--- a/Slides/Week01/16：進入RLHF階段.pptx
+++ b/Slides/Week01/16：進入RLHF階段.pptx
@@ -5,10 +5,10 @@
     <p:sldMasterId id="2147483648" r:id="rId1"/>
   </p:sldMasterIdLst>
   <p:notesMasterIdLst>
-    <p:notesMasterId r:id="rId37"/>
+    <p:notesMasterId r:id="rId36"/>
   </p:notesMasterIdLst>
   <p:handoutMasterIdLst>
-    <p:handoutMasterId r:id="rId38"/>
+    <p:handoutMasterId r:id="rId37"/>
   </p:handoutMasterIdLst>
   <p:sldIdLst>
     <p:sldId id="1158" r:id="rId2"/>
@@ -24,28 +24,27 @@
     <p:sldId id="1215" r:id="rId12"/>
     <p:sldId id="1217" r:id="rId13"/>
     <p:sldId id="1218" r:id="rId14"/>
-    <p:sldId id="1220" r:id="rId15"/>
-    <p:sldId id="1219" r:id="rId16"/>
-    <p:sldId id="1221" r:id="rId17"/>
-    <p:sldId id="1222" r:id="rId18"/>
-    <p:sldId id="1223" r:id="rId19"/>
-    <p:sldId id="1224" r:id="rId20"/>
-    <p:sldId id="1227" r:id="rId21"/>
-    <p:sldId id="1228" r:id="rId22"/>
-    <p:sldId id="1229" r:id="rId23"/>
-    <p:sldId id="1230" r:id="rId24"/>
-    <p:sldId id="1231" r:id="rId25"/>
-    <p:sldId id="1232" r:id="rId26"/>
-    <p:sldId id="1233" r:id="rId27"/>
-    <p:sldId id="1161" r:id="rId28"/>
-    <p:sldId id="1157" r:id="rId29"/>
-    <p:sldId id="1209" r:id="rId30"/>
-    <p:sldId id="1210" r:id="rId31"/>
-    <p:sldId id="1211" r:id="rId32"/>
-    <p:sldId id="1162" r:id="rId33"/>
-    <p:sldId id="1165" r:id="rId34"/>
-    <p:sldId id="1175" r:id="rId35"/>
-    <p:sldId id="1164" r:id="rId36"/>
+    <p:sldId id="1219" r:id="rId15"/>
+    <p:sldId id="1221" r:id="rId16"/>
+    <p:sldId id="1222" r:id="rId17"/>
+    <p:sldId id="1223" r:id="rId18"/>
+    <p:sldId id="1224" r:id="rId19"/>
+    <p:sldId id="1227" r:id="rId20"/>
+    <p:sldId id="1228" r:id="rId21"/>
+    <p:sldId id="1229" r:id="rId22"/>
+    <p:sldId id="1230" r:id="rId23"/>
+    <p:sldId id="1231" r:id="rId24"/>
+    <p:sldId id="1232" r:id="rId25"/>
+    <p:sldId id="1233" r:id="rId26"/>
+    <p:sldId id="1161" r:id="rId27"/>
+    <p:sldId id="1157" r:id="rId28"/>
+    <p:sldId id="1209" r:id="rId29"/>
+    <p:sldId id="1210" r:id="rId30"/>
+    <p:sldId id="1211" r:id="rId31"/>
+    <p:sldId id="1162" r:id="rId32"/>
+    <p:sldId id="1165" r:id="rId33"/>
+    <p:sldId id="1175" r:id="rId34"/>
+    <p:sldId id="1164" r:id="rId35"/>
   </p:sldIdLst>
   <p:sldSz cx="9144000" cy="6858000" type="screen4x3"/>
   <p:notesSz cx="6858000" cy="9144000"/>
@@ -260,7 +259,7 @@
             <a:fld id="{68F88C59-319B-4332-9A1D-2A62CFCB00D8}" type="datetimeFigureOut">
               <a:rPr lang="en-US" smtClean="0"/>
               <a:pPr/>
-              <a:t>3/21/2024</a:t>
+              <a:t>11/27/2024</a:t>
             </a:fld>
             <a:endParaRPr lang="en-US" dirty="0"/>
           </a:p>
@@ -431,7 +430,7 @@
             <a:fld id="{968B300D-05F0-4B43-940D-46DED5A791AD}" type="datetimeFigureOut">
               <a:rPr lang="en-US" smtClean="0"/>
               <a:pPr/>
-              <a:t>3/21/2024</a:t>
+              <a:t>11/27/2024</a:t>
             </a:fld>
             <a:endParaRPr lang="en-US" dirty="0"/>
           </a:p>
@@ -1208,7 +1207,7 @@
     </p:spTree>
     <p:extLst>
       <p:ext uri="{BB962C8B-B14F-4D97-AF65-F5344CB8AC3E}">
-        <p14:creationId xmlns:p14="http://schemas.microsoft.com/office/powerpoint/2010/main" val="3388580206"/>
+        <p14:creationId xmlns:p14="http://schemas.microsoft.com/office/powerpoint/2010/main" val="2499970301"/>
       </p:ext>
     </p:extLst>
   </p:cSld>
@@ -1293,7 +1292,7 @@
     </p:spTree>
     <p:extLst>
       <p:ext uri="{BB962C8B-B14F-4D97-AF65-F5344CB8AC3E}">
-        <p14:creationId xmlns:p14="http://schemas.microsoft.com/office/powerpoint/2010/main" val="2499970301"/>
+        <p14:creationId xmlns:p14="http://schemas.microsoft.com/office/powerpoint/2010/main" val="109356332"/>
       </p:ext>
     </p:extLst>
   </p:cSld>
@@ -1378,7 +1377,7 @@
     </p:spTree>
     <p:extLst>
       <p:ext uri="{BB962C8B-B14F-4D97-AF65-F5344CB8AC3E}">
-        <p14:creationId xmlns:p14="http://schemas.microsoft.com/office/powerpoint/2010/main" val="109356332"/>
+        <p14:creationId xmlns:p14="http://schemas.microsoft.com/office/powerpoint/2010/main" val="989592981"/>
       </p:ext>
     </p:extLst>
   </p:cSld>
@@ -1463,7 +1462,7 @@
     </p:spTree>
     <p:extLst>
       <p:ext uri="{BB962C8B-B14F-4D97-AF65-F5344CB8AC3E}">
-        <p14:creationId xmlns:p14="http://schemas.microsoft.com/office/powerpoint/2010/main" val="989592981"/>
+        <p14:creationId xmlns:p14="http://schemas.microsoft.com/office/powerpoint/2010/main" val="1744542614"/>
       </p:ext>
     </p:extLst>
   </p:cSld>
@@ -1548,7 +1547,7 @@
     </p:spTree>
     <p:extLst>
       <p:ext uri="{BB962C8B-B14F-4D97-AF65-F5344CB8AC3E}">
-        <p14:creationId xmlns:p14="http://schemas.microsoft.com/office/powerpoint/2010/main" val="1744542614"/>
+        <p14:creationId xmlns:p14="http://schemas.microsoft.com/office/powerpoint/2010/main" val="2022158012"/>
       </p:ext>
     </p:extLst>
   </p:cSld>
@@ -1633,7 +1632,7 @@
     </p:spTree>
     <p:extLst>
       <p:ext uri="{BB962C8B-B14F-4D97-AF65-F5344CB8AC3E}">
-        <p14:creationId xmlns:p14="http://schemas.microsoft.com/office/powerpoint/2010/main" val="2022158012"/>
+        <p14:creationId xmlns:p14="http://schemas.microsoft.com/office/powerpoint/2010/main" val="4184774045"/>
       </p:ext>
     </p:extLst>
   </p:cSld>
@@ -1803,7 +1802,7 @@
     </p:spTree>
     <p:extLst>
       <p:ext uri="{BB962C8B-B14F-4D97-AF65-F5344CB8AC3E}">
-        <p14:creationId xmlns:p14="http://schemas.microsoft.com/office/powerpoint/2010/main" val="4184774045"/>
+        <p14:creationId xmlns:p14="http://schemas.microsoft.com/office/powerpoint/2010/main" val="736546470"/>
       </p:ext>
     </p:extLst>
   </p:cSld>
@@ -1888,7 +1887,7 @@
     </p:spTree>
     <p:extLst>
       <p:ext uri="{BB962C8B-B14F-4D97-AF65-F5344CB8AC3E}">
-        <p14:creationId xmlns:p14="http://schemas.microsoft.com/office/powerpoint/2010/main" val="736546470"/>
+        <p14:creationId xmlns:p14="http://schemas.microsoft.com/office/powerpoint/2010/main" val="647713288"/>
       </p:ext>
     </p:extLst>
   </p:cSld>
@@ -1973,7 +1972,7 @@
     </p:spTree>
     <p:extLst>
       <p:ext uri="{BB962C8B-B14F-4D97-AF65-F5344CB8AC3E}">
-        <p14:creationId xmlns:p14="http://schemas.microsoft.com/office/powerpoint/2010/main" val="647713288"/>
+        <p14:creationId xmlns:p14="http://schemas.microsoft.com/office/powerpoint/2010/main" val="3753790699"/>
       </p:ext>
     </p:extLst>
   </p:cSld>
@@ -2058,7 +2057,7 @@
     </p:spTree>
     <p:extLst>
       <p:ext uri="{BB962C8B-B14F-4D97-AF65-F5344CB8AC3E}">
-        <p14:creationId xmlns:p14="http://schemas.microsoft.com/office/powerpoint/2010/main" val="3753790699"/>
+        <p14:creationId xmlns:p14="http://schemas.microsoft.com/office/powerpoint/2010/main" val="4067869668"/>
       </p:ext>
     </p:extLst>
   </p:cSld>
@@ -2143,7 +2142,7 @@
     </p:spTree>
     <p:extLst>
       <p:ext uri="{BB962C8B-B14F-4D97-AF65-F5344CB8AC3E}">
-        <p14:creationId xmlns:p14="http://schemas.microsoft.com/office/powerpoint/2010/main" val="4067869668"/>
+        <p14:creationId xmlns:p14="http://schemas.microsoft.com/office/powerpoint/2010/main" val="509763073"/>
       </p:ext>
     </p:extLst>
   </p:cSld>
@@ -2228,7 +2227,7 @@
     </p:spTree>
     <p:extLst>
       <p:ext uri="{BB962C8B-B14F-4D97-AF65-F5344CB8AC3E}">
-        <p14:creationId xmlns:p14="http://schemas.microsoft.com/office/powerpoint/2010/main" val="509763073"/>
+        <p14:creationId xmlns:p14="http://schemas.microsoft.com/office/powerpoint/2010/main" val="1717291848"/>
       </p:ext>
     </p:extLst>
   </p:cSld>
@@ -2313,7 +2312,7 @@
     </p:spTree>
     <p:extLst>
       <p:ext uri="{BB962C8B-B14F-4D97-AF65-F5344CB8AC3E}">
-        <p14:creationId xmlns:p14="http://schemas.microsoft.com/office/powerpoint/2010/main" val="1717291848"/>
+        <p14:creationId xmlns:p14="http://schemas.microsoft.com/office/powerpoint/2010/main" val="2994901000"/>
       </p:ext>
     </p:extLst>
   </p:cSld>
@@ -2398,7 +2397,7 @@
     </p:spTree>
     <p:extLst>
       <p:ext uri="{BB962C8B-B14F-4D97-AF65-F5344CB8AC3E}">
-        <p14:creationId xmlns:p14="http://schemas.microsoft.com/office/powerpoint/2010/main" val="2994901000"/>
+        <p14:creationId xmlns:p14="http://schemas.microsoft.com/office/powerpoint/2010/main" val="2475096517"/>
       </p:ext>
     </p:extLst>
   </p:cSld>
@@ -2483,7 +2482,7 @@
     </p:spTree>
     <p:extLst>
       <p:ext uri="{BB962C8B-B14F-4D97-AF65-F5344CB8AC3E}">
-        <p14:creationId xmlns:p14="http://schemas.microsoft.com/office/powerpoint/2010/main" val="2475096517"/>
+        <p14:creationId xmlns:p14="http://schemas.microsoft.com/office/powerpoint/2010/main" val="2112326584"/>
       </p:ext>
     </p:extLst>
   </p:cSld>
@@ -2568,7 +2567,7 @@
     </p:spTree>
     <p:extLst>
       <p:ext uri="{BB962C8B-B14F-4D97-AF65-F5344CB8AC3E}">
-        <p14:creationId xmlns:p14="http://schemas.microsoft.com/office/powerpoint/2010/main" val="2112326584"/>
+        <p14:creationId xmlns:p14="http://schemas.microsoft.com/office/powerpoint/2010/main" val="3384101725"/>
       </p:ext>
     </p:extLst>
   </p:cSld>
@@ -2738,7 +2737,7 @@
     </p:spTree>
     <p:extLst>
       <p:ext uri="{BB962C8B-B14F-4D97-AF65-F5344CB8AC3E}">
-        <p14:creationId xmlns:p14="http://schemas.microsoft.com/office/powerpoint/2010/main" val="3384101725"/>
+        <p14:creationId xmlns:p14="http://schemas.microsoft.com/office/powerpoint/2010/main" val="869645468"/>
       </p:ext>
     </p:extLst>
   </p:cSld>
@@ -2823,7 +2822,7 @@
     </p:spTree>
     <p:extLst>
       <p:ext uri="{BB962C8B-B14F-4D97-AF65-F5344CB8AC3E}">
-        <p14:creationId xmlns:p14="http://schemas.microsoft.com/office/powerpoint/2010/main" val="869645468"/>
+        <p14:creationId xmlns:p14="http://schemas.microsoft.com/office/powerpoint/2010/main" val="953099231"/>
       </p:ext>
     </p:extLst>
   </p:cSld>
@@ -2900,91 +2899,6 @@
               <a:rPr lang="en-US" smtClean="0"/>
               <a:pPr/>
               <a:t>32</a:t>
-            </a:fld>
-            <a:endParaRPr lang="en-US" dirty="0"/>
-          </a:p>
-        </p:txBody>
-      </p:sp>
-    </p:spTree>
-    <p:extLst>
-      <p:ext uri="{BB962C8B-B14F-4D97-AF65-F5344CB8AC3E}">
-        <p14:creationId xmlns:p14="http://schemas.microsoft.com/office/powerpoint/2010/main" val="953099231"/>
-      </p:ext>
-    </p:extLst>
-  </p:cSld>
-  <p:clrMapOvr>
-    <a:masterClrMapping/>
-  </p:clrMapOvr>
-</p:notes>
-</file>
-
-<file path=ppt/notesSlides/notesSlide33.xml><?xml version="1.0" encoding="utf-8"?>
-<p:notes xmlns:a="http://schemas.openxmlformats.org/drawingml/2006/main" xmlns:r="http://schemas.openxmlformats.org/officeDocument/2006/relationships" xmlns:p="http://schemas.openxmlformats.org/presentationml/2006/main">
-  <p:cSld>
-    <p:spTree>
-      <p:nvGrpSpPr>
-        <p:cNvPr id="1" name=""/>
-        <p:cNvGrpSpPr/>
-        <p:nvPr/>
-      </p:nvGrpSpPr>
-      <p:grpSpPr>
-        <a:xfrm>
-          <a:off x="0" y="0"/>
-          <a:ext cx="0" cy="0"/>
-          <a:chOff x="0" y="0"/>
-          <a:chExt cx="0" cy="0"/>
-        </a:xfrm>
-      </p:grpSpPr>
-      <p:sp>
-        <p:nvSpPr>
-          <p:cNvPr id="2" name="投影片圖像版面配置區 1"/>
-          <p:cNvSpPr>
-            <a:spLocks noGrp="1" noRot="1" noChangeAspect="1"/>
-          </p:cNvSpPr>
-          <p:nvPr>
-            <p:ph type="sldImg"/>
-          </p:nvPr>
-        </p:nvSpPr>
-        <p:spPr/>
-      </p:sp>
-      <p:sp>
-        <p:nvSpPr>
-          <p:cNvPr id="3" name="備忘稿版面配置區 2"/>
-          <p:cNvSpPr>
-            <a:spLocks noGrp="1"/>
-          </p:cNvSpPr>
-          <p:nvPr>
-            <p:ph type="body" idx="1"/>
-          </p:nvPr>
-        </p:nvSpPr>
-        <p:spPr/>
-        <p:txBody>
-          <a:bodyPr/>
-          <a:lstStyle/>
-          <a:p>
-            <a:endParaRPr lang="zh-TW" altLang="en-US" dirty="0"/>
-          </a:p>
-        </p:txBody>
-      </p:sp>
-      <p:sp>
-        <p:nvSpPr>
-          <p:cNvPr id="4" name="投影片編號版面配置區 3"/>
-          <p:cNvSpPr>
-            <a:spLocks noGrp="1"/>
-          </p:cNvSpPr>
-          <p:nvPr>
-            <p:ph type="sldNum" sz="quarter" idx="10"/>
-          </p:nvPr>
-        </p:nvSpPr>
-        <p:spPr/>
-        <p:txBody>
-          <a:bodyPr/>
-          <a:lstStyle/>
-          <a:p>
-            <a:fld id="{9B26CD33-4337-4529-948A-94F6960B2374}" type="slidenum">
-              <a:rPr lang="en-US" smtClean="0"/>
-              <a:pPr/>
-              <a:t>33</a:t>
             </a:fld>
             <a:endParaRPr lang="en-US" dirty="0"/>
           </a:p>
@@ -3821,7 +3735,7 @@
                 </a:solidFill>
               </a:rPr>
               <a:pPr/>
-              <a:t>3/21/2024</a:t>
+              <a:t>11/27/2024</a:t>
             </a:fld>
             <a:endParaRPr kumimoji="0" lang="en-US" dirty="0"/>
           </a:p>
@@ -4212,7 +4126,7 @@
                 </a:solidFill>
               </a:rPr>
               <a:pPr/>
-              <a:t>3/21/2024</a:t>
+              <a:t>11/27/2024</a:t>
             </a:fld>
             <a:endParaRPr kumimoji="0" lang="en-US" dirty="0"/>
           </a:p>
@@ -4547,7 +4461,7 @@
                 </a:solidFill>
               </a:rPr>
               <a:pPr/>
-              <a:t>3/21/2024</a:t>
+              <a:t>11/27/2024</a:t>
             </a:fld>
             <a:endParaRPr kumimoji="0" lang="en-US" dirty="0"/>
           </a:p>
@@ -5123,7 +5037,7 @@
                 </a:solidFill>
               </a:rPr>
               <a:pPr/>
-              <a:t>3/21/2024</a:t>
+              <a:t>11/27/2024</a:t>
             </a:fld>
             <a:endParaRPr kumimoji="0" lang="en-US" dirty="0"/>
           </a:p>
@@ -5687,7 +5601,7 @@
                 </a:solidFill>
               </a:rPr>
               <a:pPr/>
-              <a:t>3/21/2024</a:t>
+              <a:t>11/27/2024</a:t>
             </a:fld>
             <a:endParaRPr kumimoji="0" lang="en-US" dirty="0"/>
           </a:p>
@@ -6146,7 +6060,7 @@
                 </a:solidFill>
               </a:rPr>
               <a:pPr/>
-              <a:t>3/21/2024</a:t>
+              <a:t>11/27/2024</a:t>
             </a:fld>
             <a:endParaRPr kumimoji="0" lang="en-US" dirty="0"/>
           </a:p>
@@ -6570,7 +6484,7 @@
                 </a:solidFill>
               </a:rPr>
               <a:pPr/>
-              <a:t>3/21/2024</a:t>
+              <a:t>11/27/2024</a:t>
             </a:fld>
             <a:endParaRPr kumimoji="0" lang="en-US" dirty="0"/>
           </a:p>
@@ -7074,7 +6988,7 @@
                 </a:solidFill>
               </a:rPr>
               <a:pPr/>
-              <a:t>3/21/2024</a:t>
+              <a:t>11/27/2024</a:t>
             </a:fld>
             <a:endParaRPr kumimoji="0" lang="en-US" dirty="0"/>
           </a:p>
@@ -7578,7 +7492,7 @@
                 </a:solidFill>
               </a:rPr>
               <a:pPr/>
-              <a:t>3/21/2024</a:t>
+              <a:t>11/27/2024</a:t>
             </a:fld>
             <a:endParaRPr kumimoji="0" lang="en-US" dirty="0"/>
           </a:p>
@@ -7794,7 +7708,7 @@
                 </a:solidFill>
               </a:rPr>
               <a:pPr/>
-              <a:t>3/21/2024</a:t>
+              <a:t>11/27/2024</a:t>
             </a:fld>
             <a:endParaRPr kumimoji="0" lang="en-US" dirty="0"/>
           </a:p>
@@ -8122,7 +8036,7 @@
                 </a:solidFill>
               </a:rPr>
               <a:pPr/>
-              <a:t>3/21/2024</a:t>
+              <a:t>11/27/2024</a:t>
             </a:fld>
             <a:endParaRPr kumimoji="0" lang="en-US" dirty="0"/>
           </a:p>
@@ -8348,7 +8262,7 @@
                 </a:solidFill>
               </a:rPr>
               <a:pPr/>
-              <a:t>3/21/2024</a:t>
+              <a:t>11/27/2024</a:t>
             </a:fld>
             <a:endParaRPr kumimoji="0" lang="en-US" dirty="0"/>
           </a:p>
@@ -8567,7 +8481,7 @@
                 </a:solidFill>
               </a:rPr>
               <a:pPr/>
-              <a:t>3/21/2024</a:t>
+              <a:t>11/27/2024</a:t>
             </a:fld>
             <a:endParaRPr kumimoji="0" lang="en-US" dirty="0"/>
           </a:p>
@@ -8743,7 +8657,7 @@
             <a:fld id="{ACB2EC6F-6501-4E04-BD6C-A8A6CABB2C5B}" type="datetimeFigureOut">
               <a:rPr kumimoji="0" lang="en-US" smtClean="0"/>
               <a:pPr/>
-              <a:t>3/21/2024</a:t>
+              <a:t>11/27/2024</a:t>
             </a:fld>
             <a:endParaRPr kumimoji="0" lang="en-US" dirty="0"/>
           </a:p>
@@ -8988,7 +8902,7 @@
                 </a:solidFill>
               </a:rPr>
               <a:pPr/>
-              <a:t>3/21/2024</a:t>
+              <a:t>11/27/2024</a:t>
             </a:fld>
             <a:endParaRPr kumimoji="0" lang="en-US" dirty="0"/>
           </a:p>
@@ -9460,7 +9374,7 @@
                 </a:solidFill>
               </a:rPr>
               <a:pPr/>
-              <a:t>3/21/2024</a:t>
+              <a:t>11/27/2024</a:t>
             </a:fld>
             <a:endParaRPr kumimoji="0" lang="en-US" dirty="0"/>
           </a:p>
@@ -9812,7 +9726,7 @@
                 </a:solidFill>
               </a:rPr>
               <a:pPr/>
-              <a:t>3/21/2024</a:t>
+              <a:t>11/27/2024</a:t>
             </a:fld>
             <a:endParaRPr kumimoji="0" lang="en-US" dirty="0"/>
           </a:p>
@@ -10170,7 +10084,7 @@
                 </a:solidFill>
               </a:rPr>
               <a:pPr/>
-              <a:t>3/21/2024</a:t>
+              <a:t>11/27/2024</a:t>
             </a:fld>
             <a:endParaRPr kumimoji="0" lang="en-US" dirty="0"/>
           </a:p>
@@ -10475,7 +10389,7 @@
                 </a:solidFill>
               </a:rPr>
               <a:pPr/>
-              <a:t>3/21/2024</a:t>
+              <a:t>11/27/2024</a:t>
             </a:fld>
             <a:endParaRPr kumimoji="0" lang="en-US" dirty="0"/>
           </a:p>
@@ -10951,7 +10865,7 @@
                 </a:solidFill>
               </a:rPr>
               <a:pPr/>
-              <a:t>3/21/2024</a:t>
+              <a:t>11/27/2024</a:t>
             </a:fld>
             <a:endParaRPr kumimoji="0" lang="en-US" dirty="0"/>
           </a:p>
@@ -11188,7 +11102,7 @@
                 </a:solidFill>
               </a:rPr>
               <a:pPr/>
-              <a:t>3/21/2024</a:t>
+              <a:t>11/27/2024</a:t>
             </a:fld>
             <a:endParaRPr kumimoji="0" lang="en-US" sz="1200" dirty="0">
               <a:solidFill>
@@ -11762,7 +11676,7 @@
                   <a:schemeClr val="tx2"/>
                 </a:solidFill>
               </a:rPr>
-              <a:t>3/21/2024</a:t>
+              <a:t>11/27/2024</a:t>
             </a:fld>
             <a:endParaRPr kumimoji="0" lang="en-US" dirty="0"/>
           </a:p>
@@ -11960,7 +11874,7 @@
                 <a:latin typeface="Arial" panose="020B0604020202020204" pitchFamily="34" charset="0"/>
                 <a:cs typeface="Arial" panose="020B0604020202020204" pitchFamily="34" charset="0"/>
               </a:rPr>
-              <a:t>3/21/2024</a:t>
+              <a:t>11/27/2024</a:t>
             </a:fld>
             <a:endParaRPr kumimoji="0" lang="en-US" dirty="0">
               <a:latin typeface="Arial" panose="020B0604020202020204" pitchFamily="34" charset="0"/>
@@ -12197,7 +12111,7 @@
                 <a:latin typeface="Arial" panose="020B0604020202020204" pitchFamily="34" charset="0"/>
                 <a:cs typeface="Arial" panose="020B0604020202020204" pitchFamily="34" charset="0"/>
               </a:rPr>
-              <a:t>3/21/2024</a:t>
+              <a:t>11/27/2024</a:t>
             </a:fld>
             <a:endParaRPr kumimoji="0" lang="en-US" dirty="0">
               <a:latin typeface="Arial" panose="020B0604020202020204" pitchFamily="34" charset="0"/>
@@ -12495,7 +12409,7 @@
                 <a:latin typeface="Arial" panose="020B0604020202020204" pitchFamily="34" charset="0"/>
                 <a:cs typeface="Arial" panose="020B0604020202020204" pitchFamily="34" charset="0"/>
               </a:rPr>
-              <a:t>3/21/2024</a:t>
+              <a:t>11/27/2024</a:t>
             </a:fld>
             <a:endParaRPr kumimoji="0" lang="en-US" dirty="0">
               <a:latin typeface="Arial" panose="020B0604020202020204" pitchFamily="34" charset="0"/>
@@ -12793,7 +12707,7 @@
                 <a:latin typeface="Arial" panose="020B0604020202020204" pitchFamily="34" charset="0"/>
                 <a:cs typeface="Arial" panose="020B0604020202020204" pitchFamily="34" charset="0"/>
               </a:rPr>
-              <a:t>3/21/2024</a:t>
+              <a:t>11/27/2024</a:t>
             </a:fld>
             <a:endParaRPr kumimoji="0" lang="en-US" dirty="0">
               <a:latin typeface="Arial" panose="020B0604020202020204" pitchFamily="34" charset="0"/>
@@ -13072,7 +12986,7 @@
                 <a:latin typeface="Arial" panose="020B0604020202020204" pitchFamily="34" charset="0"/>
                 <a:cs typeface="Arial" panose="020B0604020202020204" pitchFamily="34" charset="0"/>
               </a:rPr>
-              <a:t>3/21/2024</a:t>
+              <a:t>11/27/2024</a:t>
             </a:fld>
             <a:endParaRPr kumimoji="0" lang="en-US" dirty="0">
               <a:latin typeface="Arial" panose="020B0604020202020204" pitchFamily="34" charset="0"/>
@@ -13111,285 +13025,6 @@
               </a:rPr>
               <a:pPr algn="r"/>
               <a:t>14</a:t>
-            </a:fld>
-            <a:endParaRPr kumimoji="0" lang="en-US" dirty="0"/>
-          </a:p>
-        </p:txBody>
-      </p:sp>
-      <p:sp>
-        <p:nvSpPr>
-          <p:cNvPr id="8" name="文字方塊 7">
-            <a:extLst>
-              <a:ext uri="{FF2B5EF4-FFF2-40B4-BE49-F238E27FC236}">
-                <a16:creationId xmlns:a16="http://schemas.microsoft.com/office/drawing/2014/main" id="{80CF54A5-B916-9CEC-490F-53F9FFACC280}"/>
-              </a:ext>
-            </a:extLst>
-          </p:cNvPr>
-          <p:cNvSpPr txBox="1"/>
-          <p:nvPr/>
-        </p:nvSpPr>
-        <p:spPr>
-          <a:xfrm>
-            <a:off x="533400" y="1219200"/>
-            <a:ext cx="8229600" cy="584775"/>
-          </a:xfrm>
-          <a:prstGeom prst="rect">
-            <a:avLst/>
-          </a:prstGeom>
-          <a:noFill/>
-        </p:spPr>
-        <p:txBody>
-          <a:bodyPr wrap="square" rtlCol="0">
-            <a:spAutoFit/>
-          </a:bodyPr>
-          <a:lstStyle/>
-          <a:p>
-            <a:pPr marL="457200" indent="-457200">
-              <a:buFont typeface="Arial" panose="020B0604020202020204" pitchFamily="34" charset="0"/>
-              <a:buChar char="•"/>
-            </a:pPr>
-            <a:r>
-              <a:rPr lang="zh-TW" altLang="en-US" sz="3200" b="0" i="0" dirty="0">
-                <a:effectLst/>
-                <a:latin typeface="微軟正黑體" panose="020B0604030504040204" pitchFamily="34" charset="-120"/>
-                <a:ea typeface="微軟正黑體" panose="020B0604030504040204" pitchFamily="34" charset="-120"/>
-              </a:rPr>
-              <a:t>讓人類來挑出覺得比較好的結果</a:t>
-            </a:r>
-            <a:endParaRPr lang="en-US" altLang="zh-TW" sz="3200" b="0" i="0" dirty="0">
-              <a:effectLst/>
-              <a:latin typeface="微軟正黑體" panose="020B0604030504040204" pitchFamily="34" charset="-120"/>
-              <a:ea typeface="微軟正黑體" panose="020B0604030504040204" pitchFamily="34" charset="-120"/>
-            </a:endParaRPr>
-          </a:p>
-        </p:txBody>
-      </p:sp>
-      <p:pic>
-        <p:nvPicPr>
-          <p:cNvPr id="9" name="圖片 8">
-            <a:extLst>
-              <a:ext uri="{FF2B5EF4-FFF2-40B4-BE49-F238E27FC236}">
-                <a16:creationId xmlns:a16="http://schemas.microsoft.com/office/drawing/2014/main" id="{FDBE1E1C-A049-B9B6-72A7-18EE96D7BAB1}"/>
-              </a:ext>
-            </a:extLst>
-          </p:cNvPr>
-          <p:cNvPicPr>
-            <a:picLocks noChangeAspect="1"/>
-          </p:cNvPicPr>
-          <p:nvPr/>
-        </p:nvPicPr>
-        <p:blipFill>
-          <a:blip r:embed="rId3"/>
-          <a:stretch>
-            <a:fillRect/>
-          </a:stretch>
-        </p:blipFill>
-        <p:spPr>
-          <a:xfrm>
-            <a:off x="457200" y="2590800"/>
-            <a:ext cx="8560853" cy="2134285"/>
-          </a:xfrm>
-          <a:prstGeom prst="rect">
-            <a:avLst/>
-          </a:prstGeom>
-        </p:spPr>
-      </p:pic>
-    </p:spTree>
-    <p:extLst>
-      <p:ext uri="{BB962C8B-B14F-4D97-AF65-F5344CB8AC3E}">
-        <p14:creationId xmlns:p14="http://schemas.microsoft.com/office/powerpoint/2010/main" val="391051123"/>
-      </p:ext>
-    </p:extLst>
-  </p:cSld>
-  <p:clrMapOvr>
-    <a:masterClrMapping/>
-  </p:clrMapOvr>
-  <p:transition>
-    <p:fade/>
-  </p:transition>
-</p:sld>
-</file>
-
-<file path=ppt/slides/slide15.xml><?xml version="1.0" encoding="utf-8"?>
-<p:sld xmlns:a="http://schemas.openxmlformats.org/drawingml/2006/main" xmlns:r="http://schemas.openxmlformats.org/officeDocument/2006/relationships" xmlns:p="http://schemas.openxmlformats.org/presentationml/2006/main">
-  <p:cSld>
-    <p:spTree>
-      <p:nvGrpSpPr>
-        <p:cNvPr id="1" name=""/>
-        <p:cNvGrpSpPr/>
-        <p:nvPr/>
-      </p:nvGrpSpPr>
-      <p:grpSpPr>
-        <a:xfrm>
-          <a:off x="0" y="0"/>
-          <a:ext cx="0" cy="0"/>
-          <a:chOff x="0" y="0"/>
-          <a:chExt cx="0" cy="0"/>
-        </a:xfrm>
-      </p:grpSpPr>
-      <p:sp>
-        <p:nvSpPr>
-          <p:cNvPr id="4" name="文字版面配置區 2"/>
-          <p:cNvSpPr txBox="1">
-            <a:spLocks/>
-          </p:cNvSpPr>
-          <p:nvPr/>
-        </p:nvSpPr>
-        <p:spPr>
-          <a:xfrm>
-            <a:off x="2209800" y="54165"/>
-            <a:ext cx="6553200" cy="990600"/>
-          </a:xfrm>
-          <a:prstGeom prst="rect">
-            <a:avLst/>
-          </a:prstGeom>
-        </p:spPr>
-        <p:txBody>
-          <a:bodyPr tIns="91440" bIns="91440" anchor="b" anchorCtr="0">
-            <a:noAutofit/>
-          </a:bodyPr>
-          <a:lstStyle/>
-          <a:p>
-            <a:r>
-              <a:rPr kumimoji="1" lang="zh-TW" altLang="en-US" sz="4800" b="1" dirty="0">
-                <a:solidFill>
-                  <a:srgbClr val="00B0F0"/>
-                </a:solidFill>
-                <a:effectLst>
-                  <a:outerShdw blurRad="38100" dist="38100" dir="2700000" algn="tl">
-                    <a:srgbClr val="000000">
-                      <a:alpha val="43137"/>
-                    </a:srgbClr>
-                  </a:outerShdw>
-                </a:effectLst>
-                <a:latin typeface="微軟正黑體" panose="020B0604030504040204" pitchFamily="34" charset="-120"/>
-                <a:ea typeface="微軟正黑體" panose="020B0604030504040204" pitchFamily="34" charset="-120"/>
-                <a:cs typeface="Heiti TC Light"/>
-              </a:rPr>
-              <a:t>使用</a:t>
-            </a:r>
-            <a:r>
-              <a:rPr kumimoji="1" lang="en-US" altLang="zh-TW" sz="4800" b="1" dirty="0">
-                <a:solidFill>
-                  <a:srgbClr val="00B0F0"/>
-                </a:solidFill>
-                <a:effectLst>
-                  <a:outerShdw blurRad="38100" dist="38100" dir="2700000" algn="tl">
-                    <a:srgbClr val="000000">
-                      <a:alpha val="43137"/>
-                    </a:srgbClr>
-                  </a:outerShdw>
-                </a:effectLst>
-                <a:latin typeface="微軟正黑體" panose="020B0604030504040204" pitchFamily="34" charset="-120"/>
-                <a:ea typeface="微軟正黑體" panose="020B0604030504040204" pitchFamily="34" charset="-120"/>
-                <a:cs typeface="Heiti TC Light"/>
-              </a:rPr>
-              <a:t>RLHF</a:t>
-            </a:r>
-            <a:r>
-              <a:rPr kumimoji="1" lang="zh-TW" altLang="en-US" sz="4800" b="1" dirty="0">
-                <a:solidFill>
-                  <a:srgbClr val="00B0F0"/>
-                </a:solidFill>
-                <a:effectLst>
-                  <a:outerShdw blurRad="38100" dist="38100" dir="2700000" algn="tl">
-                    <a:srgbClr val="000000">
-                      <a:alpha val="43137"/>
-                    </a:srgbClr>
-                  </a:outerShdw>
-                </a:effectLst>
-                <a:latin typeface="微軟正黑體" panose="020B0604030504040204" pitchFamily="34" charset="-120"/>
-                <a:ea typeface="微軟正黑體" panose="020B0604030504040204" pitchFamily="34" charset="-120"/>
-                <a:cs typeface="Heiti TC Light"/>
-              </a:rPr>
-              <a:t>的作法</a:t>
-            </a:r>
-            <a:endParaRPr kumimoji="1" lang="en-US" altLang="zh-TW" sz="4800" b="1" dirty="0">
-              <a:solidFill>
-                <a:srgbClr val="00B0F0"/>
-              </a:solidFill>
-              <a:effectLst>
-                <a:outerShdw blurRad="38100" dist="38100" dir="2700000" algn="tl">
-                  <a:srgbClr val="000000">
-                    <a:alpha val="43137"/>
-                  </a:srgbClr>
-                </a:outerShdw>
-              </a:effectLst>
-              <a:latin typeface="微軟正黑體" panose="020B0604030504040204" pitchFamily="34" charset="-120"/>
-              <a:ea typeface="微軟正黑體" panose="020B0604030504040204" pitchFamily="34" charset="-120"/>
-              <a:cs typeface="Heiti TC Light"/>
-            </a:endParaRPr>
-          </a:p>
-        </p:txBody>
-      </p:sp>
-      <p:sp>
-        <p:nvSpPr>
-          <p:cNvPr id="3" name="日期版面配置區 2">
-            <a:extLst>
-              <a:ext uri="{FF2B5EF4-FFF2-40B4-BE49-F238E27FC236}">
-                <a16:creationId xmlns:a16="http://schemas.microsoft.com/office/drawing/2014/main" id="{1C536CB5-3C58-6CF1-767E-952B76F12DEE}"/>
-              </a:ext>
-            </a:extLst>
-          </p:cNvPr>
-          <p:cNvSpPr>
-            <a:spLocks noGrp="1"/>
-          </p:cNvSpPr>
-          <p:nvPr>
-            <p:ph type="dt" sz="half" idx="12"/>
-          </p:nvPr>
-        </p:nvSpPr>
-        <p:spPr/>
-        <p:txBody>
-          <a:bodyPr/>
-          <a:lstStyle/>
-          <a:p>
-            <a:fld id="{0B520B05-2240-4566-BE2A-9338980FE8EB}" type="datetime1">
-              <a:rPr kumimoji="0" lang="en-US" altLang="zh-TW" sz="1200" smtClean="0">
-                <a:solidFill>
-                  <a:schemeClr val="tx2"/>
-                </a:solidFill>
-                <a:latin typeface="Arial" panose="020B0604020202020204" pitchFamily="34" charset="0"/>
-                <a:cs typeface="Arial" panose="020B0604020202020204" pitchFamily="34" charset="0"/>
-              </a:rPr>
-              <a:t>3/21/2024</a:t>
-            </a:fld>
-            <a:endParaRPr kumimoji="0" lang="en-US" dirty="0">
-              <a:latin typeface="Arial" panose="020B0604020202020204" pitchFamily="34" charset="0"/>
-              <a:cs typeface="Arial" panose="020B0604020202020204" pitchFamily="34" charset="0"/>
-            </a:endParaRPr>
-          </a:p>
-        </p:txBody>
-      </p:sp>
-      <p:sp>
-        <p:nvSpPr>
-          <p:cNvPr id="7" name="投影片編號版面配置區 6">
-            <a:extLst>
-              <a:ext uri="{FF2B5EF4-FFF2-40B4-BE49-F238E27FC236}">
-                <a16:creationId xmlns:a16="http://schemas.microsoft.com/office/drawing/2014/main" id="{DA316F56-AF12-D872-611F-78AE7ACCBF93}"/>
-              </a:ext>
-            </a:extLst>
-          </p:cNvPr>
-          <p:cNvSpPr>
-            <a:spLocks noGrp="1"/>
-          </p:cNvSpPr>
-          <p:nvPr>
-            <p:ph type="sldNum" sz="quarter" idx="13"/>
-          </p:nvPr>
-        </p:nvSpPr>
-        <p:spPr/>
-        <p:txBody>
-          <a:bodyPr/>
-          <a:lstStyle/>
-          <a:p>
-            <a:pPr algn="r"/>
-            <a:fld id="{F99EC173-99AE-4773-AB25-02E469A13EAE}" type="slidenum">
-              <a:rPr kumimoji="0" lang="en-US" sz="1200" smtClean="0">
-                <a:solidFill>
-                  <a:schemeClr val="tx2"/>
-                </a:solidFill>
-              </a:rPr>
-              <a:pPr algn="r"/>
-              <a:t>15</a:t>
             </a:fld>
             <a:endParaRPr kumimoji="0" lang="en-US" dirty="0"/>
           </a:p>
@@ -13541,7 +13176,7 @@
 </p:sld>
 </file>
 
-<file path=ppt/slides/slide16.xml><?xml version="1.0" encoding="utf-8"?>
+<file path=ppt/slides/slide15.xml><?xml version="1.0" encoding="utf-8"?>
 <p:sld xmlns:a="http://schemas.openxmlformats.org/drawingml/2006/main" xmlns:r="http://schemas.openxmlformats.org/officeDocument/2006/relationships" xmlns:p="http://schemas.openxmlformats.org/presentationml/2006/main">
   <p:cSld>
     <p:spTree>
@@ -13682,7 +13317,7 @@
                 <a:latin typeface="Arial" panose="020B0604020202020204" pitchFamily="34" charset="0"/>
                 <a:cs typeface="Arial" panose="020B0604020202020204" pitchFamily="34" charset="0"/>
               </a:rPr>
-              <a:t>3/21/2024</a:t>
+              <a:t>11/27/2024</a:t>
             </a:fld>
             <a:endParaRPr kumimoji="0" lang="en-US" dirty="0">
               <a:latin typeface="Arial" panose="020B0604020202020204" pitchFamily="34" charset="0"/>
@@ -13720,7 +13355,7 @@
                 </a:solidFill>
               </a:rPr>
               <a:pPr algn="r"/>
-              <a:t>16</a:t>
+              <a:t>15</a:t>
             </a:fld>
             <a:endParaRPr kumimoji="0" lang="en-US" dirty="0"/>
           </a:p>
@@ -13829,7 +13464,7 @@
 </p:sld>
 </file>
 
-<file path=ppt/slides/slide17.xml><?xml version="1.0" encoding="utf-8"?>
+<file path=ppt/slides/slide16.xml><?xml version="1.0" encoding="utf-8"?>
 <p:sld xmlns:a="http://schemas.openxmlformats.org/drawingml/2006/main" xmlns:r="http://schemas.openxmlformats.org/officeDocument/2006/relationships" xmlns:p="http://schemas.openxmlformats.org/presentationml/2006/main">
   <p:cSld>
     <p:spTree>
@@ -13970,7 +13605,7 @@
                 <a:latin typeface="Arial" panose="020B0604020202020204" pitchFamily="34" charset="0"/>
                 <a:cs typeface="Arial" panose="020B0604020202020204" pitchFamily="34" charset="0"/>
               </a:rPr>
-              <a:t>3/21/2024</a:t>
+              <a:t>11/27/2024</a:t>
             </a:fld>
             <a:endParaRPr kumimoji="0" lang="en-US" dirty="0">
               <a:latin typeface="Arial" panose="020B0604020202020204" pitchFamily="34" charset="0"/>
@@ -14008,7 +13643,7 @@
                 </a:solidFill>
               </a:rPr>
               <a:pPr algn="r"/>
-              <a:t>17</a:t>
+              <a:t>16</a:t>
             </a:fld>
             <a:endParaRPr kumimoji="0" lang="en-US" dirty="0"/>
           </a:p>
@@ -14189,7 +13824,7 @@
 </p:sld>
 </file>
 
-<file path=ppt/slides/slide18.xml><?xml version="1.0" encoding="utf-8"?>
+<file path=ppt/slides/slide17.xml><?xml version="1.0" encoding="utf-8"?>
 <p:sld xmlns:a="http://schemas.openxmlformats.org/drawingml/2006/main" xmlns:r="http://schemas.openxmlformats.org/officeDocument/2006/relationships" xmlns:p="http://schemas.openxmlformats.org/presentationml/2006/main">
   <p:cSld>
     <p:spTree>
@@ -14330,7 +13965,7 @@
                 <a:latin typeface="Arial" panose="020B0604020202020204" pitchFamily="34" charset="0"/>
                 <a:cs typeface="Arial" panose="020B0604020202020204" pitchFamily="34" charset="0"/>
               </a:rPr>
-              <a:t>3/21/2024</a:t>
+              <a:t>11/27/2024</a:t>
             </a:fld>
             <a:endParaRPr kumimoji="0" lang="en-US" dirty="0">
               <a:latin typeface="Arial" panose="020B0604020202020204" pitchFamily="34" charset="0"/>
@@ -14368,7 +14003,7 @@
                 </a:solidFill>
               </a:rPr>
               <a:pPr algn="r"/>
-              <a:t>18</a:t>
+              <a:t>17</a:t>
             </a:fld>
             <a:endParaRPr kumimoji="0" lang="en-US" dirty="0"/>
           </a:p>
@@ -14498,7 +14133,7 @@
 </p:sld>
 </file>
 
-<file path=ppt/slides/slide19.xml><?xml version="1.0" encoding="utf-8"?>
+<file path=ppt/slides/slide18.xml><?xml version="1.0" encoding="utf-8"?>
 <p:sld xmlns:a="http://schemas.openxmlformats.org/drawingml/2006/main" xmlns:r="http://schemas.openxmlformats.org/officeDocument/2006/relationships" xmlns:p="http://schemas.openxmlformats.org/presentationml/2006/main">
   <p:cSld>
     <p:spTree>
@@ -14639,7 +14274,7 @@
                 <a:latin typeface="Arial" panose="020B0604020202020204" pitchFamily="34" charset="0"/>
                 <a:cs typeface="Arial" panose="020B0604020202020204" pitchFamily="34" charset="0"/>
               </a:rPr>
-              <a:t>3/21/2024</a:t>
+              <a:t>11/27/2024</a:t>
             </a:fld>
             <a:endParaRPr kumimoji="0" lang="en-US" dirty="0">
               <a:latin typeface="Arial" panose="020B0604020202020204" pitchFamily="34" charset="0"/>
@@ -14677,7 +14312,7 @@
                 </a:solidFill>
               </a:rPr>
               <a:pPr algn="r"/>
-              <a:t>19</a:t>
+              <a:t>18</a:t>
             </a:fld>
             <a:endParaRPr kumimoji="0" lang="en-US" dirty="0"/>
           </a:p>
@@ -14805,7 +14440,7 @@
 </p:sld>
 </file>
 
-<file path=ppt/slides/slide2.xml><?xml version="1.0" encoding="utf-8"?>
+<file path=ppt/slides/slide19.xml><?xml version="1.0" encoding="utf-8"?>
 <p:sld xmlns:a="http://schemas.openxmlformats.org/drawingml/2006/main" xmlns:r="http://schemas.openxmlformats.org/officeDocument/2006/relationships" xmlns:p="http://schemas.openxmlformats.org/presentationml/2006/main">
   <p:cSld>
     <p:spTree>
@@ -14832,8 +14467,8 @@
         </p:nvSpPr>
         <p:spPr>
           <a:xfrm>
-            <a:off x="1962150" y="425393"/>
-            <a:ext cx="5943600" cy="990600"/>
+            <a:off x="2209800" y="54165"/>
+            <a:ext cx="6553200" cy="990600"/>
           </a:xfrm>
           <a:prstGeom prst="rect">
             <a:avLst/>
@@ -14861,7 +14496,43 @@
                 <a:ea typeface="微軟正黑體" panose="020B0604030504040204" pitchFamily="34" charset="-120"/>
                 <a:cs typeface="Heiti TC Light"/>
               </a:rPr>
-              <a:t>只是聽指令而已嗎？</a:t>
+              <a:t>使用</a:t>
+            </a:r>
+            <a:r>
+              <a:rPr kumimoji="1" lang="en-US" altLang="zh-TW" sz="4800" b="1" dirty="0">
+                <a:solidFill>
+                  <a:srgbClr val="00B0F0"/>
+                </a:solidFill>
+                <a:effectLst>
+                  <a:outerShdw blurRad="38100" dist="38100" dir="2700000" algn="tl">
+                    <a:srgbClr val="000000">
+                      <a:alpha val="43137"/>
+                    </a:srgbClr>
+                  </a:outerShdw>
+                </a:effectLst>
+                <a:latin typeface="微軟正黑體" panose="020B0604030504040204" pitchFamily="34" charset="-120"/>
+                <a:ea typeface="微軟正黑體" panose="020B0604030504040204" pitchFamily="34" charset="-120"/>
+                <a:cs typeface="Heiti TC Light"/>
+              </a:rPr>
+              <a:t>RLHF</a:t>
+            </a:r>
+            <a:r>
+              <a:rPr kumimoji="1" lang="zh-TW" altLang="en-US" sz="4800" b="1" dirty="0">
+                <a:solidFill>
+                  <a:srgbClr val="00B0F0"/>
+                </a:solidFill>
+                <a:effectLst>
+                  <a:outerShdw blurRad="38100" dist="38100" dir="2700000" algn="tl">
+                    <a:srgbClr val="000000">
+                      <a:alpha val="43137"/>
+                    </a:srgbClr>
+                  </a:outerShdw>
+                </a:effectLst>
+                <a:latin typeface="微軟正黑體" panose="020B0604030504040204" pitchFamily="34" charset="-120"/>
+                <a:ea typeface="微軟正黑體" panose="020B0604030504040204" pitchFamily="34" charset="-120"/>
+                <a:cs typeface="Heiti TC Light"/>
+              </a:rPr>
+              <a:t>的作法</a:t>
             </a:r>
             <a:endParaRPr kumimoji="1" lang="en-US" altLang="zh-TW" sz="4800" b="1" dirty="0">
               <a:solidFill>
@@ -14897,12 +14568,7 @@
             <p:ph type="dt" sz="half" idx="12"/>
           </p:nvPr>
         </p:nvSpPr>
-        <p:spPr>
-          <a:xfrm>
-            <a:off x="47625" y="6918325"/>
-            <a:ext cx="2438400" cy="244475"/>
-          </a:xfrm>
-        </p:spPr>
+        <p:spPr/>
         <p:txBody>
           <a:bodyPr/>
           <a:lstStyle/>
@@ -14915,7 +14581,7 @@
                 <a:latin typeface="Arial" panose="020B0604020202020204" pitchFamily="34" charset="0"/>
                 <a:cs typeface="Arial" panose="020B0604020202020204" pitchFamily="34" charset="0"/>
               </a:rPr>
-              <a:t>3/21/2024</a:t>
+              <a:t>11/27/2024</a:t>
             </a:fld>
             <a:endParaRPr kumimoji="0" lang="en-US" dirty="0">
               <a:latin typeface="Arial" panose="020B0604020202020204" pitchFamily="34" charset="0"/>
@@ -14940,12 +14606,7 @@
             <p:ph type="sldNum" sz="quarter" idx="13"/>
           </p:nvPr>
         </p:nvSpPr>
-        <p:spPr>
-          <a:xfrm>
-            <a:off x="8153400" y="6918325"/>
-            <a:ext cx="914400" cy="244475"/>
-          </a:xfrm>
-        </p:spPr>
+        <p:spPr/>
         <p:txBody>
           <a:bodyPr/>
           <a:lstStyle/>
@@ -14958,469 +14619,7 @@
                 </a:solidFill>
               </a:rPr>
               <a:pPr algn="r"/>
-              <a:t>2</a:t>
-            </a:fld>
-            <a:endParaRPr kumimoji="0" lang="en-US" dirty="0"/>
-          </a:p>
-        </p:txBody>
-      </p:sp>
-      <p:sp>
-        <p:nvSpPr>
-          <p:cNvPr id="2" name="文字方塊 1">
-            <a:extLst>
-              <a:ext uri="{FF2B5EF4-FFF2-40B4-BE49-F238E27FC236}">
-                <a16:creationId xmlns:a16="http://schemas.microsoft.com/office/drawing/2014/main" id="{E17C39F0-9527-522B-E55B-DAC3D2425E05}"/>
-              </a:ext>
-            </a:extLst>
-          </p:cNvPr>
-          <p:cNvSpPr txBox="1"/>
-          <p:nvPr/>
-        </p:nvSpPr>
-        <p:spPr>
-          <a:xfrm>
-            <a:off x="609600" y="1653600"/>
-            <a:ext cx="7924800" cy="5016758"/>
-          </a:xfrm>
-          <a:prstGeom prst="rect">
-            <a:avLst/>
-          </a:prstGeom>
-          <a:noFill/>
-        </p:spPr>
-        <p:txBody>
-          <a:bodyPr wrap="square" rtlCol="0">
-            <a:spAutoFit/>
-          </a:bodyPr>
-          <a:lstStyle/>
-          <a:p>
-            <a:pPr marL="457200" indent="-457200">
-              <a:buFont typeface="Arial" panose="020B0604020202020204" pitchFamily="34" charset="0"/>
-              <a:buChar char="•"/>
-            </a:pPr>
-            <a:r>
-              <a:rPr lang="en-US" altLang="zh-TW" sz="3200" b="0" i="0" dirty="0">
-                <a:effectLst/>
-                <a:latin typeface="微軟正黑體" panose="020B0604030504040204" pitchFamily="34" charset="-120"/>
-                <a:ea typeface="微軟正黑體" panose="020B0604030504040204" pitchFamily="34" charset="-120"/>
-              </a:rPr>
-              <a:t>SFT</a:t>
-            </a:r>
-            <a:r>
-              <a:rPr lang="zh-TW" altLang="en-US" sz="3200" b="0" i="0" dirty="0">
-                <a:effectLst/>
-                <a:latin typeface="微軟正黑體" panose="020B0604030504040204" pitchFamily="34" charset="-120"/>
-                <a:ea typeface="微軟正黑體" panose="020B0604030504040204" pitchFamily="34" charset="-120"/>
-              </a:rPr>
-              <a:t>已經包含了「聽人類的指示」的抽象意義，因此進入「人類指導」的範圍</a:t>
-            </a:r>
-            <a:endParaRPr lang="en-US" altLang="zh-TW" sz="3200" b="0" i="0" dirty="0">
-              <a:effectLst/>
-              <a:latin typeface="微軟正黑體" panose="020B0604030504040204" pitchFamily="34" charset="-120"/>
-              <a:ea typeface="微軟正黑體" panose="020B0604030504040204" pitchFamily="34" charset="-120"/>
-            </a:endParaRPr>
-          </a:p>
-          <a:p>
-            <a:pPr marL="457200" indent="-457200">
-              <a:buFont typeface="Arial" panose="020B0604020202020204" pitchFamily="34" charset="0"/>
-              <a:buChar char="•"/>
-            </a:pPr>
-            <a:r>
-              <a:rPr lang="zh-TW" altLang="en-US" sz="3200" b="0" i="0" dirty="0">
-                <a:effectLst/>
-                <a:latin typeface="微軟正黑體" panose="020B0604030504040204" pitchFamily="34" charset="-120"/>
-                <a:ea typeface="微軟正黑體" panose="020B0604030504040204" pitchFamily="34" charset="-120"/>
-              </a:rPr>
-              <a:t>人類指導的背後意義，就是聽人類的話</a:t>
-            </a:r>
-            <a:endParaRPr lang="en-US" altLang="zh-TW" sz="3200" b="0" i="0" dirty="0">
-              <a:effectLst/>
-              <a:latin typeface="微軟正黑體" panose="020B0604030504040204" pitchFamily="34" charset="-120"/>
-              <a:ea typeface="微軟正黑體" panose="020B0604030504040204" pitchFamily="34" charset="-120"/>
-            </a:endParaRPr>
-          </a:p>
-          <a:p>
-            <a:pPr marL="457200" indent="-457200">
-              <a:buFont typeface="Arial" panose="020B0604020202020204" pitchFamily="34" charset="0"/>
-              <a:buChar char="•"/>
-            </a:pPr>
-            <a:r>
-              <a:rPr lang="zh-TW" altLang="en-US" sz="3200" b="0" i="0" dirty="0">
-                <a:effectLst/>
-                <a:latin typeface="微軟正黑體" panose="020B0604030504040204" pitchFamily="34" charset="-120"/>
-                <a:ea typeface="微軟正黑體" panose="020B0604030504040204" pitchFamily="34" charset="-120"/>
-              </a:rPr>
-              <a:t>此時的</a:t>
-            </a:r>
-            <a:r>
-              <a:rPr lang="en-US" altLang="zh-TW" sz="3200" b="0" i="0" dirty="0">
-                <a:effectLst/>
-                <a:latin typeface="微軟正黑體" panose="020B0604030504040204" pitchFamily="34" charset="-120"/>
-                <a:ea typeface="微軟正黑體" panose="020B0604030504040204" pitchFamily="34" charset="-120"/>
-              </a:rPr>
-              <a:t>LLM</a:t>
-            </a:r>
-            <a:r>
-              <a:rPr lang="zh-TW" altLang="en-US" sz="3200" b="0" i="0" dirty="0">
-                <a:effectLst/>
-                <a:latin typeface="微軟正黑體" panose="020B0604030504040204" pitchFamily="34" charset="-120"/>
-                <a:ea typeface="微軟正黑體" panose="020B0604030504040204" pitchFamily="34" charset="-120"/>
-              </a:rPr>
-              <a:t>開始加入人類的意識</a:t>
-            </a:r>
-            <a:endParaRPr lang="en-US" altLang="zh-TW" sz="3200" b="0" i="0" dirty="0">
-              <a:effectLst/>
-              <a:latin typeface="微軟正黑體" panose="020B0604030504040204" pitchFamily="34" charset="-120"/>
-              <a:ea typeface="微軟正黑體" panose="020B0604030504040204" pitchFamily="34" charset="-120"/>
-            </a:endParaRPr>
-          </a:p>
-          <a:p>
-            <a:pPr marL="457200" indent="-457200">
-              <a:buFont typeface="Arial" panose="020B0604020202020204" pitchFamily="34" charset="0"/>
-              <a:buChar char="•"/>
-            </a:pPr>
-            <a:r>
-              <a:rPr lang="zh-TW" altLang="en-US" sz="3200" b="0" i="0" dirty="0">
-                <a:effectLst/>
-                <a:latin typeface="微軟正黑體" panose="020B0604030504040204" pitchFamily="34" charset="-120"/>
-                <a:ea typeface="微軟正黑體" panose="020B0604030504040204" pitchFamily="34" charset="-120"/>
-              </a:rPr>
-              <a:t>因此通常說的</a:t>
-            </a:r>
-            <a:r>
-              <a:rPr lang="en-US" altLang="zh-TW" sz="3200" b="0" i="0" dirty="0" err="1">
-                <a:effectLst/>
-                <a:latin typeface="微軟正黑體" panose="020B0604030504040204" pitchFamily="34" charset="-120"/>
-                <a:ea typeface="微軟正黑體" panose="020B0604030504040204" pitchFamily="34" charset="-120"/>
-              </a:rPr>
-              <a:t>sft</a:t>
-            </a:r>
-            <a:r>
-              <a:rPr lang="zh-TW" altLang="en-US" sz="3200" b="0" i="0" dirty="0">
-                <a:effectLst/>
-                <a:latin typeface="微軟正黑體" panose="020B0604030504040204" pitchFamily="34" charset="-120"/>
-                <a:ea typeface="微軟正黑體" panose="020B0604030504040204" pitchFamily="34" charset="-120"/>
-              </a:rPr>
-              <a:t>已經不光是之前範式所表示的</a:t>
-            </a:r>
-            <a:r>
-              <a:rPr lang="en-US" altLang="zh-TW" sz="3200" b="0" i="0" dirty="0">
-                <a:effectLst/>
-                <a:latin typeface="微軟正黑體" panose="020B0604030504040204" pitchFamily="34" charset="-120"/>
-                <a:ea typeface="微軟正黑體" panose="020B0604030504040204" pitchFamily="34" charset="-120"/>
-              </a:rPr>
-              <a:t>finetuning</a:t>
-            </a:r>
-            <a:r>
-              <a:rPr lang="zh-TW" altLang="en-US" sz="3200" b="0" i="0" dirty="0">
-                <a:effectLst/>
-                <a:latin typeface="微軟正黑體" panose="020B0604030504040204" pitchFamily="34" charset="-120"/>
-                <a:ea typeface="微軟正黑體" panose="020B0604030504040204" pitchFamily="34" charset="-120"/>
-              </a:rPr>
-              <a:t>，而進入強化學習範圍</a:t>
-            </a:r>
-            <a:endParaRPr lang="en-US" altLang="zh-TW" sz="3200" b="0" i="0" dirty="0">
-              <a:effectLst/>
-              <a:latin typeface="微軟正黑體" panose="020B0604030504040204" pitchFamily="34" charset="-120"/>
-              <a:ea typeface="微軟正黑體" panose="020B0604030504040204" pitchFamily="34" charset="-120"/>
-            </a:endParaRPr>
-          </a:p>
-          <a:p>
-            <a:pPr marL="457200" indent="-457200">
-              <a:buFont typeface="Arial" panose="020B0604020202020204" pitchFamily="34" charset="0"/>
-              <a:buChar char="•"/>
-            </a:pPr>
-            <a:r>
-              <a:rPr lang="zh-TW" altLang="en-US" sz="3200" b="0" i="0" dirty="0">
-                <a:effectLst/>
-                <a:latin typeface="微軟正黑體" panose="020B0604030504040204" pitchFamily="34" charset="-120"/>
-                <a:ea typeface="微軟正黑體" panose="020B0604030504040204" pitchFamily="34" charset="-120"/>
-              </a:rPr>
-              <a:t>在</a:t>
-            </a:r>
-            <a:r>
-              <a:rPr lang="en-US" altLang="zh-TW" sz="3200" b="0" i="0" dirty="0" err="1">
-                <a:effectLst/>
-                <a:latin typeface="微軟正黑體" panose="020B0604030504040204" pitchFamily="34" charset="-120"/>
-                <a:ea typeface="微軟正黑體" panose="020B0604030504040204" pitchFamily="34" charset="-120"/>
-              </a:rPr>
-              <a:t>huggingface</a:t>
-            </a:r>
-            <a:r>
-              <a:rPr lang="zh-TW" altLang="en-US" sz="3200" b="0" i="0" dirty="0">
-                <a:effectLst/>
-                <a:latin typeface="微軟正黑體" panose="020B0604030504040204" pitchFamily="34" charset="-120"/>
-                <a:ea typeface="微軟正黑體" panose="020B0604030504040204" pitchFamily="34" charset="-120"/>
-              </a:rPr>
-              <a:t>的函式庫中，把</a:t>
-            </a:r>
-            <a:r>
-              <a:rPr lang="en-US" altLang="zh-TW" sz="3200" b="0" i="0" dirty="0" err="1">
-                <a:effectLst/>
-                <a:latin typeface="微軟正黑體" panose="020B0604030504040204" pitchFamily="34" charset="-120"/>
-                <a:ea typeface="微軟正黑體" panose="020B0604030504040204" pitchFamily="34" charset="-120"/>
-              </a:rPr>
-              <a:t>sft</a:t>
-            </a:r>
-            <a:r>
-              <a:rPr lang="zh-TW" altLang="en-US" sz="3200" b="0" i="0" dirty="0">
-                <a:effectLst/>
-                <a:latin typeface="微軟正黑體" panose="020B0604030504040204" pitchFamily="34" charset="-120"/>
-                <a:ea typeface="微軟正黑體" panose="020B0604030504040204" pitchFamily="34" charset="-120"/>
-              </a:rPr>
-              <a:t>放入強化學習的</a:t>
-            </a:r>
-            <a:r>
-              <a:rPr lang="en-US" altLang="zh-TW" sz="3200" b="0" i="0" dirty="0">
-                <a:effectLst/>
-                <a:latin typeface="微軟正黑體" panose="020B0604030504040204" pitchFamily="34" charset="-120"/>
-                <a:ea typeface="微軟正黑體" panose="020B0604030504040204" pitchFamily="34" charset="-120"/>
-              </a:rPr>
-              <a:t>transformer RL</a:t>
-            </a:r>
-          </a:p>
-          <a:p>
-            <a:pPr marL="457200" indent="-457200">
-              <a:buFont typeface="Arial" panose="020B0604020202020204" pitchFamily="34" charset="0"/>
-              <a:buChar char="•"/>
-            </a:pPr>
-            <a:r>
-              <a:rPr lang="zh-TW" altLang="en-US" sz="3200" b="0" i="0" dirty="0">
-                <a:effectLst/>
-                <a:latin typeface="微軟正黑體" panose="020B0604030504040204" pitchFamily="34" charset="-120"/>
-                <a:ea typeface="微軟正黑體" panose="020B0604030504040204" pitchFamily="34" charset="-120"/>
-              </a:rPr>
-              <a:t>這就是</a:t>
-            </a:r>
-            <a:r>
-              <a:rPr lang="en-US" altLang="zh-TW" sz="3200" b="0" i="0" dirty="0">
-                <a:effectLst/>
-                <a:latin typeface="微軟正黑體" panose="020B0604030504040204" pitchFamily="34" charset="-120"/>
-                <a:ea typeface="微軟正黑體" panose="020B0604030504040204" pitchFamily="34" charset="-120"/>
-              </a:rPr>
-              <a:t>Alignment</a:t>
-            </a:r>
-            <a:r>
-              <a:rPr lang="zh-TW" altLang="en-US" sz="3200" b="0" i="0" dirty="0">
-                <a:effectLst/>
-                <a:latin typeface="微軟正黑體" panose="020B0604030504040204" pitchFamily="34" charset="-120"/>
-                <a:ea typeface="微軟正黑體" panose="020B0604030504040204" pitchFamily="34" charset="-120"/>
-              </a:rPr>
-              <a:t>的一個步驟</a:t>
-            </a:r>
-            <a:endParaRPr lang="en-US" altLang="zh-TW" sz="3200" b="0" i="0" dirty="0">
-              <a:effectLst/>
-              <a:latin typeface="微軟正黑體" panose="020B0604030504040204" pitchFamily="34" charset="-120"/>
-              <a:ea typeface="微軟正黑體" panose="020B0604030504040204" pitchFamily="34" charset="-120"/>
-            </a:endParaRPr>
-          </a:p>
-          <a:p>
-            <a:pPr marL="457200" indent="-457200">
-              <a:buFont typeface="Arial" panose="020B0604020202020204" pitchFamily="34" charset="0"/>
-              <a:buChar char="•"/>
-            </a:pPr>
-            <a:endParaRPr lang="en-US" altLang="zh-TW" sz="3200" b="0" i="0" dirty="0">
-              <a:effectLst/>
-              <a:latin typeface="微軟正黑體" panose="020B0604030504040204" pitchFamily="34" charset="-120"/>
-              <a:ea typeface="微軟正黑體" panose="020B0604030504040204" pitchFamily="34" charset="-120"/>
-            </a:endParaRPr>
-          </a:p>
-        </p:txBody>
-      </p:sp>
-    </p:spTree>
-    <p:extLst>
-      <p:ext uri="{BB962C8B-B14F-4D97-AF65-F5344CB8AC3E}">
-        <p14:creationId xmlns:p14="http://schemas.microsoft.com/office/powerpoint/2010/main" val="973264539"/>
-      </p:ext>
-    </p:extLst>
-  </p:cSld>
-  <p:clrMapOvr>
-    <a:masterClrMapping/>
-  </p:clrMapOvr>
-  <p:transition>
-    <p:fade/>
-  </p:transition>
-</p:sld>
-</file>
-
-<file path=ppt/slides/slide20.xml><?xml version="1.0" encoding="utf-8"?>
-<p:sld xmlns:a="http://schemas.openxmlformats.org/drawingml/2006/main" xmlns:r="http://schemas.openxmlformats.org/officeDocument/2006/relationships" xmlns:p="http://schemas.openxmlformats.org/presentationml/2006/main">
-  <p:cSld>
-    <p:spTree>
-      <p:nvGrpSpPr>
-        <p:cNvPr id="1" name=""/>
-        <p:cNvGrpSpPr/>
-        <p:nvPr/>
-      </p:nvGrpSpPr>
-      <p:grpSpPr>
-        <a:xfrm>
-          <a:off x="0" y="0"/>
-          <a:ext cx="0" cy="0"/>
-          <a:chOff x="0" y="0"/>
-          <a:chExt cx="0" cy="0"/>
-        </a:xfrm>
-      </p:grpSpPr>
-      <p:sp>
-        <p:nvSpPr>
-          <p:cNvPr id="4" name="文字版面配置區 2"/>
-          <p:cNvSpPr txBox="1">
-            <a:spLocks/>
-          </p:cNvSpPr>
-          <p:nvPr/>
-        </p:nvSpPr>
-        <p:spPr>
-          <a:xfrm>
-            <a:off x="2209800" y="54165"/>
-            <a:ext cx="6553200" cy="990600"/>
-          </a:xfrm>
-          <a:prstGeom prst="rect">
-            <a:avLst/>
-          </a:prstGeom>
-        </p:spPr>
-        <p:txBody>
-          <a:bodyPr tIns="91440" bIns="91440" anchor="b" anchorCtr="0">
-            <a:noAutofit/>
-          </a:bodyPr>
-          <a:lstStyle/>
-          <a:p>
-            <a:r>
-              <a:rPr kumimoji="1" lang="zh-TW" altLang="en-US" sz="4800" b="1" dirty="0">
-                <a:solidFill>
-                  <a:srgbClr val="00B0F0"/>
-                </a:solidFill>
-                <a:effectLst>
-                  <a:outerShdw blurRad="38100" dist="38100" dir="2700000" algn="tl">
-                    <a:srgbClr val="000000">
-                      <a:alpha val="43137"/>
-                    </a:srgbClr>
-                  </a:outerShdw>
-                </a:effectLst>
-                <a:latin typeface="微軟正黑體" panose="020B0604030504040204" pitchFamily="34" charset="-120"/>
-                <a:ea typeface="微軟正黑體" panose="020B0604030504040204" pitchFamily="34" charset="-120"/>
-                <a:cs typeface="Heiti TC Light"/>
-              </a:rPr>
-              <a:t>使用</a:t>
-            </a:r>
-            <a:r>
-              <a:rPr kumimoji="1" lang="en-US" altLang="zh-TW" sz="4800" b="1" dirty="0">
-                <a:solidFill>
-                  <a:srgbClr val="00B0F0"/>
-                </a:solidFill>
-                <a:effectLst>
-                  <a:outerShdw blurRad="38100" dist="38100" dir="2700000" algn="tl">
-                    <a:srgbClr val="000000">
-                      <a:alpha val="43137"/>
-                    </a:srgbClr>
-                  </a:outerShdw>
-                </a:effectLst>
-                <a:latin typeface="微軟正黑體" panose="020B0604030504040204" pitchFamily="34" charset="-120"/>
-                <a:ea typeface="微軟正黑體" panose="020B0604030504040204" pitchFamily="34" charset="-120"/>
-                <a:cs typeface="Heiti TC Light"/>
-              </a:rPr>
-              <a:t>RLHF</a:t>
-            </a:r>
-            <a:r>
-              <a:rPr kumimoji="1" lang="zh-TW" altLang="en-US" sz="4800" b="1" dirty="0">
-                <a:solidFill>
-                  <a:srgbClr val="00B0F0"/>
-                </a:solidFill>
-                <a:effectLst>
-                  <a:outerShdw blurRad="38100" dist="38100" dir="2700000" algn="tl">
-                    <a:srgbClr val="000000">
-                      <a:alpha val="43137"/>
-                    </a:srgbClr>
-                  </a:outerShdw>
-                </a:effectLst>
-                <a:latin typeface="微軟正黑體" panose="020B0604030504040204" pitchFamily="34" charset="-120"/>
-                <a:ea typeface="微軟正黑體" panose="020B0604030504040204" pitchFamily="34" charset="-120"/>
-                <a:cs typeface="Heiti TC Light"/>
-              </a:rPr>
-              <a:t>的作法</a:t>
-            </a:r>
-            <a:endParaRPr kumimoji="1" lang="en-US" altLang="zh-TW" sz="4800" b="1" dirty="0">
-              <a:solidFill>
-                <a:srgbClr val="00B0F0"/>
-              </a:solidFill>
-              <a:effectLst>
-                <a:outerShdw blurRad="38100" dist="38100" dir="2700000" algn="tl">
-                  <a:srgbClr val="000000">
-                    <a:alpha val="43137"/>
-                  </a:srgbClr>
-                </a:outerShdw>
-              </a:effectLst>
-              <a:latin typeface="微軟正黑體" panose="020B0604030504040204" pitchFamily="34" charset="-120"/>
-              <a:ea typeface="微軟正黑體" panose="020B0604030504040204" pitchFamily="34" charset="-120"/>
-              <a:cs typeface="Heiti TC Light"/>
-            </a:endParaRPr>
-          </a:p>
-        </p:txBody>
-      </p:sp>
-      <p:sp>
-        <p:nvSpPr>
-          <p:cNvPr id="3" name="日期版面配置區 2">
-            <a:extLst>
-              <a:ext uri="{FF2B5EF4-FFF2-40B4-BE49-F238E27FC236}">
-                <a16:creationId xmlns:a16="http://schemas.microsoft.com/office/drawing/2014/main" id="{1C536CB5-3C58-6CF1-767E-952B76F12DEE}"/>
-              </a:ext>
-            </a:extLst>
-          </p:cNvPr>
-          <p:cNvSpPr>
-            <a:spLocks noGrp="1"/>
-          </p:cNvSpPr>
-          <p:nvPr>
-            <p:ph type="dt" sz="half" idx="12"/>
-          </p:nvPr>
-        </p:nvSpPr>
-        <p:spPr/>
-        <p:txBody>
-          <a:bodyPr/>
-          <a:lstStyle/>
-          <a:p>
-            <a:fld id="{0B520B05-2240-4566-BE2A-9338980FE8EB}" type="datetime1">
-              <a:rPr kumimoji="0" lang="en-US" altLang="zh-TW" sz="1200" smtClean="0">
-                <a:solidFill>
-                  <a:schemeClr val="tx2"/>
-                </a:solidFill>
-                <a:latin typeface="Arial" panose="020B0604020202020204" pitchFamily="34" charset="0"/>
-                <a:cs typeface="Arial" panose="020B0604020202020204" pitchFamily="34" charset="0"/>
-              </a:rPr>
-              <a:t>3/21/2024</a:t>
-            </a:fld>
-            <a:endParaRPr kumimoji="0" lang="en-US" dirty="0">
-              <a:latin typeface="Arial" panose="020B0604020202020204" pitchFamily="34" charset="0"/>
-              <a:cs typeface="Arial" panose="020B0604020202020204" pitchFamily="34" charset="0"/>
-            </a:endParaRPr>
-          </a:p>
-        </p:txBody>
-      </p:sp>
-      <p:sp>
-        <p:nvSpPr>
-          <p:cNvPr id="7" name="投影片編號版面配置區 6">
-            <a:extLst>
-              <a:ext uri="{FF2B5EF4-FFF2-40B4-BE49-F238E27FC236}">
-                <a16:creationId xmlns:a16="http://schemas.microsoft.com/office/drawing/2014/main" id="{DA316F56-AF12-D872-611F-78AE7ACCBF93}"/>
-              </a:ext>
-            </a:extLst>
-          </p:cNvPr>
-          <p:cNvSpPr>
-            <a:spLocks noGrp="1"/>
-          </p:cNvSpPr>
-          <p:nvPr>
-            <p:ph type="sldNum" sz="quarter" idx="13"/>
-          </p:nvPr>
-        </p:nvSpPr>
-        <p:spPr/>
-        <p:txBody>
-          <a:bodyPr/>
-          <a:lstStyle/>
-          <a:p>
-            <a:pPr algn="r"/>
-            <a:fld id="{F99EC173-99AE-4773-AB25-02E469A13EAE}" type="slidenum">
-              <a:rPr kumimoji="0" lang="en-US" sz="1200" smtClean="0">
-                <a:solidFill>
-                  <a:schemeClr val="tx2"/>
-                </a:solidFill>
-              </a:rPr>
-              <a:pPr algn="r"/>
-              <a:t>20</a:t>
+              <a:t>19</a:t>
             </a:fld>
             <a:endParaRPr kumimoji="0" lang="en-US" dirty="0"/>
           </a:p>
@@ -15560,7 +14759,7 @@
 </p:sld>
 </file>
 
-<file path=ppt/slides/slide21.xml><?xml version="1.0" encoding="utf-8"?>
+<file path=ppt/slides/slide2.xml><?xml version="1.0" encoding="utf-8"?>
 <p:sld xmlns:a="http://schemas.openxmlformats.org/drawingml/2006/main" xmlns:r="http://schemas.openxmlformats.org/officeDocument/2006/relationships" xmlns:p="http://schemas.openxmlformats.org/presentationml/2006/main">
   <p:cSld>
     <p:spTree>
@@ -15587,8 +14786,8 @@
         </p:nvSpPr>
         <p:spPr>
           <a:xfrm>
-            <a:off x="2209800" y="54165"/>
-            <a:ext cx="6553200" cy="990600"/>
+            <a:off x="1962150" y="425393"/>
+            <a:ext cx="5943600" cy="990600"/>
           </a:xfrm>
           <a:prstGeom prst="rect">
             <a:avLst/>
@@ -15616,43 +14815,7 @@
                 <a:ea typeface="微軟正黑體" panose="020B0604030504040204" pitchFamily="34" charset="-120"/>
                 <a:cs typeface="Heiti TC Light"/>
               </a:rPr>
-              <a:t>使用</a:t>
-            </a:r>
-            <a:r>
-              <a:rPr kumimoji="1" lang="en-US" altLang="zh-TW" sz="4800" b="1" dirty="0">
-                <a:solidFill>
-                  <a:srgbClr val="00B0F0"/>
-                </a:solidFill>
-                <a:effectLst>
-                  <a:outerShdw blurRad="38100" dist="38100" dir="2700000" algn="tl">
-                    <a:srgbClr val="000000">
-                      <a:alpha val="43137"/>
-                    </a:srgbClr>
-                  </a:outerShdw>
-                </a:effectLst>
-                <a:latin typeface="微軟正黑體" panose="020B0604030504040204" pitchFamily="34" charset="-120"/>
-                <a:ea typeface="微軟正黑體" panose="020B0604030504040204" pitchFamily="34" charset="-120"/>
-                <a:cs typeface="Heiti TC Light"/>
-              </a:rPr>
-              <a:t>RLHF</a:t>
-            </a:r>
-            <a:r>
-              <a:rPr kumimoji="1" lang="zh-TW" altLang="en-US" sz="4800" b="1" dirty="0">
-                <a:solidFill>
-                  <a:srgbClr val="00B0F0"/>
-                </a:solidFill>
-                <a:effectLst>
-                  <a:outerShdw blurRad="38100" dist="38100" dir="2700000" algn="tl">
-                    <a:srgbClr val="000000">
-                      <a:alpha val="43137"/>
-                    </a:srgbClr>
-                  </a:outerShdw>
-                </a:effectLst>
-                <a:latin typeface="微軟正黑體" panose="020B0604030504040204" pitchFamily="34" charset="-120"/>
-                <a:ea typeface="微軟正黑體" panose="020B0604030504040204" pitchFamily="34" charset="-120"/>
-                <a:cs typeface="Heiti TC Light"/>
-              </a:rPr>
-              <a:t>的作法</a:t>
+              <a:t>只是聽指令而已嗎？</a:t>
             </a:r>
             <a:endParaRPr kumimoji="1" lang="en-US" altLang="zh-TW" sz="4800" b="1" dirty="0">
               <a:solidFill>
@@ -15688,7 +14851,12 @@
             <p:ph type="dt" sz="half" idx="12"/>
           </p:nvPr>
         </p:nvSpPr>
-        <p:spPr/>
+        <p:spPr>
+          <a:xfrm>
+            <a:off x="47625" y="6918325"/>
+            <a:ext cx="2438400" cy="244475"/>
+          </a:xfrm>
+        </p:spPr>
         <p:txBody>
           <a:bodyPr/>
           <a:lstStyle/>
@@ -15701,7 +14869,7 @@
                 <a:latin typeface="Arial" panose="020B0604020202020204" pitchFamily="34" charset="0"/>
                 <a:cs typeface="Arial" panose="020B0604020202020204" pitchFamily="34" charset="0"/>
               </a:rPr>
-              <a:t>3/21/2024</a:t>
+              <a:t>11/27/2024</a:t>
             </a:fld>
             <a:endParaRPr kumimoji="0" lang="en-US" dirty="0">
               <a:latin typeface="Arial" panose="020B0604020202020204" pitchFamily="34" charset="0"/>
@@ -15726,7 +14894,12 @@
             <p:ph type="sldNum" sz="quarter" idx="13"/>
           </p:nvPr>
         </p:nvSpPr>
-        <p:spPr/>
+        <p:spPr>
+          <a:xfrm>
+            <a:off x="8153400" y="6918325"/>
+            <a:ext cx="914400" cy="244475"/>
+          </a:xfrm>
+        </p:spPr>
         <p:txBody>
           <a:bodyPr/>
           <a:lstStyle/>
@@ -15739,7 +14912,469 @@
                 </a:solidFill>
               </a:rPr>
               <a:pPr algn="r"/>
-              <a:t>21</a:t>
+              <a:t>2</a:t>
+            </a:fld>
+            <a:endParaRPr kumimoji="0" lang="en-US" dirty="0"/>
+          </a:p>
+        </p:txBody>
+      </p:sp>
+      <p:sp>
+        <p:nvSpPr>
+          <p:cNvPr id="2" name="文字方塊 1">
+            <a:extLst>
+              <a:ext uri="{FF2B5EF4-FFF2-40B4-BE49-F238E27FC236}">
+                <a16:creationId xmlns:a16="http://schemas.microsoft.com/office/drawing/2014/main" id="{E17C39F0-9527-522B-E55B-DAC3D2425E05}"/>
+              </a:ext>
+            </a:extLst>
+          </p:cNvPr>
+          <p:cNvSpPr txBox="1"/>
+          <p:nvPr/>
+        </p:nvSpPr>
+        <p:spPr>
+          <a:xfrm>
+            <a:off x="609600" y="1653600"/>
+            <a:ext cx="7924800" cy="5016758"/>
+          </a:xfrm>
+          <a:prstGeom prst="rect">
+            <a:avLst/>
+          </a:prstGeom>
+          <a:noFill/>
+        </p:spPr>
+        <p:txBody>
+          <a:bodyPr wrap="square" rtlCol="0">
+            <a:spAutoFit/>
+          </a:bodyPr>
+          <a:lstStyle/>
+          <a:p>
+            <a:pPr marL="457200" indent="-457200">
+              <a:buFont typeface="Arial" panose="020B0604020202020204" pitchFamily="34" charset="0"/>
+              <a:buChar char="•"/>
+            </a:pPr>
+            <a:r>
+              <a:rPr lang="en-US" altLang="zh-TW" sz="3200" b="0" i="0" dirty="0">
+                <a:effectLst/>
+                <a:latin typeface="微軟正黑體" panose="020B0604030504040204" pitchFamily="34" charset="-120"/>
+                <a:ea typeface="微軟正黑體" panose="020B0604030504040204" pitchFamily="34" charset="-120"/>
+              </a:rPr>
+              <a:t>SFT</a:t>
+            </a:r>
+            <a:r>
+              <a:rPr lang="zh-TW" altLang="en-US" sz="3200" b="0" i="0" dirty="0">
+                <a:effectLst/>
+                <a:latin typeface="微軟正黑體" panose="020B0604030504040204" pitchFamily="34" charset="-120"/>
+                <a:ea typeface="微軟正黑體" panose="020B0604030504040204" pitchFamily="34" charset="-120"/>
+              </a:rPr>
+              <a:t>已經包含了「聽人類的指示」的抽象意義，因此進入「人類指導」的範圍</a:t>
+            </a:r>
+            <a:endParaRPr lang="en-US" altLang="zh-TW" sz="3200" b="0" i="0" dirty="0">
+              <a:effectLst/>
+              <a:latin typeface="微軟正黑體" panose="020B0604030504040204" pitchFamily="34" charset="-120"/>
+              <a:ea typeface="微軟正黑體" panose="020B0604030504040204" pitchFamily="34" charset="-120"/>
+            </a:endParaRPr>
+          </a:p>
+          <a:p>
+            <a:pPr marL="457200" indent="-457200">
+              <a:buFont typeface="Arial" panose="020B0604020202020204" pitchFamily="34" charset="0"/>
+              <a:buChar char="•"/>
+            </a:pPr>
+            <a:r>
+              <a:rPr lang="zh-TW" altLang="en-US" sz="3200" b="0" i="0" dirty="0">
+                <a:effectLst/>
+                <a:latin typeface="微軟正黑體" panose="020B0604030504040204" pitchFamily="34" charset="-120"/>
+                <a:ea typeface="微軟正黑體" panose="020B0604030504040204" pitchFamily="34" charset="-120"/>
+              </a:rPr>
+              <a:t>人類指導的背後意義，就是聽人類的話</a:t>
+            </a:r>
+            <a:endParaRPr lang="en-US" altLang="zh-TW" sz="3200" b="0" i="0" dirty="0">
+              <a:effectLst/>
+              <a:latin typeface="微軟正黑體" panose="020B0604030504040204" pitchFamily="34" charset="-120"/>
+              <a:ea typeface="微軟正黑體" panose="020B0604030504040204" pitchFamily="34" charset="-120"/>
+            </a:endParaRPr>
+          </a:p>
+          <a:p>
+            <a:pPr marL="457200" indent="-457200">
+              <a:buFont typeface="Arial" panose="020B0604020202020204" pitchFamily="34" charset="0"/>
+              <a:buChar char="•"/>
+            </a:pPr>
+            <a:r>
+              <a:rPr lang="zh-TW" altLang="en-US" sz="3200" b="0" i="0" dirty="0">
+                <a:effectLst/>
+                <a:latin typeface="微軟正黑體" panose="020B0604030504040204" pitchFamily="34" charset="-120"/>
+                <a:ea typeface="微軟正黑體" panose="020B0604030504040204" pitchFamily="34" charset="-120"/>
+              </a:rPr>
+              <a:t>此時的</a:t>
+            </a:r>
+            <a:r>
+              <a:rPr lang="en-US" altLang="zh-TW" sz="3200" b="0" i="0" dirty="0">
+                <a:effectLst/>
+                <a:latin typeface="微軟正黑體" panose="020B0604030504040204" pitchFamily="34" charset="-120"/>
+                <a:ea typeface="微軟正黑體" panose="020B0604030504040204" pitchFamily="34" charset="-120"/>
+              </a:rPr>
+              <a:t>LLM</a:t>
+            </a:r>
+            <a:r>
+              <a:rPr lang="zh-TW" altLang="en-US" sz="3200" b="0" i="0" dirty="0">
+                <a:effectLst/>
+                <a:latin typeface="微軟正黑體" panose="020B0604030504040204" pitchFamily="34" charset="-120"/>
+                <a:ea typeface="微軟正黑體" panose="020B0604030504040204" pitchFamily="34" charset="-120"/>
+              </a:rPr>
+              <a:t>開始加入人類的意識</a:t>
+            </a:r>
+            <a:endParaRPr lang="en-US" altLang="zh-TW" sz="3200" b="0" i="0" dirty="0">
+              <a:effectLst/>
+              <a:latin typeface="微軟正黑體" panose="020B0604030504040204" pitchFamily="34" charset="-120"/>
+              <a:ea typeface="微軟正黑體" panose="020B0604030504040204" pitchFamily="34" charset="-120"/>
+            </a:endParaRPr>
+          </a:p>
+          <a:p>
+            <a:pPr marL="457200" indent="-457200">
+              <a:buFont typeface="Arial" panose="020B0604020202020204" pitchFamily="34" charset="0"/>
+              <a:buChar char="•"/>
+            </a:pPr>
+            <a:r>
+              <a:rPr lang="zh-TW" altLang="en-US" sz="3200" b="0" i="0" dirty="0">
+                <a:effectLst/>
+                <a:latin typeface="微軟正黑體" panose="020B0604030504040204" pitchFamily="34" charset="-120"/>
+                <a:ea typeface="微軟正黑體" panose="020B0604030504040204" pitchFamily="34" charset="-120"/>
+              </a:rPr>
+              <a:t>因此通常說的</a:t>
+            </a:r>
+            <a:r>
+              <a:rPr lang="en-US" altLang="zh-TW" sz="3200" b="0" i="0" dirty="0" err="1">
+                <a:effectLst/>
+                <a:latin typeface="微軟正黑體" panose="020B0604030504040204" pitchFamily="34" charset="-120"/>
+                <a:ea typeface="微軟正黑體" panose="020B0604030504040204" pitchFamily="34" charset="-120"/>
+              </a:rPr>
+              <a:t>sft</a:t>
+            </a:r>
+            <a:r>
+              <a:rPr lang="zh-TW" altLang="en-US" sz="3200" b="0" i="0" dirty="0">
+                <a:effectLst/>
+                <a:latin typeface="微軟正黑體" panose="020B0604030504040204" pitchFamily="34" charset="-120"/>
+                <a:ea typeface="微軟正黑體" panose="020B0604030504040204" pitchFamily="34" charset="-120"/>
+              </a:rPr>
+              <a:t>已經不光是之前範式所表示的</a:t>
+            </a:r>
+            <a:r>
+              <a:rPr lang="en-US" altLang="zh-TW" sz="3200" b="0" i="0" dirty="0">
+                <a:effectLst/>
+                <a:latin typeface="微軟正黑體" panose="020B0604030504040204" pitchFamily="34" charset="-120"/>
+                <a:ea typeface="微軟正黑體" panose="020B0604030504040204" pitchFamily="34" charset="-120"/>
+              </a:rPr>
+              <a:t>finetuning</a:t>
+            </a:r>
+            <a:r>
+              <a:rPr lang="zh-TW" altLang="en-US" sz="3200" b="0" i="0" dirty="0">
+                <a:effectLst/>
+                <a:latin typeface="微軟正黑體" panose="020B0604030504040204" pitchFamily="34" charset="-120"/>
+                <a:ea typeface="微軟正黑體" panose="020B0604030504040204" pitchFamily="34" charset="-120"/>
+              </a:rPr>
+              <a:t>，而進入強化學習範圍</a:t>
+            </a:r>
+            <a:endParaRPr lang="en-US" altLang="zh-TW" sz="3200" b="0" i="0" dirty="0">
+              <a:effectLst/>
+              <a:latin typeface="微軟正黑體" panose="020B0604030504040204" pitchFamily="34" charset="-120"/>
+              <a:ea typeface="微軟正黑體" panose="020B0604030504040204" pitchFamily="34" charset="-120"/>
+            </a:endParaRPr>
+          </a:p>
+          <a:p>
+            <a:pPr marL="457200" indent="-457200">
+              <a:buFont typeface="Arial" panose="020B0604020202020204" pitchFamily="34" charset="0"/>
+              <a:buChar char="•"/>
+            </a:pPr>
+            <a:r>
+              <a:rPr lang="zh-TW" altLang="en-US" sz="3200" b="0" i="0" dirty="0">
+                <a:effectLst/>
+                <a:latin typeface="微軟正黑體" panose="020B0604030504040204" pitchFamily="34" charset="-120"/>
+                <a:ea typeface="微軟正黑體" panose="020B0604030504040204" pitchFamily="34" charset="-120"/>
+              </a:rPr>
+              <a:t>在</a:t>
+            </a:r>
+            <a:r>
+              <a:rPr lang="en-US" altLang="zh-TW" sz="3200" b="0" i="0" dirty="0" err="1">
+                <a:effectLst/>
+                <a:latin typeface="微軟正黑體" panose="020B0604030504040204" pitchFamily="34" charset="-120"/>
+                <a:ea typeface="微軟正黑體" panose="020B0604030504040204" pitchFamily="34" charset="-120"/>
+              </a:rPr>
+              <a:t>huggingface</a:t>
+            </a:r>
+            <a:r>
+              <a:rPr lang="zh-TW" altLang="en-US" sz="3200" b="0" i="0" dirty="0">
+                <a:effectLst/>
+                <a:latin typeface="微軟正黑體" panose="020B0604030504040204" pitchFamily="34" charset="-120"/>
+                <a:ea typeface="微軟正黑體" panose="020B0604030504040204" pitchFamily="34" charset="-120"/>
+              </a:rPr>
+              <a:t>的函式庫中，把</a:t>
+            </a:r>
+            <a:r>
+              <a:rPr lang="en-US" altLang="zh-TW" sz="3200" b="0" i="0" dirty="0" err="1">
+                <a:effectLst/>
+                <a:latin typeface="微軟正黑體" panose="020B0604030504040204" pitchFamily="34" charset="-120"/>
+                <a:ea typeface="微軟正黑體" panose="020B0604030504040204" pitchFamily="34" charset="-120"/>
+              </a:rPr>
+              <a:t>sft</a:t>
+            </a:r>
+            <a:r>
+              <a:rPr lang="zh-TW" altLang="en-US" sz="3200" b="0" i="0" dirty="0">
+                <a:effectLst/>
+                <a:latin typeface="微軟正黑體" panose="020B0604030504040204" pitchFamily="34" charset="-120"/>
+                <a:ea typeface="微軟正黑體" panose="020B0604030504040204" pitchFamily="34" charset="-120"/>
+              </a:rPr>
+              <a:t>放入強化學習的</a:t>
+            </a:r>
+            <a:r>
+              <a:rPr lang="en-US" altLang="zh-TW" sz="3200" b="0" i="0" dirty="0">
+                <a:effectLst/>
+                <a:latin typeface="微軟正黑體" panose="020B0604030504040204" pitchFamily="34" charset="-120"/>
+                <a:ea typeface="微軟正黑體" panose="020B0604030504040204" pitchFamily="34" charset="-120"/>
+              </a:rPr>
+              <a:t>transformer RL</a:t>
+            </a:r>
+          </a:p>
+          <a:p>
+            <a:pPr marL="457200" indent="-457200">
+              <a:buFont typeface="Arial" panose="020B0604020202020204" pitchFamily="34" charset="0"/>
+              <a:buChar char="•"/>
+            </a:pPr>
+            <a:r>
+              <a:rPr lang="zh-TW" altLang="en-US" sz="3200" b="0" i="0" dirty="0">
+                <a:effectLst/>
+                <a:latin typeface="微軟正黑體" panose="020B0604030504040204" pitchFamily="34" charset="-120"/>
+                <a:ea typeface="微軟正黑體" panose="020B0604030504040204" pitchFamily="34" charset="-120"/>
+              </a:rPr>
+              <a:t>這就是</a:t>
+            </a:r>
+            <a:r>
+              <a:rPr lang="en-US" altLang="zh-TW" sz="3200" b="0" i="0" dirty="0">
+                <a:effectLst/>
+                <a:latin typeface="微軟正黑體" panose="020B0604030504040204" pitchFamily="34" charset="-120"/>
+                <a:ea typeface="微軟正黑體" panose="020B0604030504040204" pitchFamily="34" charset="-120"/>
+              </a:rPr>
+              <a:t>Alignment</a:t>
+            </a:r>
+            <a:r>
+              <a:rPr lang="zh-TW" altLang="en-US" sz="3200" b="0" i="0" dirty="0">
+                <a:effectLst/>
+                <a:latin typeface="微軟正黑體" panose="020B0604030504040204" pitchFamily="34" charset="-120"/>
+                <a:ea typeface="微軟正黑體" panose="020B0604030504040204" pitchFamily="34" charset="-120"/>
+              </a:rPr>
+              <a:t>的一個步驟</a:t>
+            </a:r>
+            <a:endParaRPr lang="en-US" altLang="zh-TW" sz="3200" b="0" i="0" dirty="0">
+              <a:effectLst/>
+              <a:latin typeface="微軟正黑體" panose="020B0604030504040204" pitchFamily="34" charset="-120"/>
+              <a:ea typeface="微軟正黑體" panose="020B0604030504040204" pitchFamily="34" charset="-120"/>
+            </a:endParaRPr>
+          </a:p>
+          <a:p>
+            <a:pPr marL="457200" indent="-457200">
+              <a:buFont typeface="Arial" panose="020B0604020202020204" pitchFamily="34" charset="0"/>
+              <a:buChar char="•"/>
+            </a:pPr>
+            <a:endParaRPr lang="en-US" altLang="zh-TW" sz="3200" b="0" i="0" dirty="0">
+              <a:effectLst/>
+              <a:latin typeface="微軟正黑體" panose="020B0604030504040204" pitchFamily="34" charset="-120"/>
+              <a:ea typeface="微軟正黑體" panose="020B0604030504040204" pitchFamily="34" charset="-120"/>
+            </a:endParaRPr>
+          </a:p>
+        </p:txBody>
+      </p:sp>
+    </p:spTree>
+    <p:extLst>
+      <p:ext uri="{BB962C8B-B14F-4D97-AF65-F5344CB8AC3E}">
+        <p14:creationId xmlns:p14="http://schemas.microsoft.com/office/powerpoint/2010/main" val="973264539"/>
+      </p:ext>
+    </p:extLst>
+  </p:cSld>
+  <p:clrMapOvr>
+    <a:masterClrMapping/>
+  </p:clrMapOvr>
+  <p:transition>
+    <p:fade/>
+  </p:transition>
+</p:sld>
+</file>
+
+<file path=ppt/slides/slide20.xml><?xml version="1.0" encoding="utf-8"?>
+<p:sld xmlns:a="http://schemas.openxmlformats.org/drawingml/2006/main" xmlns:r="http://schemas.openxmlformats.org/officeDocument/2006/relationships" xmlns:p="http://schemas.openxmlformats.org/presentationml/2006/main">
+  <p:cSld>
+    <p:spTree>
+      <p:nvGrpSpPr>
+        <p:cNvPr id="1" name=""/>
+        <p:cNvGrpSpPr/>
+        <p:nvPr/>
+      </p:nvGrpSpPr>
+      <p:grpSpPr>
+        <a:xfrm>
+          <a:off x="0" y="0"/>
+          <a:ext cx="0" cy="0"/>
+          <a:chOff x="0" y="0"/>
+          <a:chExt cx="0" cy="0"/>
+        </a:xfrm>
+      </p:grpSpPr>
+      <p:sp>
+        <p:nvSpPr>
+          <p:cNvPr id="4" name="文字版面配置區 2"/>
+          <p:cNvSpPr txBox="1">
+            <a:spLocks/>
+          </p:cNvSpPr>
+          <p:nvPr/>
+        </p:nvSpPr>
+        <p:spPr>
+          <a:xfrm>
+            <a:off x="2209800" y="54165"/>
+            <a:ext cx="6553200" cy="990600"/>
+          </a:xfrm>
+          <a:prstGeom prst="rect">
+            <a:avLst/>
+          </a:prstGeom>
+        </p:spPr>
+        <p:txBody>
+          <a:bodyPr tIns="91440" bIns="91440" anchor="b" anchorCtr="0">
+            <a:noAutofit/>
+          </a:bodyPr>
+          <a:lstStyle/>
+          <a:p>
+            <a:r>
+              <a:rPr kumimoji="1" lang="zh-TW" altLang="en-US" sz="4800" b="1" dirty="0">
+                <a:solidFill>
+                  <a:srgbClr val="00B0F0"/>
+                </a:solidFill>
+                <a:effectLst>
+                  <a:outerShdw blurRad="38100" dist="38100" dir="2700000" algn="tl">
+                    <a:srgbClr val="000000">
+                      <a:alpha val="43137"/>
+                    </a:srgbClr>
+                  </a:outerShdw>
+                </a:effectLst>
+                <a:latin typeface="微軟正黑體" panose="020B0604030504040204" pitchFamily="34" charset="-120"/>
+                <a:ea typeface="微軟正黑體" panose="020B0604030504040204" pitchFamily="34" charset="-120"/>
+                <a:cs typeface="Heiti TC Light"/>
+              </a:rPr>
+              <a:t>使用</a:t>
+            </a:r>
+            <a:r>
+              <a:rPr kumimoji="1" lang="en-US" altLang="zh-TW" sz="4800" b="1" dirty="0">
+                <a:solidFill>
+                  <a:srgbClr val="00B0F0"/>
+                </a:solidFill>
+                <a:effectLst>
+                  <a:outerShdw blurRad="38100" dist="38100" dir="2700000" algn="tl">
+                    <a:srgbClr val="000000">
+                      <a:alpha val="43137"/>
+                    </a:srgbClr>
+                  </a:outerShdw>
+                </a:effectLst>
+                <a:latin typeface="微軟正黑體" panose="020B0604030504040204" pitchFamily="34" charset="-120"/>
+                <a:ea typeface="微軟正黑體" panose="020B0604030504040204" pitchFamily="34" charset="-120"/>
+                <a:cs typeface="Heiti TC Light"/>
+              </a:rPr>
+              <a:t>RLHF</a:t>
+            </a:r>
+            <a:r>
+              <a:rPr kumimoji="1" lang="zh-TW" altLang="en-US" sz="4800" b="1" dirty="0">
+                <a:solidFill>
+                  <a:srgbClr val="00B0F0"/>
+                </a:solidFill>
+                <a:effectLst>
+                  <a:outerShdw blurRad="38100" dist="38100" dir="2700000" algn="tl">
+                    <a:srgbClr val="000000">
+                      <a:alpha val="43137"/>
+                    </a:srgbClr>
+                  </a:outerShdw>
+                </a:effectLst>
+                <a:latin typeface="微軟正黑體" panose="020B0604030504040204" pitchFamily="34" charset="-120"/>
+                <a:ea typeface="微軟正黑體" panose="020B0604030504040204" pitchFamily="34" charset="-120"/>
+                <a:cs typeface="Heiti TC Light"/>
+              </a:rPr>
+              <a:t>的作法</a:t>
+            </a:r>
+            <a:endParaRPr kumimoji="1" lang="en-US" altLang="zh-TW" sz="4800" b="1" dirty="0">
+              <a:solidFill>
+                <a:srgbClr val="00B0F0"/>
+              </a:solidFill>
+              <a:effectLst>
+                <a:outerShdw blurRad="38100" dist="38100" dir="2700000" algn="tl">
+                  <a:srgbClr val="000000">
+                    <a:alpha val="43137"/>
+                  </a:srgbClr>
+                </a:outerShdw>
+              </a:effectLst>
+              <a:latin typeface="微軟正黑體" panose="020B0604030504040204" pitchFamily="34" charset="-120"/>
+              <a:ea typeface="微軟正黑體" panose="020B0604030504040204" pitchFamily="34" charset="-120"/>
+              <a:cs typeface="Heiti TC Light"/>
+            </a:endParaRPr>
+          </a:p>
+        </p:txBody>
+      </p:sp>
+      <p:sp>
+        <p:nvSpPr>
+          <p:cNvPr id="3" name="日期版面配置區 2">
+            <a:extLst>
+              <a:ext uri="{FF2B5EF4-FFF2-40B4-BE49-F238E27FC236}">
+                <a16:creationId xmlns:a16="http://schemas.microsoft.com/office/drawing/2014/main" id="{1C536CB5-3C58-6CF1-767E-952B76F12DEE}"/>
+              </a:ext>
+            </a:extLst>
+          </p:cNvPr>
+          <p:cNvSpPr>
+            <a:spLocks noGrp="1"/>
+          </p:cNvSpPr>
+          <p:nvPr>
+            <p:ph type="dt" sz="half" idx="12"/>
+          </p:nvPr>
+        </p:nvSpPr>
+        <p:spPr/>
+        <p:txBody>
+          <a:bodyPr/>
+          <a:lstStyle/>
+          <a:p>
+            <a:fld id="{0B520B05-2240-4566-BE2A-9338980FE8EB}" type="datetime1">
+              <a:rPr kumimoji="0" lang="en-US" altLang="zh-TW" sz="1200" smtClean="0">
+                <a:solidFill>
+                  <a:schemeClr val="tx2"/>
+                </a:solidFill>
+                <a:latin typeface="Arial" panose="020B0604020202020204" pitchFamily="34" charset="0"/>
+                <a:cs typeface="Arial" panose="020B0604020202020204" pitchFamily="34" charset="0"/>
+              </a:rPr>
+              <a:t>11/27/2024</a:t>
+            </a:fld>
+            <a:endParaRPr kumimoji="0" lang="en-US" dirty="0">
+              <a:latin typeface="Arial" panose="020B0604020202020204" pitchFamily="34" charset="0"/>
+              <a:cs typeface="Arial" panose="020B0604020202020204" pitchFamily="34" charset="0"/>
+            </a:endParaRPr>
+          </a:p>
+        </p:txBody>
+      </p:sp>
+      <p:sp>
+        <p:nvSpPr>
+          <p:cNvPr id="7" name="投影片編號版面配置區 6">
+            <a:extLst>
+              <a:ext uri="{FF2B5EF4-FFF2-40B4-BE49-F238E27FC236}">
+                <a16:creationId xmlns:a16="http://schemas.microsoft.com/office/drawing/2014/main" id="{DA316F56-AF12-D872-611F-78AE7ACCBF93}"/>
+              </a:ext>
+            </a:extLst>
+          </p:cNvPr>
+          <p:cNvSpPr>
+            <a:spLocks noGrp="1"/>
+          </p:cNvSpPr>
+          <p:nvPr>
+            <p:ph type="sldNum" sz="quarter" idx="13"/>
+          </p:nvPr>
+        </p:nvSpPr>
+        <p:spPr/>
+        <p:txBody>
+          <a:bodyPr/>
+          <a:lstStyle/>
+          <a:p>
+            <a:pPr algn="r"/>
+            <a:fld id="{F99EC173-99AE-4773-AB25-02E469A13EAE}" type="slidenum">
+              <a:rPr kumimoji="0" lang="en-US" sz="1200" smtClean="0">
+                <a:solidFill>
+                  <a:schemeClr val="tx2"/>
+                </a:solidFill>
+              </a:rPr>
+              <a:pPr algn="r"/>
+              <a:t>20</a:t>
             </a:fld>
             <a:endParaRPr kumimoji="0" lang="en-US" dirty="0"/>
           </a:p>
@@ -15855,7 +15490,7 @@
 </p:sld>
 </file>
 
-<file path=ppt/slides/slide22.xml><?xml version="1.0" encoding="utf-8"?>
+<file path=ppt/slides/slide21.xml><?xml version="1.0" encoding="utf-8"?>
 <p:sld xmlns:a="http://schemas.openxmlformats.org/drawingml/2006/main" xmlns:r="http://schemas.openxmlformats.org/officeDocument/2006/relationships" xmlns:p="http://schemas.openxmlformats.org/presentationml/2006/main">
   <p:cSld>
     <p:spTree>
@@ -15996,7 +15631,7 @@
                 <a:latin typeface="Arial" panose="020B0604020202020204" pitchFamily="34" charset="0"/>
                 <a:cs typeface="Arial" panose="020B0604020202020204" pitchFamily="34" charset="0"/>
               </a:rPr>
-              <a:t>3/21/2024</a:t>
+              <a:t>11/27/2024</a:t>
             </a:fld>
             <a:endParaRPr kumimoji="0" lang="en-US" dirty="0">
               <a:latin typeface="Arial" panose="020B0604020202020204" pitchFamily="34" charset="0"/>
@@ -16034,7 +15669,7 @@
                 </a:solidFill>
               </a:rPr>
               <a:pPr algn="r"/>
-              <a:t>22</a:t>
+              <a:t>21</a:t>
             </a:fld>
             <a:endParaRPr kumimoji="0" lang="en-US" dirty="0"/>
           </a:p>
@@ -16145,7 +15780,7 @@
 </p:sld>
 </file>
 
-<file path=ppt/slides/slide23.xml><?xml version="1.0" encoding="utf-8"?>
+<file path=ppt/slides/slide22.xml><?xml version="1.0" encoding="utf-8"?>
 <p:sld xmlns:a="http://schemas.openxmlformats.org/drawingml/2006/main" xmlns:r="http://schemas.openxmlformats.org/officeDocument/2006/relationships" xmlns:p="http://schemas.openxmlformats.org/presentationml/2006/main">
   <p:cSld>
     <p:spTree>
@@ -16286,7 +15921,7 @@
                 <a:latin typeface="Arial" panose="020B0604020202020204" pitchFamily="34" charset="0"/>
                 <a:cs typeface="Arial" panose="020B0604020202020204" pitchFamily="34" charset="0"/>
               </a:rPr>
-              <a:t>3/21/2024</a:t>
+              <a:t>11/27/2024</a:t>
             </a:fld>
             <a:endParaRPr kumimoji="0" lang="en-US" dirty="0">
               <a:latin typeface="Arial" panose="020B0604020202020204" pitchFamily="34" charset="0"/>
@@ -16324,7 +15959,7 @@
                 </a:solidFill>
               </a:rPr>
               <a:pPr algn="r"/>
-              <a:t>23</a:t>
+              <a:t>22</a:t>
             </a:fld>
             <a:endParaRPr kumimoji="0" lang="en-US" dirty="0"/>
           </a:p>
@@ -16456,7 +16091,7 @@
 </p:sld>
 </file>
 
-<file path=ppt/slides/slide24.xml><?xml version="1.0" encoding="utf-8"?>
+<file path=ppt/slides/slide23.xml><?xml version="1.0" encoding="utf-8"?>
 <p:sld xmlns:a="http://schemas.openxmlformats.org/drawingml/2006/main" xmlns:r="http://schemas.openxmlformats.org/officeDocument/2006/relationships" xmlns:p="http://schemas.openxmlformats.org/presentationml/2006/main">
   <p:cSld>
     <p:spTree>
@@ -16597,7 +16232,7 @@
                 <a:latin typeface="Arial" panose="020B0604020202020204" pitchFamily="34" charset="0"/>
                 <a:cs typeface="Arial" panose="020B0604020202020204" pitchFamily="34" charset="0"/>
               </a:rPr>
-              <a:t>3/21/2024</a:t>
+              <a:t>11/27/2024</a:t>
             </a:fld>
             <a:endParaRPr kumimoji="0" lang="en-US" dirty="0">
               <a:latin typeface="Arial" panose="020B0604020202020204" pitchFamily="34" charset="0"/>
@@ -16635,7 +16270,7 @@
                 </a:solidFill>
               </a:rPr>
               <a:pPr algn="r"/>
-              <a:t>24</a:t>
+              <a:t>23</a:t>
             </a:fld>
             <a:endParaRPr kumimoji="0" lang="en-US" dirty="0"/>
           </a:p>
@@ -16786,7 +16421,7 @@
 </p:sld>
 </file>
 
-<file path=ppt/slides/slide25.xml><?xml version="1.0" encoding="utf-8"?>
+<file path=ppt/slides/slide24.xml><?xml version="1.0" encoding="utf-8"?>
 <p:sld xmlns:a="http://schemas.openxmlformats.org/drawingml/2006/main" xmlns:r="http://schemas.openxmlformats.org/officeDocument/2006/relationships" xmlns:p="http://schemas.openxmlformats.org/presentationml/2006/main">
   <p:cSld>
     <p:spTree>
@@ -16927,7 +16562,7 @@
                 <a:latin typeface="Arial" panose="020B0604020202020204" pitchFamily="34" charset="0"/>
                 <a:cs typeface="Arial" panose="020B0604020202020204" pitchFamily="34" charset="0"/>
               </a:rPr>
-              <a:t>3/21/2024</a:t>
+              <a:t>11/27/2024</a:t>
             </a:fld>
             <a:endParaRPr kumimoji="0" lang="en-US" dirty="0">
               <a:latin typeface="Arial" panose="020B0604020202020204" pitchFamily="34" charset="0"/>
@@ -16965,7 +16600,7 @@
                 </a:solidFill>
               </a:rPr>
               <a:pPr algn="r"/>
-              <a:t>25</a:t>
+              <a:t>24</a:t>
             </a:fld>
             <a:endParaRPr kumimoji="0" lang="en-US" dirty="0"/>
           </a:p>
@@ -17116,7 +16751,7 @@
 </p:sld>
 </file>
 
-<file path=ppt/slides/slide26.xml><?xml version="1.0" encoding="utf-8"?>
+<file path=ppt/slides/slide25.xml><?xml version="1.0" encoding="utf-8"?>
 <p:sld xmlns:a="http://schemas.openxmlformats.org/drawingml/2006/main" xmlns:r="http://schemas.openxmlformats.org/officeDocument/2006/relationships" xmlns:p="http://schemas.openxmlformats.org/presentationml/2006/main">
   <p:cSld>
     <p:spTree>
@@ -17257,7 +16892,7 @@
                 <a:latin typeface="Arial" panose="020B0604020202020204" pitchFamily="34" charset="0"/>
                 <a:cs typeface="Arial" panose="020B0604020202020204" pitchFamily="34" charset="0"/>
               </a:rPr>
-              <a:t>3/21/2024</a:t>
+              <a:t>11/27/2024</a:t>
             </a:fld>
             <a:endParaRPr kumimoji="0" lang="en-US" dirty="0">
               <a:latin typeface="Arial" panose="020B0604020202020204" pitchFamily="34" charset="0"/>
@@ -17295,7 +16930,7 @@
                 </a:solidFill>
               </a:rPr>
               <a:pPr algn="r"/>
-              <a:t>26</a:t>
+              <a:t>25</a:t>
             </a:fld>
             <a:endParaRPr kumimoji="0" lang="en-US" dirty="0"/>
           </a:p>
@@ -17412,7 +17047,7 @@
 </p:sld>
 </file>
 
-<file path=ppt/slides/slide27.xml><?xml version="1.0" encoding="utf-8"?>
+<file path=ppt/slides/slide26.xml><?xml version="1.0" encoding="utf-8"?>
 <p:sld xmlns:a="http://schemas.openxmlformats.org/drawingml/2006/main" xmlns:r="http://schemas.openxmlformats.org/officeDocument/2006/relationships" xmlns:p="http://schemas.openxmlformats.org/presentationml/2006/main">
   <p:cSld>
     <p:spTree>
@@ -17535,7 +17170,7 @@
                 <a:latin typeface="Arial" panose="020B0604020202020204" pitchFamily="34" charset="0"/>
                 <a:cs typeface="Arial" panose="020B0604020202020204" pitchFamily="34" charset="0"/>
               </a:rPr>
-              <a:t>3/21/2024</a:t>
+              <a:t>11/27/2024</a:t>
             </a:fld>
             <a:endParaRPr kumimoji="0" lang="en-US" dirty="0">
               <a:latin typeface="Arial" panose="020B0604020202020204" pitchFamily="34" charset="0"/>
@@ -17573,7 +17208,7 @@
                 </a:solidFill>
               </a:rPr>
               <a:pPr algn="r"/>
-              <a:t>27</a:t>
+              <a:t>26</a:t>
             </a:fld>
             <a:endParaRPr kumimoji="0" lang="en-US" dirty="0"/>
           </a:p>
@@ -17826,6 +17461,528 @@
 </p:sld>
 </file>
 
+<file path=ppt/slides/slide27.xml><?xml version="1.0" encoding="utf-8"?>
+<p:sld xmlns:a="http://schemas.openxmlformats.org/drawingml/2006/main" xmlns:r="http://schemas.openxmlformats.org/officeDocument/2006/relationships" xmlns:p="http://schemas.openxmlformats.org/presentationml/2006/main">
+  <p:cSld>
+    <p:spTree>
+      <p:nvGrpSpPr>
+        <p:cNvPr id="1" name=""/>
+        <p:cNvGrpSpPr/>
+        <p:nvPr/>
+      </p:nvGrpSpPr>
+      <p:grpSpPr>
+        <a:xfrm>
+          <a:off x="0" y="0"/>
+          <a:ext cx="0" cy="0"/>
+          <a:chOff x="0" y="0"/>
+          <a:chExt cx="0" cy="0"/>
+        </a:xfrm>
+      </p:grpSpPr>
+      <p:sp>
+        <p:nvSpPr>
+          <p:cNvPr id="4" name="文字版面配置區 2"/>
+          <p:cNvSpPr txBox="1">
+            <a:spLocks/>
+          </p:cNvSpPr>
+          <p:nvPr/>
+        </p:nvSpPr>
+        <p:spPr>
+          <a:xfrm>
+            <a:off x="1962150" y="425393"/>
+            <a:ext cx="5943600" cy="990600"/>
+          </a:xfrm>
+          <a:prstGeom prst="rect">
+            <a:avLst/>
+          </a:prstGeom>
+        </p:spPr>
+        <p:txBody>
+          <a:bodyPr tIns="91440" bIns="91440" anchor="b" anchorCtr="0">
+            <a:noAutofit/>
+          </a:bodyPr>
+          <a:lstStyle/>
+          <a:p>
+            <a:r>
+              <a:rPr kumimoji="1" lang="zh-TW" altLang="en-US" sz="4800" b="1" dirty="0">
+                <a:solidFill>
+                  <a:srgbClr val="00B0F0"/>
+                </a:solidFill>
+                <a:effectLst>
+                  <a:outerShdw blurRad="38100" dist="38100" dir="2700000" algn="tl">
+                    <a:srgbClr val="000000">
+                      <a:alpha val="43137"/>
+                    </a:srgbClr>
+                  </a:outerShdw>
+                </a:effectLst>
+                <a:latin typeface="微軟正黑體" panose="020B0604030504040204" pitchFamily="34" charset="-120"/>
+                <a:ea typeface="微軟正黑體" panose="020B0604030504040204" pitchFamily="34" charset="-120"/>
+                <a:cs typeface="Heiti TC Light"/>
+              </a:rPr>
+              <a:t>大型語言模的進化</a:t>
+            </a:r>
+            <a:endParaRPr kumimoji="1" lang="en-US" altLang="zh-TW" sz="4800" b="1" dirty="0">
+              <a:solidFill>
+                <a:srgbClr val="00B0F0"/>
+              </a:solidFill>
+              <a:effectLst>
+                <a:outerShdw blurRad="38100" dist="38100" dir="2700000" algn="tl">
+                  <a:srgbClr val="000000">
+                    <a:alpha val="43137"/>
+                  </a:srgbClr>
+                </a:outerShdw>
+              </a:effectLst>
+              <a:latin typeface="微軟正黑體" panose="020B0604030504040204" pitchFamily="34" charset="-120"/>
+              <a:ea typeface="微軟正黑體" panose="020B0604030504040204" pitchFamily="34" charset="-120"/>
+              <a:cs typeface="Heiti TC Light"/>
+            </a:endParaRPr>
+          </a:p>
+        </p:txBody>
+      </p:sp>
+      <p:sp>
+        <p:nvSpPr>
+          <p:cNvPr id="3" name="日期版面配置區 2">
+            <a:extLst>
+              <a:ext uri="{FF2B5EF4-FFF2-40B4-BE49-F238E27FC236}">
+                <a16:creationId xmlns:a16="http://schemas.microsoft.com/office/drawing/2014/main" id="{1C536CB5-3C58-6CF1-767E-952B76F12DEE}"/>
+              </a:ext>
+            </a:extLst>
+          </p:cNvPr>
+          <p:cNvSpPr>
+            <a:spLocks noGrp="1"/>
+          </p:cNvSpPr>
+          <p:nvPr>
+            <p:ph type="dt" sz="half" idx="12"/>
+          </p:nvPr>
+        </p:nvSpPr>
+        <p:spPr>
+          <a:xfrm>
+            <a:off x="47625" y="6918325"/>
+            <a:ext cx="2438400" cy="244475"/>
+          </a:xfrm>
+        </p:spPr>
+        <p:txBody>
+          <a:bodyPr/>
+          <a:lstStyle/>
+          <a:p>
+            <a:fld id="{0B520B05-2240-4566-BE2A-9338980FE8EB}" type="datetime1">
+              <a:rPr kumimoji="0" lang="en-US" altLang="zh-TW" sz="1200" smtClean="0">
+                <a:solidFill>
+                  <a:schemeClr val="tx2"/>
+                </a:solidFill>
+                <a:latin typeface="Arial" panose="020B0604020202020204" pitchFamily="34" charset="0"/>
+                <a:cs typeface="Arial" panose="020B0604020202020204" pitchFamily="34" charset="0"/>
+              </a:rPr>
+              <a:t>11/27/2024</a:t>
+            </a:fld>
+            <a:endParaRPr kumimoji="0" lang="en-US" dirty="0">
+              <a:latin typeface="Arial" panose="020B0604020202020204" pitchFamily="34" charset="0"/>
+              <a:cs typeface="Arial" panose="020B0604020202020204" pitchFamily="34" charset="0"/>
+            </a:endParaRPr>
+          </a:p>
+        </p:txBody>
+      </p:sp>
+      <p:sp>
+        <p:nvSpPr>
+          <p:cNvPr id="7" name="投影片編號版面配置區 6">
+            <a:extLst>
+              <a:ext uri="{FF2B5EF4-FFF2-40B4-BE49-F238E27FC236}">
+                <a16:creationId xmlns:a16="http://schemas.microsoft.com/office/drawing/2014/main" id="{DA316F56-AF12-D872-611F-78AE7ACCBF93}"/>
+              </a:ext>
+            </a:extLst>
+          </p:cNvPr>
+          <p:cNvSpPr>
+            <a:spLocks noGrp="1"/>
+          </p:cNvSpPr>
+          <p:nvPr>
+            <p:ph type="sldNum" sz="quarter" idx="13"/>
+          </p:nvPr>
+        </p:nvSpPr>
+        <p:spPr>
+          <a:xfrm>
+            <a:off x="8153400" y="6918325"/>
+            <a:ext cx="914400" cy="244475"/>
+          </a:xfrm>
+        </p:spPr>
+        <p:txBody>
+          <a:bodyPr/>
+          <a:lstStyle/>
+          <a:p>
+            <a:pPr algn="r"/>
+            <a:fld id="{F99EC173-99AE-4773-AB25-02E469A13EAE}" type="slidenum">
+              <a:rPr kumimoji="0" lang="en-US" sz="1200" smtClean="0">
+                <a:solidFill>
+                  <a:schemeClr val="tx2"/>
+                </a:solidFill>
+              </a:rPr>
+              <a:pPr algn="r"/>
+              <a:t>27</a:t>
+            </a:fld>
+            <a:endParaRPr kumimoji="0" lang="en-US" dirty="0"/>
+          </a:p>
+        </p:txBody>
+      </p:sp>
+      <p:sp>
+        <p:nvSpPr>
+          <p:cNvPr id="2" name="文字方塊 1">
+            <a:extLst>
+              <a:ext uri="{FF2B5EF4-FFF2-40B4-BE49-F238E27FC236}">
+                <a16:creationId xmlns:a16="http://schemas.microsoft.com/office/drawing/2014/main" id="{E17C39F0-9527-522B-E55B-DAC3D2425E05}"/>
+              </a:ext>
+            </a:extLst>
+          </p:cNvPr>
+          <p:cNvSpPr txBox="1"/>
+          <p:nvPr/>
+        </p:nvSpPr>
+        <p:spPr>
+          <a:xfrm>
+            <a:off x="609600" y="1524000"/>
+            <a:ext cx="7924800" cy="5016758"/>
+          </a:xfrm>
+          <a:prstGeom prst="rect">
+            <a:avLst/>
+          </a:prstGeom>
+          <a:noFill/>
+        </p:spPr>
+        <p:txBody>
+          <a:bodyPr wrap="square" rtlCol="0">
+            <a:spAutoFit/>
+          </a:bodyPr>
+          <a:lstStyle/>
+          <a:p>
+            <a:pPr marL="360363" indent="-360363">
+              <a:buFont typeface="Arial" panose="020B0604020202020204" pitchFamily="34" charset="0"/>
+              <a:buChar char="•"/>
+            </a:pPr>
+            <a:r>
+              <a:rPr lang="zh-TW" altLang="en-US" sz="3200" b="0" i="0" dirty="0">
+                <a:effectLst/>
+                <a:latin typeface="微軟正黑體" panose="020B0604030504040204" pitchFamily="34" charset="-120"/>
+                <a:ea typeface="微軟正黑體" panose="020B0604030504040204" pitchFamily="34" charset="-120"/>
+              </a:rPr>
+              <a:t>只有產生下一個</a:t>
+            </a:r>
+            <a:r>
+              <a:rPr lang="en-US" altLang="zh-TW" sz="3200" b="0" i="0" dirty="0">
+                <a:effectLst/>
+                <a:latin typeface="微軟正黑體" panose="020B0604030504040204" pitchFamily="34" charset="-120"/>
+                <a:ea typeface="微軟正黑體" panose="020B0604030504040204" pitchFamily="34" charset="-120"/>
+              </a:rPr>
+              <a:t>token</a:t>
+            </a:r>
+            <a:r>
+              <a:rPr lang="zh-TW" altLang="en-US" sz="3200" b="0" i="0" dirty="0">
+                <a:effectLst/>
+                <a:latin typeface="微軟正黑體" panose="020B0604030504040204" pitchFamily="34" charset="-120"/>
+                <a:ea typeface="微軟正黑體" panose="020B0604030504040204" pitchFamily="34" charset="-120"/>
+              </a:rPr>
+              <a:t>能力的</a:t>
+            </a:r>
+            <a:r>
+              <a:rPr lang="en-US" altLang="zh-TW" sz="3200" b="0" i="0" dirty="0" err="1">
+                <a:effectLst/>
+                <a:latin typeface="微軟正黑體" panose="020B0604030504040204" pitchFamily="34" charset="-120"/>
+                <a:ea typeface="微軟正黑體" panose="020B0604030504040204" pitchFamily="34" charset="-120"/>
+              </a:rPr>
+              <a:t>llm</a:t>
+            </a:r>
+            <a:r>
+              <a:rPr lang="en-US" altLang="zh-TW" sz="3200" b="0" i="0" dirty="0">
+                <a:effectLst/>
+                <a:latin typeface="微軟正黑體" panose="020B0604030504040204" pitchFamily="34" charset="-120"/>
+                <a:ea typeface="微軟正黑體" panose="020B0604030504040204" pitchFamily="34" charset="-120"/>
+              </a:rPr>
+              <a:t>(base)</a:t>
+            </a:r>
+            <a:r>
+              <a:rPr lang="zh-TW" altLang="en-US" sz="3200" b="0" i="0" dirty="0">
+                <a:effectLst/>
+                <a:latin typeface="微軟正黑體" panose="020B0604030504040204" pitchFamily="34" charset="-120"/>
+                <a:ea typeface="微軟正黑體" panose="020B0604030504040204" pitchFamily="34" charset="-120"/>
+              </a:rPr>
+              <a:t>，如</a:t>
+            </a:r>
+            <a:r>
+              <a:rPr lang="en-US" altLang="zh-TW" sz="3200" dirty="0">
+                <a:latin typeface="微軟正黑體" panose="020B0604030504040204" pitchFamily="34" charset="-120"/>
+                <a:ea typeface="微軟正黑體" panose="020B0604030504040204" pitchFamily="34" charset="-120"/>
+              </a:rPr>
+              <a:t>GPT</a:t>
+            </a:r>
+            <a:r>
+              <a:rPr lang="zh-TW" altLang="en-US" sz="3200" dirty="0">
+                <a:latin typeface="微軟正黑體" panose="020B0604030504040204" pitchFamily="34" charset="-120"/>
+                <a:ea typeface="微軟正黑體" panose="020B0604030504040204" pitchFamily="34" charset="-120"/>
+              </a:rPr>
+              <a:t>、</a:t>
+            </a:r>
+            <a:r>
+              <a:rPr lang="en-US" altLang="zh-TW" sz="3200" dirty="0">
+                <a:latin typeface="微軟正黑體" panose="020B0604030504040204" pitchFamily="34" charset="-120"/>
+                <a:ea typeface="微軟正黑體" panose="020B0604030504040204" pitchFamily="34" charset="-120"/>
+              </a:rPr>
+              <a:t>GPT2</a:t>
+            </a:r>
+            <a:r>
+              <a:rPr lang="zh-TW" altLang="en-US" sz="3200" dirty="0">
+                <a:latin typeface="微軟正黑體" panose="020B0604030504040204" pitchFamily="34" charset="-120"/>
+                <a:ea typeface="微軟正黑體" panose="020B0604030504040204" pitchFamily="34" charset="-120"/>
+              </a:rPr>
+              <a:t>、</a:t>
+            </a:r>
+            <a:r>
+              <a:rPr lang="en-US" altLang="zh-TW" sz="3200" dirty="0">
+                <a:latin typeface="微軟正黑體" panose="020B0604030504040204" pitchFamily="34" charset="-120"/>
+                <a:ea typeface="微軟正黑體" panose="020B0604030504040204" pitchFamily="34" charset="-120"/>
+              </a:rPr>
+              <a:t>GPT3</a:t>
+            </a:r>
+          </a:p>
+          <a:p>
+            <a:pPr marL="360363" indent="-360363">
+              <a:buFont typeface="Arial" panose="020B0604020202020204" pitchFamily="34" charset="0"/>
+              <a:buChar char="•"/>
+            </a:pPr>
+            <a:r>
+              <a:rPr lang="zh-TW" altLang="en-US" sz="3200" dirty="0">
+                <a:latin typeface="微軟正黑體" panose="020B0604030504040204" pitchFamily="34" charset="-120"/>
+                <a:ea typeface="微軟正黑體" panose="020B0604030504040204" pitchFamily="34" charset="-120"/>
+              </a:rPr>
+              <a:t>經過</a:t>
+            </a:r>
+            <a:r>
+              <a:rPr lang="en-US" altLang="zh-TW" sz="3200" dirty="0" err="1">
+                <a:latin typeface="微軟正黑體" panose="020B0604030504040204" pitchFamily="34" charset="-120"/>
+                <a:ea typeface="微軟正黑體" panose="020B0604030504040204" pitchFamily="34" charset="-120"/>
+              </a:rPr>
+              <a:t>sft</a:t>
+            </a:r>
+            <a:r>
+              <a:rPr lang="zh-TW" altLang="en-US" sz="3200" dirty="0">
+                <a:latin typeface="微軟正黑體" panose="020B0604030504040204" pitchFamily="34" charset="-120"/>
+                <a:ea typeface="微軟正黑體" panose="020B0604030504040204" pitchFamily="34" charset="-120"/>
+              </a:rPr>
+              <a:t>的</a:t>
+            </a:r>
+            <a:r>
+              <a:rPr lang="en-US" altLang="zh-TW" sz="3200" dirty="0" err="1">
+                <a:latin typeface="微軟正黑體" panose="020B0604030504040204" pitchFamily="34" charset="-120"/>
+                <a:ea typeface="微軟正黑體" panose="020B0604030504040204" pitchFamily="34" charset="-120"/>
+              </a:rPr>
+              <a:t>llm</a:t>
+            </a:r>
+            <a:r>
+              <a:rPr lang="en-US" altLang="zh-TW" sz="3200" dirty="0">
+                <a:latin typeface="微軟正黑體" panose="020B0604030504040204" pitchFamily="34" charset="-120"/>
+                <a:ea typeface="微軟正黑體" panose="020B0604030504040204" pitchFamily="34" charset="-120"/>
+              </a:rPr>
+              <a:t>(instruction tuned)</a:t>
+            </a:r>
+            <a:r>
+              <a:rPr lang="zh-TW" altLang="en-US" sz="3200" dirty="0">
+                <a:latin typeface="微軟正黑體" panose="020B0604030504040204" pitchFamily="34" charset="-120"/>
+                <a:ea typeface="微軟正黑體" panose="020B0604030504040204" pitchFamily="34" charset="-120"/>
+              </a:rPr>
+              <a:t>，如</a:t>
+            </a:r>
+            <a:r>
+              <a:rPr lang="en-US" altLang="zh-TW" sz="3200" dirty="0">
+                <a:latin typeface="微軟正黑體" panose="020B0604030504040204" pitchFamily="34" charset="-120"/>
+                <a:ea typeface="微軟正黑體" panose="020B0604030504040204" pitchFamily="34" charset="-120"/>
+              </a:rPr>
+              <a:t>FLAN</a:t>
+            </a:r>
+            <a:r>
+              <a:rPr lang="zh-TW" altLang="en-US" sz="3200" dirty="0">
+                <a:latin typeface="微軟正黑體" panose="020B0604030504040204" pitchFamily="34" charset="-120"/>
+                <a:ea typeface="微軟正黑體" panose="020B0604030504040204" pitchFamily="34" charset="-120"/>
+              </a:rPr>
+              <a:t>、</a:t>
+            </a:r>
+            <a:r>
+              <a:rPr lang="en-US" altLang="zh-TW" sz="3200" dirty="0">
+                <a:latin typeface="微軟正黑體" panose="020B0604030504040204" pitchFamily="34" charset="-120"/>
+                <a:ea typeface="微軟正黑體" panose="020B0604030504040204" pitchFamily="34" charset="-120"/>
+              </a:rPr>
+              <a:t>T0</a:t>
+            </a:r>
+            <a:r>
+              <a:rPr lang="zh-TW" altLang="en-US" sz="3200" dirty="0">
+                <a:latin typeface="微軟正黑體" panose="020B0604030504040204" pitchFamily="34" charset="-120"/>
+                <a:ea typeface="微軟正黑體" panose="020B0604030504040204" pitchFamily="34" charset="-120"/>
+              </a:rPr>
+              <a:t>、</a:t>
+            </a:r>
+            <a:r>
+              <a:rPr lang="en-US" altLang="zh-TW" sz="3200" dirty="0">
+                <a:latin typeface="微軟正黑體" panose="020B0604030504040204" pitchFamily="34" charset="-120"/>
+                <a:ea typeface="微軟正黑體" panose="020B0604030504040204" pitchFamily="34" charset="-120"/>
+              </a:rPr>
+              <a:t>llama2</a:t>
+            </a:r>
+          </a:p>
+          <a:p>
+            <a:pPr marL="360363" indent="-360363">
+              <a:buFont typeface="Arial" panose="020B0604020202020204" pitchFamily="34" charset="0"/>
+              <a:buChar char="•"/>
+            </a:pPr>
+            <a:r>
+              <a:rPr lang="zh-TW" altLang="en-US" sz="3200" dirty="0">
+                <a:latin typeface="微軟正黑體" panose="020B0604030504040204" pitchFamily="34" charset="-120"/>
+                <a:ea typeface="微軟正黑體" panose="020B0604030504040204" pitchFamily="34" charset="-120"/>
+              </a:rPr>
+              <a:t>然後找出所有</a:t>
+            </a:r>
+            <a:r>
+              <a:rPr lang="en-US" altLang="zh-TW" sz="3200" dirty="0">
+                <a:latin typeface="微軟正黑體" panose="020B0604030504040204" pitchFamily="34" charset="-120"/>
+                <a:ea typeface="微軟正黑體" panose="020B0604030504040204" pitchFamily="34" charset="-120"/>
+              </a:rPr>
+              <a:t>NLP</a:t>
+            </a:r>
+            <a:r>
+              <a:rPr lang="zh-TW" altLang="en-US" sz="3200" dirty="0">
+                <a:latin typeface="微軟正黑體" panose="020B0604030504040204" pitchFamily="34" charset="-120"/>
+                <a:ea typeface="微軟正黑體" panose="020B0604030504040204" pitchFamily="34" charset="-120"/>
+              </a:rPr>
+              <a:t>任務的類型，如分類、摘要、</a:t>
+            </a:r>
+            <a:r>
+              <a:rPr lang="en-US" altLang="zh-TW" sz="3200" dirty="0">
+                <a:latin typeface="微軟正黑體" panose="020B0604030504040204" pitchFamily="34" charset="-120"/>
+                <a:ea typeface="微軟正黑體" panose="020B0604030504040204" pitchFamily="34" charset="-120"/>
+              </a:rPr>
+              <a:t>QA</a:t>
+            </a:r>
+            <a:r>
+              <a:rPr lang="zh-TW" altLang="en-US" sz="3200" dirty="0">
+                <a:latin typeface="微軟正黑體" panose="020B0604030504040204" pitchFamily="34" charset="-120"/>
+                <a:ea typeface="微軟正黑體" panose="020B0604030504040204" pitchFamily="34" charset="-120"/>
+              </a:rPr>
+              <a:t>、</a:t>
+            </a:r>
+            <a:r>
+              <a:rPr lang="en-US" altLang="zh-TW" sz="3200" dirty="0">
+                <a:latin typeface="微軟正黑體" panose="020B0604030504040204" pitchFamily="34" charset="-120"/>
+                <a:ea typeface="微軟正黑體" panose="020B0604030504040204" pitchFamily="34" charset="-120"/>
+              </a:rPr>
+              <a:t>NER</a:t>
+            </a:r>
+            <a:r>
+              <a:rPr lang="zh-TW" altLang="en-US" sz="3200" dirty="0">
+                <a:latin typeface="微軟正黑體" panose="020B0604030504040204" pitchFamily="34" charset="-120"/>
+                <a:ea typeface="微軟正黑體" panose="020B0604030504040204" pitchFamily="34" charset="-120"/>
+              </a:rPr>
+              <a:t>、</a:t>
+            </a:r>
+            <a:r>
+              <a:rPr lang="en-US" altLang="zh-TW" sz="3200" dirty="0">
+                <a:latin typeface="微軟正黑體" panose="020B0604030504040204" pitchFamily="34" charset="-120"/>
+                <a:ea typeface="微軟正黑體" panose="020B0604030504040204" pitchFamily="34" charset="-120"/>
+              </a:rPr>
+              <a:t>CHAT.......</a:t>
+            </a:r>
+            <a:r>
+              <a:rPr lang="zh-TW" altLang="en-US" sz="3200" dirty="0">
+                <a:latin typeface="微軟正黑體" panose="020B0604030504040204" pitchFamily="34" charset="-120"/>
+                <a:ea typeface="微軟正黑體" panose="020B0604030504040204" pitchFamily="34" charset="-120"/>
+              </a:rPr>
+              <a:t>將這些所有資料集拿來</a:t>
+            </a:r>
+            <a:endParaRPr lang="en-US" altLang="zh-TW" sz="3200" dirty="0">
+              <a:latin typeface="微軟正黑體" panose="020B0604030504040204" pitchFamily="34" charset="-120"/>
+              <a:ea typeface="微軟正黑體" panose="020B0604030504040204" pitchFamily="34" charset="-120"/>
+            </a:endParaRPr>
+          </a:p>
+          <a:p>
+            <a:pPr marL="360363" lvl="1" indent="-360363">
+              <a:buFont typeface="Arial" panose="020B0604020202020204" pitchFamily="34" charset="0"/>
+              <a:buChar char="•"/>
+            </a:pPr>
+            <a:r>
+              <a:rPr lang="zh-TW" altLang="en-US" sz="3200" dirty="0">
+                <a:latin typeface="微軟正黑體" panose="020B0604030504040204" pitchFamily="34" charset="-120"/>
+                <a:ea typeface="微軟正黑體" panose="020B0604030504040204" pitchFamily="34" charset="-120"/>
+              </a:rPr>
+              <a:t>最後經過</a:t>
+            </a:r>
+            <a:r>
+              <a:rPr lang="en-US" altLang="zh-TW" sz="3200" dirty="0">
+                <a:latin typeface="微軟正黑體" panose="020B0604030504040204" pitchFamily="34" charset="-120"/>
+                <a:ea typeface="微軟正黑體" panose="020B0604030504040204" pitchFamily="34" charset="-120"/>
+              </a:rPr>
+              <a:t>RLHF</a:t>
+            </a:r>
+            <a:r>
+              <a:rPr lang="zh-TW" altLang="en-US" sz="3200" dirty="0">
+                <a:latin typeface="微軟正黑體" panose="020B0604030504040204" pitchFamily="34" charset="-120"/>
+                <a:ea typeface="微軟正黑體" panose="020B0604030504040204" pitchFamily="34" charset="-120"/>
+              </a:rPr>
+              <a:t>，成為多功能，符合價值觀的產品如</a:t>
+            </a:r>
+            <a:r>
+              <a:rPr lang="en-US" altLang="zh-TW" sz="3200" dirty="0" err="1">
+                <a:latin typeface="微軟正黑體" panose="020B0604030504040204" pitchFamily="34" charset="-120"/>
+                <a:ea typeface="微軟正黑體" panose="020B0604030504040204" pitchFamily="34" charset="-120"/>
+              </a:rPr>
+              <a:t>InstructGPT</a:t>
+            </a:r>
+            <a:r>
+              <a:rPr lang="zh-TW" altLang="en-US" sz="3200" dirty="0">
+                <a:latin typeface="微軟正黑體" panose="020B0604030504040204" pitchFamily="34" charset="-120"/>
+                <a:ea typeface="微軟正黑體" panose="020B0604030504040204" pitchFamily="34" charset="-120"/>
+              </a:rPr>
+              <a:t>、</a:t>
+            </a:r>
+            <a:r>
+              <a:rPr lang="en-US" altLang="zh-TW" sz="3200" dirty="0">
+                <a:latin typeface="微軟正黑體" panose="020B0604030504040204" pitchFamily="34" charset="-120"/>
+                <a:ea typeface="微軟正黑體" panose="020B0604030504040204" pitchFamily="34" charset="-120"/>
+              </a:rPr>
+              <a:t>ChatGPT</a:t>
+            </a:r>
+            <a:r>
+              <a:rPr lang="zh-TW" altLang="en-US" sz="3200" dirty="0">
+                <a:latin typeface="微軟正黑體" panose="020B0604030504040204" pitchFamily="34" charset="-120"/>
+                <a:ea typeface="微軟正黑體" panose="020B0604030504040204" pitchFamily="34" charset="-120"/>
+              </a:rPr>
+              <a:t>，</a:t>
+            </a:r>
+            <a:r>
+              <a:rPr lang="en-US" altLang="zh-TW" sz="3200" dirty="0">
+                <a:latin typeface="微軟正黑體" panose="020B0604030504040204" pitchFamily="34" charset="-120"/>
+                <a:ea typeface="微軟正黑體" panose="020B0604030504040204" pitchFamily="34" charset="-120"/>
+              </a:rPr>
+              <a:t>llama2-chat</a:t>
+            </a:r>
+            <a:r>
+              <a:rPr lang="zh-TW" altLang="en-US" sz="3200" dirty="0">
+                <a:latin typeface="微軟正黑體" panose="020B0604030504040204" pitchFamily="34" charset="-120"/>
+                <a:ea typeface="微軟正黑體" panose="020B0604030504040204" pitchFamily="34" charset="-120"/>
+              </a:rPr>
+              <a:t>等</a:t>
+            </a:r>
+            <a:endParaRPr lang="en-US" altLang="zh-TW" sz="3200" dirty="0">
+              <a:latin typeface="微軟正黑體" panose="020B0604030504040204" pitchFamily="34" charset="-120"/>
+              <a:ea typeface="微軟正黑體" panose="020B0604030504040204" pitchFamily="34" charset="-120"/>
+            </a:endParaRPr>
+          </a:p>
+        </p:txBody>
+      </p:sp>
+    </p:spTree>
+    <p:extLst>
+      <p:ext uri="{BB962C8B-B14F-4D97-AF65-F5344CB8AC3E}">
+        <p14:creationId xmlns:p14="http://schemas.microsoft.com/office/powerpoint/2010/main" val="1269779521"/>
+      </p:ext>
+    </p:extLst>
+  </p:cSld>
+  <p:clrMapOvr>
+    <a:masterClrMapping/>
+  </p:clrMapOvr>
+  <p:transition>
+    <p:fade/>
+  </p:transition>
+</p:sld>
+</file>
+
 <file path=ppt/slides/slide28.xml><?xml version="1.0" encoding="utf-8"?>
 <p:sld xmlns:a="http://schemas.openxmlformats.org/drawingml/2006/main" xmlns:r="http://schemas.openxmlformats.org/officeDocument/2006/relationships" xmlns:p="http://schemas.openxmlformats.org/presentationml/2006/main">
   <p:cSld>
@@ -17853,8 +18010,8 @@
         </p:nvSpPr>
         <p:spPr>
           <a:xfrm>
-            <a:off x="1962150" y="425393"/>
-            <a:ext cx="5943600" cy="990600"/>
+            <a:off x="2590800" y="126742"/>
+            <a:ext cx="4552950" cy="990600"/>
           </a:xfrm>
           <a:prstGeom prst="rect">
             <a:avLst/>
@@ -17882,7 +18039,7 @@
                 <a:ea typeface="微軟正黑體" panose="020B0604030504040204" pitchFamily="34" charset="-120"/>
                 <a:cs typeface="Heiti TC Light"/>
               </a:rPr>
-              <a:t>大型語言模的進化</a:t>
+              <a:t>從結果找指令</a:t>
             </a:r>
             <a:endParaRPr kumimoji="1" lang="en-US" altLang="zh-TW" sz="4800" b="1" dirty="0">
               <a:solidFill>
@@ -17918,12 +18075,7 @@
             <p:ph type="dt" sz="half" idx="12"/>
           </p:nvPr>
         </p:nvSpPr>
-        <p:spPr>
-          <a:xfrm>
-            <a:off x="47625" y="6918325"/>
-            <a:ext cx="2438400" cy="244475"/>
-          </a:xfrm>
-        </p:spPr>
+        <p:spPr/>
         <p:txBody>
           <a:bodyPr/>
           <a:lstStyle/>
@@ -17936,7 +18088,7 @@
                 <a:latin typeface="Arial" panose="020B0604020202020204" pitchFamily="34" charset="0"/>
                 <a:cs typeface="Arial" panose="020B0604020202020204" pitchFamily="34" charset="0"/>
               </a:rPr>
-              <a:t>3/21/2024</a:t>
+              <a:t>11/27/2024</a:t>
             </a:fld>
             <a:endParaRPr kumimoji="0" lang="en-US" dirty="0">
               <a:latin typeface="Arial" panose="020B0604020202020204" pitchFamily="34" charset="0"/>
@@ -17961,12 +18113,7 @@
             <p:ph type="sldNum" sz="quarter" idx="13"/>
           </p:nvPr>
         </p:nvSpPr>
-        <p:spPr>
-          <a:xfrm>
-            <a:off x="8153400" y="6918325"/>
-            <a:ext cx="914400" cy="244475"/>
-          </a:xfrm>
-        </p:spPr>
+        <p:spPr/>
         <p:txBody>
           <a:bodyPr/>
           <a:lstStyle/>
@@ -17980,518 +18127,6 @@
               </a:rPr>
               <a:pPr algn="r"/>
               <a:t>28</a:t>
-            </a:fld>
-            <a:endParaRPr kumimoji="0" lang="en-US" dirty="0"/>
-          </a:p>
-        </p:txBody>
-      </p:sp>
-      <p:sp>
-        <p:nvSpPr>
-          <p:cNvPr id="2" name="文字方塊 1">
-            <a:extLst>
-              <a:ext uri="{FF2B5EF4-FFF2-40B4-BE49-F238E27FC236}">
-                <a16:creationId xmlns:a16="http://schemas.microsoft.com/office/drawing/2014/main" id="{E17C39F0-9527-522B-E55B-DAC3D2425E05}"/>
-              </a:ext>
-            </a:extLst>
-          </p:cNvPr>
-          <p:cNvSpPr txBox="1"/>
-          <p:nvPr/>
-        </p:nvSpPr>
-        <p:spPr>
-          <a:xfrm>
-            <a:off x="609600" y="1524000"/>
-            <a:ext cx="7924800" cy="5016758"/>
-          </a:xfrm>
-          <a:prstGeom prst="rect">
-            <a:avLst/>
-          </a:prstGeom>
-          <a:noFill/>
-        </p:spPr>
-        <p:txBody>
-          <a:bodyPr wrap="square" rtlCol="0">
-            <a:spAutoFit/>
-          </a:bodyPr>
-          <a:lstStyle/>
-          <a:p>
-            <a:pPr marL="360363" indent="-360363">
-              <a:buFont typeface="Arial" panose="020B0604020202020204" pitchFamily="34" charset="0"/>
-              <a:buChar char="•"/>
-            </a:pPr>
-            <a:r>
-              <a:rPr lang="zh-TW" altLang="en-US" sz="3200" b="0" i="0" dirty="0">
-                <a:effectLst/>
-                <a:latin typeface="微軟正黑體" panose="020B0604030504040204" pitchFamily="34" charset="-120"/>
-                <a:ea typeface="微軟正黑體" panose="020B0604030504040204" pitchFamily="34" charset="-120"/>
-              </a:rPr>
-              <a:t>只有產生下一個</a:t>
-            </a:r>
-            <a:r>
-              <a:rPr lang="en-US" altLang="zh-TW" sz="3200" b="0" i="0" dirty="0">
-                <a:effectLst/>
-                <a:latin typeface="微軟正黑體" panose="020B0604030504040204" pitchFamily="34" charset="-120"/>
-                <a:ea typeface="微軟正黑體" panose="020B0604030504040204" pitchFamily="34" charset="-120"/>
-              </a:rPr>
-              <a:t>token</a:t>
-            </a:r>
-            <a:r>
-              <a:rPr lang="zh-TW" altLang="en-US" sz="3200" b="0" i="0" dirty="0">
-                <a:effectLst/>
-                <a:latin typeface="微軟正黑體" panose="020B0604030504040204" pitchFamily="34" charset="-120"/>
-                <a:ea typeface="微軟正黑體" panose="020B0604030504040204" pitchFamily="34" charset="-120"/>
-              </a:rPr>
-              <a:t>能力的</a:t>
-            </a:r>
-            <a:r>
-              <a:rPr lang="en-US" altLang="zh-TW" sz="3200" b="0" i="0" dirty="0" err="1">
-                <a:effectLst/>
-                <a:latin typeface="微軟正黑體" panose="020B0604030504040204" pitchFamily="34" charset="-120"/>
-                <a:ea typeface="微軟正黑體" panose="020B0604030504040204" pitchFamily="34" charset="-120"/>
-              </a:rPr>
-              <a:t>llm</a:t>
-            </a:r>
-            <a:r>
-              <a:rPr lang="en-US" altLang="zh-TW" sz="3200" b="0" i="0" dirty="0">
-                <a:effectLst/>
-                <a:latin typeface="微軟正黑體" panose="020B0604030504040204" pitchFamily="34" charset="-120"/>
-                <a:ea typeface="微軟正黑體" panose="020B0604030504040204" pitchFamily="34" charset="-120"/>
-              </a:rPr>
-              <a:t>(base)</a:t>
-            </a:r>
-            <a:r>
-              <a:rPr lang="zh-TW" altLang="en-US" sz="3200" b="0" i="0" dirty="0">
-                <a:effectLst/>
-                <a:latin typeface="微軟正黑體" panose="020B0604030504040204" pitchFamily="34" charset="-120"/>
-                <a:ea typeface="微軟正黑體" panose="020B0604030504040204" pitchFamily="34" charset="-120"/>
-              </a:rPr>
-              <a:t>，如</a:t>
-            </a:r>
-            <a:r>
-              <a:rPr lang="en-US" altLang="zh-TW" sz="3200" dirty="0">
-                <a:latin typeface="微軟正黑體" panose="020B0604030504040204" pitchFamily="34" charset="-120"/>
-                <a:ea typeface="微軟正黑體" panose="020B0604030504040204" pitchFamily="34" charset="-120"/>
-              </a:rPr>
-              <a:t>GPT</a:t>
-            </a:r>
-            <a:r>
-              <a:rPr lang="zh-TW" altLang="en-US" sz="3200" dirty="0">
-                <a:latin typeface="微軟正黑體" panose="020B0604030504040204" pitchFamily="34" charset="-120"/>
-                <a:ea typeface="微軟正黑體" panose="020B0604030504040204" pitchFamily="34" charset="-120"/>
-              </a:rPr>
-              <a:t>、</a:t>
-            </a:r>
-            <a:r>
-              <a:rPr lang="en-US" altLang="zh-TW" sz="3200" dirty="0">
-                <a:latin typeface="微軟正黑體" panose="020B0604030504040204" pitchFamily="34" charset="-120"/>
-                <a:ea typeface="微軟正黑體" panose="020B0604030504040204" pitchFamily="34" charset="-120"/>
-              </a:rPr>
-              <a:t>GPT2</a:t>
-            </a:r>
-            <a:r>
-              <a:rPr lang="zh-TW" altLang="en-US" sz="3200" dirty="0">
-                <a:latin typeface="微軟正黑體" panose="020B0604030504040204" pitchFamily="34" charset="-120"/>
-                <a:ea typeface="微軟正黑體" panose="020B0604030504040204" pitchFamily="34" charset="-120"/>
-              </a:rPr>
-              <a:t>、</a:t>
-            </a:r>
-            <a:r>
-              <a:rPr lang="en-US" altLang="zh-TW" sz="3200" dirty="0">
-                <a:latin typeface="微軟正黑體" panose="020B0604030504040204" pitchFamily="34" charset="-120"/>
-                <a:ea typeface="微軟正黑體" panose="020B0604030504040204" pitchFamily="34" charset="-120"/>
-              </a:rPr>
-              <a:t>GPT3</a:t>
-            </a:r>
-          </a:p>
-          <a:p>
-            <a:pPr marL="360363" indent="-360363">
-              <a:buFont typeface="Arial" panose="020B0604020202020204" pitchFamily="34" charset="0"/>
-              <a:buChar char="•"/>
-            </a:pPr>
-            <a:r>
-              <a:rPr lang="zh-TW" altLang="en-US" sz="3200" dirty="0">
-                <a:latin typeface="微軟正黑體" panose="020B0604030504040204" pitchFamily="34" charset="-120"/>
-                <a:ea typeface="微軟正黑體" panose="020B0604030504040204" pitchFamily="34" charset="-120"/>
-              </a:rPr>
-              <a:t>經過</a:t>
-            </a:r>
-            <a:r>
-              <a:rPr lang="en-US" altLang="zh-TW" sz="3200" dirty="0" err="1">
-                <a:latin typeface="微軟正黑體" panose="020B0604030504040204" pitchFamily="34" charset="-120"/>
-                <a:ea typeface="微軟正黑體" panose="020B0604030504040204" pitchFamily="34" charset="-120"/>
-              </a:rPr>
-              <a:t>sft</a:t>
-            </a:r>
-            <a:r>
-              <a:rPr lang="zh-TW" altLang="en-US" sz="3200" dirty="0">
-                <a:latin typeface="微軟正黑體" panose="020B0604030504040204" pitchFamily="34" charset="-120"/>
-                <a:ea typeface="微軟正黑體" panose="020B0604030504040204" pitchFamily="34" charset="-120"/>
-              </a:rPr>
-              <a:t>的</a:t>
-            </a:r>
-            <a:r>
-              <a:rPr lang="en-US" altLang="zh-TW" sz="3200" dirty="0" err="1">
-                <a:latin typeface="微軟正黑體" panose="020B0604030504040204" pitchFamily="34" charset="-120"/>
-                <a:ea typeface="微軟正黑體" panose="020B0604030504040204" pitchFamily="34" charset="-120"/>
-              </a:rPr>
-              <a:t>llm</a:t>
-            </a:r>
-            <a:r>
-              <a:rPr lang="en-US" altLang="zh-TW" sz="3200" dirty="0">
-                <a:latin typeface="微軟正黑體" panose="020B0604030504040204" pitchFamily="34" charset="-120"/>
-                <a:ea typeface="微軟正黑體" panose="020B0604030504040204" pitchFamily="34" charset="-120"/>
-              </a:rPr>
-              <a:t>(instruction tuned)</a:t>
-            </a:r>
-            <a:r>
-              <a:rPr lang="zh-TW" altLang="en-US" sz="3200" dirty="0">
-                <a:latin typeface="微軟正黑體" panose="020B0604030504040204" pitchFamily="34" charset="-120"/>
-                <a:ea typeface="微軟正黑體" panose="020B0604030504040204" pitchFamily="34" charset="-120"/>
-              </a:rPr>
-              <a:t>，如</a:t>
-            </a:r>
-            <a:r>
-              <a:rPr lang="en-US" altLang="zh-TW" sz="3200" dirty="0">
-                <a:latin typeface="微軟正黑體" panose="020B0604030504040204" pitchFamily="34" charset="-120"/>
-                <a:ea typeface="微軟正黑體" panose="020B0604030504040204" pitchFamily="34" charset="-120"/>
-              </a:rPr>
-              <a:t>FLAN</a:t>
-            </a:r>
-            <a:r>
-              <a:rPr lang="zh-TW" altLang="en-US" sz="3200" dirty="0">
-                <a:latin typeface="微軟正黑體" panose="020B0604030504040204" pitchFamily="34" charset="-120"/>
-                <a:ea typeface="微軟正黑體" panose="020B0604030504040204" pitchFamily="34" charset="-120"/>
-              </a:rPr>
-              <a:t>、</a:t>
-            </a:r>
-            <a:r>
-              <a:rPr lang="en-US" altLang="zh-TW" sz="3200" dirty="0">
-                <a:latin typeface="微軟正黑體" panose="020B0604030504040204" pitchFamily="34" charset="-120"/>
-                <a:ea typeface="微軟正黑體" panose="020B0604030504040204" pitchFamily="34" charset="-120"/>
-              </a:rPr>
-              <a:t>T0</a:t>
-            </a:r>
-            <a:r>
-              <a:rPr lang="zh-TW" altLang="en-US" sz="3200" dirty="0">
-                <a:latin typeface="微軟正黑體" panose="020B0604030504040204" pitchFamily="34" charset="-120"/>
-                <a:ea typeface="微軟正黑體" panose="020B0604030504040204" pitchFamily="34" charset="-120"/>
-              </a:rPr>
-              <a:t>、</a:t>
-            </a:r>
-            <a:r>
-              <a:rPr lang="en-US" altLang="zh-TW" sz="3200" dirty="0">
-                <a:latin typeface="微軟正黑體" panose="020B0604030504040204" pitchFamily="34" charset="-120"/>
-                <a:ea typeface="微軟正黑體" panose="020B0604030504040204" pitchFamily="34" charset="-120"/>
-              </a:rPr>
-              <a:t>llama2</a:t>
-            </a:r>
-          </a:p>
-          <a:p>
-            <a:pPr marL="360363" indent="-360363">
-              <a:buFont typeface="Arial" panose="020B0604020202020204" pitchFamily="34" charset="0"/>
-              <a:buChar char="•"/>
-            </a:pPr>
-            <a:r>
-              <a:rPr lang="zh-TW" altLang="en-US" sz="3200" dirty="0">
-                <a:latin typeface="微軟正黑體" panose="020B0604030504040204" pitchFamily="34" charset="-120"/>
-                <a:ea typeface="微軟正黑體" panose="020B0604030504040204" pitchFamily="34" charset="-120"/>
-              </a:rPr>
-              <a:t>然後找出所有</a:t>
-            </a:r>
-            <a:r>
-              <a:rPr lang="en-US" altLang="zh-TW" sz="3200" dirty="0">
-                <a:latin typeface="微軟正黑體" panose="020B0604030504040204" pitchFamily="34" charset="-120"/>
-                <a:ea typeface="微軟正黑體" panose="020B0604030504040204" pitchFamily="34" charset="-120"/>
-              </a:rPr>
-              <a:t>NLP</a:t>
-            </a:r>
-            <a:r>
-              <a:rPr lang="zh-TW" altLang="en-US" sz="3200" dirty="0">
-                <a:latin typeface="微軟正黑體" panose="020B0604030504040204" pitchFamily="34" charset="-120"/>
-                <a:ea typeface="微軟正黑體" panose="020B0604030504040204" pitchFamily="34" charset="-120"/>
-              </a:rPr>
-              <a:t>任務的類型，如分類、摘要、</a:t>
-            </a:r>
-            <a:r>
-              <a:rPr lang="en-US" altLang="zh-TW" sz="3200" dirty="0">
-                <a:latin typeface="微軟正黑體" panose="020B0604030504040204" pitchFamily="34" charset="-120"/>
-                <a:ea typeface="微軟正黑體" panose="020B0604030504040204" pitchFamily="34" charset="-120"/>
-              </a:rPr>
-              <a:t>QA</a:t>
-            </a:r>
-            <a:r>
-              <a:rPr lang="zh-TW" altLang="en-US" sz="3200" dirty="0">
-                <a:latin typeface="微軟正黑體" panose="020B0604030504040204" pitchFamily="34" charset="-120"/>
-                <a:ea typeface="微軟正黑體" panose="020B0604030504040204" pitchFamily="34" charset="-120"/>
-              </a:rPr>
-              <a:t>、</a:t>
-            </a:r>
-            <a:r>
-              <a:rPr lang="en-US" altLang="zh-TW" sz="3200" dirty="0">
-                <a:latin typeface="微軟正黑體" panose="020B0604030504040204" pitchFamily="34" charset="-120"/>
-                <a:ea typeface="微軟正黑體" panose="020B0604030504040204" pitchFamily="34" charset="-120"/>
-              </a:rPr>
-              <a:t>NER</a:t>
-            </a:r>
-            <a:r>
-              <a:rPr lang="zh-TW" altLang="en-US" sz="3200" dirty="0">
-                <a:latin typeface="微軟正黑體" panose="020B0604030504040204" pitchFamily="34" charset="-120"/>
-                <a:ea typeface="微軟正黑體" panose="020B0604030504040204" pitchFamily="34" charset="-120"/>
-              </a:rPr>
-              <a:t>、</a:t>
-            </a:r>
-            <a:r>
-              <a:rPr lang="en-US" altLang="zh-TW" sz="3200" dirty="0">
-                <a:latin typeface="微軟正黑體" panose="020B0604030504040204" pitchFamily="34" charset="-120"/>
-                <a:ea typeface="微軟正黑體" panose="020B0604030504040204" pitchFamily="34" charset="-120"/>
-              </a:rPr>
-              <a:t>CHAT.......</a:t>
-            </a:r>
-            <a:r>
-              <a:rPr lang="zh-TW" altLang="en-US" sz="3200" dirty="0">
-                <a:latin typeface="微軟正黑體" panose="020B0604030504040204" pitchFamily="34" charset="-120"/>
-                <a:ea typeface="微軟正黑體" panose="020B0604030504040204" pitchFamily="34" charset="-120"/>
-              </a:rPr>
-              <a:t>將這些所有資料集拿來</a:t>
-            </a:r>
-            <a:endParaRPr lang="en-US" altLang="zh-TW" sz="3200" dirty="0">
-              <a:latin typeface="微軟正黑體" panose="020B0604030504040204" pitchFamily="34" charset="-120"/>
-              <a:ea typeface="微軟正黑體" panose="020B0604030504040204" pitchFamily="34" charset="-120"/>
-            </a:endParaRPr>
-          </a:p>
-          <a:p>
-            <a:pPr marL="360363" lvl="1" indent="-360363">
-              <a:buFont typeface="Arial" panose="020B0604020202020204" pitchFamily="34" charset="0"/>
-              <a:buChar char="•"/>
-            </a:pPr>
-            <a:r>
-              <a:rPr lang="zh-TW" altLang="en-US" sz="3200" dirty="0">
-                <a:latin typeface="微軟正黑體" panose="020B0604030504040204" pitchFamily="34" charset="-120"/>
-                <a:ea typeface="微軟正黑體" panose="020B0604030504040204" pitchFamily="34" charset="-120"/>
-              </a:rPr>
-              <a:t>最後經過</a:t>
-            </a:r>
-            <a:r>
-              <a:rPr lang="en-US" altLang="zh-TW" sz="3200" dirty="0">
-                <a:latin typeface="微軟正黑體" panose="020B0604030504040204" pitchFamily="34" charset="-120"/>
-                <a:ea typeface="微軟正黑體" panose="020B0604030504040204" pitchFamily="34" charset="-120"/>
-              </a:rPr>
-              <a:t>RLHF</a:t>
-            </a:r>
-            <a:r>
-              <a:rPr lang="zh-TW" altLang="en-US" sz="3200" dirty="0">
-                <a:latin typeface="微軟正黑體" panose="020B0604030504040204" pitchFamily="34" charset="-120"/>
-                <a:ea typeface="微軟正黑體" panose="020B0604030504040204" pitchFamily="34" charset="-120"/>
-              </a:rPr>
-              <a:t>，成為多功能，符合價值觀的產品如</a:t>
-            </a:r>
-            <a:r>
-              <a:rPr lang="en-US" altLang="zh-TW" sz="3200" dirty="0" err="1">
-                <a:latin typeface="微軟正黑體" panose="020B0604030504040204" pitchFamily="34" charset="-120"/>
-                <a:ea typeface="微軟正黑體" panose="020B0604030504040204" pitchFamily="34" charset="-120"/>
-              </a:rPr>
-              <a:t>InstructGPT</a:t>
-            </a:r>
-            <a:r>
-              <a:rPr lang="zh-TW" altLang="en-US" sz="3200" dirty="0">
-                <a:latin typeface="微軟正黑體" panose="020B0604030504040204" pitchFamily="34" charset="-120"/>
-                <a:ea typeface="微軟正黑體" panose="020B0604030504040204" pitchFamily="34" charset="-120"/>
-              </a:rPr>
-              <a:t>、</a:t>
-            </a:r>
-            <a:r>
-              <a:rPr lang="en-US" altLang="zh-TW" sz="3200" dirty="0">
-                <a:latin typeface="微軟正黑體" panose="020B0604030504040204" pitchFamily="34" charset="-120"/>
-                <a:ea typeface="微軟正黑體" panose="020B0604030504040204" pitchFamily="34" charset="-120"/>
-              </a:rPr>
-              <a:t>ChatGPT</a:t>
-            </a:r>
-            <a:r>
-              <a:rPr lang="zh-TW" altLang="en-US" sz="3200" dirty="0">
-                <a:latin typeface="微軟正黑體" panose="020B0604030504040204" pitchFamily="34" charset="-120"/>
-                <a:ea typeface="微軟正黑體" panose="020B0604030504040204" pitchFamily="34" charset="-120"/>
-              </a:rPr>
-              <a:t>，</a:t>
-            </a:r>
-            <a:r>
-              <a:rPr lang="en-US" altLang="zh-TW" sz="3200" dirty="0">
-                <a:latin typeface="微軟正黑體" panose="020B0604030504040204" pitchFamily="34" charset="-120"/>
-                <a:ea typeface="微軟正黑體" panose="020B0604030504040204" pitchFamily="34" charset="-120"/>
-              </a:rPr>
-              <a:t>llama2-chat</a:t>
-            </a:r>
-            <a:r>
-              <a:rPr lang="zh-TW" altLang="en-US" sz="3200" dirty="0">
-                <a:latin typeface="微軟正黑體" panose="020B0604030504040204" pitchFamily="34" charset="-120"/>
-                <a:ea typeface="微軟正黑體" panose="020B0604030504040204" pitchFamily="34" charset="-120"/>
-              </a:rPr>
-              <a:t>等</a:t>
-            </a:r>
-            <a:endParaRPr lang="en-US" altLang="zh-TW" sz="3200" dirty="0">
-              <a:latin typeface="微軟正黑體" panose="020B0604030504040204" pitchFamily="34" charset="-120"/>
-              <a:ea typeface="微軟正黑體" panose="020B0604030504040204" pitchFamily="34" charset="-120"/>
-            </a:endParaRPr>
-          </a:p>
-        </p:txBody>
-      </p:sp>
-    </p:spTree>
-    <p:extLst>
-      <p:ext uri="{BB962C8B-B14F-4D97-AF65-F5344CB8AC3E}">
-        <p14:creationId xmlns:p14="http://schemas.microsoft.com/office/powerpoint/2010/main" val="1269779521"/>
-      </p:ext>
-    </p:extLst>
-  </p:cSld>
-  <p:clrMapOvr>
-    <a:masterClrMapping/>
-  </p:clrMapOvr>
-  <p:transition>
-    <p:fade/>
-  </p:transition>
-</p:sld>
-</file>
-
-<file path=ppt/slides/slide29.xml><?xml version="1.0" encoding="utf-8"?>
-<p:sld xmlns:a="http://schemas.openxmlformats.org/drawingml/2006/main" xmlns:r="http://schemas.openxmlformats.org/officeDocument/2006/relationships" xmlns:p="http://schemas.openxmlformats.org/presentationml/2006/main">
-  <p:cSld>
-    <p:spTree>
-      <p:nvGrpSpPr>
-        <p:cNvPr id="1" name=""/>
-        <p:cNvGrpSpPr/>
-        <p:nvPr/>
-      </p:nvGrpSpPr>
-      <p:grpSpPr>
-        <a:xfrm>
-          <a:off x="0" y="0"/>
-          <a:ext cx="0" cy="0"/>
-          <a:chOff x="0" y="0"/>
-          <a:chExt cx="0" cy="0"/>
-        </a:xfrm>
-      </p:grpSpPr>
-      <p:sp>
-        <p:nvSpPr>
-          <p:cNvPr id="4" name="文字版面配置區 2"/>
-          <p:cNvSpPr txBox="1">
-            <a:spLocks/>
-          </p:cNvSpPr>
-          <p:nvPr/>
-        </p:nvSpPr>
-        <p:spPr>
-          <a:xfrm>
-            <a:off x="2590800" y="126742"/>
-            <a:ext cx="4552950" cy="990600"/>
-          </a:xfrm>
-          <a:prstGeom prst="rect">
-            <a:avLst/>
-          </a:prstGeom>
-        </p:spPr>
-        <p:txBody>
-          <a:bodyPr tIns="91440" bIns="91440" anchor="b" anchorCtr="0">
-            <a:noAutofit/>
-          </a:bodyPr>
-          <a:lstStyle/>
-          <a:p>
-            <a:r>
-              <a:rPr kumimoji="1" lang="zh-TW" altLang="en-US" sz="4800" b="1" dirty="0">
-                <a:solidFill>
-                  <a:srgbClr val="00B0F0"/>
-                </a:solidFill>
-                <a:effectLst>
-                  <a:outerShdw blurRad="38100" dist="38100" dir="2700000" algn="tl">
-                    <a:srgbClr val="000000">
-                      <a:alpha val="43137"/>
-                    </a:srgbClr>
-                  </a:outerShdw>
-                </a:effectLst>
-                <a:latin typeface="微軟正黑體" panose="020B0604030504040204" pitchFamily="34" charset="-120"/>
-                <a:ea typeface="微軟正黑體" panose="020B0604030504040204" pitchFamily="34" charset="-120"/>
-                <a:cs typeface="Heiti TC Light"/>
-              </a:rPr>
-              <a:t>從結果找指令</a:t>
-            </a:r>
-            <a:endParaRPr kumimoji="1" lang="en-US" altLang="zh-TW" sz="4800" b="1" dirty="0">
-              <a:solidFill>
-                <a:srgbClr val="00B0F0"/>
-              </a:solidFill>
-              <a:effectLst>
-                <a:outerShdw blurRad="38100" dist="38100" dir="2700000" algn="tl">
-                  <a:srgbClr val="000000">
-                    <a:alpha val="43137"/>
-                  </a:srgbClr>
-                </a:outerShdw>
-              </a:effectLst>
-              <a:latin typeface="微軟正黑體" panose="020B0604030504040204" pitchFamily="34" charset="-120"/>
-              <a:ea typeface="微軟正黑體" panose="020B0604030504040204" pitchFamily="34" charset="-120"/>
-              <a:cs typeface="Heiti TC Light"/>
-            </a:endParaRPr>
-          </a:p>
-        </p:txBody>
-      </p:sp>
-      <p:sp>
-        <p:nvSpPr>
-          <p:cNvPr id="3" name="日期版面配置區 2">
-            <a:extLst>
-              <a:ext uri="{FF2B5EF4-FFF2-40B4-BE49-F238E27FC236}">
-                <a16:creationId xmlns:a16="http://schemas.microsoft.com/office/drawing/2014/main" id="{1C536CB5-3C58-6CF1-767E-952B76F12DEE}"/>
-              </a:ext>
-            </a:extLst>
-          </p:cNvPr>
-          <p:cNvSpPr>
-            <a:spLocks noGrp="1"/>
-          </p:cNvSpPr>
-          <p:nvPr>
-            <p:ph type="dt" sz="half" idx="12"/>
-          </p:nvPr>
-        </p:nvSpPr>
-        <p:spPr/>
-        <p:txBody>
-          <a:bodyPr/>
-          <a:lstStyle/>
-          <a:p>
-            <a:fld id="{0B520B05-2240-4566-BE2A-9338980FE8EB}" type="datetime1">
-              <a:rPr kumimoji="0" lang="en-US" altLang="zh-TW" sz="1200" smtClean="0">
-                <a:solidFill>
-                  <a:schemeClr val="tx2"/>
-                </a:solidFill>
-                <a:latin typeface="Arial" panose="020B0604020202020204" pitchFamily="34" charset="0"/>
-                <a:cs typeface="Arial" panose="020B0604020202020204" pitchFamily="34" charset="0"/>
-              </a:rPr>
-              <a:t>3/21/2024</a:t>
-            </a:fld>
-            <a:endParaRPr kumimoji="0" lang="en-US" dirty="0">
-              <a:latin typeface="Arial" panose="020B0604020202020204" pitchFamily="34" charset="0"/>
-              <a:cs typeface="Arial" panose="020B0604020202020204" pitchFamily="34" charset="0"/>
-            </a:endParaRPr>
-          </a:p>
-        </p:txBody>
-      </p:sp>
-      <p:sp>
-        <p:nvSpPr>
-          <p:cNvPr id="7" name="投影片編號版面配置區 6">
-            <a:extLst>
-              <a:ext uri="{FF2B5EF4-FFF2-40B4-BE49-F238E27FC236}">
-                <a16:creationId xmlns:a16="http://schemas.microsoft.com/office/drawing/2014/main" id="{DA316F56-AF12-D872-611F-78AE7ACCBF93}"/>
-              </a:ext>
-            </a:extLst>
-          </p:cNvPr>
-          <p:cNvSpPr>
-            <a:spLocks noGrp="1"/>
-          </p:cNvSpPr>
-          <p:nvPr>
-            <p:ph type="sldNum" sz="quarter" idx="13"/>
-          </p:nvPr>
-        </p:nvSpPr>
-        <p:spPr/>
-        <p:txBody>
-          <a:bodyPr/>
-          <a:lstStyle/>
-          <a:p>
-            <a:pPr algn="r"/>
-            <a:fld id="{F99EC173-99AE-4773-AB25-02E469A13EAE}" type="slidenum">
-              <a:rPr kumimoji="0" lang="en-US" sz="1200" smtClean="0">
-                <a:solidFill>
-                  <a:schemeClr val="tx2"/>
-                </a:solidFill>
-              </a:rPr>
-              <a:pPr algn="r"/>
-              <a:t>29</a:t>
             </a:fld>
             <a:endParaRPr kumimoji="0" lang="en-US" dirty="0"/>
           </a:p>
@@ -18613,7 +18248,7 @@
 </p:sld>
 </file>
 
-<file path=ppt/slides/slide3.xml><?xml version="1.0" encoding="utf-8"?>
+<file path=ppt/slides/slide29.xml><?xml version="1.0" encoding="utf-8"?>
 <p:sld xmlns:a="http://schemas.openxmlformats.org/drawingml/2006/main" xmlns:r="http://schemas.openxmlformats.org/officeDocument/2006/relationships" xmlns:p="http://schemas.openxmlformats.org/presentationml/2006/main">
   <p:cSld>
     <p:spTree>
@@ -18640,8 +18275,8 @@
         </p:nvSpPr>
         <p:spPr>
           <a:xfrm>
-            <a:off x="1971330" y="40346"/>
-            <a:ext cx="6553200" cy="990600"/>
+            <a:off x="2590800" y="126742"/>
+            <a:ext cx="4552950" cy="990600"/>
           </a:xfrm>
           <a:prstGeom prst="rect">
             <a:avLst/>
@@ -18669,43 +18304,7 @@
                 <a:ea typeface="微軟正黑體" panose="020B0604030504040204" pitchFamily="34" charset="-120"/>
                 <a:cs typeface="Heiti TC Light"/>
               </a:rPr>
-              <a:t>經過之後</a:t>
-            </a:r>
-            <a:r>
-              <a:rPr kumimoji="1" lang="en-US" altLang="zh-TW" sz="4800" b="1" dirty="0">
-                <a:solidFill>
-                  <a:srgbClr val="00B0F0"/>
-                </a:solidFill>
-                <a:effectLst>
-                  <a:outerShdw blurRad="38100" dist="38100" dir="2700000" algn="tl">
-                    <a:srgbClr val="000000">
-                      <a:alpha val="43137"/>
-                    </a:srgbClr>
-                  </a:outerShdw>
-                </a:effectLst>
-                <a:latin typeface="微軟正黑體" panose="020B0604030504040204" pitchFamily="34" charset="-120"/>
-                <a:ea typeface="微軟正黑體" panose="020B0604030504040204" pitchFamily="34" charset="-120"/>
-                <a:cs typeface="Heiti TC Light"/>
-              </a:rPr>
-              <a:t>SFT</a:t>
-            </a:r>
-            <a:r>
-              <a:rPr kumimoji="1" lang="zh-TW" altLang="en-US" sz="4800" b="1" dirty="0">
-                <a:solidFill>
-                  <a:srgbClr val="00B0F0"/>
-                </a:solidFill>
-                <a:effectLst>
-                  <a:outerShdw blurRad="38100" dist="38100" dir="2700000" algn="tl">
-                    <a:srgbClr val="000000">
-                      <a:alpha val="43137"/>
-                    </a:srgbClr>
-                  </a:outerShdw>
-                </a:effectLst>
-                <a:latin typeface="微軟正黑體" panose="020B0604030504040204" pitchFamily="34" charset="-120"/>
-                <a:ea typeface="微軟正黑體" panose="020B0604030504040204" pitchFamily="34" charset="-120"/>
-                <a:cs typeface="Heiti TC Light"/>
-              </a:rPr>
-              <a:t>的模型</a:t>
+              <a:t>從結果找指令</a:t>
             </a:r>
             <a:endParaRPr kumimoji="1" lang="en-US" altLang="zh-TW" sz="4800" b="1" dirty="0">
               <a:solidFill>
@@ -18754,7 +18353,7 @@
                 <a:latin typeface="Arial" panose="020B0604020202020204" pitchFamily="34" charset="0"/>
                 <a:cs typeface="Arial" panose="020B0604020202020204" pitchFamily="34" charset="0"/>
               </a:rPr>
-              <a:t>3/21/2024</a:t>
+              <a:t>11/27/2024</a:t>
             </a:fld>
             <a:endParaRPr kumimoji="0" lang="en-US" dirty="0">
               <a:latin typeface="Arial" panose="020B0604020202020204" pitchFamily="34" charset="0"/>
@@ -18792,358 +18391,7 @@
                 </a:solidFill>
               </a:rPr>
               <a:pPr algn="r"/>
-              <a:t>3</a:t>
-            </a:fld>
-            <a:endParaRPr kumimoji="0" lang="en-US" dirty="0"/>
-          </a:p>
-        </p:txBody>
-      </p:sp>
-      <p:sp>
-        <p:nvSpPr>
-          <p:cNvPr id="2" name="文字方塊 1">
-            <a:extLst>
-              <a:ext uri="{FF2B5EF4-FFF2-40B4-BE49-F238E27FC236}">
-                <a16:creationId xmlns:a16="http://schemas.microsoft.com/office/drawing/2014/main" id="{E17C39F0-9527-522B-E55B-DAC3D2425E05}"/>
-              </a:ext>
-            </a:extLst>
-          </p:cNvPr>
-          <p:cNvSpPr txBox="1"/>
-          <p:nvPr/>
-        </p:nvSpPr>
-        <p:spPr>
-          <a:xfrm>
-            <a:off x="609600" y="1219200"/>
-            <a:ext cx="7924800" cy="4524315"/>
-          </a:xfrm>
-          <a:prstGeom prst="rect">
-            <a:avLst/>
-          </a:prstGeom>
-          <a:noFill/>
-        </p:spPr>
-        <p:txBody>
-          <a:bodyPr wrap="square" rtlCol="0">
-            <a:spAutoFit/>
-          </a:bodyPr>
-          <a:lstStyle/>
-          <a:p>
-            <a:pPr marL="457200" indent="-457200">
-              <a:buFont typeface="Arial" panose="020B0604020202020204" pitchFamily="34" charset="0"/>
-              <a:buChar char="•"/>
-            </a:pPr>
-            <a:r>
-              <a:rPr lang="zh-TW" altLang="en-US" sz="3200" b="0" i="0" dirty="0">
-                <a:effectLst/>
-                <a:latin typeface="微軟正黑體" panose="020B0604030504040204" pitchFamily="34" charset="-120"/>
-                <a:ea typeface="微軟正黑體" panose="020B0604030504040204" pitchFamily="34" charset="-120"/>
-              </a:rPr>
-              <a:t>看得懂人類的指令，做出回答</a:t>
-            </a:r>
-            <a:endParaRPr lang="en-US" altLang="zh-TW" sz="3200" b="0" i="0" dirty="0">
-              <a:effectLst/>
-              <a:latin typeface="微軟正黑體" panose="020B0604030504040204" pitchFamily="34" charset="-120"/>
-              <a:ea typeface="微軟正黑體" panose="020B0604030504040204" pitchFamily="34" charset="-120"/>
-            </a:endParaRPr>
-          </a:p>
-          <a:p>
-            <a:pPr marL="457200" indent="-457200">
-              <a:buFont typeface="Arial" panose="020B0604020202020204" pitchFamily="34" charset="0"/>
-              <a:buChar char="•"/>
-            </a:pPr>
-            <a:r>
-              <a:rPr lang="zh-TW" altLang="en-US" sz="3200" b="0" i="0" dirty="0">
-                <a:effectLst/>
-                <a:latin typeface="微軟正黑體" panose="020B0604030504040204" pitchFamily="34" charset="-120"/>
-                <a:ea typeface="微軟正黑體" panose="020B0604030504040204" pitchFamily="34" charset="-120"/>
-              </a:rPr>
-              <a:t>答案是否正確？有用？有害？有偏見？</a:t>
-            </a:r>
-            <a:endParaRPr lang="en-US" altLang="zh-TW" sz="3200" b="0" i="0" dirty="0">
-              <a:effectLst/>
-              <a:latin typeface="微軟正黑體" panose="020B0604030504040204" pitchFamily="34" charset="-120"/>
-              <a:ea typeface="微軟正黑體" panose="020B0604030504040204" pitchFamily="34" charset="-120"/>
-            </a:endParaRPr>
-          </a:p>
-          <a:p>
-            <a:pPr marL="457200" indent="-457200">
-              <a:buFont typeface="Arial" panose="020B0604020202020204" pitchFamily="34" charset="0"/>
-              <a:buChar char="•"/>
-            </a:pPr>
-            <a:r>
-              <a:rPr lang="zh-TW" altLang="en-US" sz="3200" b="0" i="0" dirty="0">
-                <a:effectLst/>
-                <a:latin typeface="微軟正黑體" panose="020B0604030504040204" pitchFamily="34" charset="-120"/>
-                <a:ea typeface="微軟正黑體" panose="020B0604030504040204" pitchFamily="34" charset="-120"/>
-              </a:rPr>
-              <a:t>答案不但要正確，還要符合人類期待</a:t>
-            </a:r>
-            <a:endParaRPr lang="en-US" altLang="zh-TW" sz="3200" b="0" i="0" dirty="0">
-              <a:effectLst/>
-              <a:latin typeface="微軟正黑體" panose="020B0604030504040204" pitchFamily="34" charset="-120"/>
-              <a:ea typeface="微軟正黑體" panose="020B0604030504040204" pitchFamily="34" charset="-120"/>
-            </a:endParaRPr>
-          </a:p>
-          <a:p>
-            <a:pPr marL="457200" indent="-457200">
-              <a:buFont typeface="Arial" panose="020B0604020202020204" pitchFamily="34" charset="0"/>
-              <a:buChar char="•"/>
-            </a:pPr>
-            <a:r>
-              <a:rPr lang="zh-TW" altLang="en-US" sz="3200" b="0" i="0" dirty="0">
-                <a:effectLst/>
-                <a:latin typeface="微軟正黑體" panose="020B0604030504040204" pitchFamily="34" charset="-120"/>
-                <a:ea typeface="微軟正黑體" panose="020B0604030504040204" pitchFamily="34" charset="-120"/>
-              </a:rPr>
-              <a:t>此時必須加入人類的判斷</a:t>
-            </a:r>
-            <a:endParaRPr lang="en-US" altLang="zh-TW" sz="3200" b="0" i="0" dirty="0">
-              <a:effectLst/>
-              <a:latin typeface="微軟正黑體" panose="020B0604030504040204" pitchFamily="34" charset="-120"/>
-              <a:ea typeface="微軟正黑體" panose="020B0604030504040204" pitchFamily="34" charset="-120"/>
-            </a:endParaRPr>
-          </a:p>
-          <a:p>
-            <a:pPr marL="457200" indent="-457200">
-              <a:buFont typeface="Arial" panose="020B0604020202020204" pitchFamily="34" charset="0"/>
-              <a:buChar char="•"/>
-            </a:pPr>
-            <a:r>
-              <a:rPr lang="zh-TW" altLang="en-US" sz="3200" b="0" i="0" dirty="0">
-                <a:effectLst/>
-                <a:latin typeface="微軟正黑體" panose="020B0604030504040204" pitchFamily="34" charset="-120"/>
-                <a:ea typeface="微軟正黑體" panose="020B0604030504040204" pitchFamily="34" charset="-120"/>
-              </a:rPr>
-              <a:t>獎勵模型的使用</a:t>
-            </a:r>
-            <a:endParaRPr lang="en-US" altLang="zh-TW" sz="3200" b="0" i="0" dirty="0">
-              <a:effectLst/>
-              <a:latin typeface="微軟正黑體" panose="020B0604030504040204" pitchFamily="34" charset="-120"/>
-              <a:ea typeface="微軟正黑體" panose="020B0604030504040204" pitchFamily="34" charset="-120"/>
-            </a:endParaRPr>
-          </a:p>
-          <a:p>
-            <a:pPr marL="457200" indent="-457200">
-              <a:buFont typeface="Arial" panose="020B0604020202020204" pitchFamily="34" charset="0"/>
-              <a:buChar char="•"/>
-            </a:pPr>
-            <a:r>
-              <a:rPr lang="zh-TW" altLang="en-US" sz="3200" b="0" i="0" dirty="0">
-                <a:effectLst/>
-                <a:latin typeface="微軟正黑體" panose="020B0604030504040204" pitchFamily="34" charset="-120"/>
-                <a:ea typeface="微軟正黑體" panose="020B0604030504040204" pitchFamily="34" charset="-120"/>
-              </a:rPr>
-              <a:t>將</a:t>
-            </a:r>
-            <a:r>
-              <a:rPr lang="en-US" altLang="zh-TW" sz="3200" dirty="0" err="1">
-                <a:latin typeface="微軟正黑體" panose="020B0604030504040204" pitchFamily="34" charset="-120"/>
-                <a:ea typeface="微軟正黑體" panose="020B0604030504040204" pitchFamily="34" charset="-120"/>
-              </a:rPr>
-              <a:t>llm</a:t>
-            </a:r>
-            <a:r>
-              <a:rPr lang="zh-TW" altLang="en-US" sz="3200" dirty="0">
-                <a:latin typeface="微軟正黑體" panose="020B0604030504040204" pitchFamily="34" charset="-120"/>
-                <a:ea typeface="微軟正黑體" panose="020B0604030504040204" pitchFamily="34" charset="-120"/>
-              </a:rPr>
-              <a:t>調整成符合人類價值觀的期待，稱對齊</a:t>
-            </a:r>
-            <a:r>
-              <a:rPr lang="en-US" altLang="zh-TW" sz="3200" dirty="0">
-                <a:latin typeface="微軟正黑體" panose="020B0604030504040204" pitchFamily="34" charset="-120"/>
-                <a:ea typeface="微軟正黑體" panose="020B0604030504040204" pitchFamily="34" charset="-120"/>
-              </a:rPr>
-              <a:t>(Alignment)</a:t>
-            </a:r>
-            <a:endParaRPr lang="en-US" altLang="zh-TW" sz="3200" b="0" i="0" dirty="0">
-              <a:effectLst/>
-              <a:latin typeface="微軟正黑體" panose="020B0604030504040204" pitchFamily="34" charset="-120"/>
-              <a:ea typeface="微軟正黑體" panose="020B0604030504040204" pitchFamily="34" charset="-120"/>
-            </a:endParaRPr>
-          </a:p>
-          <a:p>
-            <a:pPr marL="457200" indent="-457200">
-              <a:buFont typeface="Arial" panose="020B0604020202020204" pitchFamily="34" charset="0"/>
-              <a:buChar char="•"/>
-            </a:pPr>
-            <a:endParaRPr lang="en-US" altLang="zh-TW" sz="3200" b="0" i="0" dirty="0">
-              <a:effectLst/>
-              <a:latin typeface="微軟正黑體" panose="020B0604030504040204" pitchFamily="34" charset="-120"/>
-              <a:ea typeface="微軟正黑體" panose="020B0604030504040204" pitchFamily="34" charset="-120"/>
-            </a:endParaRPr>
-          </a:p>
-          <a:p>
-            <a:pPr marL="457200" indent="-457200">
-              <a:buFont typeface="Arial" panose="020B0604020202020204" pitchFamily="34" charset="0"/>
-              <a:buChar char="•"/>
-            </a:pPr>
-            <a:endParaRPr lang="en-US" altLang="zh-TW" sz="3200" b="0" i="0" dirty="0">
-              <a:effectLst/>
-              <a:latin typeface="微軟正黑體" panose="020B0604030504040204" pitchFamily="34" charset="-120"/>
-              <a:ea typeface="微軟正黑體" panose="020B0604030504040204" pitchFamily="34" charset="-120"/>
-            </a:endParaRPr>
-          </a:p>
-        </p:txBody>
-      </p:sp>
-    </p:spTree>
-    <p:extLst>
-      <p:ext uri="{BB962C8B-B14F-4D97-AF65-F5344CB8AC3E}">
-        <p14:creationId xmlns:p14="http://schemas.microsoft.com/office/powerpoint/2010/main" val="805317791"/>
-      </p:ext>
-    </p:extLst>
-  </p:cSld>
-  <p:clrMapOvr>
-    <a:masterClrMapping/>
-  </p:clrMapOvr>
-  <p:transition>
-    <p:fade/>
-  </p:transition>
-</p:sld>
-</file>
-
-<file path=ppt/slides/slide30.xml><?xml version="1.0" encoding="utf-8"?>
-<p:sld xmlns:a="http://schemas.openxmlformats.org/drawingml/2006/main" xmlns:r="http://schemas.openxmlformats.org/officeDocument/2006/relationships" xmlns:p="http://schemas.openxmlformats.org/presentationml/2006/main">
-  <p:cSld>
-    <p:spTree>
-      <p:nvGrpSpPr>
-        <p:cNvPr id="1" name=""/>
-        <p:cNvGrpSpPr/>
-        <p:nvPr/>
-      </p:nvGrpSpPr>
-      <p:grpSpPr>
-        <a:xfrm>
-          <a:off x="0" y="0"/>
-          <a:ext cx="0" cy="0"/>
-          <a:chOff x="0" y="0"/>
-          <a:chExt cx="0" cy="0"/>
-        </a:xfrm>
-      </p:grpSpPr>
-      <p:sp>
-        <p:nvSpPr>
-          <p:cNvPr id="4" name="文字版面配置區 2"/>
-          <p:cNvSpPr txBox="1">
-            <a:spLocks/>
-          </p:cNvSpPr>
-          <p:nvPr/>
-        </p:nvSpPr>
-        <p:spPr>
-          <a:xfrm>
-            <a:off x="2590800" y="126742"/>
-            <a:ext cx="4552950" cy="990600"/>
-          </a:xfrm>
-          <a:prstGeom prst="rect">
-            <a:avLst/>
-          </a:prstGeom>
-        </p:spPr>
-        <p:txBody>
-          <a:bodyPr tIns="91440" bIns="91440" anchor="b" anchorCtr="0">
-            <a:noAutofit/>
-          </a:bodyPr>
-          <a:lstStyle/>
-          <a:p>
-            <a:r>
-              <a:rPr kumimoji="1" lang="zh-TW" altLang="en-US" sz="4800" b="1" dirty="0">
-                <a:solidFill>
-                  <a:srgbClr val="00B0F0"/>
-                </a:solidFill>
-                <a:effectLst>
-                  <a:outerShdw blurRad="38100" dist="38100" dir="2700000" algn="tl">
-                    <a:srgbClr val="000000">
-                      <a:alpha val="43137"/>
-                    </a:srgbClr>
-                  </a:outerShdw>
-                </a:effectLst>
-                <a:latin typeface="微軟正黑體" panose="020B0604030504040204" pitchFamily="34" charset="-120"/>
-                <a:ea typeface="微軟正黑體" panose="020B0604030504040204" pitchFamily="34" charset="-120"/>
-                <a:cs typeface="Heiti TC Light"/>
-              </a:rPr>
-              <a:t>從結果找指令</a:t>
-            </a:r>
-            <a:endParaRPr kumimoji="1" lang="en-US" altLang="zh-TW" sz="4800" b="1" dirty="0">
-              <a:solidFill>
-                <a:srgbClr val="00B0F0"/>
-              </a:solidFill>
-              <a:effectLst>
-                <a:outerShdw blurRad="38100" dist="38100" dir="2700000" algn="tl">
-                  <a:srgbClr val="000000">
-                    <a:alpha val="43137"/>
-                  </a:srgbClr>
-                </a:outerShdw>
-              </a:effectLst>
-              <a:latin typeface="微軟正黑體" panose="020B0604030504040204" pitchFamily="34" charset="-120"/>
-              <a:ea typeface="微軟正黑體" panose="020B0604030504040204" pitchFamily="34" charset="-120"/>
-              <a:cs typeface="Heiti TC Light"/>
-            </a:endParaRPr>
-          </a:p>
-        </p:txBody>
-      </p:sp>
-      <p:sp>
-        <p:nvSpPr>
-          <p:cNvPr id="3" name="日期版面配置區 2">
-            <a:extLst>
-              <a:ext uri="{FF2B5EF4-FFF2-40B4-BE49-F238E27FC236}">
-                <a16:creationId xmlns:a16="http://schemas.microsoft.com/office/drawing/2014/main" id="{1C536CB5-3C58-6CF1-767E-952B76F12DEE}"/>
-              </a:ext>
-            </a:extLst>
-          </p:cNvPr>
-          <p:cNvSpPr>
-            <a:spLocks noGrp="1"/>
-          </p:cNvSpPr>
-          <p:nvPr>
-            <p:ph type="dt" sz="half" idx="12"/>
-          </p:nvPr>
-        </p:nvSpPr>
-        <p:spPr/>
-        <p:txBody>
-          <a:bodyPr/>
-          <a:lstStyle/>
-          <a:p>
-            <a:fld id="{0B520B05-2240-4566-BE2A-9338980FE8EB}" type="datetime1">
-              <a:rPr kumimoji="0" lang="en-US" altLang="zh-TW" sz="1200" smtClean="0">
-                <a:solidFill>
-                  <a:schemeClr val="tx2"/>
-                </a:solidFill>
-                <a:latin typeface="Arial" panose="020B0604020202020204" pitchFamily="34" charset="0"/>
-                <a:cs typeface="Arial" panose="020B0604020202020204" pitchFamily="34" charset="0"/>
-              </a:rPr>
-              <a:t>3/21/2024</a:t>
-            </a:fld>
-            <a:endParaRPr kumimoji="0" lang="en-US" dirty="0">
-              <a:latin typeface="Arial" panose="020B0604020202020204" pitchFamily="34" charset="0"/>
-              <a:cs typeface="Arial" panose="020B0604020202020204" pitchFamily="34" charset="0"/>
-            </a:endParaRPr>
-          </a:p>
-        </p:txBody>
-      </p:sp>
-      <p:sp>
-        <p:nvSpPr>
-          <p:cNvPr id="7" name="投影片編號版面配置區 6">
-            <a:extLst>
-              <a:ext uri="{FF2B5EF4-FFF2-40B4-BE49-F238E27FC236}">
-                <a16:creationId xmlns:a16="http://schemas.microsoft.com/office/drawing/2014/main" id="{DA316F56-AF12-D872-611F-78AE7ACCBF93}"/>
-              </a:ext>
-            </a:extLst>
-          </p:cNvPr>
-          <p:cNvSpPr>
-            <a:spLocks noGrp="1"/>
-          </p:cNvSpPr>
-          <p:nvPr>
-            <p:ph type="sldNum" sz="quarter" idx="13"/>
-          </p:nvPr>
-        </p:nvSpPr>
-        <p:spPr/>
-        <p:txBody>
-          <a:bodyPr/>
-          <a:lstStyle/>
-          <a:p>
-            <a:pPr algn="r"/>
-            <a:fld id="{F99EC173-99AE-4773-AB25-02E469A13EAE}" type="slidenum">
-              <a:rPr kumimoji="0" lang="en-US" sz="1200" smtClean="0">
-                <a:solidFill>
-                  <a:schemeClr val="tx2"/>
-                </a:solidFill>
-              </a:rPr>
-              <a:pPr algn="r"/>
-              <a:t>30</a:t>
+              <a:t>29</a:t>
             </a:fld>
             <a:endParaRPr kumimoji="0" lang="en-US" dirty="0"/>
           </a:p>
@@ -19284,7 +18532,7 @@
 </p:sld>
 </file>
 
-<file path=ppt/slides/slide31.xml><?xml version="1.0" encoding="utf-8"?>
+<file path=ppt/slides/slide3.xml><?xml version="1.0" encoding="utf-8"?>
 <p:sld xmlns:a="http://schemas.openxmlformats.org/drawingml/2006/main" xmlns:r="http://schemas.openxmlformats.org/officeDocument/2006/relationships" xmlns:p="http://schemas.openxmlformats.org/presentationml/2006/main">
   <p:cSld>
     <p:spTree>
@@ -19311,8 +18559,8 @@
         </p:nvSpPr>
         <p:spPr>
           <a:xfrm>
-            <a:off x="2590800" y="126742"/>
-            <a:ext cx="4552950" cy="990600"/>
+            <a:off x="1971330" y="40346"/>
+            <a:ext cx="6553200" cy="990600"/>
           </a:xfrm>
           <a:prstGeom prst="rect">
             <a:avLst/>
@@ -19340,7 +18588,43 @@
                 <a:ea typeface="微軟正黑體" panose="020B0604030504040204" pitchFamily="34" charset="-120"/>
                 <a:cs typeface="Heiti TC Light"/>
               </a:rPr>
-              <a:t>從結果找指令</a:t>
+              <a:t>經過之後</a:t>
+            </a:r>
+            <a:r>
+              <a:rPr kumimoji="1" lang="en-US" altLang="zh-TW" sz="4800" b="1" dirty="0">
+                <a:solidFill>
+                  <a:srgbClr val="00B0F0"/>
+                </a:solidFill>
+                <a:effectLst>
+                  <a:outerShdw blurRad="38100" dist="38100" dir="2700000" algn="tl">
+                    <a:srgbClr val="000000">
+                      <a:alpha val="43137"/>
+                    </a:srgbClr>
+                  </a:outerShdw>
+                </a:effectLst>
+                <a:latin typeface="微軟正黑體" panose="020B0604030504040204" pitchFamily="34" charset="-120"/>
+                <a:ea typeface="微軟正黑體" panose="020B0604030504040204" pitchFamily="34" charset="-120"/>
+                <a:cs typeface="Heiti TC Light"/>
+              </a:rPr>
+              <a:t>SFT</a:t>
+            </a:r>
+            <a:r>
+              <a:rPr kumimoji="1" lang="zh-TW" altLang="en-US" sz="4800" b="1" dirty="0">
+                <a:solidFill>
+                  <a:srgbClr val="00B0F0"/>
+                </a:solidFill>
+                <a:effectLst>
+                  <a:outerShdw blurRad="38100" dist="38100" dir="2700000" algn="tl">
+                    <a:srgbClr val="000000">
+                      <a:alpha val="43137"/>
+                    </a:srgbClr>
+                  </a:outerShdw>
+                </a:effectLst>
+                <a:latin typeface="微軟正黑體" panose="020B0604030504040204" pitchFamily="34" charset="-120"/>
+                <a:ea typeface="微軟正黑體" panose="020B0604030504040204" pitchFamily="34" charset="-120"/>
+                <a:cs typeface="Heiti TC Light"/>
+              </a:rPr>
+              <a:t>的模型</a:t>
             </a:r>
             <a:endParaRPr kumimoji="1" lang="en-US" altLang="zh-TW" sz="4800" b="1" dirty="0">
               <a:solidFill>
@@ -19389,7 +18673,7 @@
                 <a:latin typeface="Arial" panose="020B0604020202020204" pitchFamily="34" charset="0"/>
                 <a:cs typeface="Arial" panose="020B0604020202020204" pitchFamily="34" charset="0"/>
               </a:rPr>
-              <a:t>3/21/2024</a:t>
+              <a:t>11/27/2024</a:t>
             </a:fld>
             <a:endParaRPr kumimoji="0" lang="en-US" dirty="0">
               <a:latin typeface="Arial" panose="020B0604020202020204" pitchFamily="34" charset="0"/>
@@ -19427,7 +18711,358 @@
                 </a:solidFill>
               </a:rPr>
               <a:pPr algn="r"/>
-              <a:t>31</a:t>
+              <a:t>3</a:t>
+            </a:fld>
+            <a:endParaRPr kumimoji="0" lang="en-US" dirty="0"/>
+          </a:p>
+        </p:txBody>
+      </p:sp>
+      <p:sp>
+        <p:nvSpPr>
+          <p:cNvPr id="2" name="文字方塊 1">
+            <a:extLst>
+              <a:ext uri="{FF2B5EF4-FFF2-40B4-BE49-F238E27FC236}">
+                <a16:creationId xmlns:a16="http://schemas.microsoft.com/office/drawing/2014/main" id="{E17C39F0-9527-522B-E55B-DAC3D2425E05}"/>
+              </a:ext>
+            </a:extLst>
+          </p:cNvPr>
+          <p:cNvSpPr txBox="1"/>
+          <p:nvPr/>
+        </p:nvSpPr>
+        <p:spPr>
+          <a:xfrm>
+            <a:off x="609600" y="1219200"/>
+            <a:ext cx="7924800" cy="4524315"/>
+          </a:xfrm>
+          <a:prstGeom prst="rect">
+            <a:avLst/>
+          </a:prstGeom>
+          <a:noFill/>
+        </p:spPr>
+        <p:txBody>
+          <a:bodyPr wrap="square" rtlCol="0">
+            <a:spAutoFit/>
+          </a:bodyPr>
+          <a:lstStyle/>
+          <a:p>
+            <a:pPr marL="457200" indent="-457200">
+              <a:buFont typeface="Arial" panose="020B0604020202020204" pitchFamily="34" charset="0"/>
+              <a:buChar char="•"/>
+            </a:pPr>
+            <a:r>
+              <a:rPr lang="zh-TW" altLang="en-US" sz="3200" b="0" i="0" dirty="0">
+                <a:effectLst/>
+                <a:latin typeface="微軟正黑體" panose="020B0604030504040204" pitchFamily="34" charset="-120"/>
+                <a:ea typeface="微軟正黑體" panose="020B0604030504040204" pitchFamily="34" charset="-120"/>
+              </a:rPr>
+              <a:t>看得懂人類的指令，做出回答</a:t>
+            </a:r>
+            <a:endParaRPr lang="en-US" altLang="zh-TW" sz="3200" b="0" i="0" dirty="0">
+              <a:effectLst/>
+              <a:latin typeface="微軟正黑體" panose="020B0604030504040204" pitchFamily="34" charset="-120"/>
+              <a:ea typeface="微軟正黑體" panose="020B0604030504040204" pitchFamily="34" charset="-120"/>
+            </a:endParaRPr>
+          </a:p>
+          <a:p>
+            <a:pPr marL="457200" indent="-457200">
+              <a:buFont typeface="Arial" panose="020B0604020202020204" pitchFamily="34" charset="0"/>
+              <a:buChar char="•"/>
+            </a:pPr>
+            <a:r>
+              <a:rPr lang="zh-TW" altLang="en-US" sz="3200" b="0" i="0" dirty="0">
+                <a:effectLst/>
+                <a:latin typeface="微軟正黑體" panose="020B0604030504040204" pitchFamily="34" charset="-120"/>
+                <a:ea typeface="微軟正黑體" panose="020B0604030504040204" pitchFamily="34" charset="-120"/>
+              </a:rPr>
+              <a:t>答案是否正確？有用？有害？有偏見？</a:t>
+            </a:r>
+            <a:endParaRPr lang="en-US" altLang="zh-TW" sz="3200" b="0" i="0" dirty="0">
+              <a:effectLst/>
+              <a:latin typeface="微軟正黑體" panose="020B0604030504040204" pitchFamily="34" charset="-120"/>
+              <a:ea typeface="微軟正黑體" panose="020B0604030504040204" pitchFamily="34" charset="-120"/>
+            </a:endParaRPr>
+          </a:p>
+          <a:p>
+            <a:pPr marL="457200" indent="-457200">
+              <a:buFont typeface="Arial" panose="020B0604020202020204" pitchFamily="34" charset="0"/>
+              <a:buChar char="•"/>
+            </a:pPr>
+            <a:r>
+              <a:rPr lang="zh-TW" altLang="en-US" sz="3200" b="0" i="0" dirty="0">
+                <a:effectLst/>
+                <a:latin typeface="微軟正黑體" panose="020B0604030504040204" pitchFamily="34" charset="-120"/>
+                <a:ea typeface="微軟正黑體" panose="020B0604030504040204" pitchFamily="34" charset="-120"/>
+              </a:rPr>
+              <a:t>答案不但要正確，還要符合人類期待</a:t>
+            </a:r>
+            <a:endParaRPr lang="en-US" altLang="zh-TW" sz="3200" b="0" i="0" dirty="0">
+              <a:effectLst/>
+              <a:latin typeface="微軟正黑體" panose="020B0604030504040204" pitchFamily="34" charset="-120"/>
+              <a:ea typeface="微軟正黑體" panose="020B0604030504040204" pitchFamily="34" charset="-120"/>
+            </a:endParaRPr>
+          </a:p>
+          <a:p>
+            <a:pPr marL="457200" indent="-457200">
+              <a:buFont typeface="Arial" panose="020B0604020202020204" pitchFamily="34" charset="0"/>
+              <a:buChar char="•"/>
+            </a:pPr>
+            <a:r>
+              <a:rPr lang="zh-TW" altLang="en-US" sz="3200" b="0" i="0" dirty="0">
+                <a:effectLst/>
+                <a:latin typeface="微軟正黑體" panose="020B0604030504040204" pitchFamily="34" charset="-120"/>
+                <a:ea typeface="微軟正黑體" panose="020B0604030504040204" pitchFamily="34" charset="-120"/>
+              </a:rPr>
+              <a:t>此時必須加入人類的判斷</a:t>
+            </a:r>
+            <a:endParaRPr lang="en-US" altLang="zh-TW" sz="3200" b="0" i="0" dirty="0">
+              <a:effectLst/>
+              <a:latin typeface="微軟正黑體" panose="020B0604030504040204" pitchFamily="34" charset="-120"/>
+              <a:ea typeface="微軟正黑體" panose="020B0604030504040204" pitchFamily="34" charset="-120"/>
+            </a:endParaRPr>
+          </a:p>
+          <a:p>
+            <a:pPr marL="457200" indent="-457200">
+              <a:buFont typeface="Arial" panose="020B0604020202020204" pitchFamily="34" charset="0"/>
+              <a:buChar char="•"/>
+            </a:pPr>
+            <a:r>
+              <a:rPr lang="zh-TW" altLang="en-US" sz="3200" b="0" i="0" dirty="0">
+                <a:effectLst/>
+                <a:latin typeface="微軟正黑體" panose="020B0604030504040204" pitchFamily="34" charset="-120"/>
+                <a:ea typeface="微軟正黑體" panose="020B0604030504040204" pitchFamily="34" charset="-120"/>
+              </a:rPr>
+              <a:t>獎勵模型的使用</a:t>
+            </a:r>
+            <a:endParaRPr lang="en-US" altLang="zh-TW" sz="3200" b="0" i="0" dirty="0">
+              <a:effectLst/>
+              <a:latin typeface="微軟正黑體" panose="020B0604030504040204" pitchFamily="34" charset="-120"/>
+              <a:ea typeface="微軟正黑體" panose="020B0604030504040204" pitchFamily="34" charset="-120"/>
+            </a:endParaRPr>
+          </a:p>
+          <a:p>
+            <a:pPr marL="457200" indent="-457200">
+              <a:buFont typeface="Arial" panose="020B0604020202020204" pitchFamily="34" charset="0"/>
+              <a:buChar char="•"/>
+            </a:pPr>
+            <a:r>
+              <a:rPr lang="zh-TW" altLang="en-US" sz="3200" b="0" i="0" dirty="0">
+                <a:effectLst/>
+                <a:latin typeface="微軟正黑體" panose="020B0604030504040204" pitchFamily="34" charset="-120"/>
+                <a:ea typeface="微軟正黑體" panose="020B0604030504040204" pitchFamily="34" charset="-120"/>
+              </a:rPr>
+              <a:t>將</a:t>
+            </a:r>
+            <a:r>
+              <a:rPr lang="en-US" altLang="zh-TW" sz="3200" dirty="0" err="1">
+                <a:latin typeface="微軟正黑體" panose="020B0604030504040204" pitchFamily="34" charset="-120"/>
+                <a:ea typeface="微軟正黑體" panose="020B0604030504040204" pitchFamily="34" charset="-120"/>
+              </a:rPr>
+              <a:t>llm</a:t>
+            </a:r>
+            <a:r>
+              <a:rPr lang="zh-TW" altLang="en-US" sz="3200" dirty="0">
+                <a:latin typeface="微軟正黑體" panose="020B0604030504040204" pitchFamily="34" charset="-120"/>
+                <a:ea typeface="微軟正黑體" panose="020B0604030504040204" pitchFamily="34" charset="-120"/>
+              </a:rPr>
+              <a:t>調整成符合人類價值觀的期待，稱對齊</a:t>
+            </a:r>
+            <a:r>
+              <a:rPr lang="en-US" altLang="zh-TW" sz="3200" dirty="0">
+                <a:latin typeface="微軟正黑體" panose="020B0604030504040204" pitchFamily="34" charset="-120"/>
+                <a:ea typeface="微軟正黑體" panose="020B0604030504040204" pitchFamily="34" charset="-120"/>
+              </a:rPr>
+              <a:t>(Alignment)</a:t>
+            </a:r>
+            <a:endParaRPr lang="en-US" altLang="zh-TW" sz="3200" b="0" i="0" dirty="0">
+              <a:effectLst/>
+              <a:latin typeface="微軟正黑體" panose="020B0604030504040204" pitchFamily="34" charset="-120"/>
+              <a:ea typeface="微軟正黑體" panose="020B0604030504040204" pitchFamily="34" charset="-120"/>
+            </a:endParaRPr>
+          </a:p>
+          <a:p>
+            <a:pPr marL="457200" indent="-457200">
+              <a:buFont typeface="Arial" panose="020B0604020202020204" pitchFamily="34" charset="0"/>
+              <a:buChar char="•"/>
+            </a:pPr>
+            <a:endParaRPr lang="en-US" altLang="zh-TW" sz="3200" b="0" i="0" dirty="0">
+              <a:effectLst/>
+              <a:latin typeface="微軟正黑體" panose="020B0604030504040204" pitchFamily="34" charset="-120"/>
+              <a:ea typeface="微軟正黑體" panose="020B0604030504040204" pitchFamily="34" charset="-120"/>
+            </a:endParaRPr>
+          </a:p>
+          <a:p>
+            <a:pPr marL="457200" indent="-457200">
+              <a:buFont typeface="Arial" panose="020B0604020202020204" pitchFamily="34" charset="0"/>
+              <a:buChar char="•"/>
+            </a:pPr>
+            <a:endParaRPr lang="en-US" altLang="zh-TW" sz="3200" b="0" i="0" dirty="0">
+              <a:effectLst/>
+              <a:latin typeface="微軟正黑體" panose="020B0604030504040204" pitchFamily="34" charset="-120"/>
+              <a:ea typeface="微軟正黑體" panose="020B0604030504040204" pitchFamily="34" charset="-120"/>
+            </a:endParaRPr>
+          </a:p>
+        </p:txBody>
+      </p:sp>
+    </p:spTree>
+    <p:extLst>
+      <p:ext uri="{BB962C8B-B14F-4D97-AF65-F5344CB8AC3E}">
+        <p14:creationId xmlns:p14="http://schemas.microsoft.com/office/powerpoint/2010/main" val="805317791"/>
+      </p:ext>
+    </p:extLst>
+  </p:cSld>
+  <p:clrMapOvr>
+    <a:masterClrMapping/>
+  </p:clrMapOvr>
+  <p:transition>
+    <p:fade/>
+  </p:transition>
+</p:sld>
+</file>
+
+<file path=ppt/slides/slide30.xml><?xml version="1.0" encoding="utf-8"?>
+<p:sld xmlns:a="http://schemas.openxmlformats.org/drawingml/2006/main" xmlns:r="http://schemas.openxmlformats.org/officeDocument/2006/relationships" xmlns:p="http://schemas.openxmlformats.org/presentationml/2006/main">
+  <p:cSld>
+    <p:spTree>
+      <p:nvGrpSpPr>
+        <p:cNvPr id="1" name=""/>
+        <p:cNvGrpSpPr/>
+        <p:nvPr/>
+      </p:nvGrpSpPr>
+      <p:grpSpPr>
+        <a:xfrm>
+          <a:off x="0" y="0"/>
+          <a:ext cx="0" cy="0"/>
+          <a:chOff x="0" y="0"/>
+          <a:chExt cx="0" cy="0"/>
+        </a:xfrm>
+      </p:grpSpPr>
+      <p:sp>
+        <p:nvSpPr>
+          <p:cNvPr id="4" name="文字版面配置區 2"/>
+          <p:cNvSpPr txBox="1">
+            <a:spLocks/>
+          </p:cNvSpPr>
+          <p:nvPr/>
+        </p:nvSpPr>
+        <p:spPr>
+          <a:xfrm>
+            <a:off x="2590800" y="126742"/>
+            <a:ext cx="4552950" cy="990600"/>
+          </a:xfrm>
+          <a:prstGeom prst="rect">
+            <a:avLst/>
+          </a:prstGeom>
+        </p:spPr>
+        <p:txBody>
+          <a:bodyPr tIns="91440" bIns="91440" anchor="b" anchorCtr="0">
+            <a:noAutofit/>
+          </a:bodyPr>
+          <a:lstStyle/>
+          <a:p>
+            <a:r>
+              <a:rPr kumimoji="1" lang="zh-TW" altLang="en-US" sz="4800" b="1" dirty="0">
+                <a:solidFill>
+                  <a:srgbClr val="00B0F0"/>
+                </a:solidFill>
+                <a:effectLst>
+                  <a:outerShdw blurRad="38100" dist="38100" dir="2700000" algn="tl">
+                    <a:srgbClr val="000000">
+                      <a:alpha val="43137"/>
+                    </a:srgbClr>
+                  </a:outerShdw>
+                </a:effectLst>
+                <a:latin typeface="微軟正黑體" panose="020B0604030504040204" pitchFamily="34" charset="-120"/>
+                <a:ea typeface="微軟正黑體" panose="020B0604030504040204" pitchFamily="34" charset="-120"/>
+                <a:cs typeface="Heiti TC Light"/>
+              </a:rPr>
+              <a:t>從結果找指令</a:t>
+            </a:r>
+            <a:endParaRPr kumimoji="1" lang="en-US" altLang="zh-TW" sz="4800" b="1" dirty="0">
+              <a:solidFill>
+                <a:srgbClr val="00B0F0"/>
+              </a:solidFill>
+              <a:effectLst>
+                <a:outerShdw blurRad="38100" dist="38100" dir="2700000" algn="tl">
+                  <a:srgbClr val="000000">
+                    <a:alpha val="43137"/>
+                  </a:srgbClr>
+                </a:outerShdw>
+              </a:effectLst>
+              <a:latin typeface="微軟正黑體" panose="020B0604030504040204" pitchFamily="34" charset="-120"/>
+              <a:ea typeface="微軟正黑體" panose="020B0604030504040204" pitchFamily="34" charset="-120"/>
+              <a:cs typeface="Heiti TC Light"/>
+            </a:endParaRPr>
+          </a:p>
+        </p:txBody>
+      </p:sp>
+      <p:sp>
+        <p:nvSpPr>
+          <p:cNvPr id="3" name="日期版面配置區 2">
+            <a:extLst>
+              <a:ext uri="{FF2B5EF4-FFF2-40B4-BE49-F238E27FC236}">
+                <a16:creationId xmlns:a16="http://schemas.microsoft.com/office/drawing/2014/main" id="{1C536CB5-3C58-6CF1-767E-952B76F12DEE}"/>
+              </a:ext>
+            </a:extLst>
+          </p:cNvPr>
+          <p:cNvSpPr>
+            <a:spLocks noGrp="1"/>
+          </p:cNvSpPr>
+          <p:nvPr>
+            <p:ph type="dt" sz="half" idx="12"/>
+          </p:nvPr>
+        </p:nvSpPr>
+        <p:spPr/>
+        <p:txBody>
+          <a:bodyPr/>
+          <a:lstStyle/>
+          <a:p>
+            <a:fld id="{0B520B05-2240-4566-BE2A-9338980FE8EB}" type="datetime1">
+              <a:rPr kumimoji="0" lang="en-US" altLang="zh-TW" sz="1200" smtClean="0">
+                <a:solidFill>
+                  <a:schemeClr val="tx2"/>
+                </a:solidFill>
+                <a:latin typeface="Arial" panose="020B0604020202020204" pitchFamily="34" charset="0"/>
+                <a:cs typeface="Arial" panose="020B0604020202020204" pitchFamily="34" charset="0"/>
+              </a:rPr>
+              <a:t>11/27/2024</a:t>
+            </a:fld>
+            <a:endParaRPr kumimoji="0" lang="en-US" dirty="0">
+              <a:latin typeface="Arial" panose="020B0604020202020204" pitchFamily="34" charset="0"/>
+              <a:cs typeface="Arial" panose="020B0604020202020204" pitchFamily="34" charset="0"/>
+            </a:endParaRPr>
+          </a:p>
+        </p:txBody>
+      </p:sp>
+      <p:sp>
+        <p:nvSpPr>
+          <p:cNvPr id="7" name="投影片編號版面配置區 6">
+            <a:extLst>
+              <a:ext uri="{FF2B5EF4-FFF2-40B4-BE49-F238E27FC236}">
+                <a16:creationId xmlns:a16="http://schemas.microsoft.com/office/drawing/2014/main" id="{DA316F56-AF12-D872-611F-78AE7ACCBF93}"/>
+              </a:ext>
+            </a:extLst>
+          </p:cNvPr>
+          <p:cNvSpPr>
+            <a:spLocks noGrp="1"/>
+          </p:cNvSpPr>
+          <p:nvPr>
+            <p:ph type="sldNum" sz="quarter" idx="13"/>
+          </p:nvPr>
+        </p:nvSpPr>
+        <p:spPr/>
+        <p:txBody>
+          <a:bodyPr/>
+          <a:lstStyle/>
+          <a:p>
+            <a:pPr algn="r"/>
+            <a:fld id="{F99EC173-99AE-4773-AB25-02E469A13EAE}" type="slidenum">
+              <a:rPr kumimoji="0" lang="en-US" sz="1200" smtClean="0">
+                <a:solidFill>
+                  <a:schemeClr val="tx2"/>
+                </a:solidFill>
+              </a:rPr>
+              <a:pPr algn="r"/>
+              <a:t>30</a:t>
             </a:fld>
             <a:endParaRPr kumimoji="0" lang="en-US" dirty="0"/>
           </a:p>
@@ -19485,6 +19120,547 @@
 </p:sld>
 </file>
 
+<file path=ppt/slides/slide31.xml><?xml version="1.0" encoding="utf-8"?>
+<p:sld xmlns:a="http://schemas.openxmlformats.org/drawingml/2006/main" xmlns:r="http://schemas.openxmlformats.org/officeDocument/2006/relationships" xmlns:p="http://schemas.openxmlformats.org/presentationml/2006/main">
+  <p:cSld>
+    <p:spTree>
+      <p:nvGrpSpPr>
+        <p:cNvPr id="1" name=""/>
+        <p:cNvGrpSpPr/>
+        <p:nvPr/>
+      </p:nvGrpSpPr>
+      <p:grpSpPr>
+        <a:xfrm>
+          <a:off x="0" y="0"/>
+          <a:ext cx="0" cy="0"/>
+          <a:chOff x="0" y="0"/>
+          <a:chExt cx="0" cy="0"/>
+        </a:xfrm>
+      </p:grpSpPr>
+      <p:sp>
+        <p:nvSpPr>
+          <p:cNvPr id="4" name="文字版面配置區 2"/>
+          <p:cNvSpPr txBox="1">
+            <a:spLocks/>
+          </p:cNvSpPr>
+          <p:nvPr/>
+        </p:nvSpPr>
+        <p:spPr>
+          <a:xfrm>
+            <a:off x="2076450" y="123885"/>
+            <a:ext cx="6553200" cy="990600"/>
+          </a:xfrm>
+          <a:prstGeom prst="rect">
+            <a:avLst/>
+          </a:prstGeom>
+        </p:spPr>
+        <p:txBody>
+          <a:bodyPr tIns="91440" bIns="91440" anchor="b" anchorCtr="0">
+            <a:noAutofit/>
+          </a:bodyPr>
+          <a:lstStyle/>
+          <a:p>
+            <a:r>
+              <a:rPr kumimoji="1" lang="zh-TW" altLang="en-US" sz="4800" b="1" dirty="0">
+                <a:solidFill>
+                  <a:srgbClr val="00B0F0"/>
+                </a:solidFill>
+                <a:effectLst>
+                  <a:outerShdw blurRad="38100" dist="38100" dir="2700000" algn="tl">
+                    <a:srgbClr val="000000">
+                      <a:alpha val="43137"/>
+                    </a:srgbClr>
+                  </a:outerShdw>
+                </a:effectLst>
+                <a:latin typeface="微軟正黑體" panose="020B0604030504040204" pitchFamily="34" charset="-120"/>
+                <a:ea typeface="微軟正黑體" panose="020B0604030504040204" pitchFamily="34" charset="-120"/>
+                <a:cs typeface="Heiti TC Light"/>
+              </a:rPr>
+              <a:t>例子：</a:t>
+            </a:r>
+            <a:r>
+              <a:rPr kumimoji="1" lang="en-US" altLang="zh-TW" sz="4800" b="1" dirty="0" err="1">
+                <a:solidFill>
+                  <a:srgbClr val="00B0F0"/>
+                </a:solidFill>
+                <a:effectLst>
+                  <a:outerShdw blurRad="38100" dist="38100" dir="2700000" algn="tl">
+                    <a:srgbClr val="000000">
+                      <a:alpha val="43137"/>
+                    </a:srgbClr>
+                  </a:outerShdw>
+                </a:effectLst>
+                <a:latin typeface="微軟正黑體" panose="020B0604030504040204" pitchFamily="34" charset="-120"/>
+                <a:ea typeface="微軟正黑體" panose="020B0604030504040204" pitchFamily="34" charset="-120"/>
+                <a:cs typeface="Heiti TC Light"/>
+              </a:rPr>
+              <a:t>InstructGPT</a:t>
+            </a:r>
+            <a:endParaRPr kumimoji="1" lang="en-US" altLang="zh-TW" sz="4800" b="1" dirty="0">
+              <a:solidFill>
+                <a:srgbClr val="00B0F0"/>
+              </a:solidFill>
+              <a:effectLst>
+                <a:outerShdw blurRad="38100" dist="38100" dir="2700000" algn="tl">
+                  <a:srgbClr val="000000">
+                    <a:alpha val="43137"/>
+                  </a:srgbClr>
+                </a:outerShdw>
+              </a:effectLst>
+              <a:latin typeface="微軟正黑體" panose="020B0604030504040204" pitchFamily="34" charset="-120"/>
+              <a:ea typeface="微軟正黑體" panose="020B0604030504040204" pitchFamily="34" charset="-120"/>
+              <a:cs typeface="Heiti TC Light"/>
+            </a:endParaRPr>
+          </a:p>
+        </p:txBody>
+      </p:sp>
+      <p:sp>
+        <p:nvSpPr>
+          <p:cNvPr id="3" name="日期版面配置區 2">
+            <a:extLst>
+              <a:ext uri="{FF2B5EF4-FFF2-40B4-BE49-F238E27FC236}">
+                <a16:creationId xmlns:a16="http://schemas.microsoft.com/office/drawing/2014/main" id="{1C536CB5-3C58-6CF1-767E-952B76F12DEE}"/>
+              </a:ext>
+            </a:extLst>
+          </p:cNvPr>
+          <p:cNvSpPr>
+            <a:spLocks noGrp="1"/>
+          </p:cNvSpPr>
+          <p:nvPr>
+            <p:ph type="dt" sz="half" idx="12"/>
+          </p:nvPr>
+        </p:nvSpPr>
+        <p:spPr/>
+        <p:txBody>
+          <a:bodyPr/>
+          <a:lstStyle/>
+          <a:p>
+            <a:fld id="{0B520B05-2240-4566-BE2A-9338980FE8EB}" type="datetime1">
+              <a:rPr kumimoji="0" lang="en-US" altLang="zh-TW" sz="1200" smtClean="0">
+                <a:solidFill>
+                  <a:schemeClr val="tx2"/>
+                </a:solidFill>
+                <a:latin typeface="Arial" panose="020B0604020202020204" pitchFamily="34" charset="0"/>
+                <a:cs typeface="Arial" panose="020B0604020202020204" pitchFamily="34" charset="0"/>
+              </a:rPr>
+              <a:t>11/27/2024</a:t>
+            </a:fld>
+            <a:endParaRPr kumimoji="0" lang="en-US" dirty="0">
+              <a:latin typeface="Arial" panose="020B0604020202020204" pitchFamily="34" charset="0"/>
+              <a:cs typeface="Arial" panose="020B0604020202020204" pitchFamily="34" charset="0"/>
+            </a:endParaRPr>
+          </a:p>
+        </p:txBody>
+      </p:sp>
+      <p:sp>
+        <p:nvSpPr>
+          <p:cNvPr id="7" name="投影片編號版面配置區 6">
+            <a:extLst>
+              <a:ext uri="{FF2B5EF4-FFF2-40B4-BE49-F238E27FC236}">
+                <a16:creationId xmlns:a16="http://schemas.microsoft.com/office/drawing/2014/main" id="{DA316F56-AF12-D872-611F-78AE7ACCBF93}"/>
+              </a:ext>
+            </a:extLst>
+          </p:cNvPr>
+          <p:cNvSpPr>
+            <a:spLocks noGrp="1"/>
+          </p:cNvSpPr>
+          <p:nvPr>
+            <p:ph type="sldNum" sz="quarter" idx="13"/>
+          </p:nvPr>
+        </p:nvSpPr>
+        <p:spPr/>
+        <p:txBody>
+          <a:bodyPr/>
+          <a:lstStyle/>
+          <a:p>
+            <a:pPr algn="r"/>
+            <a:fld id="{F99EC173-99AE-4773-AB25-02E469A13EAE}" type="slidenum">
+              <a:rPr kumimoji="0" lang="en-US" sz="1200" smtClean="0">
+                <a:solidFill>
+                  <a:schemeClr val="tx2"/>
+                </a:solidFill>
+              </a:rPr>
+              <a:pPr algn="r"/>
+              <a:t>31</a:t>
+            </a:fld>
+            <a:endParaRPr kumimoji="0" lang="en-US" dirty="0"/>
+          </a:p>
+        </p:txBody>
+      </p:sp>
+      <p:sp>
+        <p:nvSpPr>
+          <p:cNvPr id="2" name="文字方塊 1">
+            <a:extLst>
+              <a:ext uri="{FF2B5EF4-FFF2-40B4-BE49-F238E27FC236}">
+                <a16:creationId xmlns:a16="http://schemas.microsoft.com/office/drawing/2014/main" id="{E17C39F0-9527-522B-E55B-DAC3D2425E05}"/>
+              </a:ext>
+            </a:extLst>
+          </p:cNvPr>
+          <p:cNvSpPr txBox="1"/>
+          <p:nvPr/>
+        </p:nvSpPr>
+        <p:spPr>
+          <a:xfrm>
+            <a:off x="609600" y="1219200"/>
+            <a:ext cx="7924800" cy="5509200"/>
+          </a:xfrm>
+          <a:prstGeom prst="rect">
+            <a:avLst/>
+          </a:prstGeom>
+          <a:noFill/>
+        </p:spPr>
+        <p:txBody>
+          <a:bodyPr wrap="square" rtlCol="0">
+            <a:spAutoFit/>
+          </a:bodyPr>
+          <a:lstStyle/>
+          <a:p>
+            <a:pPr marL="514350" indent="-514350">
+              <a:buFont typeface="+mj-lt"/>
+              <a:buAutoNum type="arabicPeriod"/>
+            </a:pPr>
+            <a:r>
+              <a:rPr lang="zh-TW" altLang="en-US" sz="3200" b="0" i="0" dirty="0">
+                <a:effectLst/>
+                <a:latin typeface="微軟正黑體" panose="020B0604030504040204" pitchFamily="34" charset="-120"/>
+                <a:ea typeface="微軟正黑體" panose="020B0604030504040204" pitchFamily="34" charset="-120"/>
+              </a:rPr>
+              <a:t>以</a:t>
+            </a:r>
+            <a:r>
+              <a:rPr lang="en-US" altLang="zh-TW" sz="3200" b="0" i="0" dirty="0">
+                <a:effectLst/>
+                <a:latin typeface="微軟正黑體" panose="020B0604030504040204" pitchFamily="34" charset="-120"/>
+                <a:ea typeface="微軟正黑體" panose="020B0604030504040204" pitchFamily="34" charset="-120"/>
+              </a:rPr>
+              <a:t>GPT3</a:t>
+            </a:r>
+            <a:r>
+              <a:rPr lang="zh-TW" altLang="en-US" sz="3200" b="0" i="0" dirty="0">
+                <a:effectLst/>
+                <a:latin typeface="微軟正黑體" panose="020B0604030504040204" pitchFamily="34" charset="-120"/>
+                <a:ea typeface="微軟正黑體" panose="020B0604030504040204" pitchFamily="34" charset="-120"/>
+              </a:rPr>
+              <a:t>為基礎</a:t>
+            </a:r>
+            <a:endParaRPr lang="en-US" altLang="zh-TW" sz="3200" b="0" i="0" dirty="0">
+              <a:effectLst/>
+              <a:latin typeface="微軟正黑體" panose="020B0604030504040204" pitchFamily="34" charset="-120"/>
+              <a:ea typeface="微軟正黑體" panose="020B0604030504040204" pitchFamily="34" charset="-120"/>
+            </a:endParaRPr>
+          </a:p>
+          <a:p>
+            <a:pPr marL="514350" indent="-514350">
+              <a:buFont typeface="+mj-lt"/>
+              <a:buAutoNum type="arabicPeriod"/>
+            </a:pPr>
+            <a:r>
+              <a:rPr lang="zh-TW" altLang="en-US" sz="3200" b="0" i="0" dirty="0">
+                <a:effectLst/>
+                <a:latin typeface="微軟正黑體" panose="020B0604030504040204" pitchFamily="34" charset="-120"/>
+                <a:ea typeface="微軟正黑體" panose="020B0604030504040204" pitchFamily="34" charset="-120"/>
+              </a:rPr>
+              <a:t>經過</a:t>
+            </a:r>
+            <a:r>
+              <a:rPr lang="en-US" altLang="zh-TW" sz="3200" b="0" i="0" dirty="0">
+                <a:effectLst/>
+                <a:latin typeface="微軟正黑體" panose="020B0604030504040204" pitchFamily="34" charset="-120"/>
+                <a:ea typeface="微軟正黑體" panose="020B0604030504040204" pitchFamily="34" charset="-120"/>
+              </a:rPr>
+              <a:t>SFT</a:t>
+            </a:r>
+            <a:r>
+              <a:rPr lang="zh-TW" altLang="en-US" sz="3200" b="0" i="0" dirty="0">
+                <a:effectLst/>
+                <a:latin typeface="微軟正黑體" panose="020B0604030504040204" pitchFamily="34" charset="-120"/>
+                <a:ea typeface="微軟正黑體" panose="020B0604030504040204" pitchFamily="34" charset="-120"/>
+              </a:rPr>
+              <a:t>微調</a:t>
+            </a:r>
+            <a:endParaRPr lang="en-US" altLang="zh-TW" sz="3200" b="0" i="0" dirty="0">
+              <a:effectLst/>
+              <a:latin typeface="微軟正黑體" panose="020B0604030504040204" pitchFamily="34" charset="-120"/>
+              <a:ea typeface="微軟正黑體" panose="020B0604030504040204" pitchFamily="34" charset="-120"/>
+            </a:endParaRPr>
+          </a:p>
+          <a:p>
+            <a:pPr marL="514350" indent="-514350">
+              <a:buFont typeface="+mj-lt"/>
+              <a:buAutoNum type="arabicPeriod"/>
+            </a:pPr>
+            <a:r>
+              <a:rPr lang="zh-TW" altLang="en-US" sz="3200" b="0" i="0" dirty="0">
+                <a:effectLst/>
+                <a:latin typeface="微軟正黑體" panose="020B0604030504040204" pitchFamily="34" charset="-120"/>
+                <a:ea typeface="微軟正黑體" panose="020B0604030504040204" pitchFamily="34" charset="-120"/>
+              </a:rPr>
+              <a:t>訓練</a:t>
+            </a:r>
+            <a:r>
+              <a:rPr lang="en-US" altLang="zh-TW" sz="3200" b="0" i="0" dirty="0">
+                <a:effectLst/>
+                <a:latin typeface="微軟正黑體" panose="020B0604030504040204" pitchFamily="34" charset="-120"/>
+                <a:ea typeface="微軟正黑體" panose="020B0604030504040204" pitchFamily="34" charset="-120"/>
+              </a:rPr>
+              <a:t>RM</a:t>
+            </a:r>
+            <a:r>
+              <a:rPr lang="zh-TW" altLang="en-US" sz="3200" b="0" i="0" dirty="0">
+                <a:effectLst/>
+                <a:latin typeface="微軟正黑體" panose="020B0604030504040204" pitchFamily="34" charset="-120"/>
+                <a:ea typeface="微軟正黑體" panose="020B0604030504040204" pitchFamily="34" charset="-120"/>
+              </a:rPr>
+              <a:t>模型</a:t>
+            </a:r>
+            <a:endParaRPr lang="en-US" altLang="zh-TW" sz="3200" b="0" i="0" dirty="0">
+              <a:effectLst/>
+              <a:latin typeface="微軟正黑體" panose="020B0604030504040204" pitchFamily="34" charset="-120"/>
+              <a:ea typeface="微軟正黑體" panose="020B0604030504040204" pitchFamily="34" charset="-120"/>
+            </a:endParaRPr>
+          </a:p>
+          <a:p>
+            <a:pPr marL="514350" indent="-514350">
+              <a:buFont typeface="+mj-lt"/>
+              <a:buAutoNum type="arabicPeriod"/>
+            </a:pPr>
+            <a:r>
+              <a:rPr lang="zh-TW" altLang="en-US" sz="3200" b="0" i="0" dirty="0">
+                <a:effectLst/>
+                <a:latin typeface="微軟正黑體" panose="020B0604030504040204" pitchFamily="34" charset="-120"/>
+                <a:ea typeface="微軟正黑體" panose="020B0604030504040204" pitchFamily="34" charset="-120"/>
+              </a:rPr>
+              <a:t>利用</a:t>
+            </a:r>
+            <a:r>
+              <a:rPr lang="en-US" altLang="zh-TW" sz="3200" b="0" i="0" dirty="0">
+                <a:effectLst/>
+                <a:latin typeface="微軟正黑體" panose="020B0604030504040204" pitchFamily="34" charset="-120"/>
+                <a:ea typeface="微軟正黑體" panose="020B0604030504040204" pitchFamily="34" charset="-120"/>
+              </a:rPr>
+              <a:t>RM</a:t>
+            </a:r>
+            <a:r>
+              <a:rPr lang="zh-TW" altLang="en-US" sz="3200" b="0" i="0" dirty="0">
+                <a:effectLst/>
+                <a:latin typeface="微軟正黑體" panose="020B0604030504040204" pitchFamily="34" charset="-120"/>
+                <a:ea typeface="微軟正黑體" panose="020B0604030504040204" pitchFamily="34" charset="-120"/>
+              </a:rPr>
+              <a:t>，透過</a:t>
+            </a:r>
+            <a:r>
+              <a:rPr lang="en-US" altLang="zh-TW" sz="3200" b="0" i="0" dirty="0">
+                <a:effectLst/>
+                <a:latin typeface="微軟正黑體" panose="020B0604030504040204" pitchFamily="34" charset="-120"/>
+                <a:ea typeface="微軟正黑體" panose="020B0604030504040204" pitchFamily="34" charset="-120"/>
+              </a:rPr>
+              <a:t>PPO</a:t>
+            </a:r>
+            <a:r>
+              <a:rPr lang="zh-TW" altLang="en-US" sz="3200" b="0" i="0" dirty="0">
+                <a:effectLst/>
+                <a:latin typeface="微軟正黑體" panose="020B0604030504040204" pitchFamily="34" charset="-120"/>
+                <a:ea typeface="微軟正黑體" panose="020B0604030504040204" pitchFamily="34" charset="-120"/>
+              </a:rPr>
+              <a:t>強化學習更新</a:t>
+            </a:r>
+            <a:r>
+              <a:rPr lang="en-US" altLang="zh-TW" sz="3200" b="0" i="0" dirty="0">
+                <a:effectLst/>
+                <a:latin typeface="微軟正黑體" panose="020B0604030504040204" pitchFamily="34" charset="-120"/>
+                <a:ea typeface="微軟正黑體" panose="020B0604030504040204" pitchFamily="34" charset="-120"/>
+              </a:rPr>
+              <a:t>GPT3</a:t>
+            </a:r>
+          </a:p>
+          <a:p>
+            <a:pPr marL="514350" indent="-514350">
+              <a:buFont typeface="+mj-lt"/>
+              <a:buAutoNum type="arabicPeriod"/>
+            </a:pPr>
+            <a:r>
+              <a:rPr lang="zh-TW" altLang="en-US" sz="3200" b="0" i="0" dirty="0">
+                <a:effectLst/>
+                <a:latin typeface="微軟正黑體" panose="020B0604030504040204" pitchFamily="34" charset="-120"/>
+                <a:ea typeface="微軟正黑體" panose="020B0604030504040204" pitchFamily="34" charset="-120"/>
+              </a:rPr>
+              <a:t>以上</a:t>
+            </a:r>
+            <a:r>
+              <a:rPr lang="en-US" altLang="zh-TW" sz="3200" b="0" i="0" dirty="0">
+                <a:effectLst/>
+                <a:latin typeface="微軟正黑體" panose="020B0604030504040204" pitchFamily="34" charset="-120"/>
+                <a:ea typeface="微軟正黑體" panose="020B0604030504040204" pitchFamily="34" charset="-120"/>
+              </a:rPr>
+              <a:t>1-4</a:t>
+            </a:r>
+            <a:r>
+              <a:rPr lang="zh-TW" altLang="en-US" sz="3200" b="0" i="0" dirty="0">
+                <a:effectLst/>
+                <a:latin typeface="微軟正黑體" panose="020B0604030504040204" pitchFamily="34" charset="-120"/>
+                <a:ea typeface="微軟正黑體" panose="020B0604030504040204" pitchFamily="34" charset="-120"/>
+              </a:rPr>
+              <a:t>的過程稱</a:t>
+            </a:r>
+            <a:r>
+              <a:rPr lang="en-US" altLang="zh-TW" sz="3200" b="0" i="0" dirty="0">
+                <a:effectLst/>
+                <a:latin typeface="微軟正黑體" panose="020B0604030504040204" pitchFamily="34" charset="-120"/>
+                <a:ea typeface="微軟正黑體" panose="020B0604030504040204" pitchFamily="34" charset="-120"/>
+              </a:rPr>
+              <a:t>RLHF(Reinforcement Learning from Human Feedback)</a:t>
+            </a:r>
+          </a:p>
+          <a:p>
+            <a:pPr marL="514350" indent="-514350">
+              <a:buFont typeface="+mj-lt"/>
+              <a:buAutoNum type="arabicPeriod"/>
+            </a:pPr>
+            <a:r>
+              <a:rPr lang="zh-TW" altLang="en-US" sz="3200" b="0" i="0" dirty="0">
+                <a:effectLst/>
+                <a:latin typeface="微軟正黑體" panose="020B0604030504040204" pitchFamily="34" charset="-120"/>
+                <a:ea typeface="微軟正黑體" panose="020B0604030504040204" pitchFamily="34" charset="-120"/>
+              </a:rPr>
+              <a:t>稱</a:t>
+            </a:r>
+            <a:r>
+              <a:rPr lang="en-US" altLang="zh-TW" sz="3200" b="0" i="0" dirty="0" err="1">
+                <a:effectLst/>
+                <a:latin typeface="微軟正黑體" panose="020B0604030504040204" pitchFamily="34" charset="-120"/>
+                <a:ea typeface="微軟正黑體" panose="020B0604030504040204" pitchFamily="34" charset="-120"/>
+              </a:rPr>
+              <a:t>InstructGPT</a:t>
+            </a:r>
+            <a:r>
+              <a:rPr lang="zh-TW" altLang="en-US" sz="3200" b="0" i="0" dirty="0">
+                <a:effectLst/>
+                <a:latin typeface="微軟正黑體" panose="020B0604030504040204" pitchFamily="34" charset="-120"/>
+                <a:ea typeface="微軟正黑體" panose="020B0604030504040204" pitchFamily="34" charset="-120"/>
+              </a:rPr>
+              <a:t>，是</a:t>
+            </a:r>
+            <a:r>
+              <a:rPr lang="en-US" altLang="zh-TW" sz="3200" b="0" i="0" dirty="0">
+                <a:effectLst/>
+                <a:latin typeface="微軟正黑體" panose="020B0604030504040204" pitchFamily="34" charset="-120"/>
+                <a:ea typeface="微軟正黑體" panose="020B0604030504040204" pitchFamily="34" charset="-120"/>
+              </a:rPr>
+              <a:t>ChatGPT</a:t>
+            </a:r>
+            <a:r>
+              <a:rPr lang="zh-TW" altLang="en-US" sz="3200" b="0" i="0" dirty="0">
+                <a:effectLst/>
+                <a:latin typeface="微軟正黑體" panose="020B0604030504040204" pitchFamily="34" charset="-120"/>
+                <a:ea typeface="微軟正黑體" panose="020B0604030504040204" pitchFamily="34" charset="-120"/>
+              </a:rPr>
+              <a:t>的前身</a:t>
+            </a:r>
+            <a:endParaRPr lang="en-US" altLang="zh-TW" sz="3200" b="0" i="0" dirty="0">
+              <a:effectLst/>
+              <a:latin typeface="微軟正黑體" panose="020B0604030504040204" pitchFamily="34" charset="-120"/>
+              <a:ea typeface="微軟正黑體" panose="020B0604030504040204" pitchFamily="34" charset="-120"/>
+            </a:endParaRPr>
+          </a:p>
+          <a:p>
+            <a:pPr marL="514350" indent="-514350">
+              <a:buFont typeface="+mj-lt"/>
+              <a:buAutoNum type="arabicPeriod"/>
+            </a:pPr>
+            <a:r>
+              <a:rPr lang="en-US" altLang="zh-TW" sz="3200" dirty="0" err="1">
+                <a:latin typeface="微軟正黑體" panose="020B0604030504040204" pitchFamily="34" charset="-120"/>
+                <a:ea typeface="微軟正黑體" panose="020B0604030504040204" pitchFamily="34" charset="-120"/>
+              </a:rPr>
+              <a:t>Anthropi</a:t>
+            </a:r>
+            <a:r>
+              <a:rPr lang="en-US" altLang="zh-TW" sz="3200" dirty="0">
+                <a:latin typeface="微軟正黑體" panose="020B0604030504040204" pitchFamily="34" charset="-120"/>
+                <a:ea typeface="微軟正黑體" panose="020B0604030504040204" pitchFamily="34" charset="-120"/>
+              </a:rPr>
+              <a:t> Claude</a:t>
+            </a:r>
+            <a:r>
+              <a:rPr lang="zh-TW" altLang="en-US" sz="3200" dirty="0">
+                <a:latin typeface="微軟正黑體" panose="020B0604030504040204" pitchFamily="34" charset="-120"/>
+                <a:ea typeface="微軟正黑體" panose="020B0604030504040204" pitchFamily="34" charset="-120"/>
+              </a:rPr>
+              <a:t>也是使用</a:t>
+            </a:r>
+            <a:r>
+              <a:rPr lang="en-US" altLang="zh-TW" sz="3200" dirty="0">
+                <a:latin typeface="微軟正黑體" panose="020B0604030504040204" pitchFamily="34" charset="-120"/>
+                <a:ea typeface="微軟正黑體" panose="020B0604030504040204" pitchFamily="34" charset="-120"/>
+              </a:rPr>
+              <a:t>RLHF</a:t>
+            </a:r>
+            <a:endParaRPr lang="en-US" altLang="zh-TW" sz="3200" b="0" i="0" dirty="0">
+              <a:effectLst/>
+              <a:latin typeface="微軟正黑體" panose="020B0604030504040204" pitchFamily="34" charset="-120"/>
+              <a:ea typeface="微軟正黑體" panose="020B0604030504040204" pitchFamily="34" charset="-120"/>
+            </a:endParaRPr>
+          </a:p>
+          <a:p>
+            <a:pPr marL="457200" indent="-457200">
+              <a:buFont typeface="Arial" panose="020B0604020202020204" pitchFamily="34" charset="0"/>
+              <a:buChar char="•"/>
+            </a:pPr>
+            <a:endParaRPr lang="en-US" altLang="zh-TW" sz="3200" b="0" i="0" dirty="0">
+              <a:effectLst/>
+              <a:latin typeface="微軟正黑體" panose="020B0604030504040204" pitchFamily="34" charset="-120"/>
+              <a:ea typeface="微軟正黑體" panose="020B0604030504040204" pitchFamily="34" charset="-120"/>
+              <a:hlinkClick r:id="rId3"/>
+            </a:endParaRPr>
+          </a:p>
+          <a:p>
+            <a:pPr marL="457200" indent="-457200">
+              <a:buFont typeface="Arial" panose="020B0604020202020204" pitchFamily="34" charset="0"/>
+              <a:buChar char="•"/>
+            </a:pPr>
+            <a:r>
+              <a:rPr lang="en-US" altLang="zh-TW" sz="3200" b="0" i="0" dirty="0">
+                <a:effectLst/>
+                <a:latin typeface="微軟正黑體" panose="020B0604030504040204" pitchFamily="34" charset="-120"/>
+                <a:ea typeface="微軟正黑體" panose="020B0604030504040204" pitchFamily="34" charset="-120"/>
+                <a:hlinkClick r:id="rId3"/>
+              </a:rPr>
+              <a:t>https://arxiv.org/pdf/2203.02155.pdf</a:t>
+            </a:r>
+            <a:endParaRPr lang="en-US" altLang="zh-TW" sz="3200" dirty="0">
+              <a:latin typeface="微軟正黑體" panose="020B0604030504040204" pitchFamily="34" charset="-120"/>
+              <a:ea typeface="微軟正黑體" panose="020B0604030504040204" pitchFamily="34" charset="-120"/>
+            </a:endParaRPr>
+          </a:p>
+          <a:p>
+            <a:pPr marL="457200" indent="-457200">
+              <a:buFont typeface="Arial" panose="020B0604020202020204" pitchFamily="34" charset="0"/>
+              <a:buChar char="•"/>
+            </a:pPr>
+            <a:endParaRPr lang="en-US" altLang="zh-TW" sz="3200" b="0" i="0" dirty="0">
+              <a:effectLst/>
+              <a:latin typeface="微軟正黑體" panose="020B0604030504040204" pitchFamily="34" charset="-120"/>
+              <a:ea typeface="微軟正黑體" panose="020B0604030504040204" pitchFamily="34" charset="-120"/>
+            </a:endParaRPr>
+          </a:p>
+        </p:txBody>
+      </p:sp>
+    </p:spTree>
+    <p:extLst>
+      <p:ext uri="{BB962C8B-B14F-4D97-AF65-F5344CB8AC3E}">
+        <p14:creationId xmlns:p14="http://schemas.microsoft.com/office/powerpoint/2010/main" val="48983677"/>
+      </p:ext>
+    </p:extLst>
+  </p:cSld>
+  <p:clrMapOvr>
+    <a:masterClrMapping/>
+  </p:clrMapOvr>
+  <p:transition>
+    <p:fade/>
+  </p:transition>
+</p:sld>
+</file>
+
 <file path=ppt/slides/slide32.xml><?xml version="1.0" encoding="utf-8"?>
 <p:sld xmlns:a="http://schemas.openxmlformats.org/drawingml/2006/main" xmlns:r="http://schemas.openxmlformats.org/officeDocument/2006/relationships" xmlns:p="http://schemas.openxmlformats.org/presentationml/2006/main">
   <p:cSld>
@@ -19512,7 +19688,7 @@
         </p:nvSpPr>
         <p:spPr>
           <a:xfrm>
-            <a:off x="2076450" y="123885"/>
+            <a:off x="2438400" y="76154"/>
             <a:ext cx="6553200" cy="990600"/>
           </a:xfrm>
           <a:prstGeom prst="rect">
@@ -19526,7 +19702,7 @@
           <a:lstStyle/>
           <a:p>
             <a:r>
-              <a:rPr kumimoji="1" lang="zh-TW" altLang="en-US" sz="4800" b="1" dirty="0">
+              <a:rPr kumimoji="1" lang="en-US" altLang="zh-TW" sz="4800" b="1" dirty="0">
                 <a:solidFill>
                   <a:srgbClr val="00B0F0"/>
                 </a:solidFill>
@@ -19541,10 +19717,10 @@
                 <a:ea typeface="微軟正黑體" panose="020B0604030504040204" pitchFamily="34" charset="-120"/>
                 <a:cs typeface="Heiti TC Light"/>
               </a:rPr>
-              <a:t>例子：</a:t>
-            </a:r>
-            <a:r>
-              <a:rPr kumimoji="1" lang="en-US" altLang="zh-TW" sz="4800" b="1" dirty="0" err="1">
+              <a:t>Alignment</a:t>
+            </a:r>
+            <a:r>
+              <a:rPr kumimoji="1" lang="zh-TW" altLang="en-US" sz="4800" b="1" dirty="0">
                 <a:solidFill>
                   <a:srgbClr val="00B0F0"/>
                 </a:solidFill>
@@ -19559,7 +19735,7 @@
                 <a:ea typeface="微軟正黑體" panose="020B0604030504040204" pitchFamily="34" charset="-120"/>
                 <a:cs typeface="Heiti TC Light"/>
               </a:rPr>
-              <a:t>InstructGPT</a:t>
+              <a:t>的作法</a:t>
             </a:r>
             <a:endParaRPr kumimoji="1" lang="en-US" altLang="zh-TW" sz="4800" b="1" dirty="0">
               <a:solidFill>
@@ -19608,7 +19784,7 @@
                 <a:latin typeface="Arial" panose="020B0604020202020204" pitchFamily="34" charset="0"/>
                 <a:cs typeface="Arial" panose="020B0604020202020204" pitchFamily="34" charset="0"/>
               </a:rPr>
-              <a:t>3/21/2024</a:t>
+              <a:t>11/27/2024</a:t>
             </a:fld>
             <a:endParaRPr kumimoji="0" lang="en-US" dirty="0">
               <a:latin typeface="Arial" panose="020B0604020202020204" pitchFamily="34" charset="0"/>
@@ -19647,547 +19823,6 @@
               </a:rPr>
               <a:pPr algn="r"/>
               <a:t>32</a:t>
-            </a:fld>
-            <a:endParaRPr kumimoji="0" lang="en-US" dirty="0"/>
-          </a:p>
-        </p:txBody>
-      </p:sp>
-      <p:sp>
-        <p:nvSpPr>
-          <p:cNvPr id="2" name="文字方塊 1">
-            <a:extLst>
-              <a:ext uri="{FF2B5EF4-FFF2-40B4-BE49-F238E27FC236}">
-                <a16:creationId xmlns:a16="http://schemas.microsoft.com/office/drawing/2014/main" id="{E17C39F0-9527-522B-E55B-DAC3D2425E05}"/>
-              </a:ext>
-            </a:extLst>
-          </p:cNvPr>
-          <p:cNvSpPr txBox="1"/>
-          <p:nvPr/>
-        </p:nvSpPr>
-        <p:spPr>
-          <a:xfrm>
-            <a:off x="609600" y="1219200"/>
-            <a:ext cx="7924800" cy="5509200"/>
-          </a:xfrm>
-          <a:prstGeom prst="rect">
-            <a:avLst/>
-          </a:prstGeom>
-          <a:noFill/>
-        </p:spPr>
-        <p:txBody>
-          <a:bodyPr wrap="square" rtlCol="0">
-            <a:spAutoFit/>
-          </a:bodyPr>
-          <a:lstStyle/>
-          <a:p>
-            <a:pPr marL="514350" indent="-514350">
-              <a:buFont typeface="+mj-lt"/>
-              <a:buAutoNum type="arabicPeriod"/>
-            </a:pPr>
-            <a:r>
-              <a:rPr lang="zh-TW" altLang="en-US" sz="3200" b="0" i="0" dirty="0">
-                <a:effectLst/>
-                <a:latin typeface="微軟正黑體" panose="020B0604030504040204" pitchFamily="34" charset="-120"/>
-                <a:ea typeface="微軟正黑體" panose="020B0604030504040204" pitchFamily="34" charset="-120"/>
-              </a:rPr>
-              <a:t>以</a:t>
-            </a:r>
-            <a:r>
-              <a:rPr lang="en-US" altLang="zh-TW" sz="3200" b="0" i="0" dirty="0">
-                <a:effectLst/>
-                <a:latin typeface="微軟正黑體" panose="020B0604030504040204" pitchFamily="34" charset="-120"/>
-                <a:ea typeface="微軟正黑體" panose="020B0604030504040204" pitchFamily="34" charset="-120"/>
-              </a:rPr>
-              <a:t>GPT3</a:t>
-            </a:r>
-            <a:r>
-              <a:rPr lang="zh-TW" altLang="en-US" sz="3200" b="0" i="0" dirty="0">
-                <a:effectLst/>
-                <a:latin typeface="微軟正黑體" panose="020B0604030504040204" pitchFamily="34" charset="-120"/>
-                <a:ea typeface="微軟正黑體" panose="020B0604030504040204" pitchFamily="34" charset="-120"/>
-              </a:rPr>
-              <a:t>為基礎</a:t>
-            </a:r>
-            <a:endParaRPr lang="en-US" altLang="zh-TW" sz="3200" b="0" i="0" dirty="0">
-              <a:effectLst/>
-              <a:latin typeface="微軟正黑體" panose="020B0604030504040204" pitchFamily="34" charset="-120"/>
-              <a:ea typeface="微軟正黑體" panose="020B0604030504040204" pitchFamily="34" charset="-120"/>
-            </a:endParaRPr>
-          </a:p>
-          <a:p>
-            <a:pPr marL="514350" indent="-514350">
-              <a:buFont typeface="+mj-lt"/>
-              <a:buAutoNum type="arabicPeriod"/>
-            </a:pPr>
-            <a:r>
-              <a:rPr lang="zh-TW" altLang="en-US" sz="3200" b="0" i="0" dirty="0">
-                <a:effectLst/>
-                <a:latin typeface="微軟正黑體" panose="020B0604030504040204" pitchFamily="34" charset="-120"/>
-                <a:ea typeface="微軟正黑體" panose="020B0604030504040204" pitchFamily="34" charset="-120"/>
-              </a:rPr>
-              <a:t>經過</a:t>
-            </a:r>
-            <a:r>
-              <a:rPr lang="en-US" altLang="zh-TW" sz="3200" b="0" i="0" dirty="0">
-                <a:effectLst/>
-                <a:latin typeface="微軟正黑體" panose="020B0604030504040204" pitchFamily="34" charset="-120"/>
-                <a:ea typeface="微軟正黑體" panose="020B0604030504040204" pitchFamily="34" charset="-120"/>
-              </a:rPr>
-              <a:t>SFT</a:t>
-            </a:r>
-            <a:r>
-              <a:rPr lang="zh-TW" altLang="en-US" sz="3200" b="0" i="0" dirty="0">
-                <a:effectLst/>
-                <a:latin typeface="微軟正黑體" panose="020B0604030504040204" pitchFamily="34" charset="-120"/>
-                <a:ea typeface="微軟正黑體" panose="020B0604030504040204" pitchFamily="34" charset="-120"/>
-              </a:rPr>
-              <a:t>微調</a:t>
-            </a:r>
-            <a:endParaRPr lang="en-US" altLang="zh-TW" sz="3200" b="0" i="0" dirty="0">
-              <a:effectLst/>
-              <a:latin typeface="微軟正黑體" panose="020B0604030504040204" pitchFamily="34" charset="-120"/>
-              <a:ea typeface="微軟正黑體" panose="020B0604030504040204" pitchFamily="34" charset="-120"/>
-            </a:endParaRPr>
-          </a:p>
-          <a:p>
-            <a:pPr marL="514350" indent="-514350">
-              <a:buFont typeface="+mj-lt"/>
-              <a:buAutoNum type="arabicPeriod"/>
-            </a:pPr>
-            <a:r>
-              <a:rPr lang="zh-TW" altLang="en-US" sz="3200" b="0" i="0" dirty="0">
-                <a:effectLst/>
-                <a:latin typeface="微軟正黑體" panose="020B0604030504040204" pitchFamily="34" charset="-120"/>
-                <a:ea typeface="微軟正黑體" panose="020B0604030504040204" pitchFamily="34" charset="-120"/>
-              </a:rPr>
-              <a:t>訓練</a:t>
-            </a:r>
-            <a:r>
-              <a:rPr lang="en-US" altLang="zh-TW" sz="3200" b="0" i="0" dirty="0">
-                <a:effectLst/>
-                <a:latin typeface="微軟正黑體" panose="020B0604030504040204" pitchFamily="34" charset="-120"/>
-                <a:ea typeface="微軟正黑體" panose="020B0604030504040204" pitchFamily="34" charset="-120"/>
-              </a:rPr>
-              <a:t>RM</a:t>
-            </a:r>
-            <a:r>
-              <a:rPr lang="zh-TW" altLang="en-US" sz="3200" b="0" i="0" dirty="0">
-                <a:effectLst/>
-                <a:latin typeface="微軟正黑體" panose="020B0604030504040204" pitchFamily="34" charset="-120"/>
-                <a:ea typeface="微軟正黑體" panose="020B0604030504040204" pitchFamily="34" charset="-120"/>
-              </a:rPr>
-              <a:t>模型</a:t>
-            </a:r>
-            <a:endParaRPr lang="en-US" altLang="zh-TW" sz="3200" b="0" i="0" dirty="0">
-              <a:effectLst/>
-              <a:latin typeface="微軟正黑體" panose="020B0604030504040204" pitchFamily="34" charset="-120"/>
-              <a:ea typeface="微軟正黑體" panose="020B0604030504040204" pitchFamily="34" charset="-120"/>
-            </a:endParaRPr>
-          </a:p>
-          <a:p>
-            <a:pPr marL="514350" indent="-514350">
-              <a:buFont typeface="+mj-lt"/>
-              <a:buAutoNum type="arabicPeriod"/>
-            </a:pPr>
-            <a:r>
-              <a:rPr lang="zh-TW" altLang="en-US" sz="3200" b="0" i="0" dirty="0">
-                <a:effectLst/>
-                <a:latin typeface="微軟正黑體" panose="020B0604030504040204" pitchFamily="34" charset="-120"/>
-                <a:ea typeface="微軟正黑體" panose="020B0604030504040204" pitchFamily="34" charset="-120"/>
-              </a:rPr>
-              <a:t>利用</a:t>
-            </a:r>
-            <a:r>
-              <a:rPr lang="en-US" altLang="zh-TW" sz="3200" b="0" i="0" dirty="0">
-                <a:effectLst/>
-                <a:latin typeface="微軟正黑體" panose="020B0604030504040204" pitchFamily="34" charset="-120"/>
-                <a:ea typeface="微軟正黑體" panose="020B0604030504040204" pitchFamily="34" charset="-120"/>
-              </a:rPr>
-              <a:t>RM</a:t>
-            </a:r>
-            <a:r>
-              <a:rPr lang="zh-TW" altLang="en-US" sz="3200" b="0" i="0" dirty="0">
-                <a:effectLst/>
-                <a:latin typeface="微軟正黑體" panose="020B0604030504040204" pitchFamily="34" charset="-120"/>
-                <a:ea typeface="微軟正黑體" panose="020B0604030504040204" pitchFamily="34" charset="-120"/>
-              </a:rPr>
-              <a:t>，透過</a:t>
-            </a:r>
-            <a:r>
-              <a:rPr lang="en-US" altLang="zh-TW" sz="3200" b="0" i="0" dirty="0">
-                <a:effectLst/>
-                <a:latin typeface="微軟正黑體" panose="020B0604030504040204" pitchFamily="34" charset="-120"/>
-                <a:ea typeface="微軟正黑體" panose="020B0604030504040204" pitchFamily="34" charset="-120"/>
-              </a:rPr>
-              <a:t>PPO</a:t>
-            </a:r>
-            <a:r>
-              <a:rPr lang="zh-TW" altLang="en-US" sz="3200" b="0" i="0" dirty="0">
-                <a:effectLst/>
-                <a:latin typeface="微軟正黑體" panose="020B0604030504040204" pitchFamily="34" charset="-120"/>
-                <a:ea typeface="微軟正黑體" panose="020B0604030504040204" pitchFamily="34" charset="-120"/>
-              </a:rPr>
-              <a:t>強化學習更新</a:t>
-            </a:r>
-            <a:r>
-              <a:rPr lang="en-US" altLang="zh-TW" sz="3200" b="0" i="0" dirty="0">
-                <a:effectLst/>
-                <a:latin typeface="微軟正黑體" panose="020B0604030504040204" pitchFamily="34" charset="-120"/>
-                <a:ea typeface="微軟正黑體" panose="020B0604030504040204" pitchFamily="34" charset="-120"/>
-              </a:rPr>
-              <a:t>GPT3</a:t>
-            </a:r>
-          </a:p>
-          <a:p>
-            <a:pPr marL="514350" indent="-514350">
-              <a:buFont typeface="+mj-lt"/>
-              <a:buAutoNum type="arabicPeriod"/>
-            </a:pPr>
-            <a:r>
-              <a:rPr lang="zh-TW" altLang="en-US" sz="3200" b="0" i="0" dirty="0">
-                <a:effectLst/>
-                <a:latin typeface="微軟正黑體" panose="020B0604030504040204" pitchFamily="34" charset="-120"/>
-                <a:ea typeface="微軟正黑體" panose="020B0604030504040204" pitchFamily="34" charset="-120"/>
-              </a:rPr>
-              <a:t>以上</a:t>
-            </a:r>
-            <a:r>
-              <a:rPr lang="en-US" altLang="zh-TW" sz="3200" b="0" i="0" dirty="0">
-                <a:effectLst/>
-                <a:latin typeface="微軟正黑體" panose="020B0604030504040204" pitchFamily="34" charset="-120"/>
-                <a:ea typeface="微軟正黑體" panose="020B0604030504040204" pitchFamily="34" charset="-120"/>
-              </a:rPr>
-              <a:t>1-4</a:t>
-            </a:r>
-            <a:r>
-              <a:rPr lang="zh-TW" altLang="en-US" sz="3200" b="0" i="0" dirty="0">
-                <a:effectLst/>
-                <a:latin typeface="微軟正黑體" panose="020B0604030504040204" pitchFamily="34" charset="-120"/>
-                <a:ea typeface="微軟正黑體" panose="020B0604030504040204" pitchFamily="34" charset="-120"/>
-              </a:rPr>
-              <a:t>的過程稱</a:t>
-            </a:r>
-            <a:r>
-              <a:rPr lang="en-US" altLang="zh-TW" sz="3200" b="0" i="0" dirty="0">
-                <a:effectLst/>
-                <a:latin typeface="微軟正黑體" panose="020B0604030504040204" pitchFamily="34" charset="-120"/>
-                <a:ea typeface="微軟正黑體" panose="020B0604030504040204" pitchFamily="34" charset="-120"/>
-              </a:rPr>
-              <a:t>RLHF(Reinforcement Learning from Human Feedback)</a:t>
-            </a:r>
-          </a:p>
-          <a:p>
-            <a:pPr marL="514350" indent="-514350">
-              <a:buFont typeface="+mj-lt"/>
-              <a:buAutoNum type="arabicPeriod"/>
-            </a:pPr>
-            <a:r>
-              <a:rPr lang="zh-TW" altLang="en-US" sz="3200" b="0" i="0" dirty="0">
-                <a:effectLst/>
-                <a:latin typeface="微軟正黑體" panose="020B0604030504040204" pitchFamily="34" charset="-120"/>
-                <a:ea typeface="微軟正黑體" panose="020B0604030504040204" pitchFamily="34" charset="-120"/>
-              </a:rPr>
-              <a:t>稱</a:t>
-            </a:r>
-            <a:r>
-              <a:rPr lang="en-US" altLang="zh-TW" sz="3200" b="0" i="0" dirty="0" err="1">
-                <a:effectLst/>
-                <a:latin typeface="微軟正黑體" panose="020B0604030504040204" pitchFamily="34" charset="-120"/>
-                <a:ea typeface="微軟正黑體" panose="020B0604030504040204" pitchFamily="34" charset="-120"/>
-              </a:rPr>
-              <a:t>InstructGPT</a:t>
-            </a:r>
-            <a:r>
-              <a:rPr lang="zh-TW" altLang="en-US" sz="3200" b="0" i="0" dirty="0">
-                <a:effectLst/>
-                <a:latin typeface="微軟正黑體" panose="020B0604030504040204" pitchFamily="34" charset="-120"/>
-                <a:ea typeface="微軟正黑體" panose="020B0604030504040204" pitchFamily="34" charset="-120"/>
-              </a:rPr>
-              <a:t>，是</a:t>
-            </a:r>
-            <a:r>
-              <a:rPr lang="en-US" altLang="zh-TW" sz="3200" b="0" i="0" dirty="0">
-                <a:effectLst/>
-                <a:latin typeface="微軟正黑體" panose="020B0604030504040204" pitchFamily="34" charset="-120"/>
-                <a:ea typeface="微軟正黑體" panose="020B0604030504040204" pitchFamily="34" charset="-120"/>
-              </a:rPr>
-              <a:t>ChatGPT</a:t>
-            </a:r>
-            <a:r>
-              <a:rPr lang="zh-TW" altLang="en-US" sz="3200" b="0" i="0" dirty="0">
-                <a:effectLst/>
-                <a:latin typeface="微軟正黑體" panose="020B0604030504040204" pitchFamily="34" charset="-120"/>
-                <a:ea typeface="微軟正黑體" panose="020B0604030504040204" pitchFamily="34" charset="-120"/>
-              </a:rPr>
-              <a:t>的前身</a:t>
-            </a:r>
-            <a:endParaRPr lang="en-US" altLang="zh-TW" sz="3200" b="0" i="0" dirty="0">
-              <a:effectLst/>
-              <a:latin typeface="微軟正黑體" panose="020B0604030504040204" pitchFamily="34" charset="-120"/>
-              <a:ea typeface="微軟正黑體" panose="020B0604030504040204" pitchFamily="34" charset="-120"/>
-            </a:endParaRPr>
-          </a:p>
-          <a:p>
-            <a:pPr marL="514350" indent="-514350">
-              <a:buFont typeface="+mj-lt"/>
-              <a:buAutoNum type="arabicPeriod"/>
-            </a:pPr>
-            <a:r>
-              <a:rPr lang="en-US" altLang="zh-TW" sz="3200" dirty="0" err="1">
-                <a:latin typeface="微軟正黑體" panose="020B0604030504040204" pitchFamily="34" charset="-120"/>
-                <a:ea typeface="微軟正黑體" panose="020B0604030504040204" pitchFamily="34" charset="-120"/>
-              </a:rPr>
-              <a:t>Anthropi</a:t>
-            </a:r>
-            <a:r>
-              <a:rPr lang="en-US" altLang="zh-TW" sz="3200" dirty="0">
-                <a:latin typeface="微軟正黑體" panose="020B0604030504040204" pitchFamily="34" charset="-120"/>
-                <a:ea typeface="微軟正黑體" panose="020B0604030504040204" pitchFamily="34" charset="-120"/>
-              </a:rPr>
-              <a:t> Claude</a:t>
-            </a:r>
-            <a:r>
-              <a:rPr lang="zh-TW" altLang="en-US" sz="3200" dirty="0">
-                <a:latin typeface="微軟正黑體" panose="020B0604030504040204" pitchFamily="34" charset="-120"/>
-                <a:ea typeface="微軟正黑體" panose="020B0604030504040204" pitchFamily="34" charset="-120"/>
-              </a:rPr>
-              <a:t>也是使用</a:t>
-            </a:r>
-            <a:r>
-              <a:rPr lang="en-US" altLang="zh-TW" sz="3200" dirty="0">
-                <a:latin typeface="微軟正黑體" panose="020B0604030504040204" pitchFamily="34" charset="-120"/>
-                <a:ea typeface="微軟正黑體" panose="020B0604030504040204" pitchFamily="34" charset="-120"/>
-              </a:rPr>
-              <a:t>RLHF</a:t>
-            </a:r>
-            <a:endParaRPr lang="en-US" altLang="zh-TW" sz="3200" b="0" i="0" dirty="0">
-              <a:effectLst/>
-              <a:latin typeface="微軟正黑體" panose="020B0604030504040204" pitchFamily="34" charset="-120"/>
-              <a:ea typeface="微軟正黑體" panose="020B0604030504040204" pitchFamily="34" charset="-120"/>
-            </a:endParaRPr>
-          </a:p>
-          <a:p>
-            <a:pPr marL="457200" indent="-457200">
-              <a:buFont typeface="Arial" panose="020B0604020202020204" pitchFamily="34" charset="0"/>
-              <a:buChar char="•"/>
-            </a:pPr>
-            <a:endParaRPr lang="en-US" altLang="zh-TW" sz="3200" b="0" i="0" dirty="0">
-              <a:effectLst/>
-              <a:latin typeface="微軟正黑體" panose="020B0604030504040204" pitchFamily="34" charset="-120"/>
-              <a:ea typeface="微軟正黑體" panose="020B0604030504040204" pitchFamily="34" charset="-120"/>
-              <a:hlinkClick r:id="rId3"/>
-            </a:endParaRPr>
-          </a:p>
-          <a:p>
-            <a:pPr marL="457200" indent="-457200">
-              <a:buFont typeface="Arial" panose="020B0604020202020204" pitchFamily="34" charset="0"/>
-              <a:buChar char="•"/>
-            </a:pPr>
-            <a:r>
-              <a:rPr lang="en-US" altLang="zh-TW" sz="3200" b="0" i="0" dirty="0">
-                <a:effectLst/>
-                <a:latin typeface="微軟正黑體" panose="020B0604030504040204" pitchFamily="34" charset="-120"/>
-                <a:ea typeface="微軟正黑體" panose="020B0604030504040204" pitchFamily="34" charset="-120"/>
-                <a:hlinkClick r:id="rId3"/>
-              </a:rPr>
-              <a:t>https://arxiv.org/pdf/2203.02155.pdf</a:t>
-            </a:r>
-            <a:endParaRPr lang="en-US" altLang="zh-TW" sz="3200" dirty="0">
-              <a:latin typeface="微軟正黑體" panose="020B0604030504040204" pitchFamily="34" charset="-120"/>
-              <a:ea typeface="微軟正黑體" panose="020B0604030504040204" pitchFamily="34" charset="-120"/>
-            </a:endParaRPr>
-          </a:p>
-          <a:p>
-            <a:pPr marL="457200" indent="-457200">
-              <a:buFont typeface="Arial" panose="020B0604020202020204" pitchFamily="34" charset="0"/>
-              <a:buChar char="•"/>
-            </a:pPr>
-            <a:endParaRPr lang="en-US" altLang="zh-TW" sz="3200" b="0" i="0" dirty="0">
-              <a:effectLst/>
-              <a:latin typeface="微軟正黑體" panose="020B0604030504040204" pitchFamily="34" charset="-120"/>
-              <a:ea typeface="微軟正黑體" panose="020B0604030504040204" pitchFamily="34" charset="-120"/>
-            </a:endParaRPr>
-          </a:p>
-        </p:txBody>
-      </p:sp>
-    </p:spTree>
-    <p:extLst>
-      <p:ext uri="{BB962C8B-B14F-4D97-AF65-F5344CB8AC3E}">
-        <p14:creationId xmlns:p14="http://schemas.microsoft.com/office/powerpoint/2010/main" val="48983677"/>
-      </p:ext>
-    </p:extLst>
-  </p:cSld>
-  <p:clrMapOvr>
-    <a:masterClrMapping/>
-  </p:clrMapOvr>
-  <p:transition>
-    <p:fade/>
-  </p:transition>
-</p:sld>
-</file>
-
-<file path=ppt/slides/slide33.xml><?xml version="1.0" encoding="utf-8"?>
-<p:sld xmlns:a="http://schemas.openxmlformats.org/drawingml/2006/main" xmlns:r="http://schemas.openxmlformats.org/officeDocument/2006/relationships" xmlns:p="http://schemas.openxmlformats.org/presentationml/2006/main">
-  <p:cSld>
-    <p:spTree>
-      <p:nvGrpSpPr>
-        <p:cNvPr id="1" name=""/>
-        <p:cNvGrpSpPr/>
-        <p:nvPr/>
-      </p:nvGrpSpPr>
-      <p:grpSpPr>
-        <a:xfrm>
-          <a:off x="0" y="0"/>
-          <a:ext cx="0" cy="0"/>
-          <a:chOff x="0" y="0"/>
-          <a:chExt cx="0" cy="0"/>
-        </a:xfrm>
-      </p:grpSpPr>
-      <p:sp>
-        <p:nvSpPr>
-          <p:cNvPr id="4" name="文字版面配置區 2"/>
-          <p:cNvSpPr txBox="1">
-            <a:spLocks/>
-          </p:cNvSpPr>
-          <p:nvPr/>
-        </p:nvSpPr>
-        <p:spPr>
-          <a:xfrm>
-            <a:off x="2438400" y="76154"/>
-            <a:ext cx="6553200" cy="990600"/>
-          </a:xfrm>
-          <a:prstGeom prst="rect">
-            <a:avLst/>
-          </a:prstGeom>
-        </p:spPr>
-        <p:txBody>
-          <a:bodyPr tIns="91440" bIns="91440" anchor="b" anchorCtr="0">
-            <a:noAutofit/>
-          </a:bodyPr>
-          <a:lstStyle/>
-          <a:p>
-            <a:r>
-              <a:rPr kumimoji="1" lang="en-US" altLang="zh-TW" sz="4800" b="1" dirty="0">
-                <a:solidFill>
-                  <a:srgbClr val="00B0F0"/>
-                </a:solidFill>
-                <a:effectLst>
-                  <a:outerShdw blurRad="38100" dist="38100" dir="2700000" algn="tl">
-                    <a:srgbClr val="000000">
-                      <a:alpha val="43137"/>
-                    </a:srgbClr>
-                  </a:outerShdw>
-                </a:effectLst>
-                <a:latin typeface="微軟正黑體" panose="020B0604030504040204" pitchFamily="34" charset="-120"/>
-                <a:ea typeface="微軟正黑體" panose="020B0604030504040204" pitchFamily="34" charset="-120"/>
-                <a:cs typeface="Heiti TC Light"/>
-              </a:rPr>
-              <a:t>Alignment</a:t>
-            </a:r>
-            <a:r>
-              <a:rPr kumimoji="1" lang="zh-TW" altLang="en-US" sz="4800" b="1" dirty="0">
-                <a:solidFill>
-                  <a:srgbClr val="00B0F0"/>
-                </a:solidFill>
-                <a:effectLst>
-                  <a:outerShdw blurRad="38100" dist="38100" dir="2700000" algn="tl">
-                    <a:srgbClr val="000000">
-                      <a:alpha val="43137"/>
-                    </a:srgbClr>
-                  </a:outerShdw>
-                </a:effectLst>
-                <a:latin typeface="微軟正黑體" panose="020B0604030504040204" pitchFamily="34" charset="-120"/>
-                <a:ea typeface="微軟正黑體" panose="020B0604030504040204" pitchFamily="34" charset="-120"/>
-                <a:cs typeface="Heiti TC Light"/>
-              </a:rPr>
-              <a:t>的作法</a:t>
-            </a:r>
-            <a:endParaRPr kumimoji="1" lang="en-US" altLang="zh-TW" sz="4800" b="1" dirty="0">
-              <a:solidFill>
-                <a:srgbClr val="00B0F0"/>
-              </a:solidFill>
-              <a:effectLst>
-                <a:outerShdw blurRad="38100" dist="38100" dir="2700000" algn="tl">
-                  <a:srgbClr val="000000">
-                    <a:alpha val="43137"/>
-                  </a:srgbClr>
-                </a:outerShdw>
-              </a:effectLst>
-              <a:latin typeface="微軟正黑體" panose="020B0604030504040204" pitchFamily="34" charset="-120"/>
-              <a:ea typeface="微軟正黑體" panose="020B0604030504040204" pitchFamily="34" charset="-120"/>
-              <a:cs typeface="Heiti TC Light"/>
-            </a:endParaRPr>
-          </a:p>
-        </p:txBody>
-      </p:sp>
-      <p:sp>
-        <p:nvSpPr>
-          <p:cNvPr id="3" name="日期版面配置區 2">
-            <a:extLst>
-              <a:ext uri="{FF2B5EF4-FFF2-40B4-BE49-F238E27FC236}">
-                <a16:creationId xmlns:a16="http://schemas.microsoft.com/office/drawing/2014/main" id="{1C536CB5-3C58-6CF1-767E-952B76F12DEE}"/>
-              </a:ext>
-            </a:extLst>
-          </p:cNvPr>
-          <p:cNvSpPr>
-            <a:spLocks noGrp="1"/>
-          </p:cNvSpPr>
-          <p:nvPr>
-            <p:ph type="dt" sz="half" idx="12"/>
-          </p:nvPr>
-        </p:nvSpPr>
-        <p:spPr/>
-        <p:txBody>
-          <a:bodyPr/>
-          <a:lstStyle/>
-          <a:p>
-            <a:fld id="{0B520B05-2240-4566-BE2A-9338980FE8EB}" type="datetime1">
-              <a:rPr kumimoji="0" lang="en-US" altLang="zh-TW" sz="1200" smtClean="0">
-                <a:solidFill>
-                  <a:schemeClr val="tx2"/>
-                </a:solidFill>
-                <a:latin typeface="Arial" panose="020B0604020202020204" pitchFamily="34" charset="0"/>
-                <a:cs typeface="Arial" panose="020B0604020202020204" pitchFamily="34" charset="0"/>
-              </a:rPr>
-              <a:t>3/21/2024</a:t>
-            </a:fld>
-            <a:endParaRPr kumimoji="0" lang="en-US" dirty="0">
-              <a:latin typeface="Arial" panose="020B0604020202020204" pitchFamily="34" charset="0"/>
-              <a:cs typeface="Arial" panose="020B0604020202020204" pitchFamily="34" charset="0"/>
-            </a:endParaRPr>
-          </a:p>
-        </p:txBody>
-      </p:sp>
-      <p:sp>
-        <p:nvSpPr>
-          <p:cNvPr id="7" name="投影片編號版面配置區 6">
-            <a:extLst>
-              <a:ext uri="{FF2B5EF4-FFF2-40B4-BE49-F238E27FC236}">
-                <a16:creationId xmlns:a16="http://schemas.microsoft.com/office/drawing/2014/main" id="{DA316F56-AF12-D872-611F-78AE7ACCBF93}"/>
-              </a:ext>
-            </a:extLst>
-          </p:cNvPr>
-          <p:cNvSpPr>
-            <a:spLocks noGrp="1"/>
-          </p:cNvSpPr>
-          <p:nvPr>
-            <p:ph type="sldNum" sz="quarter" idx="13"/>
-          </p:nvPr>
-        </p:nvSpPr>
-        <p:spPr/>
-        <p:txBody>
-          <a:bodyPr/>
-          <a:lstStyle/>
-          <a:p>
-            <a:pPr algn="r"/>
-            <a:fld id="{F99EC173-99AE-4773-AB25-02E469A13EAE}" type="slidenum">
-              <a:rPr kumimoji="0" lang="en-US" sz="1200" smtClean="0">
-                <a:solidFill>
-                  <a:schemeClr val="tx2"/>
-                </a:solidFill>
-              </a:rPr>
-              <a:pPr algn="r"/>
-              <a:t>33</a:t>
             </a:fld>
             <a:endParaRPr kumimoji="0" lang="en-US" dirty="0"/>
           </a:p>
@@ -20751,7 +20386,7 @@
 </p:sld>
 </file>
 
-<file path=ppt/slides/slide34.xml><?xml version="1.0" encoding="utf-8"?>
+<file path=ppt/slides/slide33.xml><?xml version="1.0" encoding="utf-8"?>
 <p:sld xmlns:a="http://schemas.openxmlformats.org/drawingml/2006/main" xmlns:r="http://schemas.openxmlformats.org/officeDocument/2006/relationships" xmlns:p="http://schemas.openxmlformats.org/presentationml/2006/main">
   <p:cSld>
     <p:spTree>
@@ -20814,7 +20449,7 @@
 </p:sld>
 </file>
 
-<file path=ppt/slides/slide35.xml><?xml version="1.0" encoding="utf-8"?>
+<file path=ppt/slides/slide34.xml><?xml version="1.0" encoding="utf-8"?>
 <p:sld xmlns:a="http://schemas.openxmlformats.org/drawingml/2006/main" xmlns:r="http://schemas.openxmlformats.org/officeDocument/2006/relationships" xmlns:p="http://schemas.openxmlformats.org/presentationml/2006/main">
   <p:cSld>
     <p:spTree>
@@ -21023,7 +20658,7 @@
                 <a:latin typeface="Arial" panose="020B0604020202020204" pitchFamily="34" charset="0"/>
                 <a:cs typeface="Arial" panose="020B0604020202020204" pitchFamily="34" charset="0"/>
               </a:rPr>
-              <a:t>3/21/2024</a:t>
+              <a:t>11/27/2024</a:t>
             </a:fld>
             <a:endParaRPr kumimoji="0" lang="en-US" dirty="0">
               <a:latin typeface="Arial" panose="020B0604020202020204" pitchFamily="34" charset="0"/>
@@ -21432,7 +21067,7 @@
                 <a:latin typeface="Arial" panose="020B0604020202020204" pitchFamily="34" charset="0"/>
                 <a:cs typeface="Arial" panose="020B0604020202020204" pitchFamily="34" charset="0"/>
               </a:rPr>
-              <a:t>3/21/2024</a:t>
+              <a:t>11/27/2024</a:t>
             </a:fld>
             <a:endParaRPr kumimoji="0" lang="en-US" dirty="0">
               <a:latin typeface="Arial" panose="020B0604020202020204" pitchFamily="34" charset="0"/>
@@ -21833,7 +21468,7 @@
                 <a:latin typeface="Arial" panose="020B0604020202020204" pitchFamily="34" charset="0"/>
                 <a:cs typeface="Arial" panose="020B0604020202020204" pitchFamily="34" charset="0"/>
               </a:rPr>
-              <a:t>3/21/2024</a:t>
+              <a:t>11/27/2024</a:t>
             </a:fld>
             <a:endParaRPr kumimoji="0" lang="en-US" dirty="0">
               <a:latin typeface="Arial" panose="020B0604020202020204" pitchFamily="34" charset="0"/>
@@ -22140,7 +21775,7 @@
                 <a:latin typeface="Arial" panose="020B0604020202020204" pitchFamily="34" charset="0"/>
                 <a:cs typeface="Arial" panose="020B0604020202020204" pitchFamily="34" charset="0"/>
               </a:rPr>
-              <a:t>3/21/2024</a:t>
+              <a:t>11/27/2024</a:t>
             </a:fld>
             <a:endParaRPr kumimoji="0" lang="en-US" dirty="0">
               <a:latin typeface="Arial" panose="020B0604020202020204" pitchFamily="34" charset="0"/>
@@ -22609,7 +22244,7 @@
                 <a:latin typeface="Arial" panose="020B0604020202020204" pitchFamily="34" charset="0"/>
                 <a:cs typeface="Arial" panose="020B0604020202020204" pitchFamily="34" charset="0"/>
               </a:rPr>
-              <a:t>3/21/2024</a:t>
+              <a:t>11/27/2024</a:t>
             </a:fld>
             <a:endParaRPr kumimoji="0" lang="en-US" dirty="0">
               <a:latin typeface="Arial" panose="020B0604020202020204" pitchFamily="34" charset="0"/>
@@ -22846,7 +22481,7 @@
                 <a:latin typeface="Arial" panose="020B0604020202020204" pitchFamily="34" charset="0"/>
                 <a:cs typeface="Arial" panose="020B0604020202020204" pitchFamily="34" charset="0"/>
               </a:rPr>
-              <a:t>3/21/2024</a:t>
+              <a:t>11/27/2024</a:t>
             </a:fld>
             <a:endParaRPr kumimoji="0" lang="en-US" dirty="0">
               <a:latin typeface="Arial" panose="020B0604020202020204" pitchFamily="34" charset="0"/>

--- a/Slides/Week01/16：進入RLHF階段.pptx
+++ b/Slides/Week01/16：進入RLHF階段.pptx
@@ -5,10 +5,10 @@
     <p:sldMasterId id="2147483648" r:id="rId1"/>
   </p:sldMasterIdLst>
   <p:notesMasterIdLst>
-    <p:notesMasterId r:id="rId36"/>
+    <p:notesMasterId r:id="rId35"/>
   </p:notesMasterIdLst>
   <p:handoutMasterIdLst>
-    <p:handoutMasterId r:id="rId37"/>
+    <p:handoutMasterId r:id="rId36"/>
   </p:handoutMasterIdLst>
   <p:sldIdLst>
     <p:sldId id="1158" r:id="rId2"/>
@@ -34,17 +34,16 @@
     <p:sldId id="1229" r:id="rId22"/>
     <p:sldId id="1230" r:id="rId23"/>
     <p:sldId id="1231" r:id="rId24"/>
-    <p:sldId id="1232" r:id="rId25"/>
-    <p:sldId id="1233" r:id="rId26"/>
-    <p:sldId id="1161" r:id="rId27"/>
-    <p:sldId id="1157" r:id="rId28"/>
-    <p:sldId id="1209" r:id="rId29"/>
-    <p:sldId id="1210" r:id="rId30"/>
-    <p:sldId id="1211" r:id="rId31"/>
-    <p:sldId id="1162" r:id="rId32"/>
-    <p:sldId id="1165" r:id="rId33"/>
-    <p:sldId id="1175" r:id="rId34"/>
-    <p:sldId id="1164" r:id="rId35"/>
+    <p:sldId id="1233" r:id="rId25"/>
+    <p:sldId id="1161" r:id="rId26"/>
+    <p:sldId id="1157" r:id="rId27"/>
+    <p:sldId id="1209" r:id="rId28"/>
+    <p:sldId id="1210" r:id="rId29"/>
+    <p:sldId id="1211" r:id="rId30"/>
+    <p:sldId id="1162" r:id="rId31"/>
+    <p:sldId id="1165" r:id="rId32"/>
+    <p:sldId id="1175" r:id="rId33"/>
+    <p:sldId id="1164" r:id="rId34"/>
   </p:sldIdLst>
   <p:sldSz cx="9144000" cy="6858000" type="screen4x3"/>
   <p:notesSz cx="6858000" cy="9144000"/>
@@ -259,7 +258,7 @@
             <a:fld id="{68F88C59-319B-4332-9A1D-2A62CFCB00D8}" type="datetimeFigureOut">
               <a:rPr lang="en-US" smtClean="0"/>
               <a:pPr/>
-              <a:t>11/27/2024</a:t>
+              <a:t>12/4/2024</a:t>
             </a:fld>
             <a:endParaRPr lang="en-US" dirty="0"/>
           </a:p>
@@ -430,7 +429,7 @@
             <a:fld id="{968B300D-05F0-4B43-940D-46DED5A791AD}" type="datetimeFigureOut">
               <a:rPr lang="en-US" smtClean="0"/>
               <a:pPr/>
-              <a:t>11/27/2024</a:t>
+              <a:t>12/3/2024</a:t>
             </a:fld>
             <a:endParaRPr lang="en-US" dirty="0"/>
           </a:p>
@@ -2142,7 +2141,7 @@
     </p:spTree>
     <p:extLst>
       <p:ext uri="{BB962C8B-B14F-4D97-AF65-F5344CB8AC3E}">
-        <p14:creationId xmlns:p14="http://schemas.microsoft.com/office/powerpoint/2010/main" val="509763073"/>
+        <p14:creationId xmlns:p14="http://schemas.microsoft.com/office/powerpoint/2010/main" val="1717291848"/>
       </p:ext>
     </p:extLst>
   </p:cSld>
@@ -2227,7 +2226,7 @@
     </p:spTree>
     <p:extLst>
       <p:ext uri="{BB962C8B-B14F-4D97-AF65-F5344CB8AC3E}">
-        <p14:creationId xmlns:p14="http://schemas.microsoft.com/office/powerpoint/2010/main" val="1717291848"/>
+        <p14:creationId xmlns:p14="http://schemas.microsoft.com/office/powerpoint/2010/main" val="2994901000"/>
       </p:ext>
     </p:extLst>
   </p:cSld>
@@ -2312,7 +2311,7 @@
     </p:spTree>
     <p:extLst>
       <p:ext uri="{BB962C8B-B14F-4D97-AF65-F5344CB8AC3E}">
-        <p14:creationId xmlns:p14="http://schemas.microsoft.com/office/powerpoint/2010/main" val="2994901000"/>
+        <p14:creationId xmlns:p14="http://schemas.microsoft.com/office/powerpoint/2010/main" val="2475096517"/>
       </p:ext>
     </p:extLst>
   </p:cSld>
@@ -2397,7 +2396,7 @@
     </p:spTree>
     <p:extLst>
       <p:ext uri="{BB962C8B-B14F-4D97-AF65-F5344CB8AC3E}">
-        <p14:creationId xmlns:p14="http://schemas.microsoft.com/office/powerpoint/2010/main" val="2475096517"/>
+        <p14:creationId xmlns:p14="http://schemas.microsoft.com/office/powerpoint/2010/main" val="2112326584"/>
       </p:ext>
     </p:extLst>
   </p:cSld>
@@ -2482,7 +2481,7 @@
     </p:spTree>
     <p:extLst>
       <p:ext uri="{BB962C8B-B14F-4D97-AF65-F5344CB8AC3E}">
-        <p14:creationId xmlns:p14="http://schemas.microsoft.com/office/powerpoint/2010/main" val="2112326584"/>
+        <p14:creationId xmlns:p14="http://schemas.microsoft.com/office/powerpoint/2010/main" val="3384101725"/>
       </p:ext>
     </p:extLst>
   </p:cSld>
@@ -2567,7 +2566,7 @@
     </p:spTree>
     <p:extLst>
       <p:ext uri="{BB962C8B-B14F-4D97-AF65-F5344CB8AC3E}">
-        <p14:creationId xmlns:p14="http://schemas.microsoft.com/office/powerpoint/2010/main" val="3384101725"/>
+        <p14:creationId xmlns:p14="http://schemas.microsoft.com/office/powerpoint/2010/main" val="869645468"/>
       </p:ext>
     </p:extLst>
   </p:cSld>
@@ -2737,7 +2736,7 @@
     </p:spTree>
     <p:extLst>
       <p:ext uri="{BB962C8B-B14F-4D97-AF65-F5344CB8AC3E}">
-        <p14:creationId xmlns:p14="http://schemas.microsoft.com/office/powerpoint/2010/main" val="869645468"/>
+        <p14:creationId xmlns:p14="http://schemas.microsoft.com/office/powerpoint/2010/main" val="953099231"/>
       </p:ext>
     </p:extLst>
   </p:cSld>
@@ -2814,91 +2813,6 @@
               <a:rPr lang="en-US" smtClean="0"/>
               <a:pPr/>
               <a:t>31</a:t>
-            </a:fld>
-            <a:endParaRPr lang="en-US" dirty="0"/>
-          </a:p>
-        </p:txBody>
-      </p:sp>
-    </p:spTree>
-    <p:extLst>
-      <p:ext uri="{BB962C8B-B14F-4D97-AF65-F5344CB8AC3E}">
-        <p14:creationId xmlns:p14="http://schemas.microsoft.com/office/powerpoint/2010/main" val="953099231"/>
-      </p:ext>
-    </p:extLst>
-  </p:cSld>
-  <p:clrMapOvr>
-    <a:masterClrMapping/>
-  </p:clrMapOvr>
-</p:notes>
-</file>
-
-<file path=ppt/notesSlides/notesSlide32.xml><?xml version="1.0" encoding="utf-8"?>
-<p:notes xmlns:a="http://schemas.openxmlformats.org/drawingml/2006/main" xmlns:r="http://schemas.openxmlformats.org/officeDocument/2006/relationships" xmlns:p="http://schemas.openxmlformats.org/presentationml/2006/main">
-  <p:cSld>
-    <p:spTree>
-      <p:nvGrpSpPr>
-        <p:cNvPr id="1" name=""/>
-        <p:cNvGrpSpPr/>
-        <p:nvPr/>
-      </p:nvGrpSpPr>
-      <p:grpSpPr>
-        <a:xfrm>
-          <a:off x="0" y="0"/>
-          <a:ext cx="0" cy="0"/>
-          <a:chOff x="0" y="0"/>
-          <a:chExt cx="0" cy="0"/>
-        </a:xfrm>
-      </p:grpSpPr>
-      <p:sp>
-        <p:nvSpPr>
-          <p:cNvPr id="2" name="投影片圖像版面配置區 1"/>
-          <p:cNvSpPr>
-            <a:spLocks noGrp="1" noRot="1" noChangeAspect="1"/>
-          </p:cNvSpPr>
-          <p:nvPr>
-            <p:ph type="sldImg"/>
-          </p:nvPr>
-        </p:nvSpPr>
-        <p:spPr/>
-      </p:sp>
-      <p:sp>
-        <p:nvSpPr>
-          <p:cNvPr id="3" name="備忘稿版面配置區 2"/>
-          <p:cNvSpPr>
-            <a:spLocks noGrp="1"/>
-          </p:cNvSpPr>
-          <p:nvPr>
-            <p:ph type="body" idx="1"/>
-          </p:nvPr>
-        </p:nvSpPr>
-        <p:spPr/>
-        <p:txBody>
-          <a:bodyPr/>
-          <a:lstStyle/>
-          <a:p>
-            <a:endParaRPr lang="zh-TW" altLang="en-US" dirty="0"/>
-          </a:p>
-        </p:txBody>
-      </p:sp>
-      <p:sp>
-        <p:nvSpPr>
-          <p:cNvPr id="4" name="投影片編號版面配置區 3"/>
-          <p:cNvSpPr>
-            <a:spLocks noGrp="1"/>
-          </p:cNvSpPr>
-          <p:nvPr>
-            <p:ph type="sldNum" sz="quarter" idx="10"/>
-          </p:nvPr>
-        </p:nvSpPr>
-        <p:spPr/>
-        <p:txBody>
-          <a:bodyPr/>
-          <a:lstStyle/>
-          <a:p>
-            <a:fld id="{9B26CD33-4337-4529-948A-94F6960B2374}" type="slidenum">
-              <a:rPr lang="en-US" smtClean="0"/>
-              <a:pPr/>
-              <a:t>32</a:t>
             </a:fld>
             <a:endParaRPr lang="en-US" dirty="0"/>
           </a:p>
@@ -3735,7 +3649,7 @@
                 </a:solidFill>
               </a:rPr>
               <a:pPr/>
-              <a:t>11/27/2024</a:t>
+              <a:t>12/3/2024</a:t>
             </a:fld>
             <a:endParaRPr kumimoji="0" lang="en-US" dirty="0"/>
           </a:p>
@@ -4126,7 +4040,7 @@
                 </a:solidFill>
               </a:rPr>
               <a:pPr/>
-              <a:t>11/27/2024</a:t>
+              <a:t>12/3/2024</a:t>
             </a:fld>
             <a:endParaRPr kumimoji="0" lang="en-US" dirty="0"/>
           </a:p>
@@ -4461,7 +4375,7 @@
                 </a:solidFill>
               </a:rPr>
               <a:pPr/>
-              <a:t>11/27/2024</a:t>
+              <a:t>12/3/2024</a:t>
             </a:fld>
             <a:endParaRPr kumimoji="0" lang="en-US" dirty="0"/>
           </a:p>
@@ -5037,7 +4951,7 @@
                 </a:solidFill>
               </a:rPr>
               <a:pPr/>
-              <a:t>11/27/2024</a:t>
+              <a:t>12/3/2024</a:t>
             </a:fld>
             <a:endParaRPr kumimoji="0" lang="en-US" dirty="0"/>
           </a:p>
@@ -5601,7 +5515,7 @@
                 </a:solidFill>
               </a:rPr>
               <a:pPr/>
-              <a:t>11/27/2024</a:t>
+              <a:t>12/3/2024</a:t>
             </a:fld>
             <a:endParaRPr kumimoji="0" lang="en-US" dirty="0"/>
           </a:p>
@@ -6060,7 +5974,7 @@
                 </a:solidFill>
               </a:rPr>
               <a:pPr/>
-              <a:t>11/27/2024</a:t>
+              <a:t>12/3/2024</a:t>
             </a:fld>
             <a:endParaRPr kumimoji="0" lang="en-US" dirty="0"/>
           </a:p>
@@ -6484,7 +6398,7 @@
                 </a:solidFill>
               </a:rPr>
               <a:pPr/>
-              <a:t>11/27/2024</a:t>
+              <a:t>12/3/2024</a:t>
             </a:fld>
             <a:endParaRPr kumimoji="0" lang="en-US" dirty="0"/>
           </a:p>
@@ -6988,7 +6902,7 @@
                 </a:solidFill>
               </a:rPr>
               <a:pPr/>
-              <a:t>11/27/2024</a:t>
+              <a:t>12/3/2024</a:t>
             </a:fld>
             <a:endParaRPr kumimoji="0" lang="en-US" dirty="0"/>
           </a:p>
@@ -7492,7 +7406,7 @@
                 </a:solidFill>
               </a:rPr>
               <a:pPr/>
-              <a:t>11/27/2024</a:t>
+              <a:t>12/3/2024</a:t>
             </a:fld>
             <a:endParaRPr kumimoji="0" lang="en-US" dirty="0"/>
           </a:p>
@@ -7708,7 +7622,7 @@
                 </a:solidFill>
               </a:rPr>
               <a:pPr/>
-              <a:t>11/27/2024</a:t>
+              <a:t>12/3/2024</a:t>
             </a:fld>
             <a:endParaRPr kumimoji="0" lang="en-US" dirty="0"/>
           </a:p>
@@ -8036,7 +7950,7 @@
                 </a:solidFill>
               </a:rPr>
               <a:pPr/>
-              <a:t>11/27/2024</a:t>
+              <a:t>12/3/2024</a:t>
             </a:fld>
             <a:endParaRPr kumimoji="0" lang="en-US" dirty="0"/>
           </a:p>
@@ -8262,7 +8176,7 @@
                 </a:solidFill>
               </a:rPr>
               <a:pPr/>
-              <a:t>11/27/2024</a:t>
+              <a:t>12/3/2024</a:t>
             </a:fld>
             <a:endParaRPr kumimoji="0" lang="en-US" dirty="0"/>
           </a:p>
@@ -8481,7 +8395,7 @@
                 </a:solidFill>
               </a:rPr>
               <a:pPr/>
-              <a:t>11/27/2024</a:t>
+              <a:t>12/3/2024</a:t>
             </a:fld>
             <a:endParaRPr kumimoji="0" lang="en-US" dirty="0"/>
           </a:p>
@@ -8657,7 +8571,7 @@
             <a:fld id="{ACB2EC6F-6501-4E04-BD6C-A8A6CABB2C5B}" type="datetimeFigureOut">
               <a:rPr kumimoji="0" lang="en-US" smtClean="0"/>
               <a:pPr/>
-              <a:t>11/27/2024</a:t>
+              <a:t>12/3/2024</a:t>
             </a:fld>
             <a:endParaRPr kumimoji="0" lang="en-US" dirty="0"/>
           </a:p>
@@ -8902,7 +8816,7 @@
                 </a:solidFill>
               </a:rPr>
               <a:pPr/>
-              <a:t>11/27/2024</a:t>
+              <a:t>12/3/2024</a:t>
             </a:fld>
             <a:endParaRPr kumimoji="0" lang="en-US" dirty="0"/>
           </a:p>
@@ -9374,7 +9288,7 @@
                 </a:solidFill>
               </a:rPr>
               <a:pPr/>
-              <a:t>11/27/2024</a:t>
+              <a:t>12/3/2024</a:t>
             </a:fld>
             <a:endParaRPr kumimoji="0" lang="en-US" dirty="0"/>
           </a:p>
@@ -9726,7 +9640,7 @@
                 </a:solidFill>
               </a:rPr>
               <a:pPr/>
-              <a:t>11/27/2024</a:t>
+              <a:t>12/3/2024</a:t>
             </a:fld>
             <a:endParaRPr kumimoji="0" lang="en-US" dirty="0"/>
           </a:p>
@@ -10084,7 +9998,7 @@
                 </a:solidFill>
               </a:rPr>
               <a:pPr/>
-              <a:t>11/27/2024</a:t>
+              <a:t>12/3/2024</a:t>
             </a:fld>
             <a:endParaRPr kumimoji="0" lang="en-US" dirty="0"/>
           </a:p>
@@ -10389,7 +10303,7 @@
                 </a:solidFill>
               </a:rPr>
               <a:pPr/>
-              <a:t>11/27/2024</a:t>
+              <a:t>12/3/2024</a:t>
             </a:fld>
             <a:endParaRPr kumimoji="0" lang="en-US" dirty="0"/>
           </a:p>
@@ -10865,7 +10779,7 @@
                 </a:solidFill>
               </a:rPr>
               <a:pPr/>
-              <a:t>11/27/2024</a:t>
+              <a:t>12/3/2024</a:t>
             </a:fld>
             <a:endParaRPr kumimoji="0" lang="en-US" dirty="0"/>
           </a:p>
@@ -11102,7 +11016,7 @@
                 </a:solidFill>
               </a:rPr>
               <a:pPr/>
-              <a:t>11/27/2024</a:t>
+              <a:t>12/3/2024</a:t>
             </a:fld>
             <a:endParaRPr kumimoji="0" lang="en-US" sz="1200" dirty="0">
               <a:solidFill>
@@ -11676,7 +11590,7 @@
                   <a:schemeClr val="tx2"/>
                 </a:solidFill>
               </a:rPr>
-              <a:t>11/27/2024</a:t>
+              <a:t>12/3/2024</a:t>
             </a:fld>
             <a:endParaRPr kumimoji="0" lang="en-US" dirty="0"/>
           </a:p>
@@ -11874,7 +11788,7 @@
                 <a:latin typeface="Arial" panose="020B0604020202020204" pitchFamily="34" charset="0"/>
                 <a:cs typeface="Arial" panose="020B0604020202020204" pitchFamily="34" charset="0"/>
               </a:rPr>
-              <a:t>11/27/2024</a:t>
+              <a:t>12/3/2024</a:t>
             </a:fld>
             <a:endParaRPr kumimoji="0" lang="en-US" dirty="0">
               <a:latin typeface="Arial" panose="020B0604020202020204" pitchFamily="34" charset="0"/>
@@ -12111,7 +12025,7 @@
                 <a:latin typeface="Arial" panose="020B0604020202020204" pitchFamily="34" charset="0"/>
                 <a:cs typeface="Arial" panose="020B0604020202020204" pitchFamily="34" charset="0"/>
               </a:rPr>
-              <a:t>11/27/2024</a:t>
+              <a:t>12/3/2024</a:t>
             </a:fld>
             <a:endParaRPr kumimoji="0" lang="en-US" dirty="0">
               <a:latin typeface="Arial" panose="020B0604020202020204" pitchFamily="34" charset="0"/>
@@ -12409,7 +12323,7 @@
                 <a:latin typeface="Arial" panose="020B0604020202020204" pitchFamily="34" charset="0"/>
                 <a:cs typeface="Arial" panose="020B0604020202020204" pitchFamily="34" charset="0"/>
               </a:rPr>
-              <a:t>11/27/2024</a:t>
+              <a:t>12/3/2024</a:t>
             </a:fld>
             <a:endParaRPr kumimoji="0" lang="en-US" dirty="0">
               <a:latin typeface="Arial" panose="020B0604020202020204" pitchFamily="34" charset="0"/>
@@ -12707,7 +12621,7 @@
                 <a:latin typeface="Arial" panose="020B0604020202020204" pitchFamily="34" charset="0"/>
                 <a:cs typeface="Arial" panose="020B0604020202020204" pitchFamily="34" charset="0"/>
               </a:rPr>
-              <a:t>11/27/2024</a:t>
+              <a:t>12/3/2024</a:t>
             </a:fld>
             <a:endParaRPr kumimoji="0" lang="en-US" dirty="0">
               <a:latin typeface="Arial" panose="020B0604020202020204" pitchFamily="34" charset="0"/>
@@ -12986,7 +12900,7 @@
                 <a:latin typeface="Arial" panose="020B0604020202020204" pitchFamily="34" charset="0"/>
                 <a:cs typeface="Arial" panose="020B0604020202020204" pitchFamily="34" charset="0"/>
               </a:rPr>
-              <a:t>11/27/2024</a:t>
+              <a:t>12/3/2024</a:t>
             </a:fld>
             <a:endParaRPr kumimoji="0" lang="en-US" dirty="0">
               <a:latin typeface="Arial" panose="020B0604020202020204" pitchFamily="34" charset="0"/>
@@ -13317,7 +13231,7 @@
                 <a:latin typeface="Arial" panose="020B0604020202020204" pitchFamily="34" charset="0"/>
                 <a:cs typeface="Arial" panose="020B0604020202020204" pitchFamily="34" charset="0"/>
               </a:rPr>
-              <a:t>11/27/2024</a:t>
+              <a:t>12/3/2024</a:t>
             </a:fld>
             <a:endParaRPr kumimoji="0" lang="en-US" dirty="0">
               <a:latin typeface="Arial" panose="020B0604020202020204" pitchFamily="34" charset="0"/>
@@ -13605,7 +13519,7 @@
                 <a:latin typeface="Arial" panose="020B0604020202020204" pitchFamily="34" charset="0"/>
                 <a:cs typeface="Arial" panose="020B0604020202020204" pitchFamily="34" charset="0"/>
               </a:rPr>
-              <a:t>11/27/2024</a:t>
+              <a:t>12/3/2024</a:t>
             </a:fld>
             <a:endParaRPr kumimoji="0" lang="en-US" dirty="0">
               <a:latin typeface="Arial" panose="020B0604020202020204" pitchFamily="34" charset="0"/>
@@ -13965,7 +13879,7 @@
                 <a:latin typeface="Arial" panose="020B0604020202020204" pitchFamily="34" charset="0"/>
                 <a:cs typeface="Arial" panose="020B0604020202020204" pitchFamily="34" charset="0"/>
               </a:rPr>
-              <a:t>11/27/2024</a:t>
+              <a:t>12/3/2024</a:t>
             </a:fld>
             <a:endParaRPr kumimoji="0" lang="en-US" dirty="0">
               <a:latin typeface="Arial" panose="020B0604020202020204" pitchFamily="34" charset="0"/>
@@ -14274,7 +14188,7 @@
                 <a:latin typeface="Arial" panose="020B0604020202020204" pitchFamily="34" charset="0"/>
                 <a:cs typeface="Arial" panose="020B0604020202020204" pitchFamily="34" charset="0"/>
               </a:rPr>
-              <a:t>11/27/2024</a:t>
+              <a:t>12/3/2024</a:t>
             </a:fld>
             <a:endParaRPr kumimoji="0" lang="en-US" dirty="0">
               <a:latin typeface="Arial" panose="020B0604020202020204" pitchFamily="34" charset="0"/>
@@ -14581,7 +14495,7 @@
                 <a:latin typeface="Arial" panose="020B0604020202020204" pitchFamily="34" charset="0"/>
                 <a:cs typeface="Arial" panose="020B0604020202020204" pitchFamily="34" charset="0"/>
               </a:rPr>
-              <a:t>11/27/2024</a:t>
+              <a:t>12/3/2024</a:t>
             </a:fld>
             <a:endParaRPr kumimoji="0" lang="en-US" dirty="0">
               <a:latin typeface="Arial" panose="020B0604020202020204" pitchFamily="34" charset="0"/>
@@ -14869,7 +14783,7 @@
                 <a:latin typeface="Arial" panose="020B0604020202020204" pitchFamily="34" charset="0"/>
                 <a:cs typeface="Arial" panose="020B0604020202020204" pitchFamily="34" charset="0"/>
               </a:rPr>
-              <a:t>11/27/2024</a:t>
+              <a:t>12/3/2024</a:t>
             </a:fld>
             <a:endParaRPr kumimoji="0" lang="en-US" dirty="0">
               <a:latin typeface="Arial" panose="020B0604020202020204" pitchFamily="34" charset="0"/>
@@ -15336,7 +15250,7 @@
                 <a:latin typeface="Arial" panose="020B0604020202020204" pitchFamily="34" charset="0"/>
                 <a:cs typeface="Arial" panose="020B0604020202020204" pitchFamily="34" charset="0"/>
               </a:rPr>
-              <a:t>11/27/2024</a:t>
+              <a:t>12/3/2024</a:t>
             </a:fld>
             <a:endParaRPr kumimoji="0" lang="en-US" dirty="0">
               <a:latin typeface="Arial" panose="020B0604020202020204" pitchFamily="34" charset="0"/>
@@ -15631,7 +15545,7 @@
                 <a:latin typeface="Arial" panose="020B0604020202020204" pitchFamily="34" charset="0"/>
                 <a:cs typeface="Arial" panose="020B0604020202020204" pitchFamily="34" charset="0"/>
               </a:rPr>
-              <a:t>11/27/2024</a:t>
+              <a:t>12/3/2024</a:t>
             </a:fld>
             <a:endParaRPr kumimoji="0" lang="en-US" dirty="0">
               <a:latin typeface="Arial" panose="020B0604020202020204" pitchFamily="34" charset="0"/>
@@ -15921,7 +15835,7 @@
                 <a:latin typeface="Arial" panose="020B0604020202020204" pitchFamily="34" charset="0"/>
                 <a:cs typeface="Arial" panose="020B0604020202020204" pitchFamily="34" charset="0"/>
               </a:rPr>
-              <a:t>11/27/2024</a:t>
+              <a:t>12/3/2024</a:t>
             </a:fld>
             <a:endParaRPr kumimoji="0" lang="en-US" dirty="0">
               <a:latin typeface="Arial" panose="020B0604020202020204" pitchFamily="34" charset="0"/>
@@ -16232,7 +16146,7 @@
                 <a:latin typeface="Arial" panose="020B0604020202020204" pitchFamily="34" charset="0"/>
                 <a:cs typeface="Arial" panose="020B0604020202020204" pitchFamily="34" charset="0"/>
               </a:rPr>
-              <a:t>11/27/2024</a:t>
+              <a:t>12/3/2024</a:t>
             </a:fld>
             <a:endParaRPr kumimoji="0" lang="en-US" dirty="0">
               <a:latin typeface="Arial" panose="020B0604020202020204" pitchFamily="34" charset="0"/>
@@ -16562,7 +16476,7 @@
                 <a:latin typeface="Arial" panose="020B0604020202020204" pitchFamily="34" charset="0"/>
                 <a:cs typeface="Arial" panose="020B0604020202020204" pitchFamily="34" charset="0"/>
               </a:rPr>
-              <a:t>11/27/2024</a:t>
+              <a:t>12/3/2024</a:t>
             </a:fld>
             <a:endParaRPr kumimoji="0" lang="en-US" dirty="0">
               <a:latin typeface="Arial" panose="020B0604020202020204" pitchFamily="34" charset="0"/>
@@ -16601,336 +16515,6 @@
               </a:rPr>
               <a:pPr algn="r"/>
               <a:t>24</a:t>
-            </a:fld>
-            <a:endParaRPr kumimoji="0" lang="en-US" dirty="0"/>
-          </a:p>
-        </p:txBody>
-      </p:sp>
-      <p:sp>
-        <p:nvSpPr>
-          <p:cNvPr id="8" name="文字方塊 7">
-            <a:extLst>
-              <a:ext uri="{FF2B5EF4-FFF2-40B4-BE49-F238E27FC236}">
-                <a16:creationId xmlns:a16="http://schemas.microsoft.com/office/drawing/2014/main" id="{80CF54A5-B916-9CEC-490F-53F9FFACC280}"/>
-              </a:ext>
-            </a:extLst>
-          </p:cNvPr>
-          <p:cNvSpPr txBox="1"/>
-          <p:nvPr/>
-        </p:nvSpPr>
-        <p:spPr>
-          <a:xfrm>
-            <a:off x="533400" y="1219200"/>
-            <a:ext cx="8229600" cy="1569660"/>
-          </a:xfrm>
-          <a:prstGeom prst="rect">
-            <a:avLst/>
-          </a:prstGeom>
-          <a:noFill/>
-        </p:spPr>
-        <p:txBody>
-          <a:bodyPr wrap="square" rtlCol="0">
-            <a:spAutoFit/>
-          </a:bodyPr>
-          <a:lstStyle/>
-          <a:p>
-            <a:pPr marL="457200" indent="-457200">
-              <a:buFont typeface="Arial" panose="020B0604020202020204" pitchFamily="34" charset="0"/>
-              <a:buChar char="•"/>
-            </a:pPr>
-            <a:r>
-              <a:rPr lang="zh-TW" altLang="en-US" sz="3200" b="0" i="0" dirty="0">
-                <a:effectLst/>
-                <a:latin typeface="微軟正黑體" panose="020B0604030504040204" pitchFamily="34" charset="-120"/>
-                <a:ea typeface="微軟正黑體" panose="020B0604030504040204" pitchFamily="34" charset="-120"/>
-              </a:rPr>
-              <a:t>將文字對送入</a:t>
-            </a:r>
-            <a:r>
-              <a:rPr lang="en-US" altLang="zh-TW" sz="3200" b="0" i="0" dirty="0">
-                <a:effectLst/>
-                <a:latin typeface="微軟正黑體" panose="020B0604030504040204" pitchFamily="34" charset="-120"/>
-                <a:ea typeface="微軟正黑體" panose="020B0604030504040204" pitchFamily="34" charset="-120"/>
-              </a:rPr>
-              <a:t>reward model</a:t>
-            </a:r>
-            <a:r>
-              <a:rPr lang="zh-TW" altLang="en-US" sz="3200" b="0" i="0" dirty="0">
-                <a:effectLst/>
-                <a:latin typeface="微軟正黑體" panose="020B0604030504040204" pitchFamily="34" charset="-120"/>
-                <a:ea typeface="微軟正黑體" panose="020B0604030504040204" pitchFamily="34" charset="-120"/>
-              </a:rPr>
-              <a:t>後就會得到</a:t>
-            </a:r>
-            <a:r>
-              <a:rPr lang="en-US" altLang="zh-TW" sz="3200" b="0" i="0" dirty="0">
-                <a:effectLst/>
-                <a:latin typeface="微軟正黑體" panose="020B0604030504040204" pitchFamily="34" charset="-120"/>
-                <a:ea typeface="微軟正黑體" panose="020B0604030504040204" pitchFamily="34" charset="-120"/>
-              </a:rPr>
-              <a:t>reward</a:t>
-            </a:r>
-            <a:r>
-              <a:rPr lang="zh-TW" altLang="en-US" sz="3200" b="0" i="0" dirty="0">
-                <a:effectLst/>
-                <a:latin typeface="微軟正黑體" panose="020B0604030504040204" pitchFamily="34" charset="-120"/>
-                <a:ea typeface="微軟正黑體" panose="020B0604030504040204" pitchFamily="34" charset="-120"/>
-              </a:rPr>
-              <a:t>分數，</a:t>
-            </a:r>
-            <a:r>
-              <a:rPr lang="en-US" altLang="zh-TW" sz="3200" b="0" i="0" dirty="0">
-                <a:effectLst/>
-                <a:latin typeface="微軟正黑體" panose="020B0604030504040204" pitchFamily="34" charset="-120"/>
-                <a:ea typeface="微軟正黑體" panose="020B0604030504040204" pitchFamily="34" charset="-120"/>
-              </a:rPr>
-              <a:t>RL Policy</a:t>
-            </a:r>
-            <a:r>
-              <a:rPr lang="zh-TW" altLang="en-US" sz="3200" b="0" i="0" dirty="0">
-                <a:effectLst/>
-                <a:latin typeface="微軟正黑體" panose="020B0604030504040204" pitchFamily="34" charset="-120"/>
-                <a:ea typeface="微軟正黑體" panose="020B0604030504040204" pitchFamily="34" charset="-120"/>
-              </a:rPr>
-              <a:t>會一直修正以獲得最高的</a:t>
-            </a:r>
-            <a:r>
-              <a:rPr lang="en-US" altLang="zh-TW" sz="3200" b="0" i="0" dirty="0">
-                <a:effectLst/>
-                <a:latin typeface="微軟正黑體" panose="020B0604030504040204" pitchFamily="34" charset="-120"/>
-                <a:ea typeface="微軟正黑體" panose="020B0604030504040204" pitchFamily="34" charset="-120"/>
-              </a:rPr>
-              <a:t>reward</a:t>
-            </a:r>
-          </a:p>
-        </p:txBody>
-      </p:sp>
-      <p:pic>
-        <p:nvPicPr>
-          <p:cNvPr id="6" name="圖片 5">
-            <a:extLst>
-              <a:ext uri="{FF2B5EF4-FFF2-40B4-BE49-F238E27FC236}">
-                <a16:creationId xmlns:a16="http://schemas.microsoft.com/office/drawing/2014/main" id="{D93ABA3F-C58C-6FED-F02E-83162DEB5AD5}"/>
-              </a:ext>
-            </a:extLst>
-          </p:cNvPr>
-          <p:cNvPicPr>
-            <a:picLocks noChangeAspect="1"/>
-          </p:cNvPicPr>
-          <p:nvPr/>
-        </p:nvPicPr>
-        <p:blipFill>
-          <a:blip r:embed="rId3"/>
-          <a:stretch>
-            <a:fillRect/>
-          </a:stretch>
-        </p:blipFill>
-        <p:spPr>
-          <a:xfrm>
-            <a:off x="876892" y="2711614"/>
-            <a:ext cx="7696200" cy="3872087"/>
-          </a:xfrm>
-          <a:prstGeom prst="rect">
-            <a:avLst/>
-          </a:prstGeom>
-        </p:spPr>
-      </p:pic>
-    </p:spTree>
-    <p:extLst>
-      <p:ext uri="{BB962C8B-B14F-4D97-AF65-F5344CB8AC3E}">
-        <p14:creationId xmlns:p14="http://schemas.microsoft.com/office/powerpoint/2010/main" val="3440503212"/>
-      </p:ext>
-    </p:extLst>
-  </p:cSld>
-  <p:clrMapOvr>
-    <a:masterClrMapping/>
-  </p:clrMapOvr>
-  <p:transition>
-    <p:fade/>
-  </p:transition>
-</p:sld>
-</file>
-
-<file path=ppt/slides/slide25.xml><?xml version="1.0" encoding="utf-8"?>
-<p:sld xmlns:a="http://schemas.openxmlformats.org/drawingml/2006/main" xmlns:r="http://schemas.openxmlformats.org/officeDocument/2006/relationships" xmlns:p="http://schemas.openxmlformats.org/presentationml/2006/main">
-  <p:cSld>
-    <p:spTree>
-      <p:nvGrpSpPr>
-        <p:cNvPr id="1" name=""/>
-        <p:cNvGrpSpPr/>
-        <p:nvPr/>
-      </p:nvGrpSpPr>
-      <p:grpSpPr>
-        <a:xfrm>
-          <a:off x="0" y="0"/>
-          <a:ext cx="0" cy="0"/>
-          <a:chOff x="0" y="0"/>
-          <a:chExt cx="0" cy="0"/>
-        </a:xfrm>
-      </p:grpSpPr>
-      <p:sp>
-        <p:nvSpPr>
-          <p:cNvPr id="4" name="文字版面配置區 2"/>
-          <p:cNvSpPr txBox="1">
-            <a:spLocks/>
-          </p:cNvSpPr>
-          <p:nvPr/>
-        </p:nvSpPr>
-        <p:spPr>
-          <a:xfrm>
-            <a:off x="2209800" y="54165"/>
-            <a:ext cx="6553200" cy="990600"/>
-          </a:xfrm>
-          <a:prstGeom prst="rect">
-            <a:avLst/>
-          </a:prstGeom>
-        </p:spPr>
-        <p:txBody>
-          <a:bodyPr tIns="91440" bIns="91440" anchor="b" anchorCtr="0">
-            <a:noAutofit/>
-          </a:bodyPr>
-          <a:lstStyle/>
-          <a:p>
-            <a:r>
-              <a:rPr kumimoji="1" lang="zh-TW" altLang="en-US" sz="4800" b="1" dirty="0">
-                <a:solidFill>
-                  <a:srgbClr val="00B0F0"/>
-                </a:solidFill>
-                <a:effectLst>
-                  <a:outerShdw blurRad="38100" dist="38100" dir="2700000" algn="tl">
-                    <a:srgbClr val="000000">
-                      <a:alpha val="43137"/>
-                    </a:srgbClr>
-                  </a:outerShdw>
-                </a:effectLst>
-                <a:latin typeface="微軟正黑體" panose="020B0604030504040204" pitchFamily="34" charset="-120"/>
-                <a:ea typeface="微軟正黑體" panose="020B0604030504040204" pitchFamily="34" charset="-120"/>
-                <a:cs typeface="Heiti TC Light"/>
-              </a:rPr>
-              <a:t>使用</a:t>
-            </a:r>
-            <a:r>
-              <a:rPr kumimoji="1" lang="en-US" altLang="zh-TW" sz="4800" b="1" dirty="0">
-                <a:solidFill>
-                  <a:srgbClr val="00B0F0"/>
-                </a:solidFill>
-                <a:effectLst>
-                  <a:outerShdw blurRad="38100" dist="38100" dir="2700000" algn="tl">
-                    <a:srgbClr val="000000">
-                      <a:alpha val="43137"/>
-                    </a:srgbClr>
-                  </a:outerShdw>
-                </a:effectLst>
-                <a:latin typeface="微軟正黑體" panose="020B0604030504040204" pitchFamily="34" charset="-120"/>
-                <a:ea typeface="微軟正黑體" panose="020B0604030504040204" pitchFamily="34" charset="-120"/>
-                <a:cs typeface="Heiti TC Light"/>
-              </a:rPr>
-              <a:t>RLHF</a:t>
-            </a:r>
-            <a:r>
-              <a:rPr kumimoji="1" lang="zh-TW" altLang="en-US" sz="4800" b="1" dirty="0">
-                <a:solidFill>
-                  <a:srgbClr val="00B0F0"/>
-                </a:solidFill>
-                <a:effectLst>
-                  <a:outerShdw blurRad="38100" dist="38100" dir="2700000" algn="tl">
-                    <a:srgbClr val="000000">
-                      <a:alpha val="43137"/>
-                    </a:srgbClr>
-                  </a:outerShdw>
-                </a:effectLst>
-                <a:latin typeface="微軟正黑體" panose="020B0604030504040204" pitchFamily="34" charset="-120"/>
-                <a:ea typeface="微軟正黑體" panose="020B0604030504040204" pitchFamily="34" charset="-120"/>
-                <a:cs typeface="Heiti TC Light"/>
-              </a:rPr>
-              <a:t>的作法</a:t>
-            </a:r>
-            <a:endParaRPr kumimoji="1" lang="en-US" altLang="zh-TW" sz="4800" b="1" dirty="0">
-              <a:solidFill>
-                <a:srgbClr val="00B0F0"/>
-              </a:solidFill>
-              <a:effectLst>
-                <a:outerShdw blurRad="38100" dist="38100" dir="2700000" algn="tl">
-                  <a:srgbClr val="000000">
-                    <a:alpha val="43137"/>
-                  </a:srgbClr>
-                </a:outerShdw>
-              </a:effectLst>
-              <a:latin typeface="微軟正黑體" panose="020B0604030504040204" pitchFamily="34" charset="-120"/>
-              <a:ea typeface="微軟正黑體" panose="020B0604030504040204" pitchFamily="34" charset="-120"/>
-              <a:cs typeface="Heiti TC Light"/>
-            </a:endParaRPr>
-          </a:p>
-        </p:txBody>
-      </p:sp>
-      <p:sp>
-        <p:nvSpPr>
-          <p:cNvPr id="3" name="日期版面配置區 2">
-            <a:extLst>
-              <a:ext uri="{FF2B5EF4-FFF2-40B4-BE49-F238E27FC236}">
-                <a16:creationId xmlns:a16="http://schemas.microsoft.com/office/drawing/2014/main" id="{1C536CB5-3C58-6CF1-767E-952B76F12DEE}"/>
-              </a:ext>
-            </a:extLst>
-          </p:cNvPr>
-          <p:cNvSpPr>
-            <a:spLocks noGrp="1"/>
-          </p:cNvSpPr>
-          <p:nvPr>
-            <p:ph type="dt" sz="half" idx="12"/>
-          </p:nvPr>
-        </p:nvSpPr>
-        <p:spPr/>
-        <p:txBody>
-          <a:bodyPr/>
-          <a:lstStyle/>
-          <a:p>
-            <a:fld id="{0B520B05-2240-4566-BE2A-9338980FE8EB}" type="datetime1">
-              <a:rPr kumimoji="0" lang="en-US" altLang="zh-TW" sz="1200" smtClean="0">
-                <a:solidFill>
-                  <a:schemeClr val="tx2"/>
-                </a:solidFill>
-                <a:latin typeface="Arial" panose="020B0604020202020204" pitchFamily="34" charset="0"/>
-                <a:cs typeface="Arial" panose="020B0604020202020204" pitchFamily="34" charset="0"/>
-              </a:rPr>
-              <a:t>11/27/2024</a:t>
-            </a:fld>
-            <a:endParaRPr kumimoji="0" lang="en-US" dirty="0">
-              <a:latin typeface="Arial" panose="020B0604020202020204" pitchFamily="34" charset="0"/>
-              <a:cs typeface="Arial" panose="020B0604020202020204" pitchFamily="34" charset="0"/>
-            </a:endParaRPr>
-          </a:p>
-        </p:txBody>
-      </p:sp>
-      <p:sp>
-        <p:nvSpPr>
-          <p:cNvPr id="7" name="投影片編號版面配置區 6">
-            <a:extLst>
-              <a:ext uri="{FF2B5EF4-FFF2-40B4-BE49-F238E27FC236}">
-                <a16:creationId xmlns:a16="http://schemas.microsoft.com/office/drawing/2014/main" id="{DA316F56-AF12-D872-611F-78AE7ACCBF93}"/>
-              </a:ext>
-            </a:extLst>
-          </p:cNvPr>
-          <p:cNvSpPr>
-            <a:spLocks noGrp="1"/>
-          </p:cNvSpPr>
-          <p:nvPr>
-            <p:ph type="sldNum" sz="quarter" idx="13"/>
-          </p:nvPr>
-        </p:nvSpPr>
-        <p:spPr/>
-        <p:txBody>
-          <a:bodyPr/>
-          <a:lstStyle/>
-          <a:p>
-            <a:pPr algn="r"/>
-            <a:fld id="{F99EC173-99AE-4773-AB25-02E469A13EAE}" type="slidenum">
-              <a:rPr kumimoji="0" lang="en-US" sz="1200" smtClean="0">
-                <a:solidFill>
-                  <a:schemeClr val="tx2"/>
-                </a:solidFill>
-              </a:rPr>
-              <a:pPr algn="r"/>
-              <a:t>25</a:t>
             </a:fld>
             <a:endParaRPr kumimoji="0" lang="en-US" dirty="0"/>
           </a:p>
@@ -17047,7 +16631,7 @@
 </p:sld>
 </file>
 
-<file path=ppt/slides/slide26.xml><?xml version="1.0" encoding="utf-8"?>
+<file path=ppt/slides/slide25.xml><?xml version="1.0" encoding="utf-8"?>
 <p:sld xmlns:a="http://schemas.openxmlformats.org/drawingml/2006/main" xmlns:r="http://schemas.openxmlformats.org/officeDocument/2006/relationships" xmlns:p="http://schemas.openxmlformats.org/presentationml/2006/main">
   <p:cSld>
     <p:spTree>
@@ -17170,7 +16754,7 @@
                 <a:latin typeface="Arial" panose="020B0604020202020204" pitchFamily="34" charset="0"/>
                 <a:cs typeface="Arial" panose="020B0604020202020204" pitchFamily="34" charset="0"/>
               </a:rPr>
-              <a:t>11/27/2024</a:t>
+              <a:t>12/3/2024</a:t>
             </a:fld>
             <a:endParaRPr kumimoji="0" lang="en-US" dirty="0">
               <a:latin typeface="Arial" panose="020B0604020202020204" pitchFamily="34" charset="0"/>
@@ -17208,7 +16792,7 @@
                 </a:solidFill>
               </a:rPr>
               <a:pPr algn="r"/>
-              <a:t>26</a:t>
+              <a:t>25</a:t>
             </a:fld>
             <a:endParaRPr kumimoji="0" lang="en-US" dirty="0"/>
           </a:p>
@@ -17461,6 +17045,528 @@
 </p:sld>
 </file>
 
+<file path=ppt/slides/slide26.xml><?xml version="1.0" encoding="utf-8"?>
+<p:sld xmlns:a="http://schemas.openxmlformats.org/drawingml/2006/main" xmlns:r="http://schemas.openxmlformats.org/officeDocument/2006/relationships" xmlns:p="http://schemas.openxmlformats.org/presentationml/2006/main">
+  <p:cSld>
+    <p:spTree>
+      <p:nvGrpSpPr>
+        <p:cNvPr id="1" name=""/>
+        <p:cNvGrpSpPr/>
+        <p:nvPr/>
+      </p:nvGrpSpPr>
+      <p:grpSpPr>
+        <a:xfrm>
+          <a:off x="0" y="0"/>
+          <a:ext cx="0" cy="0"/>
+          <a:chOff x="0" y="0"/>
+          <a:chExt cx="0" cy="0"/>
+        </a:xfrm>
+      </p:grpSpPr>
+      <p:sp>
+        <p:nvSpPr>
+          <p:cNvPr id="4" name="文字版面配置區 2"/>
+          <p:cNvSpPr txBox="1">
+            <a:spLocks/>
+          </p:cNvSpPr>
+          <p:nvPr/>
+        </p:nvSpPr>
+        <p:spPr>
+          <a:xfrm>
+            <a:off x="1962150" y="425393"/>
+            <a:ext cx="5943600" cy="990600"/>
+          </a:xfrm>
+          <a:prstGeom prst="rect">
+            <a:avLst/>
+          </a:prstGeom>
+        </p:spPr>
+        <p:txBody>
+          <a:bodyPr tIns="91440" bIns="91440" anchor="b" anchorCtr="0">
+            <a:noAutofit/>
+          </a:bodyPr>
+          <a:lstStyle/>
+          <a:p>
+            <a:r>
+              <a:rPr kumimoji="1" lang="zh-TW" altLang="en-US" sz="4800" b="1" dirty="0">
+                <a:solidFill>
+                  <a:srgbClr val="00B0F0"/>
+                </a:solidFill>
+                <a:effectLst>
+                  <a:outerShdw blurRad="38100" dist="38100" dir="2700000" algn="tl">
+                    <a:srgbClr val="000000">
+                      <a:alpha val="43137"/>
+                    </a:srgbClr>
+                  </a:outerShdw>
+                </a:effectLst>
+                <a:latin typeface="微軟正黑體" panose="020B0604030504040204" pitchFamily="34" charset="-120"/>
+                <a:ea typeface="微軟正黑體" panose="020B0604030504040204" pitchFamily="34" charset="-120"/>
+                <a:cs typeface="Heiti TC Light"/>
+              </a:rPr>
+              <a:t>大型語言模的進化</a:t>
+            </a:r>
+            <a:endParaRPr kumimoji="1" lang="en-US" altLang="zh-TW" sz="4800" b="1" dirty="0">
+              <a:solidFill>
+                <a:srgbClr val="00B0F0"/>
+              </a:solidFill>
+              <a:effectLst>
+                <a:outerShdw blurRad="38100" dist="38100" dir="2700000" algn="tl">
+                  <a:srgbClr val="000000">
+                    <a:alpha val="43137"/>
+                  </a:srgbClr>
+                </a:outerShdw>
+              </a:effectLst>
+              <a:latin typeface="微軟正黑體" panose="020B0604030504040204" pitchFamily="34" charset="-120"/>
+              <a:ea typeface="微軟正黑體" panose="020B0604030504040204" pitchFamily="34" charset="-120"/>
+              <a:cs typeface="Heiti TC Light"/>
+            </a:endParaRPr>
+          </a:p>
+        </p:txBody>
+      </p:sp>
+      <p:sp>
+        <p:nvSpPr>
+          <p:cNvPr id="3" name="日期版面配置區 2">
+            <a:extLst>
+              <a:ext uri="{FF2B5EF4-FFF2-40B4-BE49-F238E27FC236}">
+                <a16:creationId xmlns:a16="http://schemas.microsoft.com/office/drawing/2014/main" id="{1C536CB5-3C58-6CF1-767E-952B76F12DEE}"/>
+              </a:ext>
+            </a:extLst>
+          </p:cNvPr>
+          <p:cNvSpPr>
+            <a:spLocks noGrp="1"/>
+          </p:cNvSpPr>
+          <p:nvPr>
+            <p:ph type="dt" sz="half" idx="12"/>
+          </p:nvPr>
+        </p:nvSpPr>
+        <p:spPr>
+          <a:xfrm>
+            <a:off x="47625" y="6918325"/>
+            <a:ext cx="2438400" cy="244475"/>
+          </a:xfrm>
+        </p:spPr>
+        <p:txBody>
+          <a:bodyPr/>
+          <a:lstStyle/>
+          <a:p>
+            <a:fld id="{0B520B05-2240-4566-BE2A-9338980FE8EB}" type="datetime1">
+              <a:rPr kumimoji="0" lang="en-US" altLang="zh-TW" sz="1200" smtClean="0">
+                <a:solidFill>
+                  <a:schemeClr val="tx2"/>
+                </a:solidFill>
+                <a:latin typeface="Arial" panose="020B0604020202020204" pitchFamily="34" charset="0"/>
+                <a:cs typeface="Arial" panose="020B0604020202020204" pitchFamily="34" charset="0"/>
+              </a:rPr>
+              <a:t>12/3/2024</a:t>
+            </a:fld>
+            <a:endParaRPr kumimoji="0" lang="en-US" dirty="0">
+              <a:latin typeface="Arial" panose="020B0604020202020204" pitchFamily="34" charset="0"/>
+              <a:cs typeface="Arial" panose="020B0604020202020204" pitchFamily="34" charset="0"/>
+            </a:endParaRPr>
+          </a:p>
+        </p:txBody>
+      </p:sp>
+      <p:sp>
+        <p:nvSpPr>
+          <p:cNvPr id="7" name="投影片編號版面配置區 6">
+            <a:extLst>
+              <a:ext uri="{FF2B5EF4-FFF2-40B4-BE49-F238E27FC236}">
+                <a16:creationId xmlns:a16="http://schemas.microsoft.com/office/drawing/2014/main" id="{DA316F56-AF12-D872-611F-78AE7ACCBF93}"/>
+              </a:ext>
+            </a:extLst>
+          </p:cNvPr>
+          <p:cNvSpPr>
+            <a:spLocks noGrp="1"/>
+          </p:cNvSpPr>
+          <p:nvPr>
+            <p:ph type="sldNum" sz="quarter" idx="13"/>
+          </p:nvPr>
+        </p:nvSpPr>
+        <p:spPr>
+          <a:xfrm>
+            <a:off x="8153400" y="6918325"/>
+            <a:ext cx="914400" cy="244475"/>
+          </a:xfrm>
+        </p:spPr>
+        <p:txBody>
+          <a:bodyPr/>
+          <a:lstStyle/>
+          <a:p>
+            <a:pPr algn="r"/>
+            <a:fld id="{F99EC173-99AE-4773-AB25-02E469A13EAE}" type="slidenum">
+              <a:rPr kumimoji="0" lang="en-US" sz="1200" smtClean="0">
+                <a:solidFill>
+                  <a:schemeClr val="tx2"/>
+                </a:solidFill>
+              </a:rPr>
+              <a:pPr algn="r"/>
+              <a:t>26</a:t>
+            </a:fld>
+            <a:endParaRPr kumimoji="0" lang="en-US" dirty="0"/>
+          </a:p>
+        </p:txBody>
+      </p:sp>
+      <p:sp>
+        <p:nvSpPr>
+          <p:cNvPr id="2" name="文字方塊 1">
+            <a:extLst>
+              <a:ext uri="{FF2B5EF4-FFF2-40B4-BE49-F238E27FC236}">
+                <a16:creationId xmlns:a16="http://schemas.microsoft.com/office/drawing/2014/main" id="{E17C39F0-9527-522B-E55B-DAC3D2425E05}"/>
+              </a:ext>
+            </a:extLst>
+          </p:cNvPr>
+          <p:cNvSpPr txBox="1"/>
+          <p:nvPr/>
+        </p:nvSpPr>
+        <p:spPr>
+          <a:xfrm>
+            <a:off x="609600" y="1524000"/>
+            <a:ext cx="7924800" cy="5016758"/>
+          </a:xfrm>
+          <a:prstGeom prst="rect">
+            <a:avLst/>
+          </a:prstGeom>
+          <a:noFill/>
+        </p:spPr>
+        <p:txBody>
+          <a:bodyPr wrap="square" rtlCol="0">
+            <a:spAutoFit/>
+          </a:bodyPr>
+          <a:lstStyle/>
+          <a:p>
+            <a:pPr marL="360363" indent="-360363">
+              <a:buFont typeface="Arial" panose="020B0604020202020204" pitchFamily="34" charset="0"/>
+              <a:buChar char="•"/>
+            </a:pPr>
+            <a:r>
+              <a:rPr lang="zh-TW" altLang="en-US" sz="3200" b="0" i="0" dirty="0">
+                <a:effectLst/>
+                <a:latin typeface="微軟正黑體" panose="020B0604030504040204" pitchFamily="34" charset="-120"/>
+                <a:ea typeface="微軟正黑體" panose="020B0604030504040204" pitchFamily="34" charset="-120"/>
+              </a:rPr>
+              <a:t>只有產生下一個</a:t>
+            </a:r>
+            <a:r>
+              <a:rPr lang="en-US" altLang="zh-TW" sz="3200" b="0" i="0" dirty="0">
+                <a:effectLst/>
+                <a:latin typeface="微軟正黑體" panose="020B0604030504040204" pitchFamily="34" charset="-120"/>
+                <a:ea typeface="微軟正黑體" panose="020B0604030504040204" pitchFamily="34" charset="-120"/>
+              </a:rPr>
+              <a:t>token</a:t>
+            </a:r>
+            <a:r>
+              <a:rPr lang="zh-TW" altLang="en-US" sz="3200" b="0" i="0" dirty="0">
+                <a:effectLst/>
+                <a:latin typeface="微軟正黑體" panose="020B0604030504040204" pitchFamily="34" charset="-120"/>
+                <a:ea typeface="微軟正黑體" panose="020B0604030504040204" pitchFamily="34" charset="-120"/>
+              </a:rPr>
+              <a:t>能力的</a:t>
+            </a:r>
+            <a:r>
+              <a:rPr lang="en-US" altLang="zh-TW" sz="3200" b="0" i="0" dirty="0" err="1">
+                <a:effectLst/>
+                <a:latin typeface="微軟正黑體" panose="020B0604030504040204" pitchFamily="34" charset="-120"/>
+                <a:ea typeface="微軟正黑體" panose="020B0604030504040204" pitchFamily="34" charset="-120"/>
+              </a:rPr>
+              <a:t>llm</a:t>
+            </a:r>
+            <a:r>
+              <a:rPr lang="en-US" altLang="zh-TW" sz="3200" b="0" i="0" dirty="0">
+                <a:effectLst/>
+                <a:latin typeface="微軟正黑體" panose="020B0604030504040204" pitchFamily="34" charset="-120"/>
+                <a:ea typeface="微軟正黑體" panose="020B0604030504040204" pitchFamily="34" charset="-120"/>
+              </a:rPr>
+              <a:t>(base)</a:t>
+            </a:r>
+            <a:r>
+              <a:rPr lang="zh-TW" altLang="en-US" sz="3200" b="0" i="0" dirty="0">
+                <a:effectLst/>
+                <a:latin typeface="微軟正黑體" panose="020B0604030504040204" pitchFamily="34" charset="-120"/>
+                <a:ea typeface="微軟正黑體" panose="020B0604030504040204" pitchFamily="34" charset="-120"/>
+              </a:rPr>
+              <a:t>，如</a:t>
+            </a:r>
+            <a:r>
+              <a:rPr lang="en-US" altLang="zh-TW" sz="3200" dirty="0">
+                <a:latin typeface="微軟正黑體" panose="020B0604030504040204" pitchFamily="34" charset="-120"/>
+                <a:ea typeface="微軟正黑體" panose="020B0604030504040204" pitchFamily="34" charset="-120"/>
+              </a:rPr>
+              <a:t>GPT</a:t>
+            </a:r>
+            <a:r>
+              <a:rPr lang="zh-TW" altLang="en-US" sz="3200" dirty="0">
+                <a:latin typeface="微軟正黑體" panose="020B0604030504040204" pitchFamily="34" charset="-120"/>
+                <a:ea typeface="微軟正黑體" panose="020B0604030504040204" pitchFamily="34" charset="-120"/>
+              </a:rPr>
+              <a:t>、</a:t>
+            </a:r>
+            <a:r>
+              <a:rPr lang="en-US" altLang="zh-TW" sz="3200" dirty="0">
+                <a:latin typeface="微軟正黑體" panose="020B0604030504040204" pitchFamily="34" charset="-120"/>
+                <a:ea typeface="微軟正黑體" panose="020B0604030504040204" pitchFamily="34" charset="-120"/>
+              </a:rPr>
+              <a:t>GPT2</a:t>
+            </a:r>
+            <a:r>
+              <a:rPr lang="zh-TW" altLang="en-US" sz="3200" dirty="0">
+                <a:latin typeface="微軟正黑體" panose="020B0604030504040204" pitchFamily="34" charset="-120"/>
+                <a:ea typeface="微軟正黑體" panose="020B0604030504040204" pitchFamily="34" charset="-120"/>
+              </a:rPr>
+              <a:t>、</a:t>
+            </a:r>
+            <a:r>
+              <a:rPr lang="en-US" altLang="zh-TW" sz="3200" dirty="0">
+                <a:latin typeface="微軟正黑體" panose="020B0604030504040204" pitchFamily="34" charset="-120"/>
+                <a:ea typeface="微軟正黑體" panose="020B0604030504040204" pitchFamily="34" charset="-120"/>
+              </a:rPr>
+              <a:t>GPT3</a:t>
+            </a:r>
+          </a:p>
+          <a:p>
+            <a:pPr marL="360363" indent="-360363">
+              <a:buFont typeface="Arial" panose="020B0604020202020204" pitchFamily="34" charset="0"/>
+              <a:buChar char="•"/>
+            </a:pPr>
+            <a:r>
+              <a:rPr lang="zh-TW" altLang="en-US" sz="3200" dirty="0">
+                <a:latin typeface="微軟正黑體" panose="020B0604030504040204" pitchFamily="34" charset="-120"/>
+                <a:ea typeface="微軟正黑體" panose="020B0604030504040204" pitchFamily="34" charset="-120"/>
+              </a:rPr>
+              <a:t>經過</a:t>
+            </a:r>
+            <a:r>
+              <a:rPr lang="en-US" altLang="zh-TW" sz="3200" dirty="0" err="1">
+                <a:latin typeface="微軟正黑體" panose="020B0604030504040204" pitchFamily="34" charset="-120"/>
+                <a:ea typeface="微軟正黑體" panose="020B0604030504040204" pitchFamily="34" charset="-120"/>
+              </a:rPr>
+              <a:t>sft</a:t>
+            </a:r>
+            <a:r>
+              <a:rPr lang="zh-TW" altLang="en-US" sz="3200" dirty="0">
+                <a:latin typeface="微軟正黑體" panose="020B0604030504040204" pitchFamily="34" charset="-120"/>
+                <a:ea typeface="微軟正黑體" panose="020B0604030504040204" pitchFamily="34" charset="-120"/>
+              </a:rPr>
+              <a:t>的</a:t>
+            </a:r>
+            <a:r>
+              <a:rPr lang="en-US" altLang="zh-TW" sz="3200" dirty="0" err="1">
+                <a:latin typeface="微軟正黑體" panose="020B0604030504040204" pitchFamily="34" charset="-120"/>
+                <a:ea typeface="微軟正黑體" panose="020B0604030504040204" pitchFamily="34" charset="-120"/>
+              </a:rPr>
+              <a:t>llm</a:t>
+            </a:r>
+            <a:r>
+              <a:rPr lang="en-US" altLang="zh-TW" sz="3200" dirty="0">
+                <a:latin typeface="微軟正黑體" panose="020B0604030504040204" pitchFamily="34" charset="-120"/>
+                <a:ea typeface="微軟正黑體" panose="020B0604030504040204" pitchFamily="34" charset="-120"/>
+              </a:rPr>
+              <a:t>(instruction tuned)</a:t>
+            </a:r>
+            <a:r>
+              <a:rPr lang="zh-TW" altLang="en-US" sz="3200" dirty="0">
+                <a:latin typeface="微軟正黑體" panose="020B0604030504040204" pitchFamily="34" charset="-120"/>
+                <a:ea typeface="微軟正黑體" panose="020B0604030504040204" pitchFamily="34" charset="-120"/>
+              </a:rPr>
+              <a:t>，如</a:t>
+            </a:r>
+            <a:r>
+              <a:rPr lang="en-US" altLang="zh-TW" sz="3200" dirty="0">
+                <a:latin typeface="微軟正黑體" panose="020B0604030504040204" pitchFamily="34" charset="-120"/>
+                <a:ea typeface="微軟正黑體" panose="020B0604030504040204" pitchFamily="34" charset="-120"/>
+              </a:rPr>
+              <a:t>FLAN</a:t>
+            </a:r>
+            <a:r>
+              <a:rPr lang="zh-TW" altLang="en-US" sz="3200" dirty="0">
+                <a:latin typeface="微軟正黑體" panose="020B0604030504040204" pitchFamily="34" charset="-120"/>
+                <a:ea typeface="微軟正黑體" panose="020B0604030504040204" pitchFamily="34" charset="-120"/>
+              </a:rPr>
+              <a:t>、</a:t>
+            </a:r>
+            <a:r>
+              <a:rPr lang="en-US" altLang="zh-TW" sz="3200" dirty="0">
+                <a:latin typeface="微軟正黑體" panose="020B0604030504040204" pitchFamily="34" charset="-120"/>
+                <a:ea typeface="微軟正黑體" panose="020B0604030504040204" pitchFamily="34" charset="-120"/>
+              </a:rPr>
+              <a:t>T0</a:t>
+            </a:r>
+            <a:r>
+              <a:rPr lang="zh-TW" altLang="en-US" sz="3200" dirty="0">
+                <a:latin typeface="微軟正黑體" panose="020B0604030504040204" pitchFamily="34" charset="-120"/>
+                <a:ea typeface="微軟正黑體" panose="020B0604030504040204" pitchFamily="34" charset="-120"/>
+              </a:rPr>
+              <a:t>、</a:t>
+            </a:r>
+            <a:r>
+              <a:rPr lang="en-US" altLang="zh-TW" sz="3200" dirty="0">
+                <a:latin typeface="微軟正黑體" panose="020B0604030504040204" pitchFamily="34" charset="-120"/>
+                <a:ea typeface="微軟正黑體" panose="020B0604030504040204" pitchFamily="34" charset="-120"/>
+              </a:rPr>
+              <a:t>llama2</a:t>
+            </a:r>
+          </a:p>
+          <a:p>
+            <a:pPr marL="360363" indent="-360363">
+              <a:buFont typeface="Arial" panose="020B0604020202020204" pitchFamily="34" charset="0"/>
+              <a:buChar char="•"/>
+            </a:pPr>
+            <a:r>
+              <a:rPr lang="zh-TW" altLang="en-US" sz="3200" dirty="0">
+                <a:latin typeface="微軟正黑體" panose="020B0604030504040204" pitchFamily="34" charset="-120"/>
+                <a:ea typeface="微軟正黑體" panose="020B0604030504040204" pitchFamily="34" charset="-120"/>
+              </a:rPr>
+              <a:t>然後找出所有</a:t>
+            </a:r>
+            <a:r>
+              <a:rPr lang="en-US" altLang="zh-TW" sz="3200" dirty="0">
+                <a:latin typeface="微軟正黑體" panose="020B0604030504040204" pitchFamily="34" charset="-120"/>
+                <a:ea typeface="微軟正黑體" panose="020B0604030504040204" pitchFamily="34" charset="-120"/>
+              </a:rPr>
+              <a:t>NLP</a:t>
+            </a:r>
+            <a:r>
+              <a:rPr lang="zh-TW" altLang="en-US" sz="3200" dirty="0">
+                <a:latin typeface="微軟正黑體" panose="020B0604030504040204" pitchFamily="34" charset="-120"/>
+                <a:ea typeface="微軟正黑體" panose="020B0604030504040204" pitchFamily="34" charset="-120"/>
+              </a:rPr>
+              <a:t>任務的類型，如分類、摘要、</a:t>
+            </a:r>
+            <a:r>
+              <a:rPr lang="en-US" altLang="zh-TW" sz="3200" dirty="0">
+                <a:latin typeface="微軟正黑體" panose="020B0604030504040204" pitchFamily="34" charset="-120"/>
+                <a:ea typeface="微軟正黑體" panose="020B0604030504040204" pitchFamily="34" charset="-120"/>
+              </a:rPr>
+              <a:t>QA</a:t>
+            </a:r>
+            <a:r>
+              <a:rPr lang="zh-TW" altLang="en-US" sz="3200" dirty="0">
+                <a:latin typeface="微軟正黑體" panose="020B0604030504040204" pitchFamily="34" charset="-120"/>
+                <a:ea typeface="微軟正黑體" panose="020B0604030504040204" pitchFamily="34" charset="-120"/>
+              </a:rPr>
+              <a:t>、</a:t>
+            </a:r>
+            <a:r>
+              <a:rPr lang="en-US" altLang="zh-TW" sz="3200" dirty="0">
+                <a:latin typeface="微軟正黑體" panose="020B0604030504040204" pitchFamily="34" charset="-120"/>
+                <a:ea typeface="微軟正黑體" panose="020B0604030504040204" pitchFamily="34" charset="-120"/>
+              </a:rPr>
+              <a:t>NER</a:t>
+            </a:r>
+            <a:r>
+              <a:rPr lang="zh-TW" altLang="en-US" sz="3200" dirty="0">
+                <a:latin typeface="微軟正黑體" panose="020B0604030504040204" pitchFamily="34" charset="-120"/>
+                <a:ea typeface="微軟正黑體" panose="020B0604030504040204" pitchFamily="34" charset="-120"/>
+              </a:rPr>
+              <a:t>、</a:t>
+            </a:r>
+            <a:r>
+              <a:rPr lang="en-US" altLang="zh-TW" sz="3200" dirty="0">
+                <a:latin typeface="微軟正黑體" panose="020B0604030504040204" pitchFamily="34" charset="-120"/>
+                <a:ea typeface="微軟正黑體" panose="020B0604030504040204" pitchFamily="34" charset="-120"/>
+              </a:rPr>
+              <a:t>CHAT.......</a:t>
+            </a:r>
+            <a:r>
+              <a:rPr lang="zh-TW" altLang="en-US" sz="3200" dirty="0">
+                <a:latin typeface="微軟正黑體" panose="020B0604030504040204" pitchFamily="34" charset="-120"/>
+                <a:ea typeface="微軟正黑體" panose="020B0604030504040204" pitchFamily="34" charset="-120"/>
+              </a:rPr>
+              <a:t>將這些所有資料集拿來</a:t>
+            </a:r>
+            <a:endParaRPr lang="en-US" altLang="zh-TW" sz="3200" dirty="0">
+              <a:latin typeface="微軟正黑體" panose="020B0604030504040204" pitchFamily="34" charset="-120"/>
+              <a:ea typeface="微軟正黑體" panose="020B0604030504040204" pitchFamily="34" charset="-120"/>
+            </a:endParaRPr>
+          </a:p>
+          <a:p>
+            <a:pPr marL="360363" lvl="1" indent="-360363">
+              <a:buFont typeface="Arial" panose="020B0604020202020204" pitchFamily="34" charset="0"/>
+              <a:buChar char="•"/>
+            </a:pPr>
+            <a:r>
+              <a:rPr lang="zh-TW" altLang="en-US" sz="3200" dirty="0">
+                <a:latin typeface="微軟正黑體" panose="020B0604030504040204" pitchFamily="34" charset="-120"/>
+                <a:ea typeface="微軟正黑體" panose="020B0604030504040204" pitchFamily="34" charset="-120"/>
+              </a:rPr>
+              <a:t>最後經過</a:t>
+            </a:r>
+            <a:r>
+              <a:rPr lang="en-US" altLang="zh-TW" sz="3200" dirty="0">
+                <a:latin typeface="微軟正黑體" panose="020B0604030504040204" pitchFamily="34" charset="-120"/>
+                <a:ea typeface="微軟正黑體" panose="020B0604030504040204" pitchFamily="34" charset="-120"/>
+              </a:rPr>
+              <a:t>RLHF</a:t>
+            </a:r>
+            <a:r>
+              <a:rPr lang="zh-TW" altLang="en-US" sz="3200" dirty="0">
+                <a:latin typeface="微軟正黑體" panose="020B0604030504040204" pitchFamily="34" charset="-120"/>
+                <a:ea typeface="微軟正黑體" panose="020B0604030504040204" pitchFamily="34" charset="-120"/>
+              </a:rPr>
+              <a:t>，成為多功能，符合價值觀的產品如</a:t>
+            </a:r>
+            <a:r>
+              <a:rPr lang="en-US" altLang="zh-TW" sz="3200" dirty="0" err="1">
+                <a:latin typeface="微軟正黑體" panose="020B0604030504040204" pitchFamily="34" charset="-120"/>
+                <a:ea typeface="微軟正黑體" panose="020B0604030504040204" pitchFamily="34" charset="-120"/>
+              </a:rPr>
+              <a:t>InstructGPT</a:t>
+            </a:r>
+            <a:r>
+              <a:rPr lang="zh-TW" altLang="en-US" sz="3200" dirty="0">
+                <a:latin typeface="微軟正黑體" panose="020B0604030504040204" pitchFamily="34" charset="-120"/>
+                <a:ea typeface="微軟正黑體" panose="020B0604030504040204" pitchFamily="34" charset="-120"/>
+              </a:rPr>
+              <a:t>、</a:t>
+            </a:r>
+            <a:r>
+              <a:rPr lang="en-US" altLang="zh-TW" sz="3200" dirty="0">
+                <a:latin typeface="微軟正黑體" panose="020B0604030504040204" pitchFamily="34" charset="-120"/>
+                <a:ea typeface="微軟正黑體" panose="020B0604030504040204" pitchFamily="34" charset="-120"/>
+              </a:rPr>
+              <a:t>ChatGPT</a:t>
+            </a:r>
+            <a:r>
+              <a:rPr lang="zh-TW" altLang="en-US" sz="3200" dirty="0">
+                <a:latin typeface="微軟正黑體" panose="020B0604030504040204" pitchFamily="34" charset="-120"/>
+                <a:ea typeface="微軟正黑體" panose="020B0604030504040204" pitchFamily="34" charset="-120"/>
+              </a:rPr>
+              <a:t>，</a:t>
+            </a:r>
+            <a:r>
+              <a:rPr lang="en-US" altLang="zh-TW" sz="3200" dirty="0">
+                <a:latin typeface="微軟正黑體" panose="020B0604030504040204" pitchFamily="34" charset="-120"/>
+                <a:ea typeface="微軟正黑體" panose="020B0604030504040204" pitchFamily="34" charset="-120"/>
+              </a:rPr>
+              <a:t>llama2-chat</a:t>
+            </a:r>
+            <a:r>
+              <a:rPr lang="zh-TW" altLang="en-US" sz="3200" dirty="0">
+                <a:latin typeface="微軟正黑體" panose="020B0604030504040204" pitchFamily="34" charset="-120"/>
+                <a:ea typeface="微軟正黑體" panose="020B0604030504040204" pitchFamily="34" charset="-120"/>
+              </a:rPr>
+              <a:t>等</a:t>
+            </a:r>
+            <a:endParaRPr lang="en-US" altLang="zh-TW" sz="3200" dirty="0">
+              <a:latin typeface="微軟正黑體" panose="020B0604030504040204" pitchFamily="34" charset="-120"/>
+              <a:ea typeface="微軟正黑體" panose="020B0604030504040204" pitchFamily="34" charset="-120"/>
+            </a:endParaRPr>
+          </a:p>
+        </p:txBody>
+      </p:sp>
+    </p:spTree>
+    <p:extLst>
+      <p:ext uri="{BB962C8B-B14F-4D97-AF65-F5344CB8AC3E}">
+        <p14:creationId xmlns:p14="http://schemas.microsoft.com/office/powerpoint/2010/main" val="1269779521"/>
+      </p:ext>
+    </p:extLst>
+  </p:cSld>
+  <p:clrMapOvr>
+    <a:masterClrMapping/>
+  </p:clrMapOvr>
+  <p:transition>
+    <p:fade/>
+  </p:transition>
+</p:sld>
+</file>
+
 <file path=ppt/slides/slide27.xml><?xml version="1.0" encoding="utf-8"?>
 <p:sld xmlns:a="http://schemas.openxmlformats.org/drawingml/2006/main" xmlns:r="http://schemas.openxmlformats.org/officeDocument/2006/relationships" xmlns:p="http://schemas.openxmlformats.org/presentationml/2006/main">
   <p:cSld>
@@ -17488,8 +17594,8 @@
         </p:nvSpPr>
         <p:spPr>
           <a:xfrm>
-            <a:off x="1962150" y="425393"/>
-            <a:ext cx="5943600" cy="990600"/>
+            <a:off x="2590800" y="126742"/>
+            <a:ext cx="4552950" cy="990600"/>
           </a:xfrm>
           <a:prstGeom prst="rect">
             <a:avLst/>
@@ -17517,7 +17623,7 @@
                 <a:ea typeface="微軟正黑體" panose="020B0604030504040204" pitchFamily="34" charset="-120"/>
                 <a:cs typeface="Heiti TC Light"/>
               </a:rPr>
-              <a:t>大型語言模的進化</a:t>
+              <a:t>從結果找指令</a:t>
             </a:r>
             <a:endParaRPr kumimoji="1" lang="en-US" altLang="zh-TW" sz="4800" b="1" dirty="0">
               <a:solidFill>
@@ -17553,12 +17659,7 @@
             <p:ph type="dt" sz="half" idx="12"/>
           </p:nvPr>
         </p:nvSpPr>
-        <p:spPr>
-          <a:xfrm>
-            <a:off x="47625" y="6918325"/>
-            <a:ext cx="2438400" cy="244475"/>
-          </a:xfrm>
-        </p:spPr>
+        <p:spPr/>
         <p:txBody>
           <a:bodyPr/>
           <a:lstStyle/>
@@ -17571,7 +17672,7 @@
                 <a:latin typeface="Arial" panose="020B0604020202020204" pitchFamily="34" charset="0"/>
                 <a:cs typeface="Arial" panose="020B0604020202020204" pitchFamily="34" charset="0"/>
               </a:rPr>
-              <a:t>11/27/2024</a:t>
+              <a:t>12/3/2024</a:t>
             </a:fld>
             <a:endParaRPr kumimoji="0" lang="en-US" dirty="0">
               <a:latin typeface="Arial" panose="020B0604020202020204" pitchFamily="34" charset="0"/>
@@ -17596,12 +17697,7 @@
             <p:ph type="sldNum" sz="quarter" idx="13"/>
           </p:nvPr>
         </p:nvSpPr>
-        <p:spPr>
-          <a:xfrm>
-            <a:off x="8153400" y="6918325"/>
-            <a:ext cx="914400" cy="244475"/>
-          </a:xfrm>
-        </p:spPr>
+        <p:spPr/>
         <p:txBody>
           <a:bodyPr/>
           <a:lstStyle/>
@@ -17615,518 +17711,6 @@
               </a:rPr>
               <a:pPr algn="r"/>
               <a:t>27</a:t>
-            </a:fld>
-            <a:endParaRPr kumimoji="0" lang="en-US" dirty="0"/>
-          </a:p>
-        </p:txBody>
-      </p:sp>
-      <p:sp>
-        <p:nvSpPr>
-          <p:cNvPr id="2" name="文字方塊 1">
-            <a:extLst>
-              <a:ext uri="{FF2B5EF4-FFF2-40B4-BE49-F238E27FC236}">
-                <a16:creationId xmlns:a16="http://schemas.microsoft.com/office/drawing/2014/main" id="{E17C39F0-9527-522B-E55B-DAC3D2425E05}"/>
-              </a:ext>
-            </a:extLst>
-          </p:cNvPr>
-          <p:cNvSpPr txBox="1"/>
-          <p:nvPr/>
-        </p:nvSpPr>
-        <p:spPr>
-          <a:xfrm>
-            <a:off x="609600" y="1524000"/>
-            <a:ext cx="7924800" cy="5016758"/>
-          </a:xfrm>
-          <a:prstGeom prst="rect">
-            <a:avLst/>
-          </a:prstGeom>
-          <a:noFill/>
-        </p:spPr>
-        <p:txBody>
-          <a:bodyPr wrap="square" rtlCol="0">
-            <a:spAutoFit/>
-          </a:bodyPr>
-          <a:lstStyle/>
-          <a:p>
-            <a:pPr marL="360363" indent="-360363">
-              <a:buFont typeface="Arial" panose="020B0604020202020204" pitchFamily="34" charset="0"/>
-              <a:buChar char="•"/>
-            </a:pPr>
-            <a:r>
-              <a:rPr lang="zh-TW" altLang="en-US" sz="3200" b="0" i="0" dirty="0">
-                <a:effectLst/>
-                <a:latin typeface="微軟正黑體" panose="020B0604030504040204" pitchFamily="34" charset="-120"/>
-                <a:ea typeface="微軟正黑體" panose="020B0604030504040204" pitchFamily="34" charset="-120"/>
-              </a:rPr>
-              <a:t>只有產生下一個</a:t>
-            </a:r>
-            <a:r>
-              <a:rPr lang="en-US" altLang="zh-TW" sz="3200" b="0" i="0" dirty="0">
-                <a:effectLst/>
-                <a:latin typeface="微軟正黑體" panose="020B0604030504040204" pitchFamily="34" charset="-120"/>
-                <a:ea typeface="微軟正黑體" panose="020B0604030504040204" pitchFamily="34" charset="-120"/>
-              </a:rPr>
-              <a:t>token</a:t>
-            </a:r>
-            <a:r>
-              <a:rPr lang="zh-TW" altLang="en-US" sz="3200" b="0" i="0" dirty="0">
-                <a:effectLst/>
-                <a:latin typeface="微軟正黑體" panose="020B0604030504040204" pitchFamily="34" charset="-120"/>
-                <a:ea typeface="微軟正黑體" panose="020B0604030504040204" pitchFamily="34" charset="-120"/>
-              </a:rPr>
-              <a:t>能力的</a:t>
-            </a:r>
-            <a:r>
-              <a:rPr lang="en-US" altLang="zh-TW" sz="3200" b="0" i="0" dirty="0" err="1">
-                <a:effectLst/>
-                <a:latin typeface="微軟正黑體" panose="020B0604030504040204" pitchFamily="34" charset="-120"/>
-                <a:ea typeface="微軟正黑體" panose="020B0604030504040204" pitchFamily="34" charset="-120"/>
-              </a:rPr>
-              <a:t>llm</a:t>
-            </a:r>
-            <a:r>
-              <a:rPr lang="en-US" altLang="zh-TW" sz="3200" b="0" i="0" dirty="0">
-                <a:effectLst/>
-                <a:latin typeface="微軟正黑體" panose="020B0604030504040204" pitchFamily="34" charset="-120"/>
-                <a:ea typeface="微軟正黑體" panose="020B0604030504040204" pitchFamily="34" charset="-120"/>
-              </a:rPr>
-              <a:t>(base)</a:t>
-            </a:r>
-            <a:r>
-              <a:rPr lang="zh-TW" altLang="en-US" sz="3200" b="0" i="0" dirty="0">
-                <a:effectLst/>
-                <a:latin typeface="微軟正黑體" panose="020B0604030504040204" pitchFamily="34" charset="-120"/>
-                <a:ea typeface="微軟正黑體" panose="020B0604030504040204" pitchFamily="34" charset="-120"/>
-              </a:rPr>
-              <a:t>，如</a:t>
-            </a:r>
-            <a:r>
-              <a:rPr lang="en-US" altLang="zh-TW" sz="3200" dirty="0">
-                <a:latin typeface="微軟正黑體" panose="020B0604030504040204" pitchFamily="34" charset="-120"/>
-                <a:ea typeface="微軟正黑體" panose="020B0604030504040204" pitchFamily="34" charset="-120"/>
-              </a:rPr>
-              <a:t>GPT</a:t>
-            </a:r>
-            <a:r>
-              <a:rPr lang="zh-TW" altLang="en-US" sz="3200" dirty="0">
-                <a:latin typeface="微軟正黑體" panose="020B0604030504040204" pitchFamily="34" charset="-120"/>
-                <a:ea typeface="微軟正黑體" panose="020B0604030504040204" pitchFamily="34" charset="-120"/>
-              </a:rPr>
-              <a:t>、</a:t>
-            </a:r>
-            <a:r>
-              <a:rPr lang="en-US" altLang="zh-TW" sz="3200" dirty="0">
-                <a:latin typeface="微軟正黑體" panose="020B0604030504040204" pitchFamily="34" charset="-120"/>
-                <a:ea typeface="微軟正黑體" panose="020B0604030504040204" pitchFamily="34" charset="-120"/>
-              </a:rPr>
-              <a:t>GPT2</a:t>
-            </a:r>
-            <a:r>
-              <a:rPr lang="zh-TW" altLang="en-US" sz="3200" dirty="0">
-                <a:latin typeface="微軟正黑體" panose="020B0604030504040204" pitchFamily="34" charset="-120"/>
-                <a:ea typeface="微軟正黑體" panose="020B0604030504040204" pitchFamily="34" charset="-120"/>
-              </a:rPr>
-              <a:t>、</a:t>
-            </a:r>
-            <a:r>
-              <a:rPr lang="en-US" altLang="zh-TW" sz="3200" dirty="0">
-                <a:latin typeface="微軟正黑體" panose="020B0604030504040204" pitchFamily="34" charset="-120"/>
-                <a:ea typeface="微軟正黑體" panose="020B0604030504040204" pitchFamily="34" charset="-120"/>
-              </a:rPr>
-              <a:t>GPT3</a:t>
-            </a:r>
-          </a:p>
-          <a:p>
-            <a:pPr marL="360363" indent="-360363">
-              <a:buFont typeface="Arial" panose="020B0604020202020204" pitchFamily="34" charset="0"/>
-              <a:buChar char="•"/>
-            </a:pPr>
-            <a:r>
-              <a:rPr lang="zh-TW" altLang="en-US" sz="3200" dirty="0">
-                <a:latin typeface="微軟正黑體" panose="020B0604030504040204" pitchFamily="34" charset="-120"/>
-                <a:ea typeface="微軟正黑體" panose="020B0604030504040204" pitchFamily="34" charset="-120"/>
-              </a:rPr>
-              <a:t>經過</a:t>
-            </a:r>
-            <a:r>
-              <a:rPr lang="en-US" altLang="zh-TW" sz="3200" dirty="0" err="1">
-                <a:latin typeface="微軟正黑體" panose="020B0604030504040204" pitchFamily="34" charset="-120"/>
-                <a:ea typeface="微軟正黑體" panose="020B0604030504040204" pitchFamily="34" charset="-120"/>
-              </a:rPr>
-              <a:t>sft</a:t>
-            </a:r>
-            <a:r>
-              <a:rPr lang="zh-TW" altLang="en-US" sz="3200" dirty="0">
-                <a:latin typeface="微軟正黑體" panose="020B0604030504040204" pitchFamily="34" charset="-120"/>
-                <a:ea typeface="微軟正黑體" panose="020B0604030504040204" pitchFamily="34" charset="-120"/>
-              </a:rPr>
-              <a:t>的</a:t>
-            </a:r>
-            <a:r>
-              <a:rPr lang="en-US" altLang="zh-TW" sz="3200" dirty="0" err="1">
-                <a:latin typeface="微軟正黑體" panose="020B0604030504040204" pitchFamily="34" charset="-120"/>
-                <a:ea typeface="微軟正黑體" panose="020B0604030504040204" pitchFamily="34" charset="-120"/>
-              </a:rPr>
-              <a:t>llm</a:t>
-            </a:r>
-            <a:r>
-              <a:rPr lang="en-US" altLang="zh-TW" sz="3200" dirty="0">
-                <a:latin typeface="微軟正黑體" panose="020B0604030504040204" pitchFamily="34" charset="-120"/>
-                <a:ea typeface="微軟正黑體" panose="020B0604030504040204" pitchFamily="34" charset="-120"/>
-              </a:rPr>
-              <a:t>(instruction tuned)</a:t>
-            </a:r>
-            <a:r>
-              <a:rPr lang="zh-TW" altLang="en-US" sz="3200" dirty="0">
-                <a:latin typeface="微軟正黑體" panose="020B0604030504040204" pitchFamily="34" charset="-120"/>
-                <a:ea typeface="微軟正黑體" panose="020B0604030504040204" pitchFamily="34" charset="-120"/>
-              </a:rPr>
-              <a:t>，如</a:t>
-            </a:r>
-            <a:r>
-              <a:rPr lang="en-US" altLang="zh-TW" sz="3200" dirty="0">
-                <a:latin typeface="微軟正黑體" panose="020B0604030504040204" pitchFamily="34" charset="-120"/>
-                <a:ea typeface="微軟正黑體" panose="020B0604030504040204" pitchFamily="34" charset="-120"/>
-              </a:rPr>
-              <a:t>FLAN</a:t>
-            </a:r>
-            <a:r>
-              <a:rPr lang="zh-TW" altLang="en-US" sz="3200" dirty="0">
-                <a:latin typeface="微軟正黑體" panose="020B0604030504040204" pitchFamily="34" charset="-120"/>
-                <a:ea typeface="微軟正黑體" panose="020B0604030504040204" pitchFamily="34" charset="-120"/>
-              </a:rPr>
-              <a:t>、</a:t>
-            </a:r>
-            <a:r>
-              <a:rPr lang="en-US" altLang="zh-TW" sz="3200" dirty="0">
-                <a:latin typeface="微軟正黑體" panose="020B0604030504040204" pitchFamily="34" charset="-120"/>
-                <a:ea typeface="微軟正黑體" panose="020B0604030504040204" pitchFamily="34" charset="-120"/>
-              </a:rPr>
-              <a:t>T0</a:t>
-            </a:r>
-            <a:r>
-              <a:rPr lang="zh-TW" altLang="en-US" sz="3200" dirty="0">
-                <a:latin typeface="微軟正黑體" panose="020B0604030504040204" pitchFamily="34" charset="-120"/>
-                <a:ea typeface="微軟正黑體" panose="020B0604030504040204" pitchFamily="34" charset="-120"/>
-              </a:rPr>
-              <a:t>、</a:t>
-            </a:r>
-            <a:r>
-              <a:rPr lang="en-US" altLang="zh-TW" sz="3200" dirty="0">
-                <a:latin typeface="微軟正黑體" panose="020B0604030504040204" pitchFamily="34" charset="-120"/>
-                <a:ea typeface="微軟正黑體" panose="020B0604030504040204" pitchFamily="34" charset="-120"/>
-              </a:rPr>
-              <a:t>llama2</a:t>
-            </a:r>
-          </a:p>
-          <a:p>
-            <a:pPr marL="360363" indent="-360363">
-              <a:buFont typeface="Arial" panose="020B0604020202020204" pitchFamily="34" charset="0"/>
-              <a:buChar char="•"/>
-            </a:pPr>
-            <a:r>
-              <a:rPr lang="zh-TW" altLang="en-US" sz="3200" dirty="0">
-                <a:latin typeface="微軟正黑體" panose="020B0604030504040204" pitchFamily="34" charset="-120"/>
-                <a:ea typeface="微軟正黑體" panose="020B0604030504040204" pitchFamily="34" charset="-120"/>
-              </a:rPr>
-              <a:t>然後找出所有</a:t>
-            </a:r>
-            <a:r>
-              <a:rPr lang="en-US" altLang="zh-TW" sz="3200" dirty="0">
-                <a:latin typeface="微軟正黑體" panose="020B0604030504040204" pitchFamily="34" charset="-120"/>
-                <a:ea typeface="微軟正黑體" panose="020B0604030504040204" pitchFamily="34" charset="-120"/>
-              </a:rPr>
-              <a:t>NLP</a:t>
-            </a:r>
-            <a:r>
-              <a:rPr lang="zh-TW" altLang="en-US" sz="3200" dirty="0">
-                <a:latin typeface="微軟正黑體" panose="020B0604030504040204" pitchFamily="34" charset="-120"/>
-                <a:ea typeface="微軟正黑體" panose="020B0604030504040204" pitchFamily="34" charset="-120"/>
-              </a:rPr>
-              <a:t>任務的類型，如分類、摘要、</a:t>
-            </a:r>
-            <a:r>
-              <a:rPr lang="en-US" altLang="zh-TW" sz="3200" dirty="0">
-                <a:latin typeface="微軟正黑體" panose="020B0604030504040204" pitchFamily="34" charset="-120"/>
-                <a:ea typeface="微軟正黑體" panose="020B0604030504040204" pitchFamily="34" charset="-120"/>
-              </a:rPr>
-              <a:t>QA</a:t>
-            </a:r>
-            <a:r>
-              <a:rPr lang="zh-TW" altLang="en-US" sz="3200" dirty="0">
-                <a:latin typeface="微軟正黑體" panose="020B0604030504040204" pitchFamily="34" charset="-120"/>
-                <a:ea typeface="微軟正黑體" panose="020B0604030504040204" pitchFamily="34" charset="-120"/>
-              </a:rPr>
-              <a:t>、</a:t>
-            </a:r>
-            <a:r>
-              <a:rPr lang="en-US" altLang="zh-TW" sz="3200" dirty="0">
-                <a:latin typeface="微軟正黑體" panose="020B0604030504040204" pitchFamily="34" charset="-120"/>
-                <a:ea typeface="微軟正黑體" panose="020B0604030504040204" pitchFamily="34" charset="-120"/>
-              </a:rPr>
-              <a:t>NER</a:t>
-            </a:r>
-            <a:r>
-              <a:rPr lang="zh-TW" altLang="en-US" sz="3200" dirty="0">
-                <a:latin typeface="微軟正黑體" panose="020B0604030504040204" pitchFamily="34" charset="-120"/>
-                <a:ea typeface="微軟正黑體" panose="020B0604030504040204" pitchFamily="34" charset="-120"/>
-              </a:rPr>
-              <a:t>、</a:t>
-            </a:r>
-            <a:r>
-              <a:rPr lang="en-US" altLang="zh-TW" sz="3200" dirty="0">
-                <a:latin typeface="微軟正黑體" panose="020B0604030504040204" pitchFamily="34" charset="-120"/>
-                <a:ea typeface="微軟正黑體" panose="020B0604030504040204" pitchFamily="34" charset="-120"/>
-              </a:rPr>
-              <a:t>CHAT.......</a:t>
-            </a:r>
-            <a:r>
-              <a:rPr lang="zh-TW" altLang="en-US" sz="3200" dirty="0">
-                <a:latin typeface="微軟正黑體" panose="020B0604030504040204" pitchFamily="34" charset="-120"/>
-                <a:ea typeface="微軟正黑體" panose="020B0604030504040204" pitchFamily="34" charset="-120"/>
-              </a:rPr>
-              <a:t>將這些所有資料集拿來</a:t>
-            </a:r>
-            <a:endParaRPr lang="en-US" altLang="zh-TW" sz="3200" dirty="0">
-              <a:latin typeface="微軟正黑體" panose="020B0604030504040204" pitchFamily="34" charset="-120"/>
-              <a:ea typeface="微軟正黑體" panose="020B0604030504040204" pitchFamily="34" charset="-120"/>
-            </a:endParaRPr>
-          </a:p>
-          <a:p>
-            <a:pPr marL="360363" lvl="1" indent="-360363">
-              <a:buFont typeface="Arial" panose="020B0604020202020204" pitchFamily="34" charset="0"/>
-              <a:buChar char="•"/>
-            </a:pPr>
-            <a:r>
-              <a:rPr lang="zh-TW" altLang="en-US" sz="3200" dirty="0">
-                <a:latin typeface="微軟正黑體" panose="020B0604030504040204" pitchFamily="34" charset="-120"/>
-                <a:ea typeface="微軟正黑體" panose="020B0604030504040204" pitchFamily="34" charset="-120"/>
-              </a:rPr>
-              <a:t>最後經過</a:t>
-            </a:r>
-            <a:r>
-              <a:rPr lang="en-US" altLang="zh-TW" sz="3200" dirty="0">
-                <a:latin typeface="微軟正黑體" panose="020B0604030504040204" pitchFamily="34" charset="-120"/>
-                <a:ea typeface="微軟正黑體" panose="020B0604030504040204" pitchFamily="34" charset="-120"/>
-              </a:rPr>
-              <a:t>RLHF</a:t>
-            </a:r>
-            <a:r>
-              <a:rPr lang="zh-TW" altLang="en-US" sz="3200" dirty="0">
-                <a:latin typeface="微軟正黑體" panose="020B0604030504040204" pitchFamily="34" charset="-120"/>
-                <a:ea typeface="微軟正黑體" panose="020B0604030504040204" pitchFamily="34" charset="-120"/>
-              </a:rPr>
-              <a:t>，成為多功能，符合價值觀的產品如</a:t>
-            </a:r>
-            <a:r>
-              <a:rPr lang="en-US" altLang="zh-TW" sz="3200" dirty="0" err="1">
-                <a:latin typeface="微軟正黑體" panose="020B0604030504040204" pitchFamily="34" charset="-120"/>
-                <a:ea typeface="微軟正黑體" panose="020B0604030504040204" pitchFamily="34" charset="-120"/>
-              </a:rPr>
-              <a:t>InstructGPT</a:t>
-            </a:r>
-            <a:r>
-              <a:rPr lang="zh-TW" altLang="en-US" sz="3200" dirty="0">
-                <a:latin typeface="微軟正黑體" panose="020B0604030504040204" pitchFamily="34" charset="-120"/>
-                <a:ea typeface="微軟正黑體" panose="020B0604030504040204" pitchFamily="34" charset="-120"/>
-              </a:rPr>
-              <a:t>、</a:t>
-            </a:r>
-            <a:r>
-              <a:rPr lang="en-US" altLang="zh-TW" sz="3200" dirty="0">
-                <a:latin typeface="微軟正黑體" panose="020B0604030504040204" pitchFamily="34" charset="-120"/>
-                <a:ea typeface="微軟正黑體" panose="020B0604030504040204" pitchFamily="34" charset="-120"/>
-              </a:rPr>
-              <a:t>ChatGPT</a:t>
-            </a:r>
-            <a:r>
-              <a:rPr lang="zh-TW" altLang="en-US" sz="3200" dirty="0">
-                <a:latin typeface="微軟正黑體" panose="020B0604030504040204" pitchFamily="34" charset="-120"/>
-                <a:ea typeface="微軟正黑體" panose="020B0604030504040204" pitchFamily="34" charset="-120"/>
-              </a:rPr>
-              <a:t>，</a:t>
-            </a:r>
-            <a:r>
-              <a:rPr lang="en-US" altLang="zh-TW" sz="3200" dirty="0">
-                <a:latin typeface="微軟正黑體" panose="020B0604030504040204" pitchFamily="34" charset="-120"/>
-                <a:ea typeface="微軟正黑體" panose="020B0604030504040204" pitchFamily="34" charset="-120"/>
-              </a:rPr>
-              <a:t>llama2-chat</a:t>
-            </a:r>
-            <a:r>
-              <a:rPr lang="zh-TW" altLang="en-US" sz="3200" dirty="0">
-                <a:latin typeface="微軟正黑體" panose="020B0604030504040204" pitchFamily="34" charset="-120"/>
-                <a:ea typeface="微軟正黑體" panose="020B0604030504040204" pitchFamily="34" charset="-120"/>
-              </a:rPr>
-              <a:t>等</a:t>
-            </a:r>
-            <a:endParaRPr lang="en-US" altLang="zh-TW" sz="3200" dirty="0">
-              <a:latin typeface="微軟正黑體" panose="020B0604030504040204" pitchFamily="34" charset="-120"/>
-              <a:ea typeface="微軟正黑體" panose="020B0604030504040204" pitchFamily="34" charset="-120"/>
-            </a:endParaRPr>
-          </a:p>
-        </p:txBody>
-      </p:sp>
-    </p:spTree>
-    <p:extLst>
-      <p:ext uri="{BB962C8B-B14F-4D97-AF65-F5344CB8AC3E}">
-        <p14:creationId xmlns:p14="http://schemas.microsoft.com/office/powerpoint/2010/main" val="1269779521"/>
-      </p:ext>
-    </p:extLst>
-  </p:cSld>
-  <p:clrMapOvr>
-    <a:masterClrMapping/>
-  </p:clrMapOvr>
-  <p:transition>
-    <p:fade/>
-  </p:transition>
-</p:sld>
-</file>
-
-<file path=ppt/slides/slide28.xml><?xml version="1.0" encoding="utf-8"?>
-<p:sld xmlns:a="http://schemas.openxmlformats.org/drawingml/2006/main" xmlns:r="http://schemas.openxmlformats.org/officeDocument/2006/relationships" xmlns:p="http://schemas.openxmlformats.org/presentationml/2006/main">
-  <p:cSld>
-    <p:spTree>
-      <p:nvGrpSpPr>
-        <p:cNvPr id="1" name=""/>
-        <p:cNvGrpSpPr/>
-        <p:nvPr/>
-      </p:nvGrpSpPr>
-      <p:grpSpPr>
-        <a:xfrm>
-          <a:off x="0" y="0"/>
-          <a:ext cx="0" cy="0"/>
-          <a:chOff x="0" y="0"/>
-          <a:chExt cx="0" cy="0"/>
-        </a:xfrm>
-      </p:grpSpPr>
-      <p:sp>
-        <p:nvSpPr>
-          <p:cNvPr id="4" name="文字版面配置區 2"/>
-          <p:cNvSpPr txBox="1">
-            <a:spLocks/>
-          </p:cNvSpPr>
-          <p:nvPr/>
-        </p:nvSpPr>
-        <p:spPr>
-          <a:xfrm>
-            <a:off x="2590800" y="126742"/>
-            <a:ext cx="4552950" cy="990600"/>
-          </a:xfrm>
-          <a:prstGeom prst="rect">
-            <a:avLst/>
-          </a:prstGeom>
-        </p:spPr>
-        <p:txBody>
-          <a:bodyPr tIns="91440" bIns="91440" anchor="b" anchorCtr="0">
-            <a:noAutofit/>
-          </a:bodyPr>
-          <a:lstStyle/>
-          <a:p>
-            <a:r>
-              <a:rPr kumimoji="1" lang="zh-TW" altLang="en-US" sz="4800" b="1" dirty="0">
-                <a:solidFill>
-                  <a:srgbClr val="00B0F0"/>
-                </a:solidFill>
-                <a:effectLst>
-                  <a:outerShdw blurRad="38100" dist="38100" dir="2700000" algn="tl">
-                    <a:srgbClr val="000000">
-                      <a:alpha val="43137"/>
-                    </a:srgbClr>
-                  </a:outerShdw>
-                </a:effectLst>
-                <a:latin typeface="微軟正黑體" panose="020B0604030504040204" pitchFamily="34" charset="-120"/>
-                <a:ea typeface="微軟正黑體" panose="020B0604030504040204" pitchFamily="34" charset="-120"/>
-                <a:cs typeface="Heiti TC Light"/>
-              </a:rPr>
-              <a:t>從結果找指令</a:t>
-            </a:r>
-            <a:endParaRPr kumimoji="1" lang="en-US" altLang="zh-TW" sz="4800" b="1" dirty="0">
-              <a:solidFill>
-                <a:srgbClr val="00B0F0"/>
-              </a:solidFill>
-              <a:effectLst>
-                <a:outerShdw blurRad="38100" dist="38100" dir="2700000" algn="tl">
-                  <a:srgbClr val="000000">
-                    <a:alpha val="43137"/>
-                  </a:srgbClr>
-                </a:outerShdw>
-              </a:effectLst>
-              <a:latin typeface="微軟正黑體" panose="020B0604030504040204" pitchFamily="34" charset="-120"/>
-              <a:ea typeface="微軟正黑體" panose="020B0604030504040204" pitchFamily="34" charset="-120"/>
-              <a:cs typeface="Heiti TC Light"/>
-            </a:endParaRPr>
-          </a:p>
-        </p:txBody>
-      </p:sp>
-      <p:sp>
-        <p:nvSpPr>
-          <p:cNvPr id="3" name="日期版面配置區 2">
-            <a:extLst>
-              <a:ext uri="{FF2B5EF4-FFF2-40B4-BE49-F238E27FC236}">
-                <a16:creationId xmlns:a16="http://schemas.microsoft.com/office/drawing/2014/main" id="{1C536CB5-3C58-6CF1-767E-952B76F12DEE}"/>
-              </a:ext>
-            </a:extLst>
-          </p:cNvPr>
-          <p:cNvSpPr>
-            <a:spLocks noGrp="1"/>
-          </p:cNvSpPr>
-          <p:nvPr>
-            <p:ph type="dt" sz="half" idx="12"/>
-          </p:nvPr>
-        </p:nvSpPr>
-        <p:spPr/>
-        <p:txBody>
-          <a:bodyPr/>
-          <a:lstStyle/>
-          <a:p>
-            <a:fld id="{0B520B05-2240-4566-BE2A-9338980FE8EB}" type="datetime1">
-              <a:rPr kumimoji="0" lang="en-US" altLang="zh-TW" sz="1200" smtClean="0">
-                <a:solidFill>
-                  <a:schemeClr val="tx2"/>
-                </a:solidFill>
-                <a:latin typeface="Arial" panose="020B0604020202020204" pitchFamily="34" charset="0"/>
-                <a:cs typeface="Arial" panose="020B0604020202020204" pitchFamily="34" charset="0"/>
-              </a:rPr>
-              <a:t>11/27/2024</a:t>
-            </a:fld>
-            <a:endParaRPr kumimoji="0" lang="en-US" dirty="0">
-              <a:latin typeface="Arial" panose="020B0604020202020204" pitchFamily="34" charset="0"/>
-              <a:cs typeface="Arial" panose="020B0604020202020204" pitchFamily="34" charset="0"/>
-            </a:endParaRPr>
-          </a:p>
-        </p:txBody>
-      </p:sp>
-      <p:sp>
-        <p:nvSpPr>
-          <p:cNvPr id="7" name="投影片編號版面配置區 6">
-            <a:extLst>
-              <a:ext uri="{FF2B5EF4-FFF2-40B4-BE49-F238E27FC236}">
-                <a16:creationId xmlns:a16="http://schemas.microsoft.com/office/drawing/2014/main" id="{DA316F56-AF12-D872-611F-78AE7ACCBF93}"/>
-              </a:ext>
-            </a:extLst>
-          </p:cNvPr>
-          <p:cNvSpPr>
-            <a:spLocks noGrp="1"/>
-          </p:cNvSpPr>
-          <p:nvPr>
-            <p:ph type="sldNum" sz="quarter" idx="13"/>
-          </p:nvPr>
-        </p:nvSpPr>
-        <p:spPr/>
-        <p:txBody>
-          <a:bodyPr/>
-          <a:lstStyle/>
-          <a:p>
-            <a:pPr algn="r"/>
-            <a:fld id="{F99EC173-99AE-4773-AB25-02E469A13EAE}" type="slidenum">
-              <a:rPr kumimoji="0" lang="en-US" sz="1200" smtClean="0">
-                <a:solidFill>
-                  <a:schemeClr val="tx2"/>
-                </a:solidFill>
-              </a:rPr>
-              <a:pPr algn="r"/>
-              <a:t>28</a:t>
             </a:fld>
             <a:endParaRPr kumimoji="0" lang="en-US" dirty="0"/>
           </a:p>
@@ -18248,7 +17832,7 @@
 </p:sld>
 </file>
 
-<file path=ppt/slides/slide29.xml><?xml version="1.0" encoding="utf-8"?>
+<file path=ppt/slides/slide28.xml><?xml version="1.0" encoding="utf-8"?>
 <p:sld xmlns:a="http://schemas.openxmlformats.org/drawingml/2006/main" xmlns:r="http://schemas.openxmlformats.org/officeDocument/2006/relationships" xmlns:p="http://schemas.openxmlformats.org/presentationml/2006/main">
   <p:cSld>
     <p:spTree>
@@ -18353,7 +17937,7 @@
                 <a:latin typeface="Arial" panose="020B0604020202020204" pitchFamily="34" charset="0"/>
                 <a:cs typeface="Arial" panose="020B0604020202020204" pitchFamily="34" charset="0"/>
               </a:rPr>
-              <a:t>11/27/2024</a:t>
+              <a:t>12/3/2024</a:t>
             </a:fld>
             <a:endParaRPr kumimoji="0" lang="en-US" dirty="0">
               <a:latin typeface="Arial" panose="020B0604020202020204" pitchFamily="34" charset="0"/>
@@ -18391,7 +17975,7 @@
                 </a:solidFill>
               </a:rPr>
               <a:pPr algn="r"/>
-              <a:t>29</a:t>
+              <a:t>28</a:t>
             </a:fld>
             <a:endParaRPr kumimoji="0" lang="en-US" dirty="0"/>
           </a:p>
@@ -18532,7 +18116,7 @@
 </p:sld>
 </file>
 
-<file path=ppt/slides/slide3.xml><?xml version="1.0" encoding="utf-8"?>
+<file path=ppt/slides/slide29.xml><?xml version="1.0" encoding="utf-8"?>
 <p:sld xmlns:a="http://schemas.openxmlformats.org/drawingml/2006/main" xmlns:r="http://schemas.openxmlformats.org/officeDocument/2006/relationships" xmlns:p="http://schemas.openxmlformats.org/presentationml/2006/main">
   <p:cSld>
     <p:spTree>
@@ -18559,8 +18143,8 @@
         </p:nvSpPr>
         <p:spPr>
           <a:xfrm>
-            <a:off x="1971330" y="40346"/>
-            <a:ext cx="6553200" cy="990600"/>
+            <a:off x="2590800" y="126742"/>
+            <a:ext cx="4552950" cy="990600"/>
           </a:xfrm>
           <a:prstGeom prst="rect">
             <a:avLst/>
@@ -18588,43 +18172,7 @@
                 <a:ea typeface="微軟正黑體" panose="020B0604030504040204" pitchFamily="34" charset="-120"/>
                 <a:cs typeface="Heiti TC Light"/>
               </a:rPr>
-              <a:t>經過之後</a:t>
-            </a:r>
-            <a:r>
-              <a:rPr kumimoji="1" lang="en-US" altLang="zh-TW" sz="4800" b="1" dirty="0">
-                <a:solidFill>
-                  <a:srgbClr val="00B0F0"/>
-                </a:solidFill>
-                <a:effectLst>
-                  <a:outerShdw blurRad="38100" dist="38100" dir="2700000" algn="tl">
-                    <a:srgbClr val="000000">
-                      <a:alpha val="43137"/>
-                    </a:srgbClr>
-                  </a:outerShdw>
-                </a:effectLst>
-                <a:latin typeface="微軟正黑體" panose="020B0604030504040204" pitchFamily="34" charset="-120"/>
-                <a:ea typeface="微軟正黑體" panose="020B0604030504040204" pitchFamily="34" charset="-120"/>
-                <a:cs typeface="Heiti TC Light"/>
-              </a:rPr>
-              <a:t>SFT</a:t>
-            </a:r>
-            <a:r>
-              <a:rPr kumimoji="1" lang="zh-TW" altLang="en-US" sz="4800" b="1" dirty="0">
-                <a:solidFill>
-                  <a:srgbClr val="00B0F0"/>
-                </a:solidFill>
-                <a:effectLst>
-                  <a:outerShdw blurRad="38100" dist="38100" dir="2700000" algn="tl">
-                    <a:srgbClr val="000000">
-                      <a:alpha val="43137"/>
-                    </a:srgbClr>
-                  </a:outerShdw>
-                </a:effectLst>
-                <a:latin typeface="微軟正黑體" panose="020B0604030504040204" pitchFamily="34" charset="-120"/>
-                <a:ea typeface="微軟正黑體" panose="020B0604030504040204" pitchFamily="34" charset="-120"/>
-                <a:cs typeface="Heiti TC Light"/>
-              </a:rPr>
-              <a:t>的模型</a:t>
+              <a:t>從結果找指令</a:t>
             </a:r>
             <a:endParaRPr kumimoji="1" lang="en-US" altLang="zh-TW" sz="4800" b="1" dirty="0">
               <a:solidFill>
@@ -18673,7 +18221,7 @@
                 <a:latin typeface="Arial" panose="020B0604020202020204" pitchFamily="34" charset="0"/>
                 <a:cs typeface="Arial" panose="020B0604020202020204" pitchFamily="34" charset="0"/>
               </a:rPr>
-              <a:t>11/27/2024</a:t>
+              <a:t>12/3/2024</a:t>
             </a:fld>
             <a:endParaRPr kumimoji="0" lang="en-US" dirty="0">
               <a:latin typeface="Arial" panose="020B0604020202020204" pitchFamily="34" charset="0"/>
@@ -18711,358 +18259,7 @@
                 </a:solidFill>
               </a:rPr>
               <a:pPr algn="r"/>
-              <a:t>3</a:t>
-            </a:fld>
-            <a:endParaRPr kumimoji="0" lang="en-US" dirty="0"/>
-          </a:p>
-        </p:txBody>
-      </p:sp>
-      <p:sp>
-        <p:nvSpPr>
-          <p:cNvPr id="2" name="文字方塊 1">
-            <a:extLst>
-              <a:ext uri="{FF2B5EF4-FFF2-40B4-BE49-F238E27FC236}">
-                <a16:creationId xmlns:a16="http://schemas.microsoft.com/office/drawing/2014/main" id="{E17C39F0-9527-522B-E55B-DAC3D2425E05}"/>
-              </a:ext>
-            </a:extLst>
-          </p:cNvPr>
-          <p:cNvSpPr txBox="1"/>
-          <p:nvPr/>
-        </p:nvSpPr>
-        <p:spPr>
-          <a:xfrm>
-            <a:off x="609600" y="1219200"/>
-            <a:ext cx="7924800" cy="4524315"/>
-          </a:xfrm>
-          <a:prstGeom prst="rect">
-            <a:avLst/>
-          </a:prstGeom>
-          <a:noFill/>
-        </p:spPr>
-        <p:txBody>
-          <a:bodyPr wrap="square" rtlCol="0">
-            <a:spAutoFit/>
-          </a:bodyPr>
-          <a:lstStyle/>
-          <a:p>
-            <a:pPr marL="457200" indent="-457200">
-              <a:buFont typeface="Arial" panose="020B0604020202020204" pitchFamily="34" charset="0"/>
-              <a:buChar char="•"/>
-            </a:pPr>
-            <a:r>
-              <a:rPr lang="zh-TW" altLang="en-US" sz="3200" b="0" i="0" dirty="0">
-                <a:effectLst/>
-                <a:latin typeface="微軟正黑體" panose="020B0604030504040204" pitchFamily="34" charset="-120"/>
-                <a:ea typeface="微軟正黑體" panose="020B0604030504040204" pitchFamily="34" charset="-120"/>
-              </a:rPr>
-              <a:t>看得懂人類的指令，做出回答</a:t>
-            </a:r>
-            <a:endParaRPr lang="en-US" altLang="zh-TW" sz="3200" b="0" i="0" dirty="0">
-              <a:effectLst/>
-              <a:latin typeface="微軟正黑體" panose="020B0604030504040204" pitchFamily="34" charset="-120"/>
-              <a:ea typeface="微軟正黑體" panose="020B0604030504040204" pitchFamily="34" charset="-120"/>
-            </a:endParaRPr>
-          </a:p>
-          <a:p>
-            <a:pPr marL="457200" indent="-457200">
-              <a:buFont typeface="Arial" panose="020B0604020202020204" pitchFamily="34" charset="0"/>
-              <a:buChar char="•"/>
-            </a:pPr>
-            <a:r>
-              <a:rPr lang="zh-TW" altLang="en-US" sz="3200" b="0" i="0" dirty="0">
-                <a:effectLst/>
-                <a:latin typeface="微軟正黑體" panose="020B0604030504040204" pitchFamily="34" charset="-120"/>
-                <a:ea typeface="微軟正黑體" panose="020B0604030504040204" pitchFamily="34" charset="-120"/>
-              </a:rPr>
-              <a:t>答案是否正確？有用？有害？有偏見？</a:t>
-            </a:r>
-            <a:endParaRPr lang="en-US" altLang="zh-TW" sz="3200" b="0" i="0" dirty="0">
-              <a:effectLst/>
-              <a:latin typeface="微軟正黑體" panose="020B0604030504040204" pitchFamily="34" charset="-120"/>
-              <a:ea typeface="微軟正黑體" panose="020B0604030504040204" pitchFamily="34" charset="-120"/>
-            </a:endParaRPr>
-          </a:p>
-          <a:p>
-            <a:pPr marL="457200" indent="-457200">
-              <a:buFont typeface="Arial" panose="020B0604020202020204" pitchFamily="34" charset="0"/>
-              <a:buChar char="•"/>
-            </a:pPr>
-            <a:r>
-              <a:rPr lang="zh-TW" altLang="en-US" sz="3200" b="0" i="0" dirty="0">
-                <a:effectLst/>
-                <a:latin typeface="微軟正黑體" panose="020B0604030504040204" pitchFamily="34" charset="-120"/>
-                <a:ea typeface="微軟正黑體" panose="020B0604030504040204" pitchFamily="34" charset="-120"/>
-              </a:rPr>
-              <a:t>答案不但要正確，還要符合人類期待</a:t>
-            </a:r>
-            <a:endParaRPr lang="en-US" altLang="zh-TW" sz="3200" b="0" i="0" dirty="0">
-              <a:effectLst/>
-              <a:latin typeface="微軟正黑體" panose="020B0604030504040204" pitchFamily="34" charset="-120"/>
-              <a:ea typeface="微軟正黑體" panose="020B0604030504040204" pitchFamily="34" charset="-120"/>
-            </a:endParaRPr>
-          </a:p>
-          <a:p>
-            <a:pPr marL="457200" indent="-457200">
-              <a:buFont typeface="Arial" panose="020B0604020202020204" pitchFamily="34" charset="0"/>
-              <a:buChar char="•"/>
-            </a:pPr>
-            <a:r>
-              <a:rPr lang="zh-TW" altLang="en-US" sz="3200" b="0" i="0" dirty="0">
-                <a:effectLst/>
-                <a:latin typeface="微軟正黑體" panose="020B0604030504040204" pitchFamily="34" charset="-120"/>
-                <a:ea typeface="微軟正黑體" panose="020B0604030504040204" pitchFamily="34" charset="-120"/>
-              </a:rPr>
-              <a:t>此時必須加入人類的判斷</a:t>
-            </a:r>
-            <a:endParaRPr lang="en-US" altLang="zh-TW" sz="3200" b="0" i="0" dirty="0">
-              <a:effectLst/>
-              <a:latin typeface="微軟正黑體" panose="020B0604030504040204" pitchFamily="34" charset="-120"/>
-              <a:ea typeface="微軟正黑體" panose="020B0604030504040204" pitchFamily="34" charset="-120"/>
-            </a:endParaRPr>
-          </a:p>
-          <a:p>
-            <a:pPr marL="457200" indent="-457200">
-              <a:buFont typeface="Arial" panose="020B0604020202020204" pitchFamily="34" charset="0"/>
-              <a:buChar char="•"/>
-            </a:pPr>
-            <a:r>
-              <a:rPr lang="zh-TW" altLang="en-US" sz="3200" b="0" i="0" dirty="0">
-                <a:effectLst/>
-                <a:latin typeface="微軟正黑體" panose="020B0604030504040204" pitchFamily="34" charset="-120"/>
-                <a:ea typeface="微軟正黑體" panose="020B0604030504040204" pitchFamily="34" charset="-120"/>
-              </a:rPr>
-              <a:t>獎勵模型的使用</a:t>
-            </a:r>
-            <a:endParaRPr lang="en-US" altLang="zh-TW" sz="3200" b="0" i="0" dirty="0">
-              <a:effectLst/>
-              <a:latin typeface="微軟正黑體" panose="020B0604030504040204" pitchFamily="34" charset="-120"/>
-              <a:ea typeface="微軟正黑體" panose="020B0604030504040204" pitchFamily="34" charset="-120"/>
-            </a:endParaRPr>
-          </a:p>
-          <a:p>
-            <a:pPr marL="457200" indent="-457200">
-              <a:buFont typeface="Arial" panose="020B0604020202020204" pitchFamily="34" charset="0"/>
-              <a:buChar char="•"/>
-            </a:pPr>
-            <a:r>
-              <a:rPr lang="zh-TW" altLang="en-US" sz="3200" b="0" i="0" dirty="0">
-                <a:effectLst/>
-                <a:latin typeface="微軟正黑體" panose="020B0604030504040204" pitchFamily="34" charset="-120"/>
-                <a:ea typeface="微軟正黑體" panose="020B0604030504040204" pitchFamily="34" charset="-120"/>
-              </a:rPr>
-              <a:t>將</a:t>
-            </a:r>
-            <a:r>
-              <a:rPr lang="en-US" altLang="zh-TW" sz="3200" dirty="0" err="1">
-                <a:latin typeface="微軟正黑體" panose="020B0604030504040204" pitchFamily="34" charset="-120"/>
-                <a:ea typeface="微軟正黑體" panose="020B0604030504040204" pitchFamily="34" charset="-120"/>
-              </a:rPr>
-              <a:t>llm</a:t>
-            </a:r>
-            <a:r>
-              <a:rPr lang="zh-TW" altLang="en-US" sz="3200" dirty="0">
-                <a:latin typeface="微軟正黑體" panose="020B0604030504040204" pitchFamily="34" charset="-120"/>
-                <a:ea typeface="微軟正黑體" panose="020B0604030504040204" pitchFamily="34" charset="-120"/>
-              </a:rPr>
-              <a:t>調整成符合人類價值觀的期待，稱對齊</a:t>
-            </a:r>
-            <a:r>
-              <a:rPr lang="en-US" altLang="zh-TW" sz="3200" dirty="0">
-                <a:latin typeface="微軟正黑體" panose="020B0604030504040204" pitchFamily="34" charset="-120"/>
-                <a:ea typeface="微軟正黑體" panose="020B0604030504040204" pitchFamily="34" charset="-120"/>
-              </a:rPr>
-              <a:t>(Alignment)</a:t>
-            </a:r>
-            <a:endParaRPr lang="en-US" altLang="zh-TW" sz="3200" b="0" i="0" dirty="0">
-              <a:effectLst/>
-              <a:latin typeface="微軟正黑體" panose="020B0604030504040204" pitchFamily="34" charset="-120"/>
-              <a:ea typeface="微軟正黑體" panose="020B0604030504040204" pitchFamily="34" charset="-120"/>
-            </a:endParaRPr>
-          </a:p>
-          <a:p>
-            <a:pPr marL="457200" indent="-457200">
-              <a:buFont typeface="Arial" panose="020B0604020202020204" pitchFamily="34" charset="0"/>
-              <a:buChar char="•"/>
-            </a:pPr>
-            <a:endParaRPr lang="en-US" altLang="zh-TW" sz="3200" b="0" i="0" dirty="0">
-              <a:effectLst/>
-              <a:latin typeface="微軟正黑體" panose="020B0604030504040204" pitchFamily="34" charset="-120"/>
-              <a:ea typeface="微軟正黑體" panose="020B0604030504040204" pitchFamily="34" charset="-120"/>
-            </a:endParaRPr>
-          </a:p>
-          <a:p>
-            <a:pPr marL="457200" indent="-457200">
-              <a:buFont typeface="Arial" panose="020B0604020202020204" pitchFamily="34" charset="0"/>
-              <a:buChar char="•"/>
-            </a:pPr>
-            <a:endParaRPr lang="en-US" altLang="zh-TW" sz="3200" b="0" i="0" dirty="0">
-              <a:effectLst/>
-              <a:latin typeface="微軟正黑體" panose="020B0604030504040204" pitchFamily="34" charset="-120"/>
-              <a:ea typeface="微軟正黑體" panose="020B0604030504040204" pitchFamily="34" charset="-120"/>
-            </a:endParaRPr>
-          </a:p>
-        </p:txBody>
-      </p:sp>
-    </p:spTree>
-    <p:extLst>
-      <p:ext uri="{BB962C8B-B14F-4D97-AF65-F5344CB8AC3E}">
-        <p14:creationId xmlns:p14="http://schemas.microsoft.com/office/powerpoint/2010/main" val="805317791"/>
-      </p:ext>
-    </p:extLst>
-  </p:cSld>
-  <p:clrMapOvr>
-    <a:masterClrMapping/>
-  </p:clrMapOvr>
-  <p:transition>
-    <p:fade/>
-  </p:transition>
-</p:sld>
-</file>
-
-<file path=ppt/slides/slide30.xml><?xml version="1.0" encoding="utf-8"?>
-<p:sld xmlns:a="http://schemas.openxmlformats.org/drawingml/2006/main" xmlns:r="http://schemas.openxmlformats.org/officeDocument/2006/relationships" xmlns:p="http://schemas.openxmlformats.org/presentationml/2006/main">
-  <p:cSld>
-    <p:spTree>
-      <p:nvGrpSpPr>
-        <p:cNvPr id="1" name=""/>
-        <p:cNvGrpSpPr/>
-        <p:nvPr/>
-      </p:nvGrpSpPr>
-      <p:grpSpPr>
-        <a:xfrm>
-          <a:off x="0" y="0"/>
-          <a:ext cx="0" cy="0"/>
-          <a:chOff x="0" y="0"/>
-          <a:chExt cx="0" cy="0"/>
-        </a:xfrm>
-      </p:grpSpPr>
-      <p:sp>
-        <p:nvSpPr>
-          <p:cNvPr id="4" name="文字版面配置區 2"/>
-          <p:cNvSpPr txBox="1">
-            <a:spLocks/>
-          </p:cNvSpPr>
-          <p:nvPr/>
-        </p:nvSpPr>
-        <p:spPr>
-          <a:xfrm>
-            <a:off x="2590800" y="126742"/>
-            <a:ext cx="4552950" cy="990600"/>
-          </a:xfrm>
-          <a:prstGeom prst="rect">
-            <a:avLst/>
-          </a:prstGeom>
-        </p:spPr>
-        <p:txBody>
-          <a:bodyPr tIns="91440" bIns="91440" anchor="b" anchorCtr="0">
-            <a:noAutofit/>
-          </a:bodyPr>
-          <a:lstStyle/>
-          <a:p>
-            <a:r>
-              <a:rPr kumimoji="1" lang="zh-TW" altLang="en-US" sz="4800" b="1" dirty="0">
-                <a:solidFill>
-                  <a:srgbClr val="00B0F0"/>
-                </a:solidFill>
-                <a:effectLst>
-                  <a:outerShdw blurRad="38100" dist="38100" dir="2700000" algn="tl">
-                    <a:srgbClr val="000000">
-                      <a:alpha val="43137"/>
-                    </a:srgbClr>
-                  </a:outerShdw>
-                </a:effectLst>
-                <a:latin typeface="微軟正黑體" panose="020B0604030504040204" pitchFamily="34" charset="-120"/>
-                <a:ea typeface="微軟正黑體" panose="020B0604030504040204" pitchFamily="34" charset="-120"/>
-                <a:cs typeface="Heiti TC Light"/>
-              </a:rPr>
-              <a:t>從結果找指令</a:t>
-            </a:r>
-            <a:endParaRPr kumimoji="1" lang="en-US" altLang="zh-TW" sz="4800" b="1" dirty="0">
-              <a:solidFill>
-                <a:srgbClr val="00B0F0"/>
-              </a:solidFill>
-              <a:effectLst>
-                <a:outerShdw blurRad="38100" dist="38100" dir="2700000" algn="tl">
-                  <a:srgbClr val="000000">
-                    <a:alpha val="43137"/>
-                  </a:srgbClr>
-                </a:outerShdw>
-              </a:effectLst>
-              <a:latin typeface="微軟正黑體" panose="020B0604030504040204" pitchFamily="34" charset="-120"/>
-              <a:ea typeface="微軟正黑體" panose="020B0604030504040204" pitchFamily="34" charset="-120"/>
-              <a:cs typeface="Heiti TC Light"/>
-            </a:endParaRPr>
-          </a:p>
-        </p:txBody>
-      </p:sp>
-      <p:sp>
-        <p:nvSpPr>
-          <p:cNvPr id="3" name="日期版面配置區 2">
-            <a:extLst>
-              <a:ext uri="{FF2B5EF4-FFF2-40B4-BE49-F238E27FC236}">
-                <a16:creationId xmlns:a16="http://schemas.microsoft.com/office/drawing/2014/main" id="{1C536CB5-3C58-6CF1-767E-952B76F12DEE}"/>
-              </a:ext>
-            </a:extLst>
-          </p:cNvPr>
-          <p:cNvSpPr>
-            <a:spLocks noGrp="1"/>
-          </p:cNvSpPr>
-          <p:nvPr>
-            <p:ph type="dt" sz="half" idx="12"/>
-          </p:nvPr>
-        </p:nvSpPr>
-        <p:spPr/>
-        <p:txBody>
-          <a:bodyPr/>
-          <a:lstStyle/>
-          <a:p>
-            <a:fld id="{0B520B05-2240-4566-BE2A-9338980FE8EB}" type="datetime1">
-              <a:rPr kumimoji="0" lang="en-US" altLang="zh-TW" sz="1200" smtClean="0">
-                <a:solidFill>
-                  <a:schemeClr val="tx2"/>
-                </a:solidFill>
-                <a:latin typeface="Arial" panose="020B0604020202020204" pitchFamily="34" charset="0"/>
-                <a:cs typeface="Arial" panose="020B0604020202020204" pitchFamily="34" charset="0"/>
-              </a:rPr>
-              <a:t>11/27/2024</a:t>
-            </a:fld>
-            <a:endParaRPr kumimoji="0" lang="en-US" dirty="0">
-              <a:latin typeface="Arial" panose="020B0604020202020204" pitchFamily="34" charset="0"/>
-              <a:cs typeface="Arial" panose="020B0604020202020204" pitchFamily="34" charset="0"/>
-            </a:endParaRPr>
-          </a:p>
-        </p:txBody>
-      </p:sp>
-      <p:sp>
-        <p:nvSpPr>
-          <p:cNvPr id="7" name="投影片編號版面配置區 6">
-            <a:extLst>
-              <a:ext uri="{FF2B5EF4-FFF2-40B4-BE49-F238E27FC236}">
-                <a16:creationId xmlns:a16="http://schemas.microsoft.com/office/drawing/2014/main" id="{DA316F56-AF12-D872-611F-78AE7ACCBF93}"/>
-              </a:ext>
-            </a:extLst>
-          </p:cNvPr>
-          <p:cNvSpPr>
-            <a:spLocks noGrp="1"/>
-          </p:cNvSpPr>
-          <p:nvPr>
-            <p:ph type="sldNum" sz="quarter" idx="13"/>
-          </p:nvPr>
-        </p:nvSpPr>
-        <p:spPr/>
-        <p:txBody>
-          <a:bodyPr/>
-          <a:lstStyle/>
-          <a:p>
-            <a:pPr algn="r"/>
-            <a:fld id="{F99EC173-99AE-4773-AB25-02E469A13EAE}" type="slidenum">
-              <a:rPr kumimoji="0" lang="en-US" sz="1200" smtClean="0">
-                <a:solidFill>
-                  <a:schemeClr val="tx2"/>
-                </a:solidFill>
-              </a:rPr>
-              <a:pPr algn="r"/>
-              <a:t>30</a:t>
+              <a:t>29</a:t>
             </a:fld>
             <a:endParaRPr kumimoji="0" lang="en-US" dirty="0"/>
           </a:p>
@@ -19120,6 +18317,934 @@
 </p:sld>
 </file>
 
+<file path=ppt/slides/slide3.xml><?xml version="1.0" encoding="utf-8"?>
+<p:sld xmlns:a="http://schemas.openxmlformats.org/drawingml/2006/main" xmlns:r="http://schemas.openxmlformats.org/officeDocument/2006/relationships" xmlns:p="http://schemas.openxmlformats.org/presentationml/2006/main">
+  <p:cSld>
+    <p:spTree>
+      <p:nvGrpSpPr>
+        <p:cNvPr id="1" name=""/>
+        <p:cNvGrpSpPr/>
+        <p:nvPr/>
+      </p:nvGrpSpPr>
+      <p:grpSpPr>
+        <a:xfrm>
+          <a:off x="0" y="0"/>
+          <a:ext cx="0" cy="0"/>
+          <a:chOff x="0" y="0"/>
+          <a:chExt cx="0" cy="0"/>
+        </a:xfrm>
+      </p:grpSpPr>
+      <p:sp>
+        <p:nvSpPr>
+          <p:cNvPr id="4" name="文字版面配置區 2"/>
+          <p:cNvSpPr txBox="1">
+            <a:spLocks/>
+          </p:cNvSpPr>
+          <p:nvPr/>
+        </p:nvSpPr>
+        <p:spPr>
+          <a:xfrm>
+            <a:off x="1971330" y="40346"/>
+            <a:ext cx="6553200" cy="990600"/>
+          </a:xfrm>
+          <a:prstGeom prst="rect">
+            <a:avLst/>
+          </a:prstGeom>
+        </p:spPr>
+        <p:txBody>
+          <a:bodyPr tIns="91440" bIns="91440" anchor="b" anchorCtr="0">
+            <a:noAutofit/>
+          </a:bodyPr>
+          <a:lstStyle/>
+          <a:p>
+            <a:r>
+              <a:rPr kumimoji="1" lang="zh-TW" altLang="en-US" sz="4800" b="1" dirty="0">
+                <a:solidFill>
+                  <a:srgbClr val="00B0F0"/>
+                </a:solidFill>
+                <a:effectLst>
+                  <a:outerShdw blurRad="38100" dist="38100" dir="2700000" algn="tl">
+                    <a:srgbClr val="000000">
+                      <a:alpha val="43137"/>
+                    </a:srgbClr>
+                  </a:outerShdw>
+                </a:effectLst>
+                <a:latin typeface="微軟正黑體" panose="020B0604030504040204" pitchFamily="34" charset="-120"/>
+                <a:ea typeface="微軟正黑體" panose="020B0604030504040204" pitchFamily="34" charset="-120"/>
+                <a:cs typeface="Heiti TC Light"/>
+              </a:rPr>
+              <a:t>經過之後</a:t>
+            </a:r>
+            <a:r>
+              <a:rPr kumimoji="1" lang="en-US" altLang="zh-TW" sz="4800" b="1" dirty="0">
+                <a:solidFill>
+                  <a:srgbClr val="00B0F0"/>
+                </a:solidFill>
+                <a:effectLst>
+                  <a:outerShdw blurRad="38100" dist="38100" dir="2700000" algn="tl">
+                    <a:srgbClr val="000000">
+                      <a:alpha val="43137"/>
+                    </a:srgbClr>
+                  </a:outerShdw>
+                </a:effectLst>
+                <a:latin typeface="微軟正黑體" panose="020B0604030504040204" pitchFamily="34" charset="-120"/>
+                <a:ea typeface="微軟正黑體" panose="020B0604030504040204" pitchFamily="34" charset="-120"/>
+                <a:cs typeface="Heiti TC Light"/>
+              </a:rPr>
+              <a:t>SFT</a:t>
+            </a:r>
+            <a:r>
+              <a:rPr kumimoji="1" lang="zh-TW" altLang="en-US" sz="4800" b="1" dirty="0">
+                <a:solidFill>
+                  <a:srgbClr val="00B0F0"/>
+                </a:solidFill>
+                <a:effectLst>
+                  <a:outerShdw blurRad="38100" dist="38100" dir="2700000" algn="tl">
+                    <a:srgbClr val="000000">
+                      <a:alpha val="43137"/>
+                    </a:srgbClr>
+                  </a:outerShdw>
+                </a:effectLst>
+                <a:latin typeface="微軟正黑體" panose="020B0604030504040204" pitchFamily="34" charset="-120"/>
+                <a:ea typeface="微軟正黑體" panose="020B0604030504040204" pitchFamily="34" charset="-120"/>
+                <a:cs typeface="Heiti TC Light"/>
+              </a:rPr>
+              <a:t>的模型</a:t>
+            </a:r>
+            <a:endParaRPr kumimoji="1" lang="en-US" altLang="zh-TW" sz="4800" b="1" dirty="0">
+              <a:solidFill>
+                <a:srgbClr val="00B0F0"/>
+              </a:solidFill>
+              <a:effectLst>
+                <a:outerShdw blurRad="38100" dist="38100" dir="2700000" algn="tl">
+                  <a:srgbClr val="000000">
+                    <a:alpha val="43137"/>
+                  </a:srgbClr>
+                </a:outerShdw>
+              </a:effectLst>
+              <a:latin typeface="微軟正黑體" panose="020B0604030504040204" pitchFamily="34" charset="-120"/>
+              <a:ea typeface="微軟正黑體" panose="020B0604030504040204" pitchFamily="34" charset="-120"/>
+              <a:cs typeface="Heiti TC Light"/>
+            </a:endParaRPr>
+          </a:p>
+        </p:txBody>
+      </p:sp>
+      <p:sp>
+        <p:nvSpPr>
+          <p:cNvPr id="3" name="日期版面配置區 2">
+            <a:extLst>
+              <a:ext uri="{FF2B5EF4-FFF2-40B4-BE49-F238E27FC236}">
+                <a16:creationId xmlns:a16="http://schemas.microsoft.com/office/drawing/2014/main" id="{1C536CB5-3C58-6CF1-767E-952B76F12DEE}"/>
+              </a:ext>
+            </a:extLst>
+          </p:cNvPr>
+          <p:cNvSpPr>
+            <a:spLocks noGrp="1"/>
+          </p:cNvSpPr>
+          <p:nvPr>
+            <p:ph type="dt" sz="half" idx="12"/>
+          </p:nvPr>
+        </p:nvSpPr>
+        <p:spPr/>
+        <p:txBody>
+          <a:bodyPr/>
+          <a:lstStyle/>
+          <a:p>
+            <a:fld id="{0B520B05-2240-4566-BE2A-9338980FE8EB}" type="datetime1">
+              <a:rPr kumimoji="0" lang="en-US" altLang="zh-TW" sz="1200" smtClean="0">
+                <a:solidFill>
+                  <a:schemeClr val="tx2"/>
+                </a:solidFill>
+                <a:latin typeface="Arial" panose="020B0604020202020204" pitchFamily="34" charset="0"/>
+                <a:cs typeface="Arial" panose="020B0604020202020204" pitchFamily="34" charset="0"/>
+              </a:rPr>
+              <a:t>12/3/2024</a:t>
+            </a:fld>
+            <a:endParaRPr kumimoji="0" lang="en-US" dirty="0">
+              <a:latin typeface="Arial" panose="020B0604020202020204" pitchFamily="34" charset="0"/>
+              <a:cs typeface="Arial" panose="020B0604020202020204" pitchFamily="34" charset="0"/>
+            </a:endParaRPr>
+          </a:p>
+        </p:txBody>
+      </p:sp>
+      <p:sp>
+        <p:nvSpPr>
+          <p:cNvPr id="7" name="投影片編號版面配置區 6">
+            <a:extLst>
+              <a:ext uri="{FF2B5EF4-FFF2-40B4-BE49-F238E27FC236}">
+                <a16:creationId xmlns:a16="http://schemas.microsoft.com/office/drawing/2014/main" id="{DA316F56-AF12-D872-611F-78AE7ACCBF93}"/>
+              </a:ext>
+            </a:extLst>
+          </p:cNvPr>
+          <p:cNvSpPr>
+            <a:spLocks noGrp="1"/>
+          </p:cNvSpPr>
+          <p:nvPr>
+            <p:ph type="sldNum" sz="quarter" idx="13"/>
+          </p:nvPr>
+        </p:nvSpPr>
+        <p:spPr/>
+        <p:txBody>
+          <a:bodyPr/>
+          <a:lstStyle/>
+          <a:p>
+            <a:pPr algn="r"/>
+            <a:fld id="{F99EC173-99AE-4773-AB25-02E469A13EAE}" type="slidenum">
+              <a:rPr kumimoji="0" lang="en-US" sz="1200" smtClean="0">
+                <a:solidFill>
+                  <a:schemeClr val="tx2"/>
+                </a:solidFill>
+              </a:rPr>
+              <a:pPr algn="r"/>
+              <a:t>3</a:t>
+            </a:fld>
+            <a:endParaRPr kumimoji="0" lang="en-US" dirty="0"/>
+          </a:p>
+        </p:txBody>
+      </p:sp>
+      <p:sp>
+        <p:nvSpPr>
+          <p:cNvPr id="2" name="文字方塊 1">
+            <a:extLst>
+              <a:ext uri="{FF2B5EF4-FFF2-40B4-BE49-F238E27FC236}">
+                <a16:creationId xmlns:a16="http://schemas.microsoft.com/office/drawing/2014/main" id="{E17C39F0-9527-522B-E55B-DAC3D2425E05}"/>
+              </a:ext>
+            </a:extLst>
+          </p:cNvPr>
+          <p:cNvSpPr txBox="1"/>
+          <p:nvPr/>
+        </p:nvSpPr>
+        <p:spPr>
+          <a:xfrm>
+            <a:off x="609600" y="1219200"/>
+            <a:ext cx="7924800" cy="4524315"/>
+          </a:xfrm>
+          <a:prstGeom prst="rect">
+            <a:avLst/>
+          </a:prstGeom>
+          <a:noFill/>
+        </p:spPr>
+        <p:txBody>
+          <a:bodyPr wrap="square" rtlCol="0">
+            <a:spAutoFit/>
+          </a:bodyPr>
+          <a:lstStyle/>
+          <a:p>
+            <a:pPr marL="457200" indent="-457200">
+              <a:buFont typeface="Arial" panose="020B0604020202020204" pitchFamily="34" charset="0"/>
+              <a:buChar char="•"/>
+            </a:pPr>
+            <a:r>
+              <a:rPr lang="zh-TW" altLang="en-US" sz="3200" b="0" i="0" dirty="0">
+                <a:effectLst/>
+                <a:latin typeface="微軟正黑體" panose="020B0604030504040204" pitchFamily="34" charset="-120"/>
+                <a:ea typeface="微軟正黑體" panose="020B0604030504040204" pitchFamily="34" charset="-120"/>
+              </a:rPr>
+              <a:t>看得懂人類的指令，做出回答</a:t>
+            </a:r>
+            <a:endParaRPr lang="en-US" altLang="zh-TW" sz="3200" b="0" i="0" dirty="0">
+              <a:effectLst/>
+              <a:latin typeface="微軟正黑體" panose="020B0604030504040204" pitchFamily="34" charset="-120"/>
+              <a:ea typeface="微軟正黑體" panose="020B0604030504040204" pitchFamily="34" charset="-120"/>
+            </a:endParaRPr>
+          </a:p>
+          <a:p>
+            <a:pPr marL="457200" indent="-457200">
+              <a:buFont typeface="Arial" panose="020B0604020202020204" pitchFamily="34" charset="0"/>
+              <a:buChar char="•"/>
+            </a:pPr>
+            <a:r>
+              <a:rPr lang="zh-TW" altLang="en-US" sz="3200" b="0" i="0" dirty="0">
+                <a:effectLst/>
+                <a:latin typeface="微軟正黑體" panose="020B0604030504040204" pitchFamily="34" charset="-120"/>
+                <a:ea typeface="微軟正黑體" panose="020B0604030504040204" pitchFamily="34" charset="-120"/>
+              </a:rPr>
+              <a:t>答案是否正確？有用？有害？有偏見？</a:t>
+            </a:r>
+            <a:endParaRPr lang="en-US" altLang="zh-TW" sz="3200" b="0" i="0" dirty="0">
+              <a:effectLst/>
+              <a:latin typeface="微軟正黑體" panose="020B0604030504040204" pitchFamily="34" charset="-120"/>
+              <a:ea typeface="微軟正黑體" panose="020B0604030504040204" pitchFamily="34" charset="-120"/>
+            </a:endParaRPr>
+          </a:p>
+          <a:p>
+            <a:pPr marL="457200" indent="-457200">
+              <a:buFont typeface="Arial" panose="020B0604020202020204" pitchFamily="34" charset="0"/>
+              <a:buChar char="•"/>
+            </a:pPr>
+            <a:r>
+              <a:rPr lang="zh-TW" altLang="en-US" sz="3200" b="0" i="0" dirty="0">
+                <a:effectLst/>
+                <a:latin typeface="微軟正黑體" panose="020B0604030504040204" pitchFamily="34" charset="-120"/>
+                <a:ea typeface="微軟正黑體" panose="020B0604030504040204" pitchFamily="34" charset="-120"/>
+              </a:rPr>
+              <a:t>答案不但要正確，還要符合人類期待</a:t>
+            </a:r>
+            <a:endParaRPr lang="en-US" altLang="zh-TW" sz="3200" b="0" i="0" dirty="0">
+              <a:effectLst/>
+              <a:latin typeface="微軟正黑體" panose="020B0604030504040204" pitchFamily="34" charset="-120"/>
+              <a:ea typeface="微軟正黑體" panose="020B0604030504040204" pitchFamily="34" charset="-120"/>
+            </a:endParaRPr>
+          </a:p>
+          <a:p>
+            <a:pPr marL="457200" indent="-457200">
+              <a:buFont typeface="Arial" panose="020B0604020202020204" pitchFamily="34" charset="0"/>
+              <a:buChar char="•"/>
+            </a:pPr>
+            <a:r>
+              <a:rPr lang="zh-TW" altLang="en-US" sz="3200" b="0" i="0" dirty="0">
+                <a:effectLst/>
+                <a:latin typeface="微軟正黑體" panose="020B0604030504040204" pitchFamily="34" charset="-120"/>
+                <a:ea typeface="微軟正黑體" panose="020B0604030504040204" pitchFamily="34" charset="-120"/>
+              </a:rPr>
+              <a:t>此時必須加入人類的判斷</a:t>
+            </a:r>
+            <a:endParaRPr lang="en-US" altLang="zh-TW" sz="3200" b="0" i="0" dirty="0">
+              <a:effectLst/>
+              <a:latin typeface="微軟正黑體" panose="020B0604030504040204" pitchFamily="34" charset="-120"/>
+              <a:ea typeface="微軟正黑體" panose="020B0604030504040204" pitchFamily="34" charset="-120"/>
+            </a:endParaRPr>
+          </a:p>
+          <a:p>
+            <a:pPr marL="457200" indent="-457200">
+              <a:buFont typeface="Arial" panose="020B0604020202020204" pitchFamily="34" charset="0"/>
+              <a:buChar char="•"/>
+            </a:pPr>
+            <a:r>
+              <a:rPr lang="zh-TW" altLang="en-US" sz="3200" b="0" i="0" dirty="0">
+                <a:effectLst/>
+                <a:latin typeface="微軟正黑體" panose="020B0604030504040204" pitchFamily="34" charset="-120"/>
+                <a:ea typeface="微軟正黑體" panose="020B0604030504040204" pitchFamily="34" charset="-120"/>
+              </a:rPr>
+              <a:t>獎勵模型的使用</a:t>
+            </a:r>
+            <a:endParaRPr lang="en-US" altLang="zh-TW" sz="3200" b="0" i="0" dirty="0">
+              <a:effectLst/>
+              <a:latin typeface="微軟正黑體" panose="020B0604030504040204" pitchFamily="34" charset="-120"/>
+              <a:ea typeface="微軟正黑體" panose="020B0604030504040204" pitchFamily="34" charset="-120"/>
+            </a:endParaRPr>
+          </a:p>
+          <a:p>
+            <a:pPr marL="457200" indent="-457200">
+              <a:buFont typeface="Arial" panose="020B0604020202020204" pitchFamily="34" charset="0"/>
+              <a:buChar char="•"/>
+            </a:pPr>
+            <a:r>
+              <a:rPr lang="zh-TW" altLang="en-US" sz="3200" b="0" i="0" dirty="0">
+                <a:effectLst/>
+                <a:latin typeface="微軟正黑體" panose="020B0604030504040204" pitchFamily="34" charset="-120"/>
+                <a:ea typeface="微軟正黑體" panose="020B0604030504040204" pitchFamily="34" charset="-120"/>
+              </a:rPr>
+              <a:t>將</a:t>
+            </a:r>
+            <a:r>
+              <a:rPr lang="en-US" altLang="zh-TW" sz="3200" dirty="0" err="1">
+                <a:latin typeface="微軟正黑體" panose="020B0604030504040204" pitchFamily="34" charset="-120"/>
+                <a:ea typeface="微軟正黑體" panose="020B0604030504040204" pitchFamily="34" charset="-120"/>
+              </a:rPr>
+              <a:t>llm</a:t>
+            </a:r>
+            <a:r>
+              <a:rPr lang="zh-TW" altLang="en-US" sz="3200" dirty="0">
+                <a:latin typeface="微軟正黑體" panose="020B0604030504040204" pitchFamily="34" charset="-120"/>
+                <a:ea typeface="微軟正黑體" panose="020B0604030504040204" pitchFamily="34" charset="-120"/>
+              </a:rPr>
+              <a:t>調整成符合人類價值觀的期待，稱對齊</a:t>
+            </a:r>
+            <a:r>
+              <a:rPr lang="en-US" altLang="zh-TW" sz="3200" dirty="0">
+                <a:latin typeface="微軟正黑體" panose="020B0604030504040204" pitchFamily="34" charset="-120"/>
+                <a:ea typeface="微軟正黑體" panose="020B0604030504040204" pitchFamily="34" charset="-120"/>
+              </a:rPr>
+              <a:t>(Alignment)</a:t>
+            </a:r>
+            <a:endParaRPr lang="en-US" altLang="zh-TW" sz="3200" b="0" i="0" dirty="0">
+              <a:effectLst/>
+              <a:latin typeface="微軟正黑體" panose="020B0604030504040204" pitchFamily="34" charset="-120"/>
+              <a:ea typeface="微軟正黑體" panose="020B0604030504040204" pitchFamily="34" charset="-120"/>
+            </a:endParaRPr>
+          </a:p>
+          <a:p>
+            <a:pPr marL="457200" indent="-457200">
+              <a:buFont typeface="Arial" panose="020B0604020202020204" pitchFamily="34" charset="0"/>
+              <a:buChar char="•"/>
+            </a:pPr>
+            <a:endParaRPr lang="en-US" altLang="zh-TW" sz="3200" b="0" i="0" dirty="0">
+              <a:effectLst/>
+              <a:latin typeface="微軟正黑體" panose="020B0604030504040204" pitchFamily="34" charset="-120"/>
+              <a:ea typeface="微軟正黑體" panose="020B0604030504040204" pitchFamily="34" charset="-120"/>
+            </a:endParaRPr>
+          </a:p>
+          <a:p>
+            <a:pPr marL="457200" indent="-457200">
+              <a:buFont typeface="Arial" panose="020B0604020202020204" pitchFamily="34" charset="0"/>
+              <a:buChar char="•"/>
+            </a:pPr>
+            <a:endParaRPr lang="en-US" altLang="zh-TW" sz="3200" b="0" i="0" dirty="0">
+              <a:effectLst/>
+              <a:latin typeface="微軟正黑體" panose="020B0604030504040204" pitchFamily="34" charset="-120"/>
+              <a:ea typeface="微軟正黑體" panose="020B0604030504040204" pitchFamily="34" charset="-120"/>
+            </a:endParaRPr>
+          </a:p>
+        </p:txBody>
+      </p:sp>
+    </p:spTree>
+    <p:extLst>
+      <p:ext uri="{BB962C8B-B14F-4D97-AF65-F5344CB8AC3E}">
+        <p14:creationId xmlns:p14="http://schemas.microsoft.com/office/powerpoint/2010/main" val="805317791"/>
+      </p:ext>
+    </p:extLst>
+  </p:cSld>
+  <p:clrMapOvr>
+    <a:masterClrMapping/>
+  </p:clrMapOvr>
+  <p:transition>
+    <p:fade/>
+  </p:transition>
+</p:sld>
+</file>
+
+<file path=ppt/slides/slide30.xml><?xml version="1.0" encoding="utf-8"?>
+<p:sld xmlns:a="http://schemas.openxmlformats.org/drawingml/2006/main" xmlns:r="http://schemas.openxmlformats.org/officeDocument/2006/relationships" xmlns:p="http://schemas.openxmlformats.org/presentationml/2006/main">
+  <p:cSld>
+    <p:spTree>
+      <p:nvGrpSpPr>
+        <p:cNvPr id="1" name=""/>
+        <p:cNvGrpSpPr/>
+        <p:nvPr/>
+      </p:nvGrpSpPr>
+      <p:grpSpPr>
+        <a:xfrm>
+          <a:off x="0" y="0"/>
+          <a:ext cx="0" cy="0"/>
+          <a:chOff x="0" y="0"/>
+          <a:chExt cx="0" cy="0"/>
+        </a:xfrm>
+      </p:grpSpPr>
+      <p:sp>
+        <p:nvSpPr>
+          <p:cNvPr id="4" name="文字版面配置區 2"/>
+          <p:cNvSpPr txBox="1">
+            <a:spLocks/>
+          </p:cNvSpPr>
+          <p:nvPr/>
+        </p:nvSpPr>
+        <p:spPr>
+          <a:xfrm>
+            <a:off x="2076450" y="123885"/>
+            <a:ext cx="6553200" cy="990600"/>
+          </a:xfrm>
+          <a:prstGeom prst="rect">
+            <a:avLst/>
+          </a:prstGeom>
+        </p:spPr>
+        <p:txBody>
+          <a:bodyPr tIns="91440" bIns="91440" anchor="b" anchorCtr="0">
+            <a:noAutofit/>
+          </a:bodyPr>
+          <a:lstStyle/>
+          <a:p>
+            <a:r>
+              <a:rPr kumimoji="1" lang="zh-TW" altLang="en-US" sz="4800" b="1" dirty="0">
+                <a:solidFill>
+                  <a:srgbClr val="00B0F0"/>
+                </a:solidFill>
+                <a:effectLst>
+                  <a:outerShdw blurRad="38100" dist="38100" dir="2700000" algn="tl">
+                    <a:srgbClr val="000000">
+                      <a:alpha val="43137"/>
+                    </a:srgbClr>
+                  </a:outerShdw>
+                </a:effectLst>
+                <a:latin typeface="微軟正黑體" panose="020B0604030504040204" pitchFamily="34" charset="-120"/>
+                <a:ea typeface="微軟正黑體" panose="020B0604030504040204" pitchFamily="34" charset="-120"/>
+                <a:cs typeface="Heiti TC Light"/>
+              </a:rPr>
+              <a:t>例子：</a:t>
+            </a:r>
+            <a:r>
+              <a:rPr kumimoji="1" lang="en-US" altLang="zh-TW" sz="4800" b="1" dirty="0" err="1">
+                <a:solidFill>
+                  <a:srgbClr val="00B0F0"/>
+                </a:solidFill>
+                <a:effectLst>
+                  <a:outerShdw blurRad="38100" dist="38100" dir="2700000" algn="tl">
+                    <a:srgbClr val="000000">
+                      <a:alpha val="43137"/>
+                    </a:srgbClr>
+                  </a:outerShdw>
+                </a:effectLst>
+                <a:latin typeface="微軟正黑體" panose="020B0604030504040204" pitchFamily="34" charset="-120"/>
+                <a:ea typeface="微軟正黑體" panose="020B0604030504040204" pitchFamily="34" charset="-120"/>
+                <a:cs typeface="Heiti TC Light"/>
+              </a:rPr>
+              <a:t>InstructGPT</a:t>
+            </a:r>
+            <a:endParaRPr kumimoji="1" lang="en-US" altLang="zh-TW" sz="4800" b="1" dirty="0">
+              <a:solidFill>
+                <a:srgbClr val="00B0F0"/>
+              </a:solidFill>
+              <a:effectLst>
+                <a:outerShdw blurRad="38100" dist="38100" dir="2700000" algn="tl">
+                  <a:srgbClr val="000000">
+                    <a:alpha val="43137"/>
+                  </a:srgbClr>
+                </a:outerShdw>
+              </a:effectLst>
+              <a:latin typeface="微軟正黑體" panose="020B0604030504040204" pitchFamily="34" charset="-120"/>
+              <a:ea typeface="微軟正黑體" panose="020B0604030504040204" pitchFamily="34" charset="-120"/>
+              <a:cs typeface="Heiti TC Light"/>
+            </a:endParaRPr>
+          </a:p>
+        </p:txBody>
+      </p:sp>
+      <p:sp>
+        <p:nvSpPr>
+          <p:cNvPr id="3" name="日期版面配置區 2">
+            <a:extLst>
+              <a:ext uri="{FF2B5EF4-FFF2-40B4-BE49-F238E27FC236}">
+                <a16:creationId xmlns:a16="http://schemas.microsoft.com/office/drawing/2014/main" id="{1C536CB5-3C58-6CF1-767E-952B76F12DEE}"/>
+              </a:ext>
+            </a:extLst>
+          </p:cNvPr>
+          <p:cNvSpPr>
+            <a:spLocks noGrp="1"/>
+          </p:cNvSpPr>
+          <p:nvPr>
+            <p:ph type="dt" sz="half" idx="12"/>
+          </p:nvPr>
+        </p:nvSpPr>
+        <p:spPr/>
+        <p:txBody>
+          <a:bodyPr/>
+          <a:lstStyle/>
+          <a:p>
+            <a:fld id="{0B520B05-2240-4566-BE2A-9338980FE8EB}" type="datetime1">
+              <a:rPr kumimoji="0" lang="en-US" altLang="zh-TW" sz="1200" smtClean="0">
+                <a:solidFill>
+                  <a:schemeClr val="tx2"/>
+                </a:solidFill>
+                <a:latin typeface="Arial" panose="020B0604020202020204" pitchFamily="34" charset="0"/>
+                <a:cs typeface="Arial" panose="020B0604020202020204" pitchFamily="34" charset="0"/>
+              </a:rPr>
+              <a:t>12/3/2024</a:t>
+            </a:fld>
+            <a:endParaRPr kumimoji="0" lang="en-US" dirty="0">
+              <a:latin typeface="Arial" panose="020B0604020202020204" pitchFamily="34" charset="0"/>
+              <a:cs typeface="Arial" panose="020B0604020202020204" pitchFamily="34" charset="0"/>
+            </a:endParaRPr>
+          </a:p>
+        </p:txBody>
+      </p:sp>
+      <p:sp>
+        <p:nvSpPr>
+          <p:cNvPr id="7" name="投影片編號版面配置區 6">
+            <a:extLst>
+              <a:ext uri="{FF2B5EF4-FFF2-40B4-BE49-F238E27FC236}">
+                <a16:creationId xmlns:a16="http://schemas.microsoft.com/office/drawing/2014/main" id="{DA316F56-AF12-D872-611F-78AE7ACCBF93}"/>
+              </a:ext>
+            </a:extLst>
+          </p:cNvPr>
+          <p:cNvSpPr>
+            <a:spLocks noGrp="1"/>
+          </p:cNvSpPr>
+          <p:nvPr>
+            <p:ph type="sldNum" sz="quarter" idx="13"/>
+          </p:nvPr>
+        </p:nvSpPr>
+        <p:spPr/>
+        <p:txBody>
+          <a:bodyPr/>
+          <a:lstStyle/>
+          <a:p>
+            <a:pPr algn="r"/>
+            <a:fld id="{F99EC173-99AE-4773-AB25-02E469A13EAE}" type="slidenum">
+              <a:rPr kumimoji="0" lang="en-US" sz="1200" smtClean="0">
+                <a:solidFill>
+                  <a:schemeClr val="tx2"/>
+                </a:solidFill>
+              </a:rPr>
+              <a:pPr algn="r"/>
+              <a:t>30</a:t>
+            </a:fld>
+            <a:endParaRPr kumimoji="0" lang="en-US" dirty="0"/>
+          </a:p>
+        </p:txBody>
+      </p:sp>
+      <p:sp>
+        <p:nvSpPr>
+          <p:cNvPr id="2" name="文字方塊 1">
+            <a:extLst>
+              <a:ext uri="{FF2B5EF4-FFF2-40B4-BE49-F238E27FC236}">
+                <a16:creationId xmlns:a16="http://schemas.microsoft.com/office/drawing/2014/main" id="{E17C39F0-9527-522B-E55B-DAC3D2425E05}"/>
+              </a:ext>
+            </a:extLst>
+          </p:cNvPr>
+          <p:cNvSpPr txBox="1"/>
+          <p:nvPr/>
+        </p:nvSpPr>
+        <p:spPr>
+          <a:xfrm>
+            <a:off x="609600" y="1219200"/>
+            <a:ext cx="7924800" cy="5509200"/>
+          </a:xfrm>
+          <a:prstGeom prst="rect">
+            <a:avLst/>
+          </a:prstGeom>
+          <a:noFill/>
+        </p:spPr>
+        <p:txBody>
+          <a:bodyPr wrap="square" rtlCol="0">
+            <a:spAutoFit/>
+          </a:bodyPr>
+          <a:lstStyle/>
+          <a:p>
+            <a:pPr marL="514350" indent="-514350">
+              <a:buFont typeface="+mj-lt"/>
+              <a:buAutoNum type="arabicPeriod"/>
+            </a:pPr>
+            <a:r>
+              <a:rPr lang="zh-TW" altLang="en-US" sz="3200" b="0" i="0" dirty="0">
+                <a:effectLst/>
+                <a:latin typeface="微軟正黑體" panose="020B0604030504040204" pitchFamily="34" charset="-120"/>
+                <a:ea typeface="微軟正黑體" panose="020B0604030504040204" pitchFamily="34" charset="-120"/>
+              </a:rPr>
+              <a:t>以</a:t>
+            </a:r>
+            <a:r>
+              <a:rPr lang="en-US" altLang="zh-TW" sz="3200" b="0" i="0" dirty="0">
+                <a:effectLst/>
+                <a:latin typeface="微軟正黑體" panose="020B0604030504040204" pitchFamily="34" charset="-120"/>
+                <a:ea typeface="微軟正黑體" panose="020B0604030504040204" pitchFamily="34" charset="-120"/>
+              </a:rPr>
+              <a:t>GPT3</a:t>
+            </a:r>
+            <a:r>
+              <a:rPr lang="zh-TW" altLang="en-US" sz="3200" b="0" i="0" dirty="0">
+                <a:effectLst/>
+                <a:latin typeface="微軟正黑體" panose="020B0604030504040204" pitchFamily="34" charset="-120"/>
+                <a:ea typeface="微軟正黑體" panose="020B0604030504040204" pitchFamily="34" charset="-120"/>
+              </a:rPr>
+              <a:t>為基礎</a:t>
+            </a:r>
+            <a:endParaRPr lang="en-US" altLang="zh-TW" sz="3200" b="0" i="0" dirty="0">
+              <a:effectLst/>
+              <a:latin typeface="微軟正黑體" panose="020B0604030504040204" pitchFamily="34" charset="-120"/>
+              <a:ea typeface="微軟正黑體" panose="020B0604030504040204" pitchFamily="34" charset="-120"/>
+            </a:endParaRPr>
+          </a:p>
+          <a:p>
+            <a:pPr marL="514350" indent="-514350">
+              <a:buFont typeface="+mj-lt"/>
+              <a:buAutoNum type="arabicPeriod"/>
+            </a:pPr>
+            <a:r>
+              <a:rPr lang="zh-TW" altLang="en-US" sz="3200" b="0" i="0" dirty="0">
+                <a:effectLst/>
+                <a:latin typeface="微軟正黑體" panose="020B0604030504040204" pitchFamily="34" charset="-120"/>
+                <a:ea typeface="微軟正黑體" panose="020B0604030504040204" pitchFamily="34" charset="-120"/>
+              </a:rPr>
+              <a:t>經過</a:t>
+            </a:r>
+            <a:r>
+              <a:rPr lang="en-US" altLang="zh-TW" sz="3200" b="0" i="0" dirty="0">
+                <a:effectLst/>
+                <a:latin typeface="微軟正黑體" panose="020B0604030504040204" pitchFamily="34" charset="-120"/>
+                <a:ea typeface="微軟正黑體" panose="020B0604030504040204" pitchFamily="34" charset="-120"/>
+              </a:rPr>
+              <a:t>SFT</a:t>
+            </a:r>
+            <a:r>
+              <a:rPr lang="zh-TW" altLang="en-US" sz="3200" b="0" i="0" dirty="0">
+                <a:effectLst/>
+                <a:latin typeface="微軟正黑體" panose="020B0604030504040204" pitchFamily="34" charset="-120"/>
+                <a:ea typeface="微軟正黑體" panose="020B0604030504040204" pitchFamily="34" charset="-120"/>
+              </a:rPr>
+              <a:t>微調</a:t>
+            </a:r>
+            <a:endParaRPr lang="en-US" altLang="zh-TW" sz="3200" b="0" i="0" dirty="0">
+              <a:effectLst/>
+              <a:latin typeface="微軟正黑體" panose="020B0604030504040204" pitchFamily="34" charset="-120"/>
+              <a:ea typeface="微軟正黑體" panose="020B0604030504040204" pitchFamily="34" charset="-120"/>
+            </a:endParaRPr>
+          </a:p>
+          <a:p>
+            <a:pPr marL="514350" indent="-514350">
+              <a:buFont typeface="+mj-lt"/>
+              <a:buAutoNum type="arabicPeriod"/>
+            </a:pPr>
+            <a:r>
+              <a:rPr lang="zh-TW" altLang="en-US" sz="3200" b="0" i="0" dirty="0">
+                <a:effectLst/>
+                <a:latin typeface="微軟正黑體" panose="020B0604030504040204" pitchFamily="34" charset="-120"/>
+                <a:ea typeface="微軟正黑體" panose="020B0604030504040204" pitchFamily="34" charset="-120"/>
+              </a:rPr>
+              <a:t>訓練</a:t>
+            </a:r>
+            <a:r>
+              <a:rPr lang="en-US" altLang="zh-TW" sz="3200" b="0" i="0" dirty="0">
+                <a:effectLst/>
+                <a:latin typeface="微軟正黑體" panose="020B0604030504040204" pitchFamily="34" charset="-120"/>
+                <a:ea typeface="微軟正黑體" panose="020B0604030504040204" pitchFamily="34" charset="-120"/>
+              </a:rPr>
+              <a:t>RM</a:t>
+            </a:r>
+            <a:r>
+              <a:rPr lang="zh-TW" altLang="en-US" sz="3200" b="0" i="0" dirty="0">
+                <a:effectLst/>
+                <a:latin typeface="微軟正黑體" panose="020B0604030504040204" pitchFamily="34" charset="-120"/>
+                <a:ea typeface="微軟正黑體" panose="020B0604030504040204" pitchFamily="34" charset="-120"/>
+              </a:rPr>
+              <a:t>模型</a:t>
+            </a:r>
+            <a:endParaRPr lang="en-US" altLang="zh-TW" sz="3200" b="0" i="0" dirty="0">
+              <a:effectLst/>
+              <a:latin typeface="微軟正黑體" panose="020B0604030504040204" pitchFamily="34" charset="-120"/>
+              <a:ea typeface="微軟正黑體" panose="020B0604030504040204" pitchFamily="34" charset="-120"/>
+            </a:endParaRPr>
+          </a:p>
+          <a:p>
+            <a:pPr marL="514350" indent="-514350">
+              <a:buFont typeface="+mj-lt"/>
+              <a:buAutoNum type="arabicPeriod"/>
+            </a:pPr>
+            <a:r>
+              <a:rPr lang="zh-TW" altLang="en-US" sz="3200" b="0" i="0" dirty="0">
+                <a:effectLst/>
+                <a:latin typeface="微軟正黑體" panose="020B0604030504040204" pitchFamily="34" charset="-120"/>
+                <a:ea typeface="微軟正黑體" panose="020B0604030504040204" pitchFamily="34" charset="-120"/>
+              </a:rPr>
+              <a:t>利用</a:t>
+            </a:r>
+            <a:r>
+              <a:rPr lang="en-US" altLang="zh-TW" sz="3200" b="0" i="0" dirty="0">
+                <a:effectLst/>
+                <a:latin typeface="微軟正黑體" panose="020B0604030504040204" pitchFamily="34" charset="-120"/>
+                <a:ea typeface="微軟正黑體" panose="020B0604030504040204" pitchFamily="34" charset="-120"/>
+              </a:rPr>
+              <a:t>RM</a:t>
+            </a:r>
+            <a:r>
+              <a:rPr lang="zh-TW" altLang="en-US" sz="3200" b="0" i="0" dirty="0">
+                <a:effectLst/>
+                <a:latin typeface="微軟正黑體" panose="020B0604030504040204" pitchFamily="34" charset="-120"/>
+                <a:ea typeface="微軟正黑體" panose="020B0604030504040204" pitchFamily="34" charset="-120"/>
+              </a:rPr>
+              <a:t>，透過</a:t>
+            </a:r>
+            <a:r>
+              <a:rPr lang="en-US" altLang="zh-TW" sz="3200" b="0" i="0" dirty="0">
+                <a:effectLst/>
+                <a:latin typeface="微軟正黑體" panose="020B0604030504040204" pitchFamily="34" charset="-120"/>
+                <a:ea typeface="微軟正黑體" panose="020B0604030504040204" pitchFamily="34" charset="-120"/>
+              </a:rPr>
+              <a:t>PPO</a:t>
+            </a:r>
+            <a:r>
+              <a:rPr lang="zh-TW" altLang="en-US" sz="3200" b="0" i="0" dirty="0">
+                <a:effectLst/>
+                <a:latin typeface="微軟正黑體" panose="020B0604030504040204" pitchFamily="34" charset="-120"/>
+                <a:ea typeface="微軟正黑體" panose="020B0604030504040204" pitchFamily="34" charset="-120"/>
+              </a:rPr>
+              <a:t>強化學習更新</a:t>
+            </a:r>
+            <a:r>
+              <a:rPr lang="en-US" altLang="zh-TW" sz="3200" b="0" i="0" dirty="0">
+                <a:effectLst/>
+                <a:latin typeface="微軟正黑體" panose="020B0604030504040204" pitchFamily="34" charset="-120"/>
+                <a:ea typeface="微軟正黑體" panose="020B0604030504040204" pitchFamily="34" charset="-120"/>
+              </a:rPr>
+              <a:t>GPT3</a:t>
+            </a:r>
+          </a:p>
+          <a:p>
+            <a:pPr marL="514350" indent="-514350">
+              <a:buFont typeface="+mj-lt"/>
+              <a:buAutoNum type="arabicPeriod"/>
+            </a:pPr>
+            <a:r>
+              <a:rPr lang="zh-TW" altLang="en-US" sz="3200" b="0" i="0" dirty="0">
+                <a:effectLst/>
+                <a:latin typeface="微軟正黑體" panose="020B0604030504040204" pitchFamily="34" charset="-120"/>
+                <a:ea typeface="微軟正黑體" panose="020B0604030504040204" pitchFamily="34" charset="-120"/>
+              </a:rPr>
+              <a:t>以上</a:t>
+            </a:r>
+            <a:r>
+              <a:rPr lang="en-US" altLang="zh-TW" sz="3200" b="0" i="0" dirty="0">
+                <a:effectLst/>
+                <a:latin typeface="微軟正黑體" panose="020B0604030504040204" pitchFamily="34" charset="-120"/>
+                <a:ea typeface="微軟正黑體" panose="020B0604030504040204" pitchFamily="34" charset="-120"/>
+              </a:rPr>
+              <a:t>1-4</a:t>
+            </a:r>
+            <a:r>
+              <a:rPr lang="zh-TW" altLang="en-US" sz="3200" b="0" i="0" dirty="0">
+                <a:effectLst/>
+                <a:latin typeface="微軟正黑體" panose="020B0604030504040204" pitchFamily="34" charset="-120"/>
+                <a:ea typeface="微軟正黑體" panose="020B0604030504040204" pitchFamily="34" charset="-120"/>
+              </a:rPr>
+              <a:t>的過程稱</a:t>
+            </a:r>
+            <a:r>
+              <a:rPr lang="en-US" altLang="zh-TW" sz="3200" b="0" i="0" dirty="0">
+                <a:effectLst/>
+                <a:latin typeface="微軟正黑體" panose="020B0604030504040204" pitchFamily="34" charset="-120"/>
+                <a:ea typeface="微軟正黑體" panose="020B0604030504040204" pitchFamily="34" charset="-120"/>
+              </a:rPr>
+              <a:t>RLHF(Reinforcement Learning from Human Feedback)</a:t>
+            </a:r>
+          </a:p>
+          <a:p>
+            <a:pPr marL="514350" indent="-514350">
+              <a:buFont typeface="+mj-lt"/>
+              <a:buAutoNum type="arabicPeriod"/>
+            </a:pPr>
+            <a:r>
+              <a:rPr lang="zh-TW" altLang="en-US" sz="3200" b="0" i="0" dirty="0">
+                <a:effectLst/>
+                <a:latin typeface="微軟正黑體" panose="020B0604030504040204" pitchFamily="34" charset="-120"/>
+                <a:ea typeface="微軟正黑體" panose="020B0604030504040204" pitchFamily="34" charset="-120"/>
+              </a:rPr>
+              <a:t>稱</a:t>
+            </a:r>
+            <a:r>
+              <a:rPr lang="en-US" altLang="zh-TW" sz="3200" b="0" i="0" dirty="0" err="1">
+                <a:effectLst/>
+                <a:latin typeface="微軟正黑體" panose="020B0604030504040204" pitchFamily="34" charset="-120"/>
+                <a:ea typeface="微軟正黑體" panose="020B0604030504040204" pitchFamily="34" charset="-120"/>
+              </a:rPr>
+              <a:t>InstructGPT</a:t>
+            </a:r>
+            <a:r>
+              <a:rPr lang="zh-TW" altLang="en-US" sz="3200" b="0" i="0" dirty="0">
+                <a:effectLst/>
+                <a:latin typeface="微軟正黑體" panose="020B0604030504040204" pitchFamily="34" charset="-120"/>
+                <a:ea typeface="微軟正黑體" panose="020B0604030504040204" pitchFamily="34" charset="-120"/>
+              </a:rPr>
+              <a:t>，是</a:t>
+            </a:r>
+            <a:r>
+              <a:rPr lang="en-US" altLang="zh-TW" sz="3200" b="0" i="0" dirty="0">
+                <a:effectLst/>
+                <a:latin typeface="微軟正黑體" panose="020B0604030504040204" pitchFamily="34" charset="-120"/>
+                <a:ea typeface="微軟正黑體" panose="020B0604030504040204" pitchFamily="34" charset="-120"/>
+              </a:rPr>
+              <a:t>ChatGPT</a:t>
+            </a:r>
+            <a:r>
+              <a:rPr lang="zh-TW" altLang="en-US" sz="3200" b="0" i="0" dirty="0">
+                <a:effectLst/>
+                <a:latin typeface="微軟正黑體" panose="020B0604030504040204" pitchFamily="34" charset="-120"/>
+                <a:ea typeface="微軟正黑體" panose="020B0604030504040204" pitchFamily="34" charset="-120"/>
+              </a:rPr>
+              <a:t>的前身</a:t>
+            </a:r>
+            <a:endParaRPr lang="en-US" altLang="zh-TW" sz="3200" b="0" i="0" dirty="0">
+              <a:effectLst/>
+              <a:latin typeface="微軟正黑體" panose="020B0604030504040204" pitchFamily="34" charset="-120"/>
+              <a:ea typeface="微軟正黑體" panose="020B0604030504040204" pitchFamily="34" charset="-120"/>
+            </a:endParaRPr>
+          </a:p>
+          <a:p>
+            <a:pPr marL="514350" indent="-514350">
+              <a:buFont typeface="+mj-lt"/>
+              <a:buAutoNum type="arabicPeriod"/>
+            </a:pPr>
+            <a:r>
+              <a:rPr lang="en-US" altLang="zh-TW" sz="3200" dirty="0" err="1">
+                <a:latin typeface="微軟正黑體" panose="020B0604030504040204" pitchFamily="34" charset="-120"/>
+                <a:ea typeface="微軟正黑體" panose="020B0604030504040204" pitchFamily="34" charset="-120"/>
+              </a:rPr>
+              <a:t>Anthropi</a:t>
+            </a:r>
+            <a:r>
+              <a:rPr lang="en-US" altLang="zh-TW" sz="3200" dirty="0">
+                <a:latin typeface="微軟正黑體" panose="020B0604030504040204" pitchFamily="34" charset="-120"/>
+                <a:ea typeface="微軟正黑體" panose="020B0604030504040204" pitchFamily="34" charset="-120"/>
+              </a:rPr>
+              <a:t> Claude</a:t>
+            </a:r>
+            <a:r>
+              <a:rPr lang="zh-TW" altLang="en-US" sz="3200" dirty="0">
+                <a:latin typeface="微軟正黑體" panose="020B0604030504040204" pitchFamily="34" charset="-120"/>
+                <a:ea typeface="微軟正黑體" panose="020B0604030504040204" pitchFamily="34" charset="-120"/>
+              </a:rPr>
+              <a:t>也是使用</a:t>
+            </a:r>
+            <a:r>
+              <a:rPr lang="en-US" altLang="zh-TW" sz="3200" dirty="0">
+                <a:latin typeface="微軟正黑體" panose="020B0604030504040204" pitchFamily="34" charset="-120"/>
+                <a:ea typeface="微軟正黑體" panose="020B0604030504040204" pitchFamily="34" charset="-120"/>
+              </a:rPr>
+              <a:t>RLHF</a:t>
+            </a:r>
+            <a:endParaRPr lang="en-US" altLang="zh-TW" sz="3200" b="0" i="0" dirty="0">
+              <a:effectLst/>
+              <a:latin typeface="微軟正黑體" panose="020B0604030504040204" pitchFamily="34" charset="-120"/>
+              <a:ea typeface="微軟正黑體" panose="020B0604030504040204" pitchFamily="34" charset="-120"/>
+            </a:endParaRPr>
+          </a:p>
+          <a:p>
+            <a:pPr marL="457200" indent="-457200">
+              <a:buFont typeface="Arial" panose="020B0604020202020204" pitchFamily="34" charset="0"/>
+              <a:buChar char="•"/>
+            </a:pPr>
+            <a:endParaRPr lang="en-US" altLang="zh-TW" sz="3200" b="0" i="0" dirty="0">
+              <a:effectLst/>
+              <a:latin typeface="微軟正黑體" panose="020B0604030504040204" pitchFamily="34" charset="-120"/>
+              <a:ea typeface="微軟正黑體" panose="020B0604030504040204" pitchFamily="34" charset="-120"/>
+              <a:hlinkClick r:id="rId3"/>
+            </a:endParaRPr>
+          </a:p>
+          <a:p>
+            <a:pPr marL="457200" indent="-457200">
+              <a:buFont typeface="Arial" panose="020B0604020202020204" pitchFamily="34" charset="0"/>
+              <a:buChar char="•"/>
+            </a:pPr>
+            <a:r>
+              <a:rPr lang="en-US" altLang="zh-TW" sz="3200" b="0" i="0" dirty="0">
+                <a:effectLst/>
+                <a:latin typeface="微軟正黑體" panose="020B0604030504040204" pitchFamily="34" charset="-120"/>
+                <a:ea typeface="微軟正黑體" panose="020B0604030504040204" pitchFamily="34" charset="-120"/>
+                <a:hlinkClick r:id="rId3"/>
+              </a:rPr>
+              <a:t>https://arxiv.org/pdf/2203.02155.pdf</a:t>
+            </a:r>
+            <a:endParaRPr lang="en-US" altLang="zh-TW" sz="3200" dirty="0">
+              <a:latin typeface="微軟正黑體" panose="020B0604030504040204" pitchFamily="34" charset="-120"/>
+              <a:ea typeface="微軟正黑體" panose="020B0604030504040204" pitchFamily="34" charset="-120"/>
+            </a:endParaRPr>
+          </a:p>
+          <a:p>
+            <a:pPr marL="457200" indent="-457200">
+              <a:buFont typeface="Arial" panose="020B0604020202020204" pitchFamily="34" charset="0"/>
+              <a:buChar char="•"/>
+            </a:pPr>
+            <a:endParaRPr lang="en-US" altLang="zh-TW" sz="3200" b="0" i="0" dirty="0">
+              <a:effectLst/>
+              <a:latin typeface="微軟正黑體" panose="020B0604030504040204" pitchFamily="34" charset="-120"/>
+              <a:ea typeface="微軟正黑體" panose="020B0604030504040204" pitchFamily="34" charset="-120"/>
+            </a:endParaRPr>
+          </a:p>
+        </p:txBody>
+      </p:sp>
+    </p:spTree>
+    <p:extLst>
+      <p:ext uri="{BB962C8B-B14F-4D97-AF65-F5344CB8AC3E}">
+        <p14:creationId xmlns:p14="http://schemas.microsoft.com/office/powerpoint/2010/main" val="48983677"/>
+      </p:ext>
+    </p:extLst>
+  </p:cSld>
+  <p:clrMapOvr>
+    <a:masterClrMapping/>
+  </p:clrMapOvr>
+  <p:transition>
+    <p:fade/>
+  </p:transition>
+</p:sld>
+</file>
+
 <file path=ppt/slides/slide31.xml><?xml version="1.0" encoding="utf-8"?>
 <p:sld xmlns:a="http://schemas.openxmlformats.org/drawingml/2006/main" xmlns:r="http://schemas.openxmlformats.org/officeDocument/2006/relationships" xmlns:p="http://schemas.openxmlformats.org/presentationml/2006/main">
   <p:cSld>
@@ -19147,7 +19272,7 @@
         </p:nvSpPr>
         <p:spPr>
           <a:xfrm>
-            <a:off x="2076450" y="123885"/>
+            <a:off x="2438400" y="76154"/>
             <a:ext cx="6553200" cy="990600"/>
           </a:xfrm>
           <a:prstGeom prst="rect">
@@ -19161,7 +19286,7 @@
           <a:lstStyle/>
           <a:p>
             <a:r>
-              <a:rPr kumimoji="1" lang="zh-TW" altLang="en-US" sz="4800" b="1" dirty="0">
+              <a:rPr kumimoji="1" lang="en-US" altLang="zh-TW" sz="4800" b="1" dirty="0">
                 <a:solidFill>
                   <a:srgbClr val="00B0F0"/>
                 </a:solidFill>
@@ -19176,10 +19301,10 @@
                 <a:ea typeface="微軟正黑體" panose="020B0604030504040204" pitchFamily="34" charset="-120"/>
                 <a:cs typeface="Heiti TC Light"/>
               </a:rPr>
-              <a:t>例子：</a:t>
-            </a:r>
-            <a:r>
-              <a:rPr kumimoji="1" lang="en-US" altLang="zh-TW" sz="4800" b="1" dirty="0" err="1">
+              <a:t>Alignment</a:t>
+            </a:r>
+            <a:r>
+              <a:rPr kumimoji="1" lang="zh-TW" altLang="en-US" sz="4800" b="1" dirty="0">
                 <a:solidFill>
                   <a:srgbClr val="00B0F0"/>
                 </a:solidFill>
@@ -19194,7 +19319,7 @@
                 <a:ea typeface="微軟正黑體" panose="020B0604030504040204" pitchFamily="34" charset="-120"/>
                 <a:cs typeface="Heiti TC Light"/>
               </a:rPr>
-              <a:t>InstructGPT</a:t>
+              <a:t>的作法</a:t>
             </a:r>
             <a:endParaRPr kumimoji="1" lang="en-US" altLang="zh-TW" sz="4800" b="1" dirty="0">
               <a:solidFill>
@@ -19243,7 +19368,7 @@
                 <a:latin typeface="Arial" panose="020B0604020202020204" pitchFamily="34" charset="0"/>
                 <a:cs typeface="Arial" panose="020B0604020202020204" pitchFamily="34" charset="0"/>
               </a:rPr>
-              <a:t>11/27/2024</a:t>
+              <a:t>12/3/2024</a:t>
             </a:fld>
             <a:endParaRPr kumimoji="0" lang="en-US" dirty="0">
               <a:latin typeface="Arial" panose="020B0604020202020204" pitchFamily="34" charset="0"/>
@@ -19282,547 +19407,6 @@
               </a:rPr>
               <a:pPr algn="r"/>
               <a:t>31</a:t>
-            </a:fld>
-            <a:endParaRPr kumimoji="0" lang="en-US" dirty="0"/>
-          </a:p>
-        </p:txBody>
-      </p:sp>
-      <p:sp>
-        <p:nvSpPr>
-          <p:cNvPr id="2" name="文字方塊 1">
-            <a:extLst>
-              <a:ext uri="{FF2B5EF4-FFF2-40B4-BE49-F238E27FC236}">
-                <a16:creationId xmlns:a16="http://schemas.microsoft.com/office/drawing/2014/main" id="{E17C39F0-9527-522B-E55B-DAC3D2425E05}"/>
-              </a:ext>
-            </a:extLst>
-          </p:cNvPr>
-          <p:cNvSpPr txBox="1"/>
-          <p:nvPr/>
-        </p:nvSpPr>
-        <p:spPr>
-          <a:xfrm>
-            <a:off x="609600" y="1219200"/>
-            <a:ext cx="7924800" cy="5509200"/>
-          </a:xfrm>
-          <a:prstGeom prst="rect">
-            <a:avLst/>
-          </a:prstGeom>
-          <a:noFill/>
-        </p:spPr>
-        <p:txBody>
-          <a:bodyPr wrap="square" rtlCol="0">
-            <a:spAutoFit/>
-          </a:bodyPr>
-          <a:lstStyle/>
-          <a:p>
-            <a:pPr marL="514350" indent="-514350">
-              <a:buFont typeface="+mj-lt"/>
-              <a:buAutoNum type="arabicPeriod"/>
-            </a:pPr>
-            <a:r>
-              <a:rPr lang="zh-TW" altLang="en-US" sz="3200" b="0" i="0" dirty="0">
-                <a:effectLst/>
-                <a:latin typeface="微軟正黑體" panose="020B0604030504040204" pitchFamily="34" charset="-120"/>
-                <a:ea typeface="微軟正黑體" panose="020B0604030504040204" pitchFamily="34" charset="-120"/>
-              </a:rPr>
-              <a:t>以</a:t>
-            </a:r>
-            <a:r>
-              <a:rPr lang="en-US" altLang="zh-TW" sz="3200" b="0" i="0" dirty="0">
-                <a:effectLst/>
-                <a:latin typeface="微軟正黑體" panose="020B0604030504040204" pitchFamily="34" charset="-120"/>
-                <a:ea typeface="微軟正黑體" panose="020B0604030504040204" pitchFamily="34" charset="-120"/>
-              </a:rPr>
-              <a:t>GPT3</a:t>
-            </a:r>
-            <a:r>
-              <a:rPr lang="zh-TW" altLang="en-US" sz="3200" b="0" i="0" dirty="0">
-                <a:effectLst/>
-                <a:latin typeface="微軟正黑體" panose="020B0604030504040204" pitchFamily="34" charset="-120"/>
-                <a:ea typeface="微軟正黑體" panose="020B0604030504040204" pitchFamily="34" charset="-120"/>
-              </a:rPr>
-              <a:t>為基礎</a:t>
-            </a:r>
-            <a:endParaRPr lang="en-US" altLang="zh-TW" sz="3200" b="0" i="0" dirty="0">
-              <a:effectLst/>
-              <a:latin typeface="微軟正黑體" panose="020B0604030504040204" pitchFamily="34" charset="-120"/>
-              <a:ea typeface="微軟正黑體" panose="020B0604030504040204" pitchFamily="34" charset="-120"/>
-            </a:endParaRPr>
-          </a:p>
-          <a:p>
-            <a:pPr marL="514350" indent="-514350">
-              <a:buFont typeface="+mj-lt"/>
-              <a:buAutoNum type="arabicPeriod"/>
-            </a:pPr>
-            <a:r>
-              <a:rPr lang="zh-TW" altLang="en-US" sz="3200" b="0" i="0" dirty="0">
-                <a:effectLst/>
-                <a:latin typeface="微軟正黑體" panose="020B0604030504040204" pitchFamily="34" charset="-120"/>
-                <a:ea typeface="微軟正黑體" panose="020B0604030504040204" pitchFamily="34" charset="-120"/>
-              </a:rPr>
-              <a:t>經過</a:t>
-            </a:r>
-            <a:r>
-              <a:rPr lang="en-US" altLang="zh-TW" sz="3200" b="0" i="0" dirty="0">
-                <a:effectLst/>
-                <a:latin typeface="微軟正黑體" panose="020B0604030504040204" pitchFamily="34" charset="-120"/>
-                <a:ea typeface="微軟正黑體" panose="020B0604030504040204" pitchFamily="34" charset="-120"/>
-              </a:rPr>
-              <a:t>SFT</a:t>
-            </a:r>
-            <a:r>
-              <a:rPr lang="zh-TW" altLang="en-US" sz="3200" b="0" i="0" dirty="0">
-                <a:effectLst/>
-                <a:latin typeface="微軟正黑體" panose="020B0604030504040204" pitchFamily="34" charset="-120"/>
-                <a:ea typeface="微軟正黑體" panose="020B0604030504040204" pitchFamily="34" charset="-120"/>
-              </a:rPr>
-              <a:t>微調</a:t>
-            </a:r>
-            <a:endParaRPr lang="en-US" altLang="zh-TW" sz="3200" b="0" i="0" dirty="0">
-              <a:effectLst/>
-              <a:latin typeface="微軟正黑體" panose="020B0604030504040204" pitchFamily="34" charset="-120"/>
-              <a:ea typeface="微軟正黑體" panose="020B0604030504040204" pitchFamily="34" charset="-120"/>
-            </a:endParaRPr>
-          </a:p>
-          <a:p>
-            <a:pPr marL="514350" indent="-514350">
-              <a:buFont typeface="+mj-lt"/>
-              <a:buAutoNum type="arabicPeriod"/>
-            </a:pPr>
-            <a:r>
-              <a:rPr lang="zh-TW" altLang="en-US" sz="3200" b="0" i="0" dirty="0">
-                <a:effectLst/>
-                <a:latin typeface="微軟正黑體" panose="020B0604030504040204" pitchFamily="34" charset="-120"/>
-                <a:ea typeface="微軟正黑體" panose="020B0604030504040204" pitchFamily="34" charset="-120"/>
-              </a:rPr>
-              <a:t>訓練</a:t>
-            </a:r>
-            <a:r>
-              <a:rPr lang="en-US" altLang="zh-TW" sz="3200" b="0" i="0" dirty="0">
-                <a:effectLst/>
-                <a:latin typeface="微軟正黑體" panose="020B0604030504040204" pitchFamily="34" charset="-120"/>
-                <a:ea typeface="微軟正黑體" panose="020B0604030504040204" pitchFamily="34" charset="-120"/>
-              </a:rPr>
-              <a:t>RM</a:t>
-            </a:r>
-            <a:r>
-              <a:rPr lang="zh-TW" altLang="en-US" sz="3200" b="0" i="0" dirty="0">
-                <a:effectLst/>
-                <a:latin typeface="微軟正黑體" panose="020B0604030504040204" pitchFamily="34" charset="-120"/>
-                <a:ea typeface="微軟正黑體" panose="020B0604030504040204" pitchFamily="34" charset="-120"/>
-              </a:rPr>
-              <a:t>模型</a:t>
-            </a:r>
-            <a:endParaRPr lang="en-US" altLang="zh-TW" sz="3200" b="0" i="0" dirty="0">
-              <a:effectLst/>
-              <a:latin typeface="微軟正黑體" panose="020B0604030504040204" pitchFamily="34" charset="-120"/>
-              <a:ea typeface="微軟正黑體" panose="020B0604030504040204" pitchFamily="34" charset="-120"/>
-            </a:endParaRPr>
-          </a:p>
-          <a:p>
-            <a:pPr marL="514350" indent="-514350">
-              <a:buFont typeface="+mj-lt"/>
-              <a:buAutoNum type="arabicPeriod"/>
-            </a:pPr>
-            <a:r>
-              <a:rPr lang="zh-TW" altLang="en-US" sz="3200" b="0" i="0" dirty="0">
-                <a:effectLst/>
-                <a:latin typeface="微軟正黑體" panose="020B0604030504040204" pitchFamily="34" charset="-120"/>
-                <a:ea typeface="微軟正黑體" panose="020B0604030504040204" pitchFamily="34" charset="-120"/>
-              </a:rPr>
-              <a:t>利用</a:t>
-            </a:r>
-            <a:r>
-              <a:rPr lang="en-US" altLang="zh-TW" sz="3200" b="0" i="0" dirty="0">
-                <a:effectLst/>
-                <a:latin typeface="微軟正黑體" panose="020B0604030504040204" pitchFamily="34" charset="-120"/>
-                <a:ea typeface="微軟正黑體" panose="020B0604030504040204" pitchFamily="34" charset="-120"/>
-              </a:rPr>
-              <a:t>RM</a:t>
-            </a:r>
-            <a:r>
-              <a:rPr lang="zh-TW" altLang="en-US" sz="3200" b="0" i="0" dirty="0">
-                <a:effectLst/>
-                <a:latin typeface="微軟正黑體" panose="020B0604030504040204" pitchFamily="34" charset="-120"/>
-                <a:ea typeface="微軟正黑體" panose="020B0604030504040204" pitchFamily="34" charset="-120"/>
-              </a:rPr>
-              <a:t>，透過</a:t>
-            </a:r>
-            <a:r>
-              <a:rPr lang="en-US" altLang="zh-TW" sz="3200" b="0" i="0" dirty="0">
-                <a:effectLst/>
-                <a:latin typeface="微軟正黑體" panose="020B0604030504040204" pitchFamily="34" charset="-120"/>
-                <a:ea typeface="微軟正黑體" panose="020B0604030504040204" pitchFamily="34" charset="-120"/>
-              </a:rPr>
-              <a:t>PPO</a:t>
-            </a:r>
-            <a:r>
-              <a:rPr lang="zh-TW" altLang="en-US" sz="3200" b="0" i="0" dirty="0">
-                <a:effectLst/>
-                <a:latin typeface="微軟正黑體" panose="020B0604030504040204" pitchFamily="34" charset="-120"/>
-                <a:ea typeface="微軟正黑體" panose="020B0604030504040204" pitchFamily="34" charset="-120"/>
-              </a:rPr>
-              <a:t>強化學習更新</a:t>
-            </a:r>
-            <a:r>
-              <a:rPr lang="en-US" altLang="zh-TW" sz="3200" b="0" i="0" dirty="0">
-                <a:effectLst/>
-                <a:latin typeface="微軟正黑體" panose="020B0604030504040204" pitchFamily="34" charset="-120"/>
-                <a:ea typeface="微軟正黑體" panose="020B0604030504040204" pitchFamily="34" charset="-120"/>
-              </a:rPr>
-              <a:t>GPT3</a:t>
-            </a:r>
-          </a:p>
-          <a:p>
-            <a:pPr marL="514350" indent="-514350">
-              <a:buFont typeface="+mj-lt"/>
-              <a:buAutoNum type="arabicPeriod"/>
-            </a:pPr>
-            <a:r>
-              <a:rPr lang="zh-TW" altLang="en-US" sz="3200" b="0" i="0" dirty="0">
-                <a:effectLst/>
-                <a:latin typeface="微軟正黑體" panose="020B0604030504040204" pitchFamily="34" charset="-120"/>
-                <a:ea typeface="微軟正黑體" panose="020B0604030504040204" pitchFamily="34" charset="-120"/>
-              </a:rPr>
-              <a:t>以上</a:t>
-            </a:r>
-            <a:r>
-              <a:rPr lang="en-US" altLang="zh-TW" sz="3200" b="0" i="0" dirty="0">
-                <a:effectLst/>
-                <a:latin typeface="微軟正黑體" panose="020B0604030504040204" pitchFamily="34" charset="-120"/>
-                <a:ea typeface="微軟正黑體" panose="020B0604030504040204" pitchFamily="34" charset="-120"/>
-              </a:rPr>
-              <a:t>1-4</a:t>
-            </a:r>
-            <a:r>
-              <a:rPr lang="zh-TW" altLang="en-US" sz="3200" b="0" i="0" dirty="0">
-                <a:effectLst/>
-                <a:latin typeface="微軟正黑體" panose="020B0604030504040204" pitchFamily="34" charset="-120"/>
-                <a:ea typeface="微軟正黑體" panose="020B0604030504040204" pitchFamily="34" charset="-120"/>
-              </a:rPr>
-              <a:t>的過程稱</a:t>
-            </a:r>
-            <a:r>
-              <a:rPr lang="en-US" altLang="zh-TW" sz="3200" b="0" i="0" dirty="0">
-                <a:effectLst/>
-                <a:latin typeface="微軟正黑體" panose="020B0604030504040204" pitchFamily="34" charset="-120"/>
-                <a:ea typeface="微軟正黑體" panose="020B0604030504040204" pitchFamily="34" charset="-120"/>
-              </a:rPr>
-              <a:t>RLHF(Reinforcement Learning from Human Feedback)</a:t>
-            </a:r>
-          </a:p>
-          <a:p>
-            <a:pPr marL="514350" indent="-514350">
-              <a:buFont typeface="+mj-lt"/>
-              <a:buAutoNum type="arabicPeriod"/>
-            </a:pPr>
-            <a:r>
-              <a:rPr lang="zh-TW" altLang="en-US" sz="3200" b="0" i="0" dirty="0">
-                <a:effectLst/>
-                <a:latin typeface="微軟正黑體" panose="020B0604030504040204" pitchFamily="34" charset="-120"/>
-                <a:ea typeface="微軟正黑體" panose="020B0604030504040204" pitchFamily="34" charset="-120"/>
-              </a:rPr>
-              <a:t>稱</a:t>
-            </a:r>
-            <a:r>
-              <a:rPr lang="en-US" altLang="zh-TW" sz="3200" b="0" i="0" dirty="0" err="1">
-                <a:effectLst/>
-                <a:latin typeface="微軟正黑體" panose="020B0604030504040204" pitchFamily="34" charset="-120"/>
-                <a:ea typeface="微軟正黑體" panose="020B0604030504040204" pitchFamily="34" charset="-120"/>
-              </a:rPr>
-              <a:t>InstructGPT</a:t>
-            </a:r>
-            <a:r>
-              <a:rPr lang="zh-TW" altLang="en-US" sz="3200" b="0" i="0" dirty="0">
-                <a:effectLst/>
-                <a:latin typeface="微軟正黑體" panose="020B0604030504040204" pitchFamily="34" charset="-120"/>
-                <a:ea typeface="微軟正黑體" panose="020B0604030504040204" pitchFamily="34" charset="-120"/>
-              </a:rPr>
-              <a:t>，是</a:t>
-            </a:r>
-            <a:r>
-              <a:rPr lang="en-US" altLang="zh-TW" sz="3200" b="0" i="0" dirty="0">
-                <a:effectLst/>
-                <a:latin typeface="微軟正黑體" panose="020B0604030504040204" pitchFamily="34" charset="-120"/>
-                <a:ea typeface="微軟正黑體" panose="020B0604030504040204" pitchFamily="34" charset="-120"/>
-              </a:rPr>
-              <a:t>ChatGPT</a:t>
-            </a:r>
-            <a:r>
-              <a:rPr lang="zh-TW" altLang="en-US" sz="3200" b="0" i="0" dirty="0">
-                <a:effectLst/>
-                <a:latin typeface="微軟正黑體" panose="020B0604030504040204" pitchFamily="34" charset="-120"/>
-                <a:ea typeface="微軟正黑體" panose="020B0604030504040204" pitchFamily="34" charset="-120"/>
-              </a:rPr>
-              <a:t>的前身</a:t>
-            </a:r>
-            <a:endParaRPr lang="en-US" altLang="zh-TW" sz="3200" b="0" i="0" dirty="0">
-              <a:effectLst/>
-              <a:latin typeface="微軟正黑體" panose="020B0604030504040204" pitchFamily="34" charset="-120"/>
-              <a:ea typeface="微軟正黑體" panose="020B0604030504040204" pitchFamily="34" charset="-120"/>
-            </a:endParaRPr>
-          </a:p>
-          <a:p>
-            <a:pPr marL="514350" indent="-514350">
-              <a:buFont typeface="+mj-lt"/>
-              <a:buAutoNum type="arabicPeriod"/>
-            </a:pPr>
-            <a:r>
-              <a:rPr lang="en-US" altLang="zh-TW" sz="3200" dirty="0" err="1">
-                <a:latin typeface="微軟正黑體" panose="020B0604030504040204" pitchFamily="34" charset="-120"/>
-                <a:ea typeface="微軟正黑體" panose="020B0604030504040204" pitchFamily="34" charset="-120"/>
-              </a:rPr>
-              <a:t>Anthropi</a:t>
-            </a:r>
-            <a:r>
-              <a:rPr lang="en-US" altLang="zh-TW" sz="3200" dirty="0">
-                <a:latin typeface="微軟正黑體" panose="020B0604030504040204" pitchFamily="34" charset="-120"/>
-                <a:ea typeface="微軟正黑體" panose="020B0604030504040204" pitchFamily="34" charset="-120"/>
-              </a:rPr>
-              <a:t> Claude</a:t>
-            </a:r>
-            <a:r>
-              <a:rPr lang="zh-TW" altLang="en-US" sz="3200" dirty="0">
-                <a:latin typeface="微軟正黑體" panose="020B0604030504040204" pitchFamily="34" charset="-120"/>
-                <a:ea typeface="微軟正黑體" panose="020B0604030504040204" pitchFamily="34" charset="-120"/>
-              </a:rPr>
-              <a:t>也是使用</a:t>
-            </a:r>
-            <a:r>
-              <a:rPr lang="en-US" altLang="zh-TW" sz="3200" dirty="0">
-                <a:latin typeface="微軟正黑體" panose="020B0604030504040204" pitchFamily="34" charset="-120"/>
-                <a:ea typeface="微軟正黑體" panose="020B0604030504040204" pitchFamily="34" charset="-120"/>
-              </a:rPr>
-              <a:t>RLHF</a:t>
-            </a:r>
-            <a:endParaRPr lang="en-US" altLang="zh-TW" sz="3200" b="0" i="0" dirty="0">
-              <a:effectLst/>
-              <a:latin typeface="微軟正黑體" panose="020B0604030504040204" pitchFamily="34" charset="-120"/>
-              <a:ea typeface="微軟正黑體" panose="020B0604030504040204" pitchFamily="34" charset="-120"/>
-            </a:endParaRPr>
-          </a:p>
-          <a:p>
-            <a:pPr marL="457200" indent="-457200">
-              <a:buFont typeface="Arial" panose="020B0604020202020204" pitchFamily="34" charset="0"/>
-              <a:buChar char="•"/>
-            </a:pPr>
-            <a:endParaRPr lang="en-US" altLang="zh-TW" sz="3200" b="0" i="0" dirty="0">
-              <a:effectLst/>
-              <a:latin typeface="微軟正黑體" panose="020B0604030504040204" pitchFamily="34" charset="-120"/>
-              <a:ea typeface="微軟正黑體" panose="020B0604030504040204" pitchFamily="34" charset="-120"/>
-              <a:hlinkClick r:id="rId3"/>
-            </a:endParaRPr>
-          </a:p>
-          <a:p>
-            <a:pPr marL="457200" indent="-457200">
-              <a:buFont typeface="Arial" panose="020B0604020202020204" pitchFamily="34" charset="0"/>
-              <a:buChar char="•"/>
-            </a:pPr>
-            <a:r>
-              <a:rPr lang="en-US" altLang="zh-TW" sz="3200" b="0" i="0" dirty="0">
-                <a:effectLst/>
-                <a:latin typeface="微軟正黑體" panose="020B0604030504040204" pitchFamily="34" charset="-120"/>
-                <a:ea typeface="微軟正黑體" panose="020B0604030504040204" pitchFamily="34" charset="-120"/>
-                <a:hlinkClick r:id="rId3"/>
-              </a:rPr>
-              <a:t>https://arxiv.org/pdf/2203.02155.pdf</a:t>
-            </a:r>
-            <a:endParaRPr lang="en-US" altLang="zh-TW" sz="3200" dirty="0">
-              <a:latin typeface="微軟正黑體" panose="020B0604030504040204" pitchFamily="34" charset="-120"/>
-              <a:ea typeface="微軟正黑體" panose="020B0604030504040204" pitchFamily="34" charset="-120"/>
-            </a:endParaRPr>
-          </a:p>
-          <a:p>
-            <a:pPr marL="457200" indent="-457200">
-              <a:buFont typeface="Arial" panose="020B0604020202020204" pitchFamily="34" charset="0"/>
-              <a:buChar char="•"/>
-            </a:pPr>
-            <a:endParaRPr lang="en-US" altLang="zh-TW" sz="3200" b="0" i="0" dirty="0">
-              <a:effectLst/>
-              <a:latin typeface="微軟正黑體" panose="020B0604030504040204" pitchFamily="34" charset="-120"/>
-              <a:ea typeface="微軟正黑體" panose="020B0604030504040204" pitchFamily="34" charset="-120"/>
-            </a:endParaRPr>
-          </a:p>
-        </p:txBody>
-      </p:sp>
-    </p:spTree>
-    <p:extLst>
-      <p:ext uri="{BB962C8B-B14F-4D97-AF65-F5344CB8AC3E}">
-        <p14:creationId xmlns:p14="http://schemas.microsoft.com/office/powerpoint/2010/main" val="48983677"/>
-      </p:ext>
-    </p:extLst>
-  </p:cSld>
-  <p:clrMapOvr>
-    <a:masterClrMapping/>
-  </p:clrMapOvr>
-  <p:transition>
-    <p:fade/>
-  </p:transition>
-</p:sld>
-</file>
-
-<file path=ppt/slides/slide32.xml><?xml version="1.0" encoding="utf-8"?>
-<p:sld xmlns:a="http://schemas.openxmlformats.org/drawingml/2006/main" xmlns:r="http://schemas.openxmlformats.org/officeDocument/2006/relationships" xmlns:p="http://schemas.openxmlformats.org/presentationml/2006/main">
-  <p:cSld>
-    <p:spTree>
-      <p:nvGrpSpPr>
-        <p:cNvPr id="1" name=""/>
-        <p:cNvGrpSpPr/>
-        <p:nvPr/>
-      </p:nvGrpSpPr>
-      <p:grpSpPr>
-        <a:xfrm>
-          <a:off x="0" y="0"/>
-          <a:ext cx="0" cy="0"/>
-          <a:chOff x="0" y="0"/>
-          <a:chExt cx="0" cy="0"/>
-        </a:xfrm>
-      </p:grpSpPr>
-      <p:sp>
-        <p:nvSpPr>
-          <p:cNvPr id="4" name="文字版面配置區 2"/>
-          <p:cNvSpPr txBox="1">
-            <a:spLocks/>
-          </p:cNvSpPr>
-          <p:nvPr/>
-        </p:nvSpPr>
-        <p:spPr>
-          <a:xfrm>
-            <a:off x="2438400" y="76154"/>
-            <a:ext cx="6553200" cy="990600"/>
-          </a:xfrm>
-          <a:prstGeom prst="rect">
-            <a:avLst/>
-          </a:prstGeom>
-        </p:spPr>
-        <p:txBody>
-          <a:bodyPr tIns="91440" bIns="91440" anchor="b" anchorCtr="0">
-            <a:noAutofit/>
-          </a:bodyPr>
-          <a:lstStyle/>
-          <a:p>
-            <a:r>
-              <a:rPr kumimoji="1" lang="en-US" altLang="zh-TW" sz="4800" b="1" dirty="0">
-                <a:solidFill>
-                  <a:srgbClr val="00B0F0"/>
-                </a:solidFill>
-                <a:effectLst>
-                  <a:outerShdw blurRad="38100" dist="38100" dir="2700000" algn="tl">
-                    <a:srgbClr val="000000">
-                      <a:alpha val="43137"/>
-                    </a:srgbClr>
-                  </a:outerShdw>
-                </a:effectLst>
-                <a:latin typeface="微軟正黑體" panose="020B0604030504040204" pitchFamily="34" charset="-120"/>
-                <a:ea typeface="微軟正黑體" panose="020B0604030504040204" pitchFamily="34" charset="-120"/>
-                <a:cs typeface="Heiti TC Light"/>
-              </a:rPr>
-              <a:t>Alignment</a:t>
-            </a:r>
-            <a:r>
-              <a:rPr kumimoji="1" lang="zh-TW" altLang="en-US" sz="4800" b="1" dirty="0">
-                <a:solidFill>
-                  <a:srgbClr val="00B0F0"/>
-                </a:solidFill>
-                <a:effectLst>
-                  <a:outerShdw blurRad="38100" dist="38100" dir="2700000" algn="tl">
-                    <a:srgbClr val="000000">
-                      <a:alpha val="43137"/>
-                    </a:srgbClr>
-                  </a:outerShdw>
-                </a:effectLst>
-                <a:latin typeface="微軟正黑體" panose="020B0604030504040204" pitchFamily="34" charset="-120"/>
-                <a:ea typeface="微軟正黑體" panose="020B0604030504040204" pitchFamily="34" charset="-120"/>
-                <a:cs typeface="Heiti TC Light"/>
-              </a:rPr>
-              <a:t>的作法</a:t>
-            </a:r>
-            <a:endParaRPr kumimoji="1" lang="en-US" altLang="zh-TW" sz="4800" b="1" dirty="0">
-              <a:solidFill>
-                <a:srgbClr val="00B0F0"/>
-              </a:solidFill>
-              <a:effectLst>
-                <a:outerShdw blurRad="38100" dist="38100" dir="2700000" algn="tl">
-                  <a:srgbClr val="000000">
-                    <a:alpha val="43137"/>
-                  </a:srgbClr>
-                </a:outerShdw>
-              </a:effectLst>
-              <a:latin typeface="微軟正黑體" panose="020B0604030504040204" pitchFamily="34" charset="-120"/>
-              <a:ea typeface="微軟正黑體" panose="020B0604030504040204" pitchFamily="34" charset="-120"/>
-              <a:cs typeface="Heiti TC Light"/>
-            </a:endParaRPr>
-          </a:p>
-        </p:txBody>
-      </p:sp>
-      <p:sp>
-        <p:nvSpPr>
-          <p:cNvPr id="3" name="日期版面配置區 2">
-            <a:extLst>
-              <a:ext uri="{FF2B5EF4-FFF2-40B4-BE49-F238E27FC236}">
-                <a16:creationId xmlns:a16="http://schemas.microsoft.com/office/drawing/2014/main" id="{1C536CB5-3C58-6CF1-767E-952B76F12DEE}"/>
-              </a:ext>
-            </a:extLst>
-          </p:cNvPr>
-          <p:cNvSpPr>
-            <a:spLocks noGrp="1"/>
-          </p:cNvSpPr>
-          <p:nvPr>
-            <p:ph type="dt" sz="half" idx="12"/>
-          </p:nvPr>
-        </p:nvSpPr>
-        <p:spPr/>
-        <p:txBody>
-          <a:bodyPr/>
-          <a:lstStyle/>
-          <a:p>
-            <a:fld id="{0B520B05-2240-4566-BE2A-9338980FE8EB}" type="datetime1">
-              <a:rPr kumimoji="0" lang="en-US" altLang="zh-TW" sz="1200" smtClean="0">
-                <a:solidFill>
-                  <a:schemeClr val="tx2"/>
-                </a:solidFill>
-                <a:latin typeface="Arial" panose="020B0604020202020204" pitchFamily="34" charset="0"/>
-                <a:cs typeface="Arial" panose="020B0604020202020204" pitchFamily="34" charset="0"/>
-              </a:rPr>
-              <a:t>11/27/2024</a:t>
-            </a:fld>
-            <a:endParaRPr kumimoji="0" lang="en-US" dirty="0">
-              <a:latin typeface="Arial" panose="020B0604020202020204" pitchFamily="34" charset="0"/>
-              <a:cs typeface="Arial" panose="020B0604020202020204" pitchFamily="34" charset="0"/>
-            </a:endParaRPr>
-          </a:p>
-        </p:txBody>
-      </p:sp>
-      <p:sp>
-        <p:nvSpPr>
-          <p:cNvPr id="7" name="投影片編號版面配置區 6">
-            <a:extLst>
-              <a:ext uri="{FF2B5EF4-FFF2-40B4-BE49-F238E27FC236}">
-                <a16:creationId xmlns:a16="http://schemas.microsoft.com/office/drawing/2014/main" id="{DA316F56-AF12-D872-611F-78AE7ACCBF93}"/>
-              </a:ext>
-            </a:extLst>
-          </p:cNvPr>
-          <p:cNvSpPr>
-            <a:spLocks noGrp="1"/>
-          </p:cNvSpPr>
-          <p:nvPr>
-            <p:ph type="sldNum" sz="quarter" idx="13"/>
-          </p:nvPr>
-        </p:nvSpPr>
-        <p:spPr/>
-        <p:txBody>
-          <a:bodyPr/>
-          <a:lstStyle/>
-          <a:p>
-            <a:pPr algn="r"/>
-            <a:fld id="{F99EC173-99AE-4773-AB25-02E469A13EAE}" type="slidenum">
-              <a:rPr kumimoji="0" lang="en-US" sz="1200" smtClean="0">
-                <a:solidFill>
-                  <a:schemeClr val="tx2"/>
-                </a:solidFill>
-              </a:rPr>
-              <a:pPr algn="r"/>
-              <a:t>32</a:t>
             </a:fld>
             <a:endParaRPr kumimoji="0" lang="en-US" dirty="0"/>
           </a:p>
@@ -20386,7 +19970,7 @@
 </p:sld>
 </file>
 
-<file path=ppt/slides/slide33.xml><?xml version="1.0" encoding="utf-8"?>
+<file path=ppt/slides/slide32.xml><?xml version="1.0" encoding="utf-8"?>
 <p:sld xmlns:a="http://schemas.openxmlformats.org/drawingml/2006/main" xmlns:r="http://schemas.openxmlformats.org/officeDocument/2006/relationships" xmlns:p="http://schemas.openxmlformats.org/presentationml/2006/main">
   <p:cSld>
     <p:spTree>
@@ -20449,7 +20033,7 @@
 </p:sld>
 </file>
 
-<file path=ppt/slides/slide34.xml><?xml version="1.0" encoding="utf-8"?>
+<file path=ppt/slides/slide33.xml><?xml version="1.0" encoding="utf-8"?>
 <p:sld xmlns:a="http://schemas.openxmlformats.org/drawingml/2006/main" xmlns:r="http://schemas.openxmlformats.org/officeDocument/2006/relationships" xmlns:p="http://schemas.openxmlformats.org/presentationml/2006/main">
   <p:cSld>
     <p:spTree>
@@ -20658,7 +20242,7 @@
                 <a:latin typeface="Arial" panose="020B0604020202020204" pitchFamily="34" charset="0"/>
                 <a:cs typeface="Arial" panose="020B0604020202020204" pitchFamily="34" charset="0"/>
               </a:rPr>
-              <a:t>11/27/2024</a:t>
+              <a:t>12/3/2024</a:t>
             </a:fld>
             <a:endParaRPr kumimoji="0" lang="en-US" dirty="0">
               <a:latin typeface="Arial" panose="020B0604020202020204" pitchFamily="34" charset="0"/>
@@ -21067,7 +20651,7 @@
                 <a:latin typeface="Arial" panose="020B0604020202020204" pitchFamily="34" charset="0"/>
                 <a:cs typeface="Arial" panose="020B0604020202020204" pitchFamily="34" charset="0"/>
               </a:rPr>
-              <a:t>11/27/2024</a:t>
+              <a:t>12/3/2024</a:t>
             </a:fld>
             <a:endParaRPr kumimoji="0" lang="en-US" dirty="0">
               <a:latin typeface="Arial" panose="020B0604020202020204" pitchFamily="34" charset="0"/>
@@ -21468,7 +21052,7 @@
                 <a:latin typeface="Arial" panose="020B0604020202020204" pitchFamily="34" charset="0"/>
                 <a:cs typeface="Arial" panose="020B0604020202020204" pitchFamily="34" charset="0"/>
               </a:rPr>
-              <a:t>11/27/2024</a:t>
+              <a:t>12/3/2024</a:t>
             </a:fld>
             <a:endParaRPr kumimoji="0" lang="en-US" dirty="0">
               <a:latin typeface="Arial" panose="020B0604020202020204" pitchFamily="34" charset="0"/>
@@ -21775,7 +21359,7 @@
                 <a:latin typeface="Arial" panose="020B0604020202020204" pitchFamily="34" charset="0"/>
                 <a:cs typeface="Arial" panose="020B0604020202020204" pitchFamily="34" charset="0"/>
               </a:rPr>
-              <a:t>11/27/2024</a:t>
+              <a:t>12/3/2024</a:t>
             </a:fld>
             <a:endParaRPr kumimoji="0" lang="en-US" dirty="0">
               <a:latin typeface="Arial" panose="020B0604020202020204" pitchFamily="34" charset="0"/>
@@ -22244,7 +21828,7 @@
                 <a:latin typeface="Arial" panose="020B0604020202020204" pitchFamily="34" charset="0"/>
                 <a:cs typeface="Arial" panose="020B0604020202020204" pitchFamily="34" charset="0"/>
               </a:rPr>
-              <a:t>11/27/2024</a:t>
+              <a:t>12/3/2024</a:t>
             </a:fld>
             <a:endParaRPr kumimoji="0" lang="en-US" dirty="0">
               <a:latin typeface="Arial" panose="020B0604020202020204" pitchFamily="34" charset="0"/>
@@ -22481,7 +22065,7 @@
                 <a:latin typeface="Arial" panose="020B0604020202020204" pitchFamily="34" charset="0"/>
                 <a:cs typeface="Arial" panose="020B0604020202020204" pitchFamily="34" charset="0"/>
               </a:rPr>
-              <a:t>11/27/2024</a:t>
+              <a:t>12/3/2024</a:t>
             </a:fld>
             <a:endParaRPr kumimoji="0" lang="en-US" dirty="0">
               <a:latin typeface="Arial" panose="020B0604020202020204" pitchFamily="34" charset="0"/>
